--- a/ARA_Challenge3.pptx
+++ b/ARA_Challenge3.pptx
@@ -4536,7 +4536,7 @@
                 </a:solidFill>
                 <a:latin typeface="Consolas"/>
               </a:rPr>
-              <a:t>HELD-OUT ACCURACY</a:t>
+              <a:t>BEST HELD-OUT</a:t>
             </a:r>
           </a:p>
         </p:txBody>
@@ -4571,7 +4571,7 @@
                 </a:solidFill>
                 <a:latin typeface="Archivo"/>
               </a:rPr>
-              <a:t>9.66 dB</a:t>
+              <a:t>7.95 dB</a:t>
             </a:r>
           </a:p>
         </p:txBody>
@@ -4606,7 +4606,7 @@
                 </a:solidFill>
                 <a:latin typeface="Consolas"/>
               </a:rPr>
-              <a:t>RMSE, geographic blocks</a:t>
+              <a:t>KMeans blocks · sionna-hybrid-agronomy</a:t>
             </a:r>
           </a:p>
         </p:txBody>
@@ -6415,7 +6415,7 @@
                           </a:solidFill>
                           <a:latin typeface="Consolas"/>
                         </a:rPr>
-                        <a:t>9.66</a:t>
+                        <a:t>9.59</a:t>
                       </a:r>
                     </a:p>
                   </a:txBody>
@@ -6438,7 +6438,7 @@
                           </a:solidFill>
                           <a:latin typeface="Consolas"/>
                         </a:rPr>
-                        <a:t>9.78</a:t>
+                        <a:t>9.81</a:t>
                       </a:r>
                     </a:p>
                   </a:txBody>
@@ -6485,7 +6485,7 @@
                           </a:solidFill>
                           <a:latin typeface="Consolas"/>
                         </a:rPr>
-                        <a:t>Sionna ray tracing</a:t>
+                        <a:t>Sionna ray tracing (hybrid)</a:t>
                       </a:r>
                     </a:p>
                   </a:txBody>
@@ -6508,7 +6508,7 @@
                           </a:solidFill>
                           <a:latin typeface="Consolas"/>
                         </a:rPr>
-                        <a:t>—</a:t>
+                        <a:t>7.61</a:t>
                       </a:r>
                     </a:p>
                   </a:txBody>
@@ -6531,7 +6531,7 @@
                           </a:solidFill>
                           <a:latin typeface="Consolas"/>
                         </a:rPr>
-                        <a:t>—</a:t>
+                        <a:t>7.59</a:t>
                       </a:r>
                     </a:p>
                   </a:txBody>
@@ -6554,7 +6554,7 @@
                           </a:solidFill>
                           <a:latin typeface="Consolas"/>
                         </a:rPr>
-                        <a:t>8.29</a:t>
+                        <a:t>7.95</a:t>
                       </a:r>
                     </a:p>
                   </a:txBody>
@@ -6577,7 +6577,7 @@
                           </a:solidFill>
                           <a:latin typeface="Consolas"/>
                         </a:rPr>
-                        <a:t>—</a:t>
+                        <a:t>7.80</a:t>
                       </a:r>
                     </a:p>
                   </a:txBody>
@@ -6600,7 +6600,7 @@
                           </a:solidFill>
                           <a:latin typeface="Consolas"/>
                         </a:rPr>
-                        <a:t>no — nothing fitted</a:t>
+                        <a:t>yes</a:t>
                       </a:r>
                     </a:p>
                   </a:txBody>
@@ -6624,7 +6624,7 @@
                           </a:solidFill>
                           <a:latin typeface="Consolas"/>
                         </a:rPr>
-                        <a:t>FNO on profiles</a:t>
+                        <a:t>FNO on path profiles</a:t>
                       </a:r>
                     </a:p>
                   </a:txBody>
@@ -6739,7 +6739,7 @@
                           </a:solidFill>
                           <a:latin typeface="Consolas"/>
                         </a:rPr>
-                        <a:t>yes</a:t>
+                        <a:t>not yet run</a:t>
                       </a:r>
                     </a:p>
                   </a:txBody>
@@ -6878,7 +6878,7 @@
                           </a:solidFill>
                           <a:latin typeface="Consolas"/>
                         </a:rPr>
-                        <a:t>—</a:t>
+                        <a:t>reserved</a:t>
                       </a:r>
                     </a:p>
                   </a:txBody>
@@ -6923,7 +6923,7 @@
                 </a:solidFill>
                 <a:latin typeface="Consolas"/>
               </a:rPr>
-              <a:t>Blank cells are work not yet done, not results withheld. The table is completed when every simulator has run — the numbers above are produced by python -m common.selftest, which fails if the bench itself has changed.</a:t>
+              <a:t>Dashes are work not yet done, not results withheld. Produced by one harness from reports/testbench.json — and python -m common.selftest reproduces the published reference to 0.02 dB, so a change to the bench is caught rather than absorbed into the numbers.</a:t>
             </a:r>
           </a:p>
         </p:txBody>

--- a/ARA_Challenge3.pptx
+++ b/ARA_Challenge3.pptx
@@ -6624,7 +6624,7 @@
                           </a:solidFill>
                           <a:latin typeface="Consolas"/>
                         </a:rPr>
-                        <a:t>FNO on path profiles</a:t>
+                        <a:t>Neural operator (FNO)</a:t>
                       </a:r>
                     </a:p>
                   </a:txBody>
@@ -17676,7 +17676,7 @@
                 </a:solidFill>
                 <a:latin typeface="Archivo"/>
               </a:rPr>
-              <a:t>Neural operator — a 1-D FNO over path profiles</a:t>
+              <a:t>Neural operator — a learned map from terrain profile to signal</a:t>
             </a:r>
           </a:p>
         </p:txBody>
@@ -17711,7 +17711,7 @@
                 </a:solidFill>
                 <a:latin typeface="Archivo"/>
               </a:rPr>
-              <a:t>The framing is the whole difficulty. Most of the operator family cannot be posed on this dataset at all.</a:t>
+              <a:t>A 1-D Fourier neural operator. It does not trace rays and it does not assume a path-loss law; it learns the terrain term directly from 3,838 measured links.</a:t>
             </a:r>
           </a:p>
         </p:txBody>
@@ -17751,519 +17751,16 @@
           </a:p>
         </p:txBody>
       </p:sp>
-      <p:graphicFrame>
-        <p:nvGraphicFramePr>
-          <p:cNvPr id="9" name="Table 8"/>
-          <p:cNvGraphicFramePr>
-            <a:graphicFrameLocks noGrp="1"/>
-          </p:cNvGraphicFramePr>
-          <p:nvPr/>
-        </p:nvGraphicFramePr>
-        <p:xfrm>
-          <a:off x="502920" y="1737360"/>
-          <a:ext cx="5943599" cy="2103120"/>
-        </p:xfrm>
-        <a:graphic>
-          <a:graphicData uri="http://schemas.openxmlformats.org/drawingml/2006/table">
-            <a:tbl>
-              <a:tblPr firstRow="1" bandRow="1">
-                <a:tableStyleId>{5C22544A-7EE6-4342-B048-85BDC9FD1C3A}</a:tableStyleId>
-              </a:tblPr>
-              <a:tblGrid>
-                <a:gridCol w="2194560"/>
-                <a:gridCol w="3749039"/>
-              </a:tblGrid>
-              <a:tr h="350520">
-                <a:tc>
-                  <a:txBody>
-                    <a:bodyPr/>
-                    <a:lstStyle/>
-                    <a:p>
-                      <a:r>
-                        <a:rPr sz="900" b="1">
-                          <a:solidFill>
-                            <a:srgbClr val="65726B"/>
-                          </a:solidFill>
-                          <a:latin typeface="Consolas"/>
-                        </a:rPr>
-                        <a:t>model</a:t>
-                      </a:r>
-                    </a:p>
-                  </a:txBody>
-                  <a:tcPr marL="54864" marR="54864" marT="27432" marB="27432">
-                    <a:solidFill>
-                      <a:srgbClr val="F1F4EF"/>
-                    </a:solidFill>
-                  </a:tcPr>
-                </a:tc>
-                <a:tc>
-                  <a:txBody>
-                    <a:bodyPr/>
-                    <a:lstStyle/>
-                    <a:p>
-                      <a:pPr algn="r"/>
-                      <a:r>
-                        <a:rPr sz="900" b="1">
-                          <a:solidFill>
-                            <a:srgbClr val="65726B"/>
-                          </a:solidFill>
-                          <a:latin typeface="Consolas"/>
-                        </a:rPr>
-                        <a:t>verdict on this dataset</a:t>
-                      </a:r>
-                    </a:p>
-                  </a:txBody>
-                  <a:tcPr marL="54864" marR="54864" marT="27432" marB="27432">
-                    <a:solidFill>
-                      <a:srgbClr val="F1F4EF"/>
-                    </a:solidFill>
-                  </a:tcPr>
-                </a:tc>
-              </a:tr>
-              <a:tr h="350520">
-                <a:tc>
-                  <a:txBody>
-                    <a:bodyPr/>
-                    <a:lstStyle/>
-                    <a:p>
-                      <a:r>
-                        <a:rPr sz="900" b="0">
-                          <a:solidFill>
-                            <a:srgbClr val="16211C"/>
-                          </a:solidFill>
-                          <a:latin typeface="Consolas"/>
-                        </a:rPr>
-                        <a:t>FNO / TFNO / UNO / WNO in 2-D</a:t>
-                      </a:r>
-                    </a:p>
-                  </a:txBody>
-                  <a:tcPr marL="54864" marR="54864" marT="27432" marB="27432">
-                    <a:solidFill>
-                      <a:srgbClr val="FFFFFF"/>
-                    </a:solidFill>
-                  </a:tcPr>
-                </a:tc>
-                <a:tc>
-                  <a:txBody>
-                    <a:bodyPr/>
-                    <a:lstStyle/>
-                    <a:p>
-                      <a:pPr algn="r"/>
-                      <a:r>
-                        <a:rPr sz="900" b="0">
-                          <a:solidFill>
-                            <a:srgbClr val="16211C"/>
-                          </a:solidFill>
-                          <a:latin typeface="Consolas"/>
-                        </a:rPr>
-                        <a:t>(terrain, TX) → surface has ONE training example. Not viable.</a:t>
-                      </a:r>
-                    </a:p>
-                  </a:txBody>
-                  <a:tcPr marL="54864" marR="54864" marT="27432" marB="27432">
-                    <a:solidFill>
-                      <a:srgbClr val="FFFFFF"/>
-                    </a:solidFill>
-                  </a:tcPr>
-                </a:tc>
-              </a:tr>
-              <a:tr h="350520">
-                <a:tc>
-                  <a:txBody>
-                    <a:bodyPr/>
-                    <a:lstStyle/>
-                    <a:p>
-                      <a:r>
-                        <a:rPr sz="900" b="0">
-                          <a:solidFill>
-                            <a:srgbClr val="16211C"/>
-                          </a:solidFill>
-                          <a:latin typeface="Consolas"/>
-                        </a:rPr>
-                        <a:t>NeRF2</a:t>
-                      </a:r>
-                    </a:p>
-                  </a:txBody>
-                  <a:tcPr marL="54864" marR="54864" marT="27432" marB="27432">
-                    <a:solidFill>
-                      <a:srgbClr val="FFFFFF"/>
-                    </a:solidFill>
-                  </a:tcPr>
-                </a:tc>
-                <a:tc>
-                  <a:txBody>
-                    <a:bodyPr/>
-                    <a:lstStyle/>
-                    <a:p>
-                      <a:pPr algn="r"/>
-                      <a:r>
-                        <a:rPr sz="900" b="0">
-                          <a:solidFill>
-                            <a:srgbClr val="16211C"/>
-                          </a:solidFill>
-                          <a:latin typeface="Consolas"/>
-                        </a:rPr>
-                        <a:t>needs many TX or dense volumetric RX. One TX, road-confined.</a:t>
-                      </a:r>
-                    </a:p>
-                  </a:txBody>
-                  <a:tcPr marL="54864" marR="54864" marT="27432" marB="27432">
-                    <a:solidFill>
-                      <a:srgbClr val="FFFFFF"/>
-                    </a:solidFill>
-                  </a:tcPr>
-                </a:tc>
-              </a:tr>
-              <a:tr h="350520">
-                <a:tc>
-                  <a:txBody>
-                    <a:bodyPr/>
-                    <a:lstStyle/>
-                    <a:p>
-                      <a:r>
-                        <a:rPr sz="900" b="0">
-                          <a:solidFill>
-                            <a:srgbClr val="16211C"/>
-                          </a:solidFill>
-                          <a:latin typeface="Consolas"/>
-                        </a:rPr>
-                        <a:t>SFNO</a:t>
-                      </a:r>
-                    </a:p>
-                  </a:txBody>
-                  <a:tcPr marL="54864" marR="54864" marT="27432" marB="27432">
-                    <a:solidFill>
-                      <a:srgbClr val="FFFFFF"/>
-                    </a:solidFill>
-                  </a:tcPr>
-                </a:tc>
-                <a:tc>
-                  <a:txBody>
-                    <a:bodyPr/>
-                    <a:lstStyle/>
-                    <a:p>
-                      <a:pPr algn="r"/>
-                      <a:r>
-                        <a:rPr sz="900" b="0">
-                          <a:solidFill>
-                            <a:srgbClr val="16211C"/>
-                          </a:solidFill>
-                          <a:latin typeface="Consolas"/>
-                        </a:rPr>
-                        <a:t>spherical harmonics; the box is 11 × 16 km.</a:t>
-                      </a:r>
-                    </a:p>
-                  </a:txBody>
-                  <a:tcPr marL="54864" marR="54864" marT="27432" marB="27432">
-                    <a:solidFill>
-                      <a:srgbClr val="FFFFFF"/>
-                    </a:solidFill>
-                  </a:tcPr>
-                </a:tc>
-              </a:tr>
-              <a:tr h="350520">
-                <a:tc>
-                  <a:txBody>
-                    <a:bodyPr/>
-                    <a:lstStyle/>
-                    <a:p>
-                      <a:r>
-                        <a:rPr sz="900" b="0">
-                          <a:solidFill>
-                            <a:srgbClr val="16211C"/>
-                          </a:solidFill>
-                          <a:latin typeface="Consolas"/>
-                        </a:rPr>
-                        <a:t>CoDANO</a:t>
-                      </a:r>
-                    </a:p>
-                  </a:txBody>
-                  <a:tcPr marL="54864" marR="54864" marT="27432" marB="27432">
-                    <a:solidFill>
-                      <a:srgbClr val="FFFFFF"/>
-                    </a:solidFill>
-                  </a:tcPr>
-                </a:tc>
-                <a:tc>
-                  <a:txBody>
-                    <a:bodyPr/>
-                    <a:lstStyle/>
-                    <a:p>
-                      <a:pPr algn="r"/>
-                      <a:r>
-                        <a:rPr sz="900" b="0">
-                          <a:solidFill>
-                            <a:srgbClr val="16211C"/>
-                          </a:solidFill>
-                          <a:latin typeface="Consolas"/>
-                        </a:rPr>
-                        <a:t>codomain attention across coupled variables; there is one.</a:t>
-                      </a:r>
-                    </a:p>
-                  </a:txBody>
-                  <a:tcPr marL="54864" marR="54864" marT="27432" marB="27432">
-                    <a:solidFill>
-                      <a:srgbClr val="FFFFFF"/>
-                    </a:solidFill>
-                  </a:tcPr>
-                </a:tc>
-              </a:tr>
-              <a:tr h="350520">
-                <a:tc>
-                  <a:txBody>
-                    <a:bodyPr/>
-                    <a:lstStyle/>
-                    <a:p>
-                      <a:r>
-                        <a:rPr sz="900" b="0">
-                          <a:solidFill>
-                            <a:srgbClr val="16211C"/>
-                          </a:solidFill>
-                          <a:latin typeface="Consolas"/>
-                        </a:rPr>
-                        <a:t>GeNeRT</a:t>
-                      </a:r>
-                    </a:p>
-                  </a:txBody>
-                  <a:tcPr marL="54864" marR="54864" marT="27432" marB="27432">
-                    <a:solidFill>
-                      <a:srgbClr val="FFFFFF"/>
-                    </a:solidFill>
-                  </a:tcPr>
-                </a:tc>
-                <a:tc>
-                  <a:txBody>
-                    <a:bodyPr/>
-                    <a:lstStyle/>
-                    <a:p>
-                      <a:pPr algn="r"/>
-                      <a:r>
-                        <a:rPr sz="900" b="0">
-                          <a:solidFill>
-                            <a:srgbClr val="16211C"/>
-                          </a:solidFill>
-                          <a:latin typeface="Consolas"/>
-                        </a:rPr>
-                        <a:t>needs a semantic 3-D scene and ray-traced CIRs; no weights.</a:t>
-                      </a:r>
-                    </a:p>
-                  </a:txBody>
-                  <a:tcPr marL="54864" marR="54864" marT="27432" marB="27432">
-                    <a:solidFill>
-                      <a:srgbClr val="FFFFFF"/>
-                    </a:solidFill>
-                  </a:tcPr>
-                </a:tc>
-              </a:tr>
-            </a:tbl>
-          </a:graphicData>
-        </a:graphic>
-      </p:graphicFrame>
-      <p:sp>
-        <p:nvSpPr>
-          <p:cNvPr id="10" name="TextBox 9"/>
-          <p:cNvSpPr txBox="1"/>
-          <p:nvPr/>
-        </p:nvSpPr>
-        <p:spPr>
-          <a:xfrm>
-            <a:off x="502920" y="3977639"/>
-            <a:ext cx="5943600" cy="274320"/>
-          </a:xfrm>
-          <a:prstGeom prst="rect">
-            <a:avLst/>
-          </a:prstGeom>
-          <a:noFill/>
-        </p:spPr>
-        <p:txBody>
-          <a:bodyPr wrap="square" anchor="t" lIns="0" rIns="0" tIns="0" bIns="0">
-            <a:spAutoFit/>
-          </a:bodyPr>
-          <a:lstStyle/>
-          <a:p>
-            <a:pPr algn="l"/>
-            <a:r>
-              <a:rPr sz="1100" b="1" spc="120">
-                <a:solidFill>
-                  <a:srgbClr val="5B3A9B"/>
-                </a:solidFill>
-                <a:latin typeface="Consolas"/>
-              </a:rPr>
-              <a:t>THE FRAMING THAT IS WELL POSED</a:t>
-            </a:r>
-          </a:p>
-        </p:txBody>
-      </p:sp>
-      <p:sp>
-        <p:nvSpPr>
-          <p:cNvPr id="11" name="TextBox 10"/>
-          <p:cNvSpPr txBox="1"/>
-          <p:nvPr/>
-        </p:nvSpPr>
-        <p:spPr>
-          <a:xfrm>
-            <a:off x="502920" y="4279392"/>
-            <a:ext cx="5943600" cy="914400"/>
-          </a:xfrm>
-          <a:prstGeom prst="rect">
-            <a:avLst/>
-          </a:prstGeom>
-          <a:noFill/>
-        </p:spPr>
-        <p:txBody>
-          <a:bodyPr wrap="square" anchor="t" lIns="0" rIns="0" tIns="0" bIns="0">
-            <a:spAutoFit/>
-          </a:bodyPr>
-          <a:lstStyle/>
-          <a:p>
-            <a:pPr algn="l"/>
-            <a:r>
-              <a:rPr sz="1200" b="0">
-                <a:solidFill>
-                  <a:srgbClr val="3A4842"/>
-                </a:solidFill>
-                <a:latin typeface="Archivo"/>
-              </a:rPr>
-              <a:t>Stop treating the area as the function. The terrain profile along each link is a genuine input function on [0,1] — 3,838 of them — and it competes head-to-head with the P.526 term it would replace.</a:t>
-            </a:r>
-          </a:p>
-        </p:txBody>
-      </p:sp>
-      <p:sp>
-        <p:nvSpPr>
-          <p:cNvPr id="12" name="Rectangle 11"/>
-          <p:cNvSpPr/>
-          <p:nvPr/>
-        </p:nvSpPr>
-        <p:spPr>
-          <a:xfrm>
-            <a:off x="6720840" y="1737360"/>
-            <a:ext cx="4937760" cy="2148840"/>
-          </a:xfrm>
-          <a:prstGeom prst="rect">
-            <a:avLst/>
-          </a:prstGeom>
-          <a:solidFill>
-            <a:srgbClr val="F1F4EF"/>
-          </a:solidFill>
-          <a:ln w="19050">
-            <a:solidFill>
-              <a:srgbClr val="8C1D40"/>
-            </a:solidFill>
-          </a:ln>
-          <a:effectLst/>
-        </p:spPr>
-        <p:style>
-          <a:lnRef idx="1">
-            <a:schemeClr val="accent1"/>
-          </a:lnRef>
-          <a:fillRef idx="3">
-            <a:schemeClr val="accent1"/>
-          </a:fillRef>
-          <a:effectRef idx="2">
-            <a:schemeClr val="accent1"/>
-          </a:effectRef>
-          <a:fontRef idx="minor">
-            <a:schemeClr val="lt1"/>
-          </a:fontRef>
-        </p:style>
-        <p:txBody>
-          <a:bodyPr rtlCol="0" anchor="ctr"/>
-          <a:lstStyle/>
-          <a:p>
-            <a:pPr algn="ctr"/>
-          </a:p>
-        </p:txBody>
-      </p:sp>
-      <p:sp>
-        <p:nvSpPr>
-          <p:cNvPr id="13" name="Rectangle 12"/>
-          <p:cNvSpPr/>
-          <p:nvPr/>
-        </p:nvSpPr>
-        <p:spPr>
-          <a:xfrm>
-            <a:off x="6720840" y="1737360"/>
-            <a:ext cx="54864" cy="2148840"/>
-          </a:xfrm>
-          <a:prstGeom prst="rect">
-            <a:avLst/>
-          </a:prstGeom>
-          <a:solidFill>
-            <a:srgbClr val="8C1D40"/>
-          </a:solidFill>
-          <a:ln>
-            <a:noFill/>
-          </a:ln>
-          <a:effectLst/>
-        </p:spPr>
-        <p:style>
-          <a:lnRef idx="1">
-            <a:schemeClr val="accent1"/>
-          </a:lnRef>
-          <a:fillRef idx="3">
-            <a:schemeClr val="accent1"/>
-          </a:fillRef>
-          <a:effectRef idx="2">
-            <a:schemeClr val="accent1"/>
-          </a:effectRef>
-          <a:fontRef idx="minor">
-            <a:schemeClr val="lt1"/>
-          </a:fontRef>
-        </p:style>
-        <p:txBody>
-          <a:bodyPr rtlCol="0" anchor="ctr"/>
-          <a:lstStyle/>
-          <a:p>
-            <a:pPr algn="ctr"/>
-          </a:p>
-        </p:txBody>
-      </p:sp>
-      <p:sp>
-        <p:nvSpPr>
-          <p:cNvPr id="14" name="TextBox 13"/>
-          <p:cNvSpPr txBox="1"/>
-          <p:nvPr/>
-        </p:nvSpPr>
-        <p:spPr>
-          <a:xfrm>
-            <a:off x="6949440" y="1874519"/>
-            <a:ext cx="4572000" cy="274320"/>
-          </a:xfrm>
-          <a:prstGeom prst="rect">
-            <a:avLst/>
-          </a:prstGeom>
-          <a:noFill/>
-        </p:spPr>
-        <p:txBody>
-          <a:bodyPr wrap="square" anchor="t" lIns="0" rIns="0" tIns="0" bIns="0">
-            <a:spAutoFit/>
-          </a:bodyPr>
-          <a:lstStyle/>
-          <a:p>
-            <a:pPr algn="l"/>
-            <a:r>
-              <a:rPr sz="1250" b="1">
-                <a:solidFill>
-                  <a:srgbClr val="8C1D40"/>
-                </a:solidFill>
-                <a:latin typeface="Archivo"/>
-              </a:rPr>
-              <a:t>A terrain profile is a location fingerprint</a:t>
-            </a:r>
-          </a:p>
-        </p:txBody>
-      </p:sp>
-      <p:sp>
-        <p:nvSpPr>
-          <p:cNvPr id="15" name="TextBox 14"/>
-          <p:cNvSpPr txBox="1"/>
-          <p:nvPr/>
-        </p:nvSpPr>
-        <p:spPr>
-          <a:xfrm>
-            <a:off x="6949440" y="2240280"/>
-            <a:ext cx="4572000" cy="1554480"/>
+      <p:sp>
+        <p:nvSpPr>
+          <p:cNvPr id="9" name="TextBox 8"/>
+          <p:cNvSpPr txBox="1"/>
+          <p:nvPr/>
+        </p:nvSpPr>
+        <p:spPr>
+          <a:xfrm>
+            <a:off x="502920" y="1783080"/>
+            <a:ext cx="5486400" cy="2194560"/>
           </a:xfrm>
           <a:prstGeom prst="rect">
             <a:avLst/>
@@ -18282,13 +17779,13 @@
               </a:spcAft>
             </a:pPr>
             <a:r>
-              <a:rPr sz="1000" b="0">
-                <a:solidFill>
-                  <a:srgbClr val="3A4842"/>
+              <a:rPr sz="1100" b="1">
+                <a:solidFill>
+                  <a:srgbClr val="16211C"/>
                 </a:solidFill>
                 <a:latin typeface="Archivo"/>
               </a:rPr>
-              <a:t>— Nearest other link in profile space: median 12.2 m away on the ground.</a:t>
+              <a:t>— The input is a function, not a number.</a:t>
             </a:r>
           </a:p>
           <a:p>
@@ -18298,13 +17795,13 @@
               </a:spcAft>
             </a:pPr>
             <a:r>
-              <a:rPr sz="1000" b="0">
+              <a:rPr sz="1100" b="0">
                 <a:solidFill>
                   <a:srgbClr val="3A4842"/>
                 </a:solidFill>
                 <a:latin typeface="Archivo"/>
               </a:rPr>
-              <a:t>— 97.2% within 50 m; 99.6% within 200 m.</a:t>
+              <a:t>— For every link, ground elevation is sampled at 128 points along the path from the tower to the receiver. That profile is the input; the received power is the output.</a:t>
             </a:r>
           </a:p>
           <a:p>
@@ -18314,27 +17811,43 @@
               </a:spcAft>
             </a:pPr>
             <a:r>
-              <a:rPr sz="1000" b="1">
+              <a:rPr sz="1100" b="1">
                 <a:solidFill>
                   <a:srgbClr val="16211C"/>
                 </a:solidFill>
                 <a:latin typeface="Archivo"/>
               </a:rPr>
-              <a:t>— So on a random split a profile-fed network answers by looking up its own training set.</a:t>
-            </a:r>
-          </a:p>
-        </p:txBody>
-      </p:sp>
-      <p:sp>
-        <p:nvSpPr>
-          <p:cNvPr id="16" name="Rectangle 15"/>
+              <a:t>— It replaces the textbook diffraction term, not the whole model.</a:t>
+            </a:r>
+          </a:p>
+          <a:p>
+            <a:pPr>
+              <a:spcAft>
+                <a:spcPts val="600"/>
+              </a:spcAft>
+            </a:pPr>
+            <a:r>
+              <a:rPr sz="1100" b="0">
+                <a:solidFill>
+                  <a:srgbClr val="3A4842"/>
+                </a:solidFill>
+                <a:latin typeface="Archivo"/>
+              </a:rPr>
+              <a:t>— Distance and bearing stay parametric. The operator is asked only what the terrain along the path does to the signal — the same question ITU-R P.526 answers with a single knife edge.</a:t>
+            </a:r>
+          </a:p>
+        </p:txBody>
+      </p:sp>
+      <p:sp>
+        <p:nvSpPr>
+          <p:cNvPr id="10" name="Rectangle 9"/>
           <p:cNvSpPr/>
           <p:nvPr/>
         </p:nvSpPr>
         <p:spPr>
           <a:xfrm>
-            <a:off x="6720840" y="4023360"/>
-            <a:ext cx="4937760" cy="1920240"/>
+            <a:off x="6309360" y="1783080"/>
+            <a:ext cx="5394960" cy="2377440"/>
           </a:xfrm>
           <a:prstGeom prst="rect">
             <a:avLst/>
@@ -18373,14 +17886,14 @@
       </p:sp>
       <p:sp>
         <p:nvSpPr>
-          <p:cNvPr id="17" name="TextBox 16"/>
-          <p:cNvSpPr txBox="1"/>
-          <p:nvPr/>
-        </p:nvSpPr>
-        <p:spPr>
-          <a:xfrm>
-            <a:off x="6949440" y="4206240"/>
-            <a:ext cx="4572000" cy="274320"/>
+          <p:cNvPr id="11" name="TextBox 10"/>
+          <p:cNvSpPr txBox="1"/>
+          <p:nvPr/>
+        </p:nvSpPr>
+        <p:spPr>
+          <a:xfrm>
+            <a:off x="6537960" y="1965960"/>
+            <a:ext cx="4937760" cy="274320"/>
           </a:xfrm>
           <a:prstGeom prst="rect">
             <a:avLst/>
@@ -18401,21 +17914,21 @@
                 </a:solidFill>
                 <a:latin typeface="Archivo"/>
               </a:rPr>
-              <a:t>Reserved — head-to-head result</a:t>
-            </a:r>
-          </a:p>
-        </p:txBody>
-      </p:sp>
-      <p:sp>
-        <p:nvSpPr>
-          <p:cNvPr id="18" name="TextBox 17"/>
-          <p:cNvSpPr txBox="1"/>
-          <p:nvPr/>
-        </p:nvSpPr>
-        <p:spPr>
-          <a:xfrm>
-            <a:off x="6949440" y="4553712"/>
-            <a:ext cx="4572000" cy="1280160"/>
+              <a:t>Reserved — backtest result</a:t>
+            </a:r>
+          </a:p>
+        </p:txBody>
+      </p:sp>
+      <p:sp>
+        <p:nvSpPr>
+          <p:cNvPr id="12" name="TextBox 11"/>
+          <p:cNvSpPr txBox="1"/>
+          <p:nvPr/>
+        </p:nvSpPr>
+        <p:spPr>
+          <a:xfrm>
+            <a:off x="6537960" y="2331720"/>
+            <a:ext cx="4937760" cy="1645920"/>
           </a:xfrm>
           <a:prstGeom prst="rect">
             <a:avLst/>
@@ -18440,7 +17953,7 @@
                 </a:solidFill>
                 <a:latin typeface="Archivo"/>
               </a:rPr>
-              <a:t>— Same splits as every other model, imported not reimplemented.</a:t>
+              <a:t>— Runs on the shared testbench, so it lands straight into the scoreboard on slide 11.</a:t>
             </a:r>
           </a:p>
           <a:p>
@@ -18456,30 +17969,174 @@
                 </a:solidFill>
                 <a:latin typeface="Archivo"/>
               </a:rPr>
-              <a:t>— Controls: no-terrain backbone, ridge on 12 profile PCs, and the same network trained on shuffled profiles.</a:t>
-            </a:r>
-          </a:p>
-          <a:p>
-            <a:pPr>
-              <a:spcAft>
-                <a:spcPts val="600"/>
-              </a:spcAft>
-            </a:pPr>
-            <a:r>
-              <a:rPr sz="1000" b="0">
+              <a:t>— Same three splits, same 200 m buffer, same seed.</a:t>
+            </a:r>
+          </a:p>
+        </p:txBody>
+      </p:sp>
+      <p:sp>
+        <p:nvSpPr>
+          <p:cNvPr id="13" name="Rectangle 12"/>
+          <p:cNvSpPr/>
+          <p:nvPr/>
+        </p:nvSpPr>
+        <p:spPr>
+          <a:xfrm>
+            <a:off x="502920" y="4343400"/>
+            <a:ext cx="11155680" cy="1600200"/>
+          </a:xfrm>
+          <a:prstGeom prst="rect">
+            <a:avLst/>
+          </a:prstGeom>
+          <a:solidFill>
+            <a:srgbClr val="F1F4EF"/>
+          </a:solidFill>
+          <a:ln w="19050">
+            <a:solidFill>
+              <a:srgbClr val="5B3A9B"/>
+            </a:solidFill>
+          </a:ln>
+          <a:effectLst/>
+        </p:spPr>
+        <p:style>
+          <a:lnRef idx="1">
+            <a:schemeClr val="accent1"/>
+          </a:lnRef>
+          <a:fillRef idx="3">
+            <a:schemeClr val="accent1"/>
+          </a:fillRef>
+          <a:effectRef idx="2">
+            <a:schemeClr val="accent1"/>
+          </a:effectRef>
+          <a:fontRef idx="minor">
+            <a:schemeClr val="lt1"/>
+          </a:fontRef>
+        </p:style>
+        <p:txBody>
+          <a:bodyPr rtlCol="0" anchor="ctr"/>
+          <a:lstStyle/>
+          <a:p>
+            <a:pPr algn="ctr"/>
+          </a:p>
+        </p:txBody>
+      </p:sp>
+      <p:sp>
+        <p:nvSpPr>
+          <p:cNvPr id="14" name="Rectangle 13"/>
+          <p:cNvSpPr/>
+          <p:nvPr/>
+        </p:nvSpPr>
+        <p:spPr>
+          <a:xfrm>
+            <a:off x="502920" y="4343400"/>
+            <a:ext cx="54864" cy="1600200"/>
+          </a:xfrm>
+          <a:prstGeom prst="rect">
+            <a:avLst/>
+          </a:prstGeom>
+          <a:solidFill>
+            <a:srgbClr val="5B3A9B"/>
+          </a:solidFill>
+          <a:ln>
+            <a:noFill/>
+          </a:ln>
+          <a:effectLst/>
+        </p:spPr>
+        <p:style>
+          <a:lnRef idx="1">
+            <a:schemeClr val="accent1"/>
+          </a:lnRef>
+          <a:fillRef idx="3">
+            <a:schemeClr val="accent1"/>
+          </a:fillRef>
+          <a:effectRef idx="2">
+            <a:schemeClr val="accent1"/>
+          </a:effectRef>
+          <a:fontRef idx="minor">
+            <a:schemeClr val="lt1"/>
+          </a:fontRef>
+        </p:style>
+        <p:txBody>
+          <a:bodyPr rtlCol="0" anchor="ctr"/>
+          <a:lstStyle/>
+          <a:p>
+            <a:pPr algn="ctr"/>
+          </a:p>
+        </p:txBody>
+      </p:sp>
+      <p:sp>
+        <p:nvSpPr>
+          <p:cNvPr id="15" name="TextBox 14"/>
+          <p:cNvSpPr txBox="1"/>
+          <p:nvPr/>
+        </p:nvSpPr>
+        <p:spPr>
+          <a:xfrm>
+            <a:off x="777240" y="4498848"/>
+            <a:ext cx="10607040" cy="274320"/>
+          </a:xfrm>
+          <a:prstGeom prst="rect">
+            <a:avLst/>
+          </a:prstGeom>
+          <a:noFill/>
+        </p:spPr>
+        <p:txBody>
+          <a:bodyPr wrap="square" anchor="t" lIns="0" rIns="0" tIns="0" bIns="0">
+            <a:spAutoFit/>
+          </a:bodyPr>
+          <a:lstStyle/>
+          <a:p>
+            <a:pPr algn="l"/>
+            <a:r>
+              <a:rPr sz="1300" b="1">
+                <a:solidFill>
+                  <a:srgbClr val="5B3A9B"/>
+                </a:solidFill>
+                <a:latin typeface="Archivo"/>
+              </a:rPr>
+              <a:t>Why the split matters more here than anywhere else</a:t>
+            </a:r>
+          </a:p>
+        </p:txBody>
+      </p:sp>
+      <p:sp>
+        <p:nvSpPr>
+          <p:cNvPr id="16" name="TextBox 15"/>
+          <p:cNvSpPr txBox="1"/>
+          <p:nvPr/>
+        </p:nvSpPr>
+        <p:spPr>
+          <a:xfrm>
+            <a:off x="777240" y="4864608"/>
+            <a:ext cx="10607040" cy="914400"/>
+          </a:xfrm>
+          <a:prstGeom prst="rect">
+            <a:avLst/>
+          </a:prstGeom>
+          <a:noFill/>
+        </p:spPr>
+        <p:txBody>
+          <a:bodyPr wrap="square" anchor="t" lIns="0" rIns="0" tIns="0" bIns="0">
+            <a:spAutoFit/>
+          </a:bodyPr>
+          <a:lstStyle/>
+          <a:p>
+            <a:pPr algn="l"/>
+            <a:r>
+              <a:rPr sz="1200" b="0">
                 <a:solidFill>
                   <a:srgbClr val="3A4842"/>
                 </a:solidFill>
                 <a:latin typeface="Archivo"/>
               </a:rPr>
-              <a:t>— The control is what separates skill from the target distribution.</a:t>
-            </a:r>
-          </a:p>
-        </p:txBody>
-      </p:sp>
-      <p:sp>
-        <p:nvSpPr>
-          <p:cNvPr id="19" name="TextBox 18"/>
+              <a:t>A terrain profile is very nearly a unique identifier of where the receiver was: the nearest other link in profile space sits a median of 12.2 m away on the ground, and 97.2% are within 50 m. So on a random split this model can reach the answer by recognising the location rather than the physics. Only the geographic splits say anything about whether it has learned propagation.</a:t>
+            </a:r>
+          </a:p>
+        </p:txBody>
+      </p:sp>
+      <p:sp>
+        <p:nvSpPr>
+          <p:cNvPr id="17" name="TextBox 16"/>
           <p:cNvSpPr txBox="1"/>
           <p:nvPr/>
         </p:nvSpPr>
@@ -18507,7 +18164,7 @@
                 </a:solidFill>
                 <a:latin typeface="Consolas"/>
               </a:rPr>
-              <a:t>terrain-approach/NEURAL_OPERATOR.md   ·   torch 2.10 CPU · neuraloperator 2.0</a:t>
+              <a:t>terrain-approach/NEURAL_OPERATOR.md   ·   1-D FNO, 128-point profiles, torch CPU</a:t>
             </a:r>
           </a:p>
         </p:txBody>

--- a/ARA_Challenge3.pptx
+++ b/ARA_Challenge3.pptx
@@ -4606,7 +4606,7 @@
                 </a:solidFill>
                 <a:latin typeface="Consolas"/>
               </a:rPr>
-              <a:t>KMeans blocks · sionna-hybrid-agronomy</a:t>
+              <a:t>KMeans blocks · sionna</a:t>
             </a:r>
           </a:p>
         </p:txBody>
@@ -4912,7 +4912,7 @@
         <p:spPr>
           <a:xfrm>
             <a:off x="502920" y="310896"/>
-            <a:ext cx="548640" cy="274320"/>
+            <a:ext cx="384048" cy="274320"/>
           </a:xfrm>
           <a:prstGeom prst="rect">
             <a:avLst/>
@@ -6037,7 +6037,7 @@
         <p:spPr>
           <a:xfrm>
             <a:off x="502920" y="310896"/>
-            <a:ext cx="548640" cy="274320"/>
+            <a:ext cx="384048" cy="274320"/>
           </a:xfrm>
           <a:prstGeom prst="rect">
             <a:avLst/>
@@ -7558,7 +7558,7 @@
         <p:spPr>
           <a:xfrm>
             <a:off x="502920" y="310896"/>
-            <a:ext cx="548640" cy="274320"/>
+            <a:ext cx="384048" cy="274320"/>
           </a:xfrm>
           <a:prstGeom prst="rect">
             <a:avLst/>
@@ -7800,7 +7800,7 @@
                 </a:solidFill>
                 <a:latin typeface="Archivo"/>
               </a:rPr>
-              <a:t>1</a:t>
+              <a:t>2</a:t>
             </a:r>
           </a:p>
         </p:txBody>
@@ -8691,7 +8691,7 @@
         <p:spPr>
           <a:xfrm>
             <a:off x="502920" y="310896"/>
-            <a:ext cx="548640" cy="274320"/>
+            <a:ext cx="384048" cy="274320"/>
           </a:xfrm>
           <a:prstGeom prst="rect">
             <a:avLst/>
@@ -9818,7 +9818,7 @@
         <p:spPr>
           <a:xfrm>
             <a:off x="502920" y="310896"/>
-            <a:ext cx="548640" cy="274320"/>
+            <a:ext cx="384048" cy="274320"/>
           </a:xfrm>
           <a:prstGeom prst="rect">
             <a:avLst/>
@@ -10054,7 +10054,7 @@
           <a:p>
             <a:pPr algn="l"/>
             <a:r>
-              <a:rPr sz="2500" b="1">
+              <a:rPr sz="1400" b="1">
                 <a:solidFill>
                   <a:srgbClr val="0F6E70"/>
                 </a:solidFill>
@@ -10875,7 +10875,7 @@
         <p:spPr>
           <a:xfrm>
             <a:off x="502920" y="310896"/>
-            <a:ext cx="548640" cy="274320"/>
+            <a:ext cx="384048" cy="274320"/>
           </a:xfrm>
           <a:prstGeom prst="rect">
             <a:avLst/>
@@ -11776,7 +11776,7 @@
         <p:spPr>
           <a:xfrm>
             <a:off x="502920" y="310896"/>
-            <a:ext cx="548640" cy="274320"/>
+            <a:ext cx="384048" cy="274320"/>
           </a:xfrm>
           <a:prstGeom prst="rect">
             <a:avLst/>
@@ -12836,7 +12836,7 @@
         <p:spPr>
           <a:xfrm>
             <a:off x="502920" y="310896"/>
-            <a:ext cx="548640" cy="274320"/>
+            <a:ext cx="384048" cy="274320"/>
           </a:xfrm>
           <a:prstGeom prst="rect">
             <a:avLst/>
@@ -13794,7 +13794,7 @@
         <p:spPr>
           <a:xfrm>
             <a:off x="502920" y="310896"/>
-            <a:ext cx="548640" cy="274320"/>
+            <a:ext cx="384048" cy="274320"/>
           </a:xfrm>
           <a:prstGeom prst="rect">
             <a:avLst/>
@@ -14282,7 +14282,7 @@
         <p:spPr>
           <a:xfrm>
             <a:off x="502920" y="310896"/>
-            <a:ext cx="548640" cy="274320"/>
+            <a:ext cx="384048" cy="274320"/>
           </a:xfrm>
           <a:prstGeom prst="rect">
             <a:avLst/>
@@ -14380,42 +14380,7 @@
       </p:sp>
       <p:sp>
         <p:nvSpPr>
-          <p:cNvPr id="7" name="TextBox 6"/>
-          <p:cNvSpPr txBox="1"/>
-          <p:nvPr/>
-        </p:nvSpPr>
-        <p:spPr>
-          <a:xfrm>
-            <a:off x="502920" y="1152144"/>
-            <a:ext cx="11155680" cy="365760"/>
-          </a:xfrm>
-          <a:prstGeom prst="rect">
-            <a:avLst/>
-          </a:prstGeom>
-          <a:noFill/>
-        </p:spPr>
-        <p:txBody>
-          <a:bodyPr wrap="square" anchor="t" lIns="0" rIns="0" tIns="0" bIns="0">
-            <a:spAutoFit/>
-          </a:bodyPr>
-          <a:lstStyle/>
-          <a:p>
-            <a:pPr algn="l"/>
-            <a:r>
-              <a:rPr sz="1250" b="0">
-                <a:solidFill>
-                  <a:srgbClr val="3A4842"/>
-                </a:solidFill>
-                <a:latin typeface="Archivo"/>
-              </a:rPr>
-              <a:t>Different physics, different failure modes — but scored on the same demand, the same splits and the same objective, or they are not being compared.</a:t>
-            </a:r>
-          </a:p>
-        </p:txBody>
-      </p:sp>
-      <p:sp>
-        <p:nvSpPr>
-          <p:cNvPr id="8" name="Rectangle 7"/>
+          <p:cNvPr id="7" name="Rectangle 6"/>
           <p:cNvSpPr/>
           <p:nvPr/>
         </p:nvSpPr>
@@ -14461,7 +14426,7 @@
       </p:sp>
       <p:sp>
         <p:nvSpPr>
-          <p:cNvPr id="9" name="TextBox 8"/>
+          <p:cNvPr id="8" name="TextBox 7"/>
           <p:cNvSpPr txBox="1"/>
           <p:nvPr/>
         </p:nvSpPr>
@@ -14496,7 +14461,7 @@
       </p:sp>
       <p:sp>
         <p:nvSpPr>
-          <p:cNvPr id="10" name="TextBox 9"/>
+          <p:cNvPr id="9" name="TextBox 8"/>
           <p:cNvSpPr txBox="1"/>
           <p:nvPr/>
         </p:nvSpPr>
@@ -14532,7 +14497,7 @@
       </p:sp>
       <p:sp>
         <p:nvSpPr>
-          <p:cNvPr id="11" name="TextBox 10"/>
+          <p:cNvPr id="10" name="TextBox 9"/>
           <p:cNvSpPr txBox="1"/>
           <p:nvPr/>
         </p:nvSpPr>
@@ -14567,7 +14532,7 @@
       </p:sp>
       <p:sp>
         <p:nvSpPr>
-          <p:cNvPr id="12" name="Rectangle 11"/>
+          <p:cNvPr id="11" name="Rectangle 10"/>
           <p:cNvSpPr/>
           <p:nvPr/>
         </p:nvSpPr>
@@ -14613,7 +14578,7 @@
       </p:sp>
       <p:sp>
         <p:nvSpPr>
-          <p:cNvPr id="13" name="TextBox 12"/>
+          <p:cNvPr id="12" name="TextBox 11"/>
           <p:cNvSpPr txBox="1"/>
           <p:nvPr/>
         </p:nvSpPr>
@@ -14648,7 +14613,7 @@
       </p:sp>
       <p:sp>
         <p:nvSpPr>
-          <p:cNvPr id="14" name="TextBox 13"/>
+          <p:cNvPr id="13" name="TextBox 12"/>
           <p:cNvSpPr txBox="1"/>
           <p:nvPr/>
         </p:nvSpPr>
@@ -14683,7 +14648,7 @@
       </p:sp>
       <p:sp>
         <p:nvSpPr>
-          <p:cNvPr id="15" name="Rectangle 14"/>
+          <p:cNvPr id="14" name="Rectangle 13"/>
           <p:cNvSpPr/>
           <p:nvPr/>
         </p:nvSpPr>
@@ -14729,7 +14694,7 @@
       </p:sp>
       <p:sp>
         <p:nvSpPr>
-          <p:cNvPr id="16" name="TextBox 15"/>
+          <p:cNvPr id="15" name="TextBox 14"/>
           <p:cNvSpPr txBox="1"/>
           <p:nvPr/>
         </p:nvSpPr>
@@ -14764,7 +14729,7 @@
       </p:sp>
       <p:sp>
         <p:nvSpPr>
-          <p:cNvPr id="17" name="TextBox 16"/>
+          <p:cNvPr id="16" name="TextBox 15"/>
           <p:cNvSpPr txBox="1"/>
           <p:nvPr/>
         </p:nvSpPr>
@@ -14799,7 +14764,7 @@
       </p:sp>
       <p:sp>
         <p:nvSpPr>
-          <p:cNvPr id="18" name="Rectangle 17"/>
+          <p:cNvPr id="17" name="Rectangle 16"/>
           <p:cNvSpPr/>
           <p:nvPr/>
         </p:nvSpPr>
@@ -14845,7 +14810,7 @@
       </p:sp>
       <p:sp>
         <p:nvSpPr>
-          <p:cNvPr id="19" name="TextBox 18"/>
+          <p:cNvPr id="18" name="TextBox 17"/>
           <p:cNvSpPr txBox="1"/>
           <p:nvPr/>
         </p:nvSpPr>
@@ -14880,7 +14845,7 @@
       </p:sp>
       <p:sp>
         <p:nvSpPr>
-          <p:cNvPr id="20" name="TextBox 19"/>
+          <p:cNvPr id="19" name="TextBox 18"/>
           <p:cNvSpPr txBox="1"/>
           <p:nvPr/>
         </p:nvSpPr>
@@ -14915,7 +14880,7 @@
       </p:sp>
       <p:sp>
         <p:nvSpPr>
-          <p:cNvPr id="21" name="Rectangle 20"/>
+          <p:cNvPr id="20" name="Rectangle 19"/>
           <p:cNvSpPr/>
           <p:nvPr/>
         </p:nvSpPr>
@@ -14961,7 +14926,7 @@
       </p:sp>
       <p:sp>
         <p:nvSpPr>
-          <p:cNvPr id="22" name="TextBox 21"/>
+          <p:cNvPr id="21" name="TextBox 20"/>
           <p:cNvSpPr txBox="1"/>
           <p:nvPr/>
         </p:nvSpPr>
@@ -14996,7 +14961,7 @@
       </p:sp>
       <p:sp>
         <p:nvSpPr>
-          <p:cNvPr id="23" name="TextBox 22"/>
+          <p:cNvPr id="22" name="TextBox 21"/>
           <p:cNvSpPr txBox="1"/>
           <p:nvPr/>
         </p:nvSpPr>
@@ -15031,7 +14996,7 @@
       </p:sp>
       <p:sp>
         <p:nvSpPr>
-          <p:cNvPr id="24" name="Rectangle 23"/>
+          <p:cNvPr id="23" name="Rectangle 22"/>
           <p:cNvSpPr/>
           <p:nvPr/>
         </p:nvSpPr>
@@ -15077,7 +15042,7 @@
       </p:sp>
       <p:sp>
         <p:nvSpPr>
-          <p:cNvPr id="25" name="Rectangle 24"/>
+          <p:cNvPr id="24" name="Rectangle 23"/>
           <p:cNvSpPr/>
           <p:nvPr/>
         </p:nvSpPr>
@@ -15121,7 +15086,7 @@
       </p:sp>
       <p:sp>
         <p:nvSpPr>
-          <p:cNvPr id="26" name="TextBox 25"/>
+          <p:cNvPr id="25" name="TextBox 24"/>
           <p:cNvSpPr txBox="1"/>
           <p:nvPr/>
         </p:nvSpPr>
@@ -15156,7 +15121,7 @@
       </p:sp>
       <p:sp>
         <p:nvSpPr>
-          <p:cNvPr id="27" name="TextBox 26"/>
+          <p:cNvPr id="26" name="TextBox 25"/>
           <p:cNvSpPr txBox="1"/>
           <p:nvPr/>
         </p:nvSpPr>
@@ -15191,7 +15156,7 @@
       </p:sp>
       <p:sp>
         <p:nvSpPr>
-          <p:cNvPr id="28" name="Rectangle 27"/>
+          <p:cNvPr id="27" name="Rectangle 26"/>
           <p:cNvSpPr/>
           <p:nvPr/>
         </p:nvSpPr>
@@ -15237,7 +15202,7 @@
       </p:sp>
       <p:sp>
         <p:nvSpPr>
-          <p:cNvPr id="29" name="Rectangle 28"/>
+          <p:cNvPr id="28" name="Rectangle 27"/>
           <p:cNvSpPr/>
           <p:nvPr/>
         </p:nvSpPr>
@@ -15281,7 +15246,7 @@
       </p:sp>
       <p:sp>
         <p:nvSpPr>
-          <p:cNvPr id="30" name="TextBox 29"/>
+          <p:cNvPr id="29" name="TextBox 28"/>
           <p:cNvSpPr txBox="1"/>
           <p:nvPr/>
         </p:nvSpPr>
@@ -15316,7 +15281,7 @@
       </p:sp>
       <p:sp>
         <p:nvSpPr>
-          <p:cNvPr id="31" name="TextBox 30"/>
+          <p:cNvPr id="30" name="TextBox 29"/>
           <p:cNvSpPr txBox="1"/>
           <p:nvPr/>
         </p:nvSpPr>
@@ -15351,7 +15316,7 @@
       </p:sp>
       <p:sp>
         <p:nvSpPr>
-          <p:cNvPr id="32" name="Rectangle 31"/>
+          <p:cNvPr id="31" name="Rectangle 30"/>
           <p:cNvSpPr/>
           <p:nvPr/>
         </p:nvSpPr>
@@ -15397,7 +15362,7 @@
       </p:sp>
       <p:sp>
         <p:nvSpPr>
-          <p:cNvPr id="33" name="Rectangle 32"/>
+          <p:cNvPr id="32" name="Rectangle 31"/>
           <p:cNvSpPr/>
           <p:nvPr/>
         </p:nvSpPr>
@@ -15441,7 +15406,7 @@
       </p:sp>
       <p:sp>
         <p:nvSpPr>
-          <p:cNvPr id="34" name="TextBox 33"/>
+          <p:cNvPr id="33" name="TextBox 32"/>
           <p:cNvSpPr txBox="1"/>
           <p:nvPr/>
         </p:nvSpPr>
@@ -15476,7 +15441,7 @@
       </p:sp>
       <p:sp>
         <p:nvSpPr>
-          <p:cNvPr id="35" name="TextBox 34"/>
+          <p:cNvPr id="34" name="TextBox 33"/>
           <p:cNvSpPr txBox="1"/>
           <p:nvPr/>
         </p:nvSpPr>
@@ -15511,7 +15476,7 @@
       </p:sp>
       <p:sp>
         <p:nvSpPr>
-          <p:cNvPr id="36" name="TextBox 35"/>
+          <p:cNvPr id="35" name="TextBox 34"/>
           <p:cNvSpPr txBox="1"/>
           <p:nvPr/>
         </p:nvSpPr>
@@ -15546,7 +15511,7 @@
       </p:sp>
       <p:sp>
         <p:nvSpPr>
-          <p:cNvPr id="37" name="TextBox 36"/>
+          <p:cNvPr id="36" name="TextBox 35"/>
           <p:cNvSpPr txBox="1"/>
           <p:nvPr/>
         </p:nvSpPr>
@@ -15694,7 +15659,7 @@
         <p:spPr>
           <a:xfrm>
             <a:off x="502920" y="310896"/>
-            <a:ext cx="548640" cy="274320"/>
+            <a:ext cx="384048" cy="274320"/>
           </a:xfrm>
           <a:prstGeom prst="rect">
             <a:avLst/>
@@ -16649,7 +16614,7 @@
         <p:spPr>
           <a:xfrm>
             <a:off x="502920" y="310896"/>
-            <a:ext cx="548640" cy="274320"/>
+            <a:ext cx="384048" cy="274320"/>
           </a:xfrm>
           <a:prstGeom prst="rect">
             <a:avLst/>
@@ -17585,7 +17550,7 @@
         <p:spPr>
           <a:xfrm>
             <a:off x="502920" y="310896"/>
-            <a:ext cx="548640" cy="274320"/>
+            <a:ext cx="384048" cy="274320"/>
           </a:xfrm>
           <a:prstGeom prst="rect">
             <a:avLst/>
@@ -17676,7 +17641,7 @@
                 </a:solidFill>
                 <a:latin typeface="Archivo"/>
               </a:rPr>
-              <a:t>Neural operator — a learned map from terrain profile to signal</a:t>
+              <a:t>Neural operator — learning the terrain term</a:t>
             </a:r>
           </a:p>
         </p:txBody>
@@ -17711,7 +17676,7 @@
                 </a:solidFill>
                 <a:latin typeface="Archivo"/>
               </a:rPr>
-              <a:t>A 1-D Fourier neural operator. It does not trace rays and it does not assume a path-loss law; it learns the terrain term directly from 3,838 measured links.</a:t>
+              <a:t>A 1-D Fourier neural operator. It does not trace rays and it does not assume a path-loss law; it learns what terrain does to the signal from 3,838 measured links.</a:t>
             </a:r>
           </a:p>
         </p:txBody>

--- a/ARA_Challenge3.pptx
+++ b/ARA_Challenge3.pptx
@@ -19,6 +19,7 @@
     <p:sldId id="267" r:id="rId18"/>
     <p:sldId id="268" r:id="rId19"/>
     <p:sldId id="269" r:id="rId20"/>
+    <p:sldId id="270" r:id="rId21"/>
   </p:sldIdLst>
   <p:sldSz cx="12191695" cy="6858000" type="screen4x3"/>
   <p:notesSz cx="6858000" cy="9144000"/>
@@ -739,6 +740,210 @@
 </file>
 
 <file path=ppt/charts/chart4.xml><?xml version="1.0" encoding="utf-8"?>
+<c:chartSpace xmlns:c="http://schemas.openxmlformats.org/drawingml/2006/chart" xmlns:a="http://schemas.openxmlformats.org/drawingml/2006/main" xmlns:r="http://schemas.openxmlformats.org/officeDocument/2006/relationships">
+  <c:date1904 val="0"/>
+  <c:chart>
+    <c:autoTitleDeleted val="1"/>
+    <c:plotArea>
+      <c:barChart>
+        <c:barDir val="col"/>
+        <c:grouping val="clustered"/>
+        <c:ser>
+          <c:idx val="0"/>
+          <c:order val="0"/>
+          <c:tx>
+            <c:strRef>
+              <c:f>Sheet1!$B$1</c:f>
+              <c:strCache>
+                <c:ptCount val="1"/>
+                <c:pt idx="0">
+                  <c:v>RMSE</c:v>
+                </c:pt>
+              </c:strCache>
+            </c:strRef>
+          </c:tx>
+          <c:spPr>
+            <a:solidFill>
+              <a:srgbClr val="5B3A9B"/>
+            </a:solidFill>
+            <a:ln>
+              <a:noFill/>
+            </a:ln>
+          </c:spPr>
+          <c:cat>
+            <c:strRef>
+              <c:f>Sheet1!$A$2:$A$5</c:f>
+              <c:strCache>
+                <c:ptCount val="4"/>
+                <c:pt idx="0">
+                  <c:v>in sample</c:v>
+                </c:pt>
+                <c:pt idx="1">
+                  <c:v>random</c:v>
+                </c:pt>
+                <c:pt idx="2">
+                  <c:v>KMeans</c:v>
+                </c:pt>
+                <c:pt idx="3">
+                  <c:v>wedges</c:v>
+                </c:pt>
+              </c:strCache>
+            </c:strRef>
+          </c:cat>
+          <c:val>
+            <c:numRef>
+              <c:f>Sheet1!$B$2:$B$5</c:f>
+              <c:numCache>
+                <c:formatCode>General</c:formatCode>
+                <c:ptCount val="4"/>
+                <c:pt idx="0">
+                  <c:v>7.26</c:v>
+                </c:pt>
+                <c:pt idx="1">
+                  <c:v>7.52</c:v>
+                </c:pt>
+                <c:pt idx="2">
+                  <c:v>14.04</c:v>
+                </c:pt>
+                <c:pt idx="3">
+                  <c:v>11.47</c:v>
+                </c:pt>
+              </c:numCache>
+            </c:numRef>
+          </c:val>
+        </c:ser>
+        <c:dLbls>
+          <c:numFmt formatCode="0.00" sourceLinked="0"/>
+          <c:txPr>
+            <a:bodyPr/>
+            <a:lstStyle/>
+            <a:p>
+              <a:pPr>
+                <a:defRPr sz="850">
+                  <a:solidFill>
+                    <a:srgbClr val="16211C"/>
+                  </a:solidFill>
+                  <a:latin typeface="Consolas"/>
+                </a:defRPr>
+              </a:pPr>
+            </a:p>
+          </c:txPr>
+          <c:showLegendKey val="0"/>
+          <c:showVal val="1"/>
+          <c:showCatName val="0"/>
+          <c:showSerName val="0"/>
+          <c:showPercent val="0"/>
+          <c:showBubbleSize val="0"/>
+          <c:showLeaderLines val="1"/>
+        </c:dLbls>
+        <c:gapWidth val="60"/>
+        <c:axId val="-2068027336"/>
+        <c:axId val="-2113994440"/>
+      </c:barChart>
+      <c:catAx>
+        <c:axId val="-2068027336"/>
+        <c:scaling>
+          <c:orientation val="minMax"/>
+        </c:scaling>
+        <c:delete val="0"/>
+        <c:axPos val="b"/>
+        <c:majorTickMark val="none"/>
+        <c:minorTickMark val="none"/>
+        <c:tickLblPos val="nextTo"/>
+        <c:spPr>
+          <a:ln>
+            <a:solidFill>
+              <a:srgbClr val="C3CCBF"/>
+            </a:solidFill>
+          </a:ln>
+        </c:spPr>
+        <c:txPr>
+          <a:bodyPr/>
+          <a:lstStyle/>
+          <a:p>
+            <a:pPr>
+              <a:defRPr sz="850">
+                <a:solidFill>
+                  <a:srgbClr val="65726B"/>
+                </a:solidFill>
+                <a:latin typeface="Consolas"/>
+              </a:defRPr>
+            </a:pPr>
+          </a:p>
+        </c:txPr>
+        <c:crossAx val="-2113994440"/>
+        <c:crosses val="autoZero"/>
+        <c:auto val="1"/>
+        <c:lblAlgn val="ctr"/>
+        <c:lblOffset val="100"/>
+        <c:noMultiLvlLbl val="0"/>
+      </c:catAx>
+      <c:valAx>
+        <c:axId val="-2113994440"/>
+        <c:scaling/>
+        <c:delete val="0"/>
+        <c:axPos val="l"/>
+        <c:majorGridlines>
+          <c:spPr>
+            <a:ln w="6350">
+              <a:solidFill>
+                <a:srgbClr val="C3CCBF"/>
+              </a:solidFill>
+            </a:ln>
+          </c:spPr>
+        </c:majorGridlines>
+        <c:majorTickMark val="none"/>
+        <c:minorTickMark val="none"/>
+        <c:tickLblPos val="nextTo"/>
+        <c:spPr>
+          <a:ln>
+            <a:solidFill>
+              <a:srgbClr val="C3CCBF"/>
+            </a:solidFill>
+          </a:ln>
+        </c:spPr>
+        <c:txPr>
+          <a:bodyPr/>
+          <a:lstStyle/>
+          <a:p>
+            <a:pPr>
+              <a:defRPr sz="850">
+                <a:solidFill>
+                  <a:srgbClr val="65726B"/>
+                </a:solidFill>
+                <a:latin typeface="Consolas"/>
+              </a:defRPr>
+            </a:pPr>
+          </a:p>
+        </c:txPr>
+        <c:crossAx val="-2068027336"/>
+        <c:crosses val="autoZero"/>
+      </c:valAx>
+    </c:plotArea>
+    <c:dispBlanksAs val="gap"/>
+  </c:chart>
+  <c:txPr>
+    <a:bodyPr/>
+    <a:lstStyle/>
+    <a:p>
+      <a:pPr>
+        <a:defRPr sz="900">
+          <a:solidFill>
+            <a:srgbClr val="65726B"/>
+          </a:solidFill>
+          <a:latin typeface="Consolas"/>
+        </a:defRPr>
+      </a:pPr>
+      <a:endParaRPr lang="en-US"/>
+    </a:p>
+  </c:txPr>
+  <c:externalData r:id="rId1">
+    <c:autoUpdate val="0"/>
+  </c:externalData>
+</c:chartSpace>
+</file>
+
+<file path=ppt/charts/chart5.xml><?xml version="1.0" encoding="utf-8"?>
 <c:chartSpace xmlns:c="http://schemas.openxmlformats.org/drawingml/2006/chart" xmlns:a="http://schemas.openxmlformats.org/drawingml/2006/main" xmlns:r="http://schemas.openxmlformats.org/officeDocument/2006/relationships">
   <c:date1904 val="0"/>
   <c:chart>
@@ -6647,7 +6852,7 @@
                           </a:solidFill>
                           <a:latin typeface="Consolas"/>
                         </a:rPr>
-                        <a:t>—</a:t>
+                        <a:t>7.26</a:t>
                       </a:r>
                     </a:p>
                   </a:txBody>
@@ -6670,7 +6875,7 @@
                           </a:solidFill>
                           <a:latin typeface="Consolas"/>
                         </a:rPr>
-                        <a:t>—</a:t>
+                        <a:t>7.52</a:t>
                       </a:r>
                     </a:p>
                   </a:txBody>
@@ -6693,7 +6898,7 @@
                           </a:solidFill>
                           <a:latin typeface="Consolas"/>
                         </a:rPr>
-                        <a:t>—</a:t>
+                        <a:t>14.04</a:t>
                       </a:r>
                     </a:p>
                   </a:txBody>
@@ -6716,7 +6921,7 @@
                           </a:solidFill>
                           <a:latin typeface="Consolas"/>
                         </a:rPr>
-                        <a:t>—</a:t>
+                        <a:t>11.47</a:t>
                       </a:r>
                     </a:p>
                   </a:txBody>
@@ -6739,7 +6944,7 @@
                           </a:solidFill>
                           <a:latin typeface="Consolas"/>
                         </a:rPr>
-                        <a:t>not yet run</a:t>
+                        <a:t>yes</a:t>
                       </a:r>
                     </a:p>
                   </a:txBody>
@@ -7614,7 +7819,7 @@
                 </a:solidFill>
                 <a:latin typeface="Consolas"/>
               </a:rPr>
-              <a:t>THE TOOL · 1 OF 2</a:t>
+              <a:t>THE TOOL · 1 OF 3</a:t>
             </a:r>
           </a:p>
         </p:txBody>
@@ -8747,7 +8952,7 @@
                 </a:solidFill>
                 <a:latin typeface="Consolas"/>
               </a:rPr>
-              <a:t>THE TOOL · 2 OF 2</a:t>
+              <a:t>THE TOOL · 2 OF 3</a:t>
             </a:r>
           </a:p>
         </p:txBody>
@@ -9840,6 +10045,1503 @@
                 <a:latin typeface="Consolas"/>
               </a:rPr>
               <a:t>14</a:t>
+            </a:r>
+          </a:p>
+        </p:txBody>
+      </p:sp>
+      <p:sp>
+        <p:nvSpPr>
+          <p:cNvPr id="5" name="TextBox 4"/>
+          <p:cNvSpPr txBox="1"/>
+          <p:nvPr/>
+        </p:nvSpPr>
+        <p:spPr>
+          <a:xfrm>
+            <a:off x="960120" y="329184"/>
+            <a:ext cx="7315200" cy="274320"/>
+          </a:xfrm>
+          <a:prstGeom prst="rect">
+            <a:avLst/>
+          </a:prstGeom>
+          <a:noFill/>
+        </p:spPr>
+        <p:txBody>
+          <a:bodyPr wrap="square" anchor="t" lIns="0" rIns="0" tIns="0" bIns="0">
+            <a:spAutoFit/>
+          </a:bodyPr>
+          <a:lstStyle/>
+          <a:p>
+            <a:pPr algn="l"/>
+            <a:r>
+              <a:rPr sz="950" b="0" spc="160">
+                <a:solidFill>
+                  <a:srgbClr val="65726B"/>
+                </a:solidFill>
+                <a:latin typeface="Consolas"/>
+              </a:rPr>
+              <a:t>THE TOOL · 3 OF 3</a:t>
+            </a:r>
+          </a:p>
+        </p:txBody>
+      </p:sp>
+      <p:sp>
+        <p:nvSpPr>
+          <p:cNvPr id="6" name="TextBox 5"/>
+          <p:cNvSpPr txBox="1"/>
+          <p:nvPr/>
+        </p:nvSpPr>
+        <p:spPr>
+          <a:xfrm>
+            <a:off x="502920" y="621792"/>
+            <a:ext cx="11155680" cy="566928"/>
+          </a:xfrm>
+          <a:prstGeom prst="rect">
+            <a:avLst/>
+          </a:prstGeom>
+          <a:noFill/>
+        </p:spPr>
+        <p:txBody>
+          <a:bodyPr wrap="square" anchor="t" lIns="0" rIns="0" tIns="0" bIns="0">
+            <a:spAutoFit/>
+          </a:bodyPr>
+          <a:lstStyle/>
+          <a:p>
+            <a:pPr algn="l"/>
+            <a:r>
+              <a:rPr sz="2900" b="1">
+                <a:solidFill>
+                  <a:srgbClr val="16211C"/>
+                </a:solidFill>
+                <a:latin typeface="Archivo"/>
+              </a:rPr>
+              <a:t>Where an asset can actually be built</a:t>
+            </a:r>
+          </a:p>
+        </p:txBody>
+      </p:sp>
+      <p:sp>
+        <p:nvSpPr>
+          <p:cNvPr id="7" name="TextBox 6"/>
+          <p:cNvSpPr txBox="1"/>
+          <p:nvPr/>
+        </p:nvSpPr>
+        <p:spPr>
+          <a:xfrm>
+            <a:off x="502920" y="1152144"/>
+            <a:ext cx="11155680" cy="365760"/>
+          </a:xfrm>
+          <a:prstGeom prst="rect">
+            <a:avLst/>
+          </a:prstGeom>
+          <a:noFill/>
+        </p:spPr>
+        <p:txBody>
+          <a:bodyPr wrap="square" anchor="t" lIns="0" rIns="0" tIns="0" bIns="0">
+            <a:spAutoFit/>
+          </a:bodyPr>
+          <a:lstStyle/>
+          <a:p>
+            <a:pPr algn="l"/>
+            <a:r>
+              <a:rPr sz="1250" b="0">
+                <a:solidFill>
+                  <a:srgbClr val="3A4842"/>
+                </a:solidFill>
+                <a:latin typeface="Archivo"/>
+              </a:rPr>
+              <a:t>The measurements say where service is poor. They say nothing about whether you are allowed to build there, or could get power to it.</a:t>
+            </a:r>
+          </a:p>
+        </p:txBody>
+      </p:sp>
+      <p:sp>
+        <p:nvSpPr>
+          <p:cNvPr id="8" name="Rectangle 7"/>
+          <p:cNvSpPr/>
+          <p:nvPr/>
+        </p:nvSpPr>
+        <p:spPr>
+          <a:xfrm>
+            <a:off x="502920" y="1737360"/>
+            <a:ext cx="5394960" cy="1051560"/>
+          </a:xfrm>
+          <a:prstGeom prst="rect">
+            <a:avLst/>
+          </a:prstGeom>
+          <a:solidFill>
+            <a:srgbClr val="F1F4EF"/>
+          </a:solidFill>
+          <a:ln w="19050">
+            <a:solidFill>
+              <a:srgbClr val="8C1D40"/>
+            </a:solidFill>
+          </a:ln>
+          <a:effectLst/>
+        </p:spPr>
+        <p:style>
+          <a:lnRef idx="1">
+            <a:schemeClr val="accent1"/>
+          </a:lnRef>
+          <a:fillRef idx="3">
+            <a:schemeClr val="accent1"/>
+          </a:fillRef>
+          <a:effectRef idx="2">
+            <a:schemeClr val="accent1"/>
+          </a:effectRef>
+          <a:fontRef idx="minor">
+            <a:schemeClr val="lt1"/>
+          </a:fontRef>
+        </p:style>
+        <p:txBody>
+          <a:bodyPr rtlCol="0" anchor="ctr"/>
+          <a:lstStyle/>
+          <a:p>
+            <a:pPr algn="ctr"/>
+          </a:p>
+        </p:txBody>
+      </p:sp>
+      <p:sp>
+        <p:nvSpPr>
+          <p:cNvPr id="9" name="Rectangle 8"/>
+          <p:cNvSpPr/>
+          <p:nvPr/>
+        </p:nvSpPr>
+        <p:spPr>
+          <a:xfrm>
+            <a:off x="502920" y="1737360"/>
+            <a:ext cx="54864" cy="1051560"/>
+          </a:xfrm>
+          <a:prstGeom prst="rect">
+            <a:avLst/>
+          </a:prstGeom>
+          <a:solidFill>
+            <a:srgbClr val="8C1D40"/>
+          </a:solidFill>
+          <a:ln>
+            <a:noFill/>
+          </a:ln>
+          <a:effectLst/>
+        </p:spPr>
+        <p:style>
+          <a:lnRef idx="1">
+            <a:schemeClr val="accent1"/>
+          </a:lnRef>
+          <a:fillRef idx="3">
+            <a:schemeClr val="accent1"/>
+          </a:fillRef>
+          <a:effectRef idx="2">
+            <a:schemeClr val="accent1"/>
+          </a:effectRef>
+          <a:fontRef idx="minor">
+            <a:schemeClr val="lt1"/>
+          </a:fontRef>
+        </p:style>
+        <p:txBody>
+          <a:bodyPr rtlCol="0" anchor="ctr"/>
+          <a:lstStyle/>
+          <a:p>
+            <a:pPr algn="ctr"/>
+          </a:p>
+        </p:txBody>
+      </p:sp>
+      <p:sp>
+        <p:nvSpPr>
+          <p:cNvPr id="10" name="TextBox 9"/>
+          <p:cNvSpPr txBox="1"/>
+          <p:nvPr/>
+        </p:nvSpPr>
+        <p:spPr>
+          <a:xfrm>
+            <a:off x="777240" y="1874519"/>
+            <a:ext cx="4937760" cy="256032"/>
+          </a:xfrm>
+          <a:prstGeom prst="rect">
+            <a:avLst/>
+          </a:prstGeom>
+          <a:noFill/>
+        </p:spPr>
+        <p:txBody>
+          <a:bodyPr wrap="square" anchor="t" lIns="0" rIns="0" tIns="0" bIns="0">
+            <a:spAutoFit/>
+          </a:bodyPr>
+          <a:lstStyle/>
+          <a:p>
+            <a:pPr algn="l"/>
+            <a:r>
+              <a:rPr sz="1250" b="1">
+                <a:solidFill>
+                  <a:srgbClr val="8C1D40"/>
+                </a:solidFill>
+                <a:latin typeface="Archivo"/>
+              </a:rPr>
+              <a:t>The gap this closes</a:t>
+            </a:r>
+          </a:p>
+        </p:txBody>
+      </p:sp>
+      <p:sp>
+        <p:nvSpPr>
+          <p:cNvPr id="11" name="TextBox 10"/>
+          <p:cNvSpPr txBox="1"/>
+          <p:nvPr/>
+        </p:nvSpPr>
+        <p:spPr>
+          <a:xfrm>
+            <a:off x="777240" y="2194560"/>
+            <a:ext cx="4937760" cy="502920"/>
+          </a:xfrm>
+          <a:prstGeom prst="rect">
+            <a:avLst/>
+          </a:prstGeom>
+          <a:noFill/>
+        </p:spPr>
+        <p:txBody>
+          <a:bodyPr wrap="square" anchor="t" lIns="0" rIns="0" tIns="0" bIns="0">
+            <a:spAutoFit/>
+          </a:bodyPr>
+          <a:lstStyle/>
+          <a:p>
+            <a:pPr algn="l"/>
+            <a:r>
+              <a:rPr sz="1100" b="0">
+                <a:solidFill>
+                  <a:srgbClr val="3A4842"/>
+                </a:solidFill>
+                <a:latin typeface="Archivo"/>
+              </a:rPr>
+              <a:t>The optimiser had no feasible set. It would happily nominate the middle of a field, kilometres from the nearest pole or track.</a:t>
+            </a:r>
+          </a:p>
+        </p:txBody>
+      </p:sp>
+      <p:graphicFrame>
+        <p:nvGraphicFramePr>
+          <p:cNvPr id="12" name="Table 11"/>
+          <p:cNvGraphicFramePr>
+            <a:graphicFrameLocks noGrp="1"/>
+          </p:cNvGraphicFramePr>
+          <p:nvPr/>
+        </p:nvGraphicFramePr>
+        <p:xfrm>
+          <a:off x="502920" y="2971800"/>
+          <a:ext cx="5394960" cy="2011680"/>
+        </p:xfrm>
+        <a:graphic>
+          <a:graphicData uri="http://schemas.openxmlformats.org/drawingml/2006/table">
+            <a:tbl>
+              <a:tblPr firstRow="1" bandRow="1">
+                <a:tableStyleId>{5C22544A-7EE6-4342-B048-85BDC9FD1C3A}</a:tableStyleId>
+              </a:tblPr>
+              <a:tblGrid>
+                <a:gridCol w="1463040"/>
+                <a:gridCol w="2148840"/>
+                <a:gridCol w="914400"/>
+                <a:gridCol w="868680"/>
+              </a:tblGrid>
+              <a:tr h="335280">
+                <a:tc>
+                  <a:txBody>
+                    <a:bodyPr/>
+                    <a:lstStyle/>
+                    <a:p>
+                      <a:r>
+                        <a:rPr sz="850" b="1">
+                          <a:solidFill>
+                            <a:srgbClr val="65726B"/>
+                          </a:solidFill>
+                          <a:latin typeface="Consolas"/>
+                        </a:rPr>
+                        <a:t>layer</a:t>
+                      </a:r>
+                    </a:p>
+                  </a:txBody>
+                  <a:tcPr marL="54864" marR="54864" marT="27432" marB="27432">
+                    <a:solidFill>
+                      <a:srgbClr val="F1F4EF"/>
+                    </a:solidFill>
+                  </a:tcPr>
+                </a:tc>
+                <a:tc>
+                  <a:txBody>
+                    <a:bodyPr/>
+                    <a:lstStyle/>
+                    <a:p>
+                      <a:pPr algn="r"/>
+                      <a:r>
+                        <a:rPr sz="850" b="1">
+                          <a:solidFill>
+                            <a:srgbClr val="65726B"/>
+                          </a:solidFill>
+                          <a:latin typeface="Consolas"/>
+                        </a:rPr>
+                        <a:t>open-data proxy</a:t>
+                      </a:r>
+                    </a:p>
+                  </a:txBody>
+                  <a:tcPr marL="54864" marR="54864" marT="27432" marB="27432">
+                    <a:solidFill>
+                      <a:srgbClr val="F1F4EF"/>
+                    </a:solidFill>
+                  </a:tcPr>
+                </a:tc>
+                <a:tc>
+                  <a:txBody>
+                    <a:bodyPr/>
+                    <a:lstStyle/>
+                    <a:p>
+                      <a:pPr algn="r"/>
+                      <a:r>
+                        <a:rPr sz="850" b="1">
+                          <a:solidFill>
+                            <a:srgbClr val="65726B"/>
+                          </a:solidFill>
+                          <a:latin typeface="Consolas"/>
+                        </a:rPr>
+                        <a:t>features</a:t>
+                      </a:r>
+                    </a:p>
+                  </a:txBody>
+                  <a:tcPr marL="54864" marR="54864" marT="27432" marB="27432">
+                    <a:solidFill>
+                      <a:srgbClr val="F1F4EF"/>
+                    </a:solidFill>
+                  </a:tcPr>
+                </a:tc>
+                <a:tc>
+                  <a:txBody>
+                    <a:bodyPr/>
+                    <a:lstStyle/>
+                    <a:p>
+                      <a:pPr algn="r"/>
+                      <a:r>
+                        <a:rPr sz="850" b="1">
+                          <a:solidFill>
+                            <a:srgbClr val="65726B"/>
+                          </a:solidFill>
+                          <a:latin typeface="Consolas"/>
+                        </a:rPr>
+                        <a:t>default</a:t>
+                      </a:r>
+                    </a:p>
+                  </a:txBody>
+                  <a:tcPr marL="54864" marR="54864" marT="27432" marB="27432">
+                    <a:solidFill>
+                      <a:srgbClr val="F1F4EF"/>
+                    </a:solidFill>
+                  </a:tcPr>
+                </a:tc>
+              </a:tr>
+              <a:tr h="335280">
+                <a:tc>
+                  <a:txBody>
+                    <a:bodyPr/>
+                    <a:lstStyle/>
+                    <a:p>
+                      <a:r>
+                        <a:rPr sz="850" b="0">
+                          <a:solidFill>
+                            <a:srgbClr val="16211C"/>
+                          </a:solidFill>
+                          <a:latin typeface="Consolas"/>
+                        </a:rPr>
+                        <a:t>Grid power</a:t>
+                      </a:r>
+                    </a:p>
+                  </a:txBody>
+                  <a:tcPr marL="54864" marR="54864" marT="27432" marB="27432">
+                    <a:solidFill>
+                      <a:srgbClr val="FFFFFF"/>
+                    </a:solidFill>
+                  </a:tcPr>
+                </a:tc>
+                <a:tc>
+                  <a:txBody>
+                    <a:bodyPr/>
+                    <a:lstStyle/>
+                    <a:p>
+                      <a:pPr algn="r"/>
+                      <a:r>
+                        <a:rPr sz="850" b="0">
+                          <a:solidFill>
+                            <a:srgbClr val="16211C"/>
+                          </a:solidFill>
+                          <a:latin typeface="Consolas"/>
+                        </a:rPr>
+                        <a:t>tower, pole, line, substation</a:t>
+                      </a:r>
+                    </a:p>
+                  </a:txBody>
+                  <a:tcPr marL="54864" marR="54864" marT="27432" marB="27432">
+                    <a:solidFill>
+                      <a:srgbClr val="FFFFFF"/>
+                    </a:solidFill>
+                  </a:tcPr>
+                </a:tc>
+                <a:tc>
+                  <a:txBody>
+                    <a:bodyPr/>
+                    <a:lstStyle/>
+                    <a:p>
+                      <a:pPr algn="r"/>
+                      <a:r>
+                        <a:rPr sz="850" b="0">
+                          <a:solidFill>
+                            <a:srgbClr val="16211C"/>
+                          </a:solidFill>
+                          <a:latin typeface="Consolas"/>
+                        </a:rPr>
+                        <a:t>1,057</a:t>
+                      </a:r>
+                    </a:p>
+                  </a:txBody>
+                  <a:tcPr marL="54864" marR="54864" marT="27432" marB="27432">
+                    <a:solidFill>
+                      <a:srgbClr val="FFFFFF"/>
+                    </a:solidFill>
+                  </a:tcPr>
+                </a:tc>
+                <a:tc>
+                  <a:txBody>
+                    <a:bodyPr/>
+                    <a:lstStyle/>
+                    <a:p>
+                      <a:pPr algn="r"/>
+                      <a:r>
+                        <a:rPr sz="850" b="0">
+                          <a:solidFill>
+                            <a:srgbClr val="16211C"/>
+                          </a:solidFill>
+                          <a:latin typeface="Consolas"/>
+                        </a:rPr>
+                        <a:t>≤ 2 km</a:t>
+                      </a:r>
+                    </a:p>
+                  </a:txBody>
+                  <a:tcPr marL="54864" marR="54864" marT="27432" marB="27432">
+                    <a:solidFill>
+                      <a:srgbClr val="FFFFFF"/>
+                    </a:solidFill>
+                  </a:tcPr>
+                </a:tc>
+              </a:tr>
+              <a:tr h="335280">
+                <a:tc>
+                  <a:txBody>
+                    <a:bodyPr/>
+                    <a:lstStyle/>
+                    <a:p>
+                      <a:r>
+                        <a:rPr sz="850" b="0">
+                          <a:solidFill>
+                            <a:srgbClr val="16211C"/>
+                          </a:solidFill>
+                          <a:latin typeface="Consolas"/>
+                        </a:rPr>
+                        <a:t>Land access</a:t>
+                      </a:r>
+                    </a:p>
+                  </a:txBody>
+                  <a:tcPr marL="54864" marR="54864" marT="27432" marB="27432">
+                    <a:solidFill>
+                      <a:srgbClr val="FFFFFF"/>
+                    </a:solidFill>
+                  </a:tcPr>
+                </a:tc>
+                <a:tc>
+                  <a:txBody>
+                    <a:bodyPr/>
+                    <a:lstStyle/>
+                    <a:p>
+                      <a:pPr algn="r"/>
+                      <a:r>
+                        <a:rPr sz="850" b="0">
+                          <a:solidFill>
+                            <a:srgbClr val="16211C"/>
+                          </a:solidFill>
+                          <a:latin typeface="Consolas"/>
+                        </a:rPr>
+                        <a:t>any mapped highway</a:t>
+                      </a:r>
+                    </a:p>
+                  </a:txBody>
+                  <a:tcPr marL="54864" marR="54864" marT="27432" marB="27432">
+                    <a:solidFill>
+                      <a:srgbClr val="FFFFFF"/>
+                    </a:solidFill>
+                  </a:tcPr>
+                </a:tc>
+                <a:tc>
+                  <a:txBody>
+                    <a:bodyPr/>
+                    <a:lstStyle/>
+                    <a:p>
+                      <a:pPr algn="r"/>
+                      <a:r>
+                        <a:rPr sz="850" b="0">
+                          <a:solidFill>
+                            <a:srgbClr val="16211C"/>
+                          </a:solidFill>
+                          <a:latin typeface="Consolas"/>
+                        </a:rPr>
+                        <a:t>81,471</a:t>
+                      </a:r>
+                    </a:p>
+                  </a:txBody>
+                  <a:tcPr marL="54864" marR="54864" marT="27432" marB="27432">
+                    <a:solidFill>
+                      <a:srgbClr val="FFFFFF"/>
+                    </a:solidFill>
+                  </a:tcPr>
+                </a:tc>
+                <a:tc>
+                  <a:txBody>
+                    <a:bodyPr/>
+                    <a:lstStyle/>
+                    <a:p>
+                      <a:pPr algn="r"/>
+                      <a:r>
+                        <a:rPr sz="850" b="0">
+                          <a:solidFill>
+                            <a:srgbClr val="16211C"/>
+                          </a:solidFill>
+                          <a:latin typeface="Consolas"/>
+                        </a:rPr>
+                        <a:t>≤ 250 m</a:t>
+                      </a:r>
+                    </a:p>
+                  </a:txBody>
+                  <a:tcPr marL="54864" marR="54864" marT="27432" marB="27432">
+                    <a:solidFill>
+                      <a:srgbClr val="FFFFFF"/>
+                    </a:solidFill>
+                  </a:tcPr>
+                </a:tc>
+              </a:tr>
+              <a:tr h="335280">
+                <a:tc>
+                  <a:txBody>
+                    <a:bodyPr/>
+                    <a:lstStyle/>
+                    <a:p>
+                      <a:r>
+                        <a:rPr sz="850" b="0">
+                          <a:solidFill>
+                            <a:srgbClr val="16211C"/>
+                          </a:solidFill>
+                          <a:latin typeface="Consolas"/>
+                        </a:rPr>
+                        <a:t>Existing structure</a:t>
+                      </a:r>
+                    </a:p>
+                  </a:txBody>
+                  <a:tcPr marL="54864" marR="54864" marT="27432" marB="27432">
+                    <a:solidFill>
+                      <a:srgbClr val="FFFFFF"/>
+                    </a:solidFill>
+                  </a:tcPr>
+                </a:tc>
+                <a:tc>
+                  <a:txBody>
+                    <a:bodyPr/>
+                    <a:lstStyle/>
+                    <a:p>
+                      <a:pPr algn="r"/>
+                      <a:r>
+                        <a:rPr sz="850" b="0">
+                          <a:solidFill>
+                            <a:srgbClr val="16211C"/>
+                          </a:solidFill>
+                          <a:latin typeface="Consolas"/>
+                        </a:rPr>
+                        <a:t>building, silo, mast</a:t>
+                      </a:r>
+                    </a:p>
+                  </a:txBody>
+                  <a:tcPr marL="54864" marR="54864" marT="27432" marB="27432">
+                    <a:solidFill>
+                      <a:srgbClr val="FFFFFF"/>
+                    </a:solidFill>
+                  </a:tcPr>
+                </a:tc>
+                <a:tc>
+                  <a:txBody>
+                    <a:bodyPr/>
+                    <a:lstStyle/>
+                    <a:p>
+                      <a:pPr algn="r"/>
+                      <a:r>
+                        <a:rPr sz="850" b="0">
+                          <a:solidFill>
+                            <a:srgbClr val="16211C"/>
+                          </a:solidFill>
+                          <a:latin typeface="Consolas"/>
+                        </a:rPr>
+                        <a:t>109,018</a:t>
+                      </a:r>
+                    </a:p>
+                  </a:txBody>
+                  <a:tcPr marL="54864" marR="54864" marT="27432" marB="27432">
+                    <a:solidFill>
+                      <a:srgbClr val="FFFFFF"/>
+                    </a:solidFill>
+                  </a:tcPr>
+                </a:tc>
+                <a:tc>
+                  <a:txBody>
+                    <a:bodyPr/>
+                    <a:lstStyle/>
+                    <a:p>
+                      <a:pPr algn="r"/>
+                      <a:r>
+                        <a:rPr sz="850" b="0">
+                          <a:solidFill>
+                            <a:srgbClr val="16211C"/>
+                          </a:solidFill>
+                          <a:latin typeface="Consolas"/>
+                        </a:rPr>
+                        <a:t>≤ 500 m</a:t>
+                      </a:r>
+                    </a:p>
+                  </a:txBody>
+                  <a:tcPr marL="54864" marR="54864" marT="27432" marB="27432">
+                    <a:solidFill>
+                      <a:srgbClr val="FFFFFF"/>
+                    </a:solidFill>
+                  </a:tcPr>
+                </a:tc>
+              </a:tr>
+              <a:tr h="335280">
+                <a:tc>
+                  <a:txBody>
+                    <a:bodyPr/>
+                    <a:lstStyle/>
+                    <a:p>
+                      <a:r>
+                        <a:rPr sz="850" b="0">
+                          <a:solidFill>
+                            <a:srgbClr val="16211C"/>
+                          </a:solidFill>
+                          <a:latin typeface="Consolas"/>
+                        </a:rPr>
+                        <a:t>Backhaul</a:t>
+                      </a:r>
+                    </a:p>
+                  </a:txBody>
+                  <a:tcPr marL="54864" marR="54864" marT="27432" marB="27432">
+                    <a:solidFill>
+                      <a:srgbClr val="FFFFFF"/>
+                    </a:solidFill>
+                  </a:tcPr>
+                </a:tc>
+                <a:tc>
+                  <a:txBody>
+                    <a:bodyPr/>
+                    <a:lstStyle/>
+                    <a:p>
+                      <a:pPr algn="r"/>
+                      <a:r>
+                        <a:rPr sz="850" b="0">
+                          <a:solidFill>
+                            <a:srgbClr val="16211C"/>
+                          </a:solidFill>
+                          <a:latin typeface="Consolas"/>
+                        </a:rPr>
+                        <a:t>distance to a base station</a:t>
+                      </a:r>
+                    </a:p>
+                  </a:txBody>
+                  <a:tcPr marL="54864" marR="54864" marT="27432" marB="27432">
+                    <a:solidFill>
+                      <a:srgbClr val="FFFFFF"/>
+                    </a:solidFill>
+                  </a:tcPr>
+                </a:tc>
+                <a:tc>
+                  <a:txBody>
+                    <a:bodyPr/>
+                    <a:lstStyle/>
+                    <a:p>
+                      <a:pPr algn="r"/>
+                      <a:r>
+                        <a:rPr sz="850" b="0">
+                          <a:solidFill>
+                            <a:srgbClr val="16211C"/>
+                          </a:solidFill>
+                          <a:latin typeface="Consolas"/>
+                        </a:rPr>
+                        <a:t>4</a:t>
+                      </a:r>
+                    </a:p>
+                  </a:txBody>
+                  <a:tcPr marL="54864" marR="54864" marT="27432" marB="27432">
+                    <a:solidFill>
+                      <a:srgbClr val="FFFFFF"/>
+                    </a:solidFill>
+                  </a:tcPr>
+                </a:tc>
+                <a:tc>
+                  <a:txBody>
+                    <a:bodyPr/>
+                    <a:lstStyle/>
+                    <a:p>
+                      <a:pPr algn="r"/>
+                      <a:r>
+                        <a:rPr sz="850" b="0">
+                          <a:solidFill>
+                            <a:srgbClr val="16211C"/>
+                          </a:solidFill>
+                          <a:latin typeface="Consolas"/>
+                        </a:rPr>
+                        <a:t>≤ 8 km</a:t>
+                      </a:r>
+                    </a:p>
+                  </a:txBody>
+                  <a:tcPr marL="54864" marR="54864" marT="27432" marB="27432">
+                    <a:solidFill>
+                      <a:srgbClr val="FFFFFF"/>
+                    </a:solidFill>
+                  </a:tcPr>
+                </a:tc>
+              </a:tr>
+              <a:tr h="335280">
+                <a:tc>
+                  <a:txBody>
+                    <a:bodyPr/>
+                    <a:lstStyle/>
+                    <a:p>
+                      <a:r>
+                        <a:rPr sz="850" b="0">
+                          <a:solidFill>
+                            <a:srgbClr val="16211C"/>
+                          </a:solidFill>
+                          <a:latin typeface="Consolas"/>
+                        </a:rPr>
+                        <a:t>Water (exclusion)</a:t>
+                      </a:r>
+                    </a:p>
+                  </a:txBody>
+                  <a:tcPr marL="54864" marR="54864" marT="27432" marB="27432">
+                    <a:solidFill>
+                      <a:srgbClr val="FFFFFF"/>
+                    </a:solidFill>
+                  </a:tcPr>
+                </a:tc>
+                <a:tc>
+                  <a:txBody>
+                    <a:bodyPr/>
+                    <a:lstStyle/>
+                    <a:p>
+                      <a:pPr algn="r"/>
+                      <a:r>
+                        <a:rPr sz="850" b="0">
+                          <a:solidFill>
+                            <a:srgbClr val="16211C"/>
+                          </a:solidFill>
+                          <a:latin typeface="Consolas"/>
+                        </a:rPr>
+                        <a:t>mapped water or riverbank</a:t>
+                      </a:r>
+                    </a:p>
+                  </a:txBody>
+                  <a:tcPr marL="54864" marR="54864" marT="27432" marB="27432">
+                    <a:solidFill>
+                      <a:srgbClr val="FFFFFF"/>
+                    </a:solidFill>
+                  </a:tcPr>
+                </a:tc>
+                <a:tc>
+                  <a:txBody>
+                    <a:bodyPr/>
+                    <a:lstStyle/>
+                    <a:p>
+                      <a:pPr algn="r"/>
+                      <a:r>
+                        <a:rPr sz="850" b="0">
+                          <a:solidFill>
+                            <a:srgbClr val="16211C"/>
+                          </a:solidFill>
+                          <a:latin typeface="Consolas"/>
+                        </a:rPr>
+                        <a:t>4,834</a:t>
+                      </a:r>
+                    </a:p>
+                  </a:txBody>
+                  <a:tcPr marL="54864" marR="54864" marT="27432" marB="27432">
+                    <a:solidFill>
+                      <a:srgbClr val="FFFFFF"/>
+                    </a:solidFill>
+                  </a:tcPr>
+                </a:tc>
+                <a:tc>
+                  <a:txBody>
+                    <a:bodyPr/>
+                    <a:lstStyle/>
+                    <a:p>
+                      <a:pPr algn="r"/>
+                      <a:r>
+                        <a:rPr sz="850" b="0">
+                          <a:solidFill>
+                            <a:srgbClr val="16211C"/>
+                          </a:solidFill>
+                          <a:latin typeface="Consolas"/>
+                        </a:rPr>
+                        <a:t>≥ 50 m</a:t>
+                      </a:r>
+                    </a:p>
+                  </a:txBody>
+                  <a:tcPr marL="54864" marR="54864" marT="27432" marB="27432">
+                    <a:solidFill>
+                      <a:srgbClr val="FFFFFF"/>
+                    </a:solidFill>
+                  </a:tcPr>
+                </a:tc>
+              </a:tr>
+            </a:tbl>
+          </a:graphicData>
+        </a:graphic>
+      </p:graphicFrame>
+      <p:sp>
+        <p:nvSpPr>
+          <p:cNvPr id="13" name="TextBox 12"/>
+          <p:cNvSpPr txBox="1"/>
+          <p:nvPr/>
+        </p:nvSpPr>
+        <p:spPr>
+          <a:xfrm>
+            <a:off x="6217920" y="1737360"/>
+            <a:ext cx="5440680" cy="2286000"/>
+          </a:xfrm>
+          <a:prstGeom prst="rect">
+            <a:avLst/>
+          </a:prstGeom>
+          <a:noFill/>
+        </p:spPr>
+        <p:txBody>
+          <a:bodyPr wrap="square" lIns="0" rIns="0" tIns="0" bIns="0">
+            <a:spAutoFit/>
+          </a:bodyPr>
+          <a:lstStyle/>
+          <a:p>
+            <a:pPr>
+              <a:spcAft>
+                <a:spcPts val="600"/>
+              </a:spcAft>
+            </a:pPr>
+            <a:r>
+              <a:rPr sz="1100" b="1">
+                <a:solidFill>
+                  <a:srgbClr val="16211C"/>
+                </a:solidFill>
+                <a:latin typeface="Archivo"/>
+              </a:rPr>
+              <a:t>— A post-processor, not a second planner.</a:t>
+            </a:r>
+          </a:p>
+          <a:p>
+            <a:pPr>
+              <a:spcAft>
+                <a:spcPts val="600"/>
+              </a:spcAft>
+            </a:pPr>
+            <a:r>
+              <a:rPr sz="1100" b="0">
+                <a:solidFill>
+                  <a:srgbClr val="3A4842"/>
+                </a:solidFill>
+                <a:latin typeface="Archivo"/>
+              </a:rPr>
+              <a:t>— It reads the built page, computes each candidate's distance to every layer, and injects a constraints panel. It inherits the simulators, the criteria and the map without knowing anything about them.</a:t>
+            </a:r>
+          </a:p>
+          <a:p>
+            <a:pPr>
+              <a:spcAft>
+                <a:spcPts val="600"/>
+              </a:spcAft>
+            </a:pPr>
+            <a:r>
+              <a:rPr sz="1100" b="1">
+                <a:solidFill>
+                  <a:srgbClr val="16211C"/>
+                </a:solidFill>
+                <a:latin typeface="Archivo"/>
+              </a:rPr>
+              <a:t>— Five sliders shrink the feasible set, live.</a:t>
+            </a:r>
+          </a:p>
+          <a:p>
+            <a:pPr>
+              <a:spcAft>
+                <a:spcPts val="600"/>
+              </a:spcAft>
+            </a:pPr>
+            <a:r>
+              <a:rPr sz="1100" b="0">
+                <a:solidFill>
+                  <a:srgbClr val="3A4842"/>
+                </a:solidFill>
+                <a:latin typeface="Archivo"/>
+              </a:rPr>
+              <a:t>— The optimiser re-solves over what survives, and the page reports the count that remains.</a:t>
+            </a:r>
+          </a:p>
+        </p:txBody>
+      </p:sp>
+      <p:sp>
+        <p:nvSpPr>
+          <p:cNvPr id="14" name="Rectangle 13"/>
+          <p:cNvSpPr/>
+          <p:nvPr/>
+        </p:nvSpPr>
+        <p:spPr>
+          <a:xfrm>
+            <a:off x="6217920" y="4160520"/>
+            <a:ext cx="2651760" cy="932688"/>
+          </a:xfrm>
+          <a:prstGeom prst="rect">
+            <a:avLst/>
+          </a:prstGeom>
+          <a:solidFill>
+            <a:srgbClr val="F1F4EF"/>
+          </a:solidFill>
+          <a:ln w="12700">
+            <a:solidFill>
+              <a:srgbClr val="C3CCBF"/>
+            </a:solidFill>
+          </a:ln>
+          <a:effectLst/>
+        </p:spPr>
+        <p:style>
+          <a:lnRef idx="1">
+            <a:schemeClr val="accent1"/>
+          </a:lnRef>
+          <a:fillRef idx="3">
+            <a:schemeClr val="accent1"/>
+          </a:fillRef>
+          <a:effectRef idx="2">
+            <a:schemeClr val="accent1"/>
+          </a:effectRef>
+          <a:fontRef idx="minor">
+            <a:schemeClr val="lt1"/>
+          </a:fontRef>
+        </p:style>
+        <p:txBody>
+          <a:bodyPr rtlCol="0" anchor="ctr"/>
+          <a:lstStyle/>
+          <a:p>
+            <a:pPr algn="ctr"/>
+          </a:p>
+        </p:txBody>
+      </p:sp>
+      <p:sp>
+        <p:nvSpPr>
+          <p:cNvPr id="15" name="TextBox 14"/>
+          <p:cNvSpPr txBox="1"/>
+          <p:nvPr/>
+        </p:nvSpPr>
+        <p:spPr>
+          <a:xfrm>
+            <a:off x="6345936" y="4251960"/>
+            <a:ext cx="2395728" cy="146304"/>
+          </a:xfrm>
+          <a:prstGeom prst="rect">
+            <a:avLst/>
+          </a:prstGeom>
+          <a:noFill/>
+        </p:spPr>
+        <p:txBody>
+          <a:bodyPr wrap="square" anchor="t" lIns="0" rIns="0" tIns="0" bIns="0">
+            <a:spAutoFit/>
+          </a:bodyPr>
+          <a:lstStyle/>
+          <a:p>
+            <a:pPr algn="l"/>
+            <a:r>
+              <a:rPr sz="800" b="0" spc="120">
+                <a:solidFill>
+                  <a:srgbClr val="65726B"/>
+                </a:solidFill>
+                <a:latin typeface="Consolas"/>
+              </a:rPr>
+              <a:t>IT REPORTS</a:t>
+            </a:r>
+          </a:p>
+        </p:txBody>
+      </p:sp>
+      <p:sp>
+        <p:nvSpPr>
+          <p:cNvPr id="16" name="TextBox 15"/>
+          <p:cNvSpPr txBox="1"/>
+          <p:nvPr/>
+        </p:nvSpPr>
+        <p:spPr>
+          <a:xfrm>
+            <a:off x="6345936" y="4416552"/>
+            <a:ext cx="2395728" cy="384048"/>
+          </a:xfrm>
+          <a:prstGeom prst="rect">
+            <a:avLst/>
+          </a:prstGeom>
+          <a:noFill/>
+        </p:spPr>
+        <p:txBody>
+          <a:bodyPr wrap="square" anchor="t" lIns="0" rIns="0" tIns="0" bIns="0">
+            <a:spAutoFit/>
+          </a:bodyPr>
+          <a:lstStyle/>
+          <a:p>
+            <a:pPr algn="l"/>
+            <a:r>
+              <a:rPr sz="2000" b="1">
+                <a:solidFill>
+                  <a:srgbClr val="0F6E70"/>
+                </a:solidFill>
+                <a:latin typeface="Archivo"/>
+              </a:rPr>
+              <a:t>the move</a:t>
+            </a:r>
+          </a:p>
+        </p:txBody>
+      </p:sp>
+      <p:sp>
+        <p:nvSpPr>
+          <p:cNvPr id="17" name="TextBox 16"/>
+          <p:cNvSpPr txBox="1"/>
+          <p:nvPr/>
+        </p:nvSpPr>
+        <p:spPr>
+          <a:xfrm>
+            <a:off x="6345936" y="4818888"/>
+            <a:ext cx="2395728" cy="219456"/>
+          </a:xfrm>
+          <a:prstGeom prst="rect">
+            <a:avLst/>
+          </a:prstGeom>
+          <a:noFill/>
+        </p:spPr>
+        <p:txBody>
+          <a:bodyPr wrap="square" anchor="t" lIns="0" rIns="0" tIns="0" bIns="0">
+            <a:spAutoFit/>
+          </a:bodyPr>
+          <a:lstStyle/>
+          <a:p>
+            <a:pPr algn="l"/>
+            <a:r>
+              <a:rPr sz="850" b="0">
+                <a:solidFill>
+                  <a:srgbClr val="65726B"/>
+                </a:solidFill>
+                <a:latin typeface="Consolas"/>
+              </a:rPr>
+              <a:t>metres from the free optimum</a:t>
+            </a:r>
+          </a:p>
+        </p:txBody>
+      </p:sp>
+      <p:sp>
+        <p:nvSpPr>
+          <p:cNvPr id="18" name="Rectangle 17"/>
+          <p:cNvSpPr/>
+          <p:nvPr/>
+        </p:nvSpPr>
+        <p:spPr>
+          <a:xfrm>
+            <a:off x="9006840" y="4160520"/>
+            <a:ext cx="2651760" cy="932688"/>
+          </a:xfrm>
+          <a:prstGeom prst="rect">
+            <a:avLst/>
+          </a:prstGeom>
+          <a:solidFill>
+            <a:srgbClr val="F1F4EF"/>
+          </a:solidFill>
+          <a:ln w="12700">
+            <a:solidFill>
+              <a:srgbClr val="C3CCBF"/>
+            </a:solidFill>
+          </a:ln>
+          <a:effectLst/>
+        </p:spPr>
+        <p:style>
+          <a:lnRef idx="1">
+            <a:schemeClr val="accent1"/>
+          </a:lnRef>
+          <a:fillRef idx="3">
+            <a:schemeClr val="accent1"/>
+          </a:fillRef>
+          <a:effectRef idx="2">
+            <a:schemeClr val="accent1"/>
+          </a:effectRef>
+          <a:fontRef idx="minor">
+            <a:schemeClr val="lt1"/>
+          </a:fontRef>
+        </p:style>
+        <p:txBody>
+          <a:bodyPr rtlCol="0" anchor="ctr"/>
+          <a:lstStyle/>
+          <a:p>
+            <a:pPr algn="ctr"/>
+          </a:p>
+        </p:txBody>
+      </p:sp>
+      <p:sp>
+        <p:nvSpPr>
+          <p:cNvPr id="19" name="TextBox 18"/>
+          <p:cNvSpPr txBox="1"/>
+          <p:nvPr/>
+        </p:nvSpPr>
+        <p:spPr>
+          <a:xfrm>
+            <a:off x="9134856" y="4251960"/>
+            <a:ext cx="2395728" cy="146304"/>
+          </a:xfrm>
+          <a:prstGeom prst="rect">
+            <a:avLst/>
+          </a:prstGeom>
+          <a:noFill/>
+        </p:spPr>
+        <p:txBody>
+          <a:bodyPr wrap="square" anchor="t" lIns="0" rIns="0" tIns="0" bIns="0">
+            <a:spAutoFit/>
+          </a:bodyPr>
+          <a:lstStyle/>
+          <a:p>
+            <a:pPr algn="l"/>
+            <a:r>
+              <a:rPr sz="800" b="0" spc="120">
+                <a:solidFill>
+                  <a:srgbClr val="65726B"/>
+                </a:solidFill>
+                <a:latin typeface="Consolas"/>
+              </a:rPr>
+              <a:t>AND</a:t>
+            </a:r>
+          </a:p>
+        </p:txBody>
+      </p:sp>
+      <p:sp>
+        <p:nvSpPr>
+          <p:cNvPr id="20" name="TextBox 19"/>
+          <p:cNvSpPr txBox="1"/>
+          <p:nvPr/>
+        </p:nvSpPr>
+        <p:spPr>
+          <a:xfrm>
+            <a:off x="9134856" y="4416552"/>
+            <a:ext cx="2395728" cy="384048"/>
+          </a:xfrm>
+          <a:prstGeom prst="rect">
+            <a:avLst/>
+          </a:prstGeom>
+          <a:noFill/>
+        </p:spPr>
+        <p:txBody>
+          <a:bodyPr wrap="square" anchor="t" lIns="0" rIns="0" tIns="0" bIns="0">
+            <a:spAutoFit/>
+          </a:bodyPr>
+          <a:lstStyle/>
+          <a:p>
+            <a:pPr algn="l"/>
+            <a:r>
+              <a:rPr sz="2000" b="1">
+                <a:solidFill>
+                  <a:srgbClr val="0F6E70"/>
+                </a:solidFill>
+                <a:latin typeface="Archivo"/>
+              </a:rPr>
+              <a:t>the cost</a:t>
+            </a:r>
+          </a:p>
+        </p:txBody>
+      </p:sp>
+      <p:sp>
+        <p:nvSpPr>
+          <p:cNvPr id="21" name="TextBox 20"/>
+          <p:cNvSpPr txBox="1"/>
+          <p:nvPr/>
+        </p:nvSpPr>
+        <p:spPr>
+          <a:xfrm>
+            <a:off x="9134856" y="4818888"/>
+            <a:ext cx="2395728" cy="219456"/>
+          </a:xfrm>
+          <a:prstGeom prst="rect">
+            <a:avLst/>
+          </a:prstGeom>
+          <a:noFill/>
+        </p:spPr>
+        <p:txBody>
+          <a:bodyPr wrap="square" anchor="t" lIns="0" rIns="0" tIns="0" bIns="0">
+            <a:spAutoFit/>
+          </a:bodyPr>
+          <a:lstStyle/>
+          <a:p>
+            <a:pPr algn="l"/>
+            <a:r>
+              <a:rPr sz="850" b="0">
+                <a:solidFill>
+                  <a:srgbClr val="65726B"/>
+                </a:solidFill>
+                <a:latin typeface="Consolas"/>
+              </a:rPr>
+              <a:t>score given up to comply</a:t>
+            </a:r>
+          </a:p>
+        </p:txBody>
+      </p:sp>
+      <p:sp>
+        <p:nvSpPr>
+          <p:cNvPr id="22" name="Rectangle 21"/>
+          <p:cNvSpPr/>
+          <p:nvPr/>
+        </p:nvSpPr>
+        <p:spPr>
+          <a:xfrm>
+            <a:off x="502920" y="5212080"/>
+            <a:ext cx="11155680" cy="914400"/>
+          </a:xfrm>
+          <a:prstGeom prst="rect">
+            <a:avLst/>
+          </a:prstGeom>
+          <a:solidFill>
+            <a:srgbClr val="F1F4EF"/>
+          </a:solidFill>
+          <a:ln w="12700">
+            <a:solidFill>
+              <a:srgbClr val="C3CCBF"/>
+            </a:solidFill>
+          </a:ln>
+          <a:effectLst/>
+        </p:spPr>
+        <p:style>
+          <a:lnRef idx="1">
+            <a:schemeClr val="accent1"/>
+          </a:lnRef>
+          <a:fillRef idx="3">
+            <a:schemeClr val="accent1"/>
+          </a:fillRef>
+          <a:effectRef idx="2">
+            <a:schemeClr val="accent1"/>
+          </a:effectRef>
+          <a:fontRef idx="minor">
+            <a:schemeClr val="lt1"/>
+          </a:fontRef>
+        </p:style>
+        <p:txBody>
+          <a:bodyPr rtlCol="0" anchor="ctr"/>
+          <a:lstStyle/>
+          <a:p>
+            <a:pPr algn="ctr"/>
+          </a:p>
+        </p:txBody>
+      </p:sp>
+      <p:sp>
+        <p:nvSpPr>
+          <p:cNvPr id="23" name="TextBox 22"/>
+          <p:cNvSpPr txBox="1"/>
+          <p:nvPr/>
+        </p:nvSpPr>
+        <p:spPr>
+          <a:xfrm>
+            <a:off x="777240" y="5349240"/>
+            <a:ext cx="10607040" cy="685800"/>
+          </a:xfrm>
+          <a:prstGeom prst="rect">
+            <a:avLst/>
+          </a:prstGeom>
+          <a:noFill/>
+        </p:spPr>
+        <p:txBody>
+          <a:bodyPr wrap="square" anchor="t" lIns="0" rIns="0" tIns="0" bIns="0">
+            <a:spAutoFit/>
+          </a:bodyPr>
+          <a:lstStyle/>
+          <a:p>
+            <a:pPr algn="l"/>
+            <a:r>
+              <a:rPr sz="1150" b="0">
+                <a:solidFill>
+                  <a:srgbClr val="3A4842"/>
+                </a:solidFill>
+                <a:latin typeface="Archivo"/>
+              </a:rPr>
+              <a:t>Every layer is an open-data proxy, not a utility record, and the page says so on its face. OpenStreetMap maps transmission towers well and rural distribution poorly, so grid power reads pessimistically here — real utility data would replace it and would loosen the answer, not tighten it.</a:t>
+            </a:r>
+          </a:p>
+        </p:txBody>
+      </p:sp>
+      <p:sp>
+        <p:nvSpPr>
+          <p:cNvPr id="24" name="TextBox 23"/>
+          <p:cNvSpPr txBox="1"/>
+          <p:nvPr/>
+        </p:nvSpPr>
+        <p:spPr>
+          <a:xfrm>
+            <a:off x="502920" y="6473952"/>
+            <a:ext cx="11155680" cy="228600"/>
+          </a:xfrm>
+          <a:prstGeom prst="rect">
+            <a:avLst/>
+          </a:prstGeom>
+          <a:noFill/>
+        </p:spPr>
+        <p:txBody>
+          <a:bodyPr wrap="square" anchor="t" lIns="0" rIns="0" tIns="0" bIns="0">
+            <a:spAutoFit/>
+          </a:bodyPr>
+          <a:lstStyle/>
+          <a:p>
+            <a:pPr algn="l"/>
+            <a:r>
+              <a:rPr sz="850" b="0">
+                <a:solidFill>
+                  <a:srgbClr val="A8B2A6"/>
+                </a:solidFill>
+                <a:latin typeface="Consolas"/>
+              </a:rPr>
+              <a:t>common/constraints.py · common/build_planner_constrained.py · planner_constrained.html</a:t>
+            </a:r>
+          </a:p>
+        </p:txBody>
+      </p:sp>
+    </p:spTree>
+  </p:cSld>
+  <p:clrMapOvr>
+    <a:masterClrMapping/>
+  </p:clrMapOvr>
+</p:sld>
+</file>
+
+<file path=ppt/slides/slide15.xml><?xml version="1.0" encoding="utf-8"?>
+<p:sld xmlns:a="http://schemas.openxmlformats.org/drawingml/2006/main" xmlns:p="http://schemas.openxmlformats.org/presentationml/2006/main" xmlns:r="http://schemas.openxmlformats.org/officeDocument/2006/relationships">
+  <p:cSld>
+    <p:spTree>
+      <p:nvGrpSpPr>
+        <p:cNvPr id="1" name=""/>
+        <p:cNvGrpSpPr/>
+        <p:nvPr/>
+      </p:nvGrpSpPr>
+      <p:grpSpPr/>
+      <p:sp>
+        <p:nvSpPr>
+          <p:cNvPr id="2" name="Rectangle 1"/>
+          <p:cNvSpPr/>
+          <p:nvPr/>
+        </p:nvSpPr>
+        <p:spPr>
+          <a:xfrm>
+            <a:off x="0" y="0"/>
+            <a:ext cx="12191695" cy="6858000"/>
+          </a:xfrm>
+          <a:prstGeom prst="rect">
+            <a:avLst/>
+          </a:prstGeom>
+          <a:solidFill>
+            <a:srgbClr val="FBFCFA"/>
+          </a:solidFill>
+          <a:ln>
+            <a:noFill/>
+          </a:ln>
+          <a:effectLst/>
+        </p:spPr>
+        <p:style>
+          <a:lnRef idx="1">
+            <a:schemeClr val="accent1"/>
+          </a:lnRef>
+          <a:fillRef idx="3">
+            <a:schemeClr val="accent1"/>
+          </a:fillRef>
+          <a:effectRef idx="2">
+            <a:schemeClr val="accent1"/>
+          </a:effectRef>
+          <a:fontRef idx="minor">
+            <a:schemeClr val="lt1"/>
+          </a:fontRef>
+        </p:style>
+        <p:txBody>
+          <a:bodyPr rtlCol="0" anchor="ctr"/>
+          <a:lstStyle/>
+          <a:p>
+            <a:pPr algn="ctr"/>
+          </a:p>
+        </p:txBody>
+      </p:sp>
+      <p:sp>
+        <p:nvSpPr>
+          <p:cNvPr id="3" name="Rectangle 2"/>
+          <p:cNvSpPr/>
+          <p:nvPr/>
+        </p:nvSpPr>
+        <p:spPr>
+          <a:xfrm>
+            <a:off x="0" y="0"/>
+            <a:ext cx="12191695" cy="50292"/>
+          </a:xfrm>
+          <a:prstGeom prst="rect">
+            <a:avLst/>
+          </a:prstGeom>
+          <a:solidFill>
+            <a:srgbClr val="0F6E70"/>
+          </a:solidFill>
+          <a:ln>
+            <a:noFill/>
+          </a:ln>
+          <a:effectLst/>
+        </p:spPr>
+        <p:style>
+          <a:lnRef idx="1">
+            <a:schemeClr val="accent1"/>
+          </a:lnRef>
+          <a:fillRef idx="3">
+            <a:schemeClr val="accent1"/>
+          </a:fillRef>
+          <a:effectRef idx="2">
+            <a:schemeClr val="accent1"/>
+          </a:effectRef>
+          <a:fontRef idx="minor">
+            <a:schemeClr val="lt1"/>
+          </a:fontRef>
+        </p:style>
+        <p:txBody>
+          <a:bodyPr rtlCol="0" anchor="ctr"/>
+          <a:lstStyle/>
+          <a:p>
+            <a:pPr algn="ctr"/>
+          </a:p>
+        </p:txBody>
+      </p:sp>
+      <p:sp>
+        <p:nvSpPr>
+          <p:cNvPr id="4" name="TextBox 3"/>
+          <p:cNvSpPr txBox="1"/>
+          <p:nvPr/>
+        </p:nvSpPr>
+        <p:spPr>
+          <a:xfrm>
+            <a:off x="502920" y="310896"/>
+            <a:ext cx="384048" cy="274320"/>
+          </a:xfrm>
+          <a:prstGeom prst="rect">
+            <a:avLst/>
+          </a:prstGeom>
+          <a:noFill/>
+        </p:spPr>
+        <p:txBody>
+          <a:bodyPr wrap="square" anchor="t" lIns="0" rIns="0" tIns="0" bIns="0">
+            <a:spAutoFit/>
+          </a:bodyPr>
+          <a:lstStyle/>
+          <a:p>
+            <a:pPr algn="l"/>
+            <a:r>
+              <a:rPr sz="1200" b="1">
+                <a:solidFill>
+                  <a:srgbClr val="0F6E70"/>
+                </a:solidFill>
+                <a:latin typeface="Consolas"/>
+              </a:rPr>
+              <a:t>15</a:t>
             </a:r>
           </a:p>
         </p:txBody>
@@ -17512,7 +19214,7 @@
             <a:avLst/>
           </a:prstGeom>
           <a:solidFill>
-            <a:srgbClr val="A8B2A6"/>
+            <a:srgbClr val="5B3A9B"/>
           </a:solidFill>
           <a:ln>
             <a:noFill/>
@@ -17567,7 +19269,7 @@
             <a:r>
               <a:rPr sz="1200" b="1">
                 <a:solidFill>
-                  <a:srgbClr val="A8B2A6"/>
+                  <a:srgbClr val="5B3A9B"/>
                 </a:solidFill>
                 <a:latin typeface="Consolas"/>
               </a:rPr>
@@ -17707,11 +19409,11 @@
             <a:r>
               <a:rPr sz="950" b="1" spc="120">
                 <a:solidFill>
-                  <a:srgbClr val="A8B2A6"/>
+                  <a:srgbClr val="5B3A9B"/>
                 </a:solidFill>
                 <a:latin typeface="Consolas"/>
               </a:rPr>
-              <a:t>RUNNING</a:t>
+              <a:t>BUILT</a:t>
             </a:r>
           </a:p>
         </p:txBody>
@@ -17805,143 +19507,60 @@
       </p:sp>
       <p:sp>
         <p:nvSpPr>
-          <p:cNvPr id="10" name="Rectangle 9"/>
-          <p:cNvSpPr/>
-          <p:nvPr/>
-        </p:nvSpPr>
-        <p:spPr>
-          <a:xfrm>
-            <a:off x="6309360" y="1783080"/>
-            <a:ext cx="5394960" cy="2377440"/>
-          </a:xfrm>
-          <a:prstGeom prst="rect">
-            <a:avLst/>
-          </a:prstGeom>
-          <a:solidFill>
-            <a:srgbClr val="FBFCFA"/>
-          </a:solidFill>
-          <a:ln w="12700">
-            <a:solidFill>
-              <a:srgbClr val="A8B2A6"/>
-            </a:solidFill>
-          </a:ln>
-          <a:effectLst/>
-        </p:spPr>
-        <p:style>
-          <a:lnRef idx="1">
-            <a:schemeClr val="accent1"/>
-          </a:lnRef>
-          <a:fillRef idx="3">
-            <a:schemeClr val="accent1"/>
-          </a:fillRef>
-          <a:effectRef idx="2">
-            <a:schemeClr val="accent1"/>
-          </a:effectRef>
-          <a:fontRef idx="minor">
-            <a:schemeClr val="lt1"/>
-          </a:fontRef>
-        </p:style>
-        <p:txBody>
-          <a:bodyPr rtlCol="0" anchor="ctr"/>
-          <a:lstStyle/>
-          <a:p>
-            <a:pPr algn="ctr"/>
-          </a:p>
-        </p:txBody>
-      </p:sp>
-      <p:sp>
-        <p:nvSpPr>
-          <p:cNvPr id="11" name="TextBox 10"/>
-          <p:cNvSpPr txBox="1"/>
-          <p:nvPr/>
-        </p:nvSpPr>
-        <p:spPr>
-          <a:xfrm>
-            <a:off x="6537960" y="1965960"/>
-            <a:ext cx="4937760" cy="274320"/>
-          </a:xfrm>
-          <a:prstGeom prst="rect">
-            <a:avLst/>
-          </a:prstGeom>
-          <a:noFill/>
-        </p:spPr>
-        <p:txBody>
-          <a:bodyPr wrap="square" anchor="t" lIns="0" rIns="0" tIns="0" bIns="0">
-            <a:spAutoFit/>
-          </a:bodyPr>
-          <a:lstStyle/>
-          <a:p>
-            <a:pPr algn="l"/>
-            <a:r>
-              <a:rPr sz="1250" b="1">
+          <p:cNvPr id="10" name="TextBox 9"/>
+          <p:cNvSpPr txBox="1"/>
+          <p:nvPr/>
+        </p:nvSpPr>
+        <p:spPr>
+          <a:xfrm>
+            <a:off x="6400800" y="1783080"/>
+            <a:ext cx="5303520" cy="274320"/>
+          </a:xfrm>
+          <a:prstGeom prst="rect">
+            <a:avLst/>
+          </a:prstGeom>
+          <a:noFill/>
+        </p:spPr>
+        <p:txBody>
+          <a:bodyPr wrap="square" anchor="t" lIns="0" rIns="0" tIns="0" bIns="0">
+            <a:spAutoFit/>
+          </a:bodyPr>
+          <a:lstStyle/>
+          <a:p>
+            <a:pPr algn="l"/>
+            <a:r>
+              <a:rPr sz="1050" b="1" spc="110">
                 <a:solidFill>
                   <a:srgbClr val="65726B"/>
                 </a:solidFill>
-                <a:latin typeface="Archivo"/>
-              </a:rPr>
-              <a:t>Reserved — backtest result</a:t>
-            </a:r>
-          </a:p>
-        </p:txBody>
-      </p:sp>
-      <p:sp>
-        <p:nvSpPr>
-          <p:cNvPr id="12" name="TextBox 11"/>
-          <p:cNvSpPr txBox="1"/>
-          <p:nvPr/>
-        </p:nvSpPr>
-        <p:spPr>
-          <a:xfrm>
-            <a:off x="6537960" y="2331720"/>
-            <a:ext cx="4937760" cy="1645920"/>
-          </a:xfrm>
-          <a:prstGeom prst="rect">
-            <a:avLst/>
-          </a:prstGeom>
-          <a:noFill/>
-        </p:spPr>
-        <p:txBody>
-          <a:bodyPr wrap="square" lIns="0" rIns="0" tIns="0" bIns="0">
-            <a:spAutoFit/>
-          </a:bodyPr>
-          <a:lstStyle/>
-          <a:p>
-            <a:pPr>
-              <a:spcAft>
-                <a:spcPts val="600"/>
-              </a:spcAft>
-            </a:pPr>
-            <a:r>
-              <a:rPr sz="1000" b="0">
-                <a:solidFill>
-                  <a:srgbClr val="3A4842"/>
-                </a:solidFill>
-                <a:latin typeface="Archivo"/>
-              </a:rPr>
-              <a:t>— Runs on the shared testbench, so it lands straight into the scoreboard on slide 11.</a:t>
-            </a:r>
-          </a:p>
-          <a:p>
-            <a:pPr>
-              <a:spcAft>
-                <a:spcPts val="600"/>
-              </a:spcAft>
-            </a:pPr>
-            <a:r>
-              <a:rPr sz="1000" b="0">
-                <a:solidFill>
-                  <a:srgbClr val="3A4842"/>
-                </a:solidFill>
-                <a:latin typeface="Archivo"/>
-              </a:rPr>
-              <a:t>— Same three splits, same 200 m buffer, same seed.</a:t>
-            </a:r>
-          </a:p>
-        </p:txBody>
-      </p:sp>
-      <p:sp>
-        <p:nvSpPr>
-          <p:cNvPr id="13" name="Rectangle 12"/>
+                <a:latin typeface="Consolas"/>
+              </a:rPr>
+              <a:t>RMSE BY SPLIT, DB</a:t>
+            </a:r>
+          </a:p>
+        </p:txBody>
+      </p:sp>
+      <p:graphicFrame>
+        <p:nvGraphicFramePr>
+          <p:cNvPr id="11" name="Chart 10"/>
+          <p:cNvGraphicFramePr>
+            <a:graphicFrameLocks noGrp="1"/>
+          </p:cNvGraphicFramePr>
+          <p:nvPr/>
+        </p:nvGraphicFramePr>
+        <p:xfrm>
+          <a:off x="6309360" y="2057400"/>
+          <a:ext cx="5394960" cy="2148840"/>
+        </p:xfrm>
+        <a:graphic>
+          <a:graphicData uri="http://schemas.openxmlformats.org/drawingml/2006/chart">
+            <c:chart xmlns:c="http://schemas.openxmlformats.org/drawingml/2006/chart" r:id="rId2"/>
+          </a:graphicData>
+        </a:graphic>
+      </p:graphicFrame>
+      <p:sp>
+        <p:nvSpPr>
+          <p:cNvPr id="12" name="Rectangle 11"/>
           <p:cNvSpPr/>
           <p:nvPr/>
         </p:nvSpPr>
@@ -17987,7 +19606,7 @@
       </p:sp>
       <p:sp>
         <p:nvSpPr>
-          <p:cNvPr id="14" name="Rectangle 13"/>
+          <p:cNvPr id="13" name="Rectangle 12"/>
           <p:cNvSpPr/>
           <p:nvPr/>
         </p:nvSpPr>
@@ -18031,7 +19650,7 @@
       </p:sp>
       <p:sp>
         <p:nvSpPr>
-          <p:cNvPr id="15" name="TextBox 14"/>
+          <p:cNvPr id="14" name="TextBox 13"/>
           <p:cNvSpPr txBox="1"/>
           <p:nvPr/>
         </p:nvSpPr>
@@ -18066,7 +19685,7 @@
       </p:sp>
       <p:sp>
         <p:nvSpPr>
-          <p:cNvPr id="16" name="TextBox 15"/>
+          <p:cNvPr id="15" name="TextBox 14"/>
           <p:cNvSpPr txBox="1"/>
           <p:nvPr/>
         </p:nvSpPr>
@@ -18101,7 +19720,7 @@
       </p:sp>
       <p:sp>
         <p:nvSpPr>
-          <p:cNvPr id="17" name="TextBox 16"/>
+          <p:cNvPr id="16" name="TextBox 15"/>
           <p:cNvSpPr txBox="1"/>
           <p:nvPr/>
         </p:nvSpPr>

--- a/ARA_Challenge3.pptx
+++ b/ARA_Challenge3.pptx
@@ -8759,6 +8759,210 @@
 </c:chartSpace>
 </file>
 
+<file path=ppt/charts/chart4.xml><?xml version="1.0" encoding="utf-8"?>
+<c:chartSpace xmlns:c="http://schemas.openxmlformats.org/drawingml/2006/chart" xmlns:a="http://schemas.openxmlformats.org/drawingml/2006/main" xmlns:r="http://schemas.openxmlformats.org/officeDocument/2006/relationships">
+  <c:date1904 val="0"/>
+  <c:chart>
+    <c:autoTitleDeleted val="1"/>
+    <c:plotArea>
+      <c:barChart>
+        <c:barDir val="bar"/>
+        <c:grouping val="clustered"/>
+        <c:ser>
+          <c:idx val="0"/>
+          <c:order val="0"/>
+          <c:tx>
+            <c:strRef>
+              <c:f>Sheet1!$B$1</c:f>
+              <c:strCache>
+                <c:ptCount val="1"/>
+                <c:pt idx="0">
+                  <c:v>km</c:v>
+                </c:pt>
+              </c:strCache>
+            </c:strRef>
+          </c:tx>
+          <c:spPr>
+            <a:solidFill>
+              <a:srgbClr val="5B3A9B"/>
+            </a:solidFill>
+            <a:ln>
+              <a:noFill/>
+            </a:ln>
+          </c:spPr>
+          <c:cat>
+            <c:strRef>
+              <c:f>Sheet1!$A$2:$A$5</c:f>
+              <c:strCache>
+                <c:ptCount val="4"/>
+                <c:pt idx="0">
+                  <c:v>which model</c:v>
+                </c:pt>
+                <c:pt idx="1">
+                  <c:v>criterion</c:v>
+                </c:pt>
+                <c:pt idx="2">
+                  <c:v>target</c:v>
+                </c:pt>
+                <c:pt idx="3">
+                  <c:v>route/area</c:v>
+                </c:pt>
+              </c:strCache>
+            </c:strRef>
+          </c:cat>
+          <c:val>
+            <c:numRef>
+              <c:f>Sheet1!$B$2:$B$5</c:f>
+              <c:numCache>
+                <c:formatCode>General</c:formatCode>
+                <c:ptCount val="4"/>
+                <c:pt idx="0">
+                  <c:v>7.28</c:v>
+                </c:pt>
+                <c:pt idx="1">
+                  <c:v>5.06</c:v>
+                </c:pt>
+                <c:pt idx="2">
+                  <c:v>3.53</c:v>
+                </c:pt>
+                <c:pt idx="3">
+                  <c:v>0.77</c:v>
+                </c:pt>
+              </c:numCache>
+            </c:numRef>
+          </c:val>
+        </c:ser>
+        <c:dLbls>
+          <c:numFmt formatCode="0.0" sourceLinked="0"/>
+          <c:txPr>
+            <a:bodyPr/>
+            <a:lstStyle/>
+            <a:p>
+              <a:pPr>
+                <a:defRPr sz="750">
+                  <a:solidFill>
+                    <a:srgbClr val="16211C"/>
+                  </a:solidFill>
+                  <a:latin typeface="Consolas"/>
+                </a:defRPr>
+              </a:pPr>
+            </a:p>
+          </c:txPr>
+          <c:showLegendKey val="0"/>
+          <c:showVal val="1"/>
+          <c:showCatName val="0"/>
+          <c:showSerName val="0"/>
+          <c:showPercent val="0"/>
+          <c:showBubbleSize val="0"/>
+          <c:showLeaderLines val="1"/>
+        </c:dLbls>
+        <c:gapWidth val="60"/>
+        <c:axId val="-2068027336"/>
+        <c:axId val="-2113994440"/>
+      </c:barChart>
+      <c:catAx>
+        <c:axId val="-2068027336"/>
+        <c:scaling>
+          <c:orientation val="minMax"/>
+        </c:scaling>
+        <c:delete val="0"/>
+        <c:axPos val="l"/>
+        <c:majorTickMark val="none"/>
+        <c:minorTickMark val="none"/>
+        <c:tickLblPos val="nextTo"/>
+        <c:spPr>
+          <a:ln>
+            <a:solidFill>
+              <a:srgbClr val="C3CCBF"/>
+            </a:solidFill>
+          </a:ln>
+        </c:spPr>
+        <c:txPr>
+          <a:bodyPr/>
+          <a:lstStyle/>
+          <a:p>
+            <a:pPr>
+              <a:defRPr sz="750">
+                <a:solidFill>
+                  <a:srgbClr val="65726B"/>
+                </a:solidFill>
+                <a:latin typeface="Consolas"/>
+              </a:defRPr>
+            </a:pPr>
+          </a:p>
+        </c:txPr>
+        <c:crossAx val="-2113994440"/>
+        <c:crosses val="autoZero"/>
+        <c:auto val="1"/>
+        <c:lblAlgn val="ctr"/>
+        <c:lblOffset val="100"/>
+        <c:noMultiLvlLbl val="0"/>
+      </c:catAx>
+      <c:valAx>
+        <c:axId val="-2113994440"/>
+        <c:scaling/>
+        <c:delete val="0"/>
+        <c:axPos val="b"/>
+        <c:majorGridlines>
+          <c:spPr>
+            <a:ln w="6350">
+              <a:solidFill>
+                <a:srgbClr val="C3CCBF"/>
+              </a:solidFill>
+            </a:ln>
+          </c:spPr>
+        </c:majorGridlines>
+        <c:majorTickMark val="none"/>
+        <c:minorTickMark val="none"/>
+        <c:tickLblPos val="nextTo"/>
+        <c:spPr>
+          <a:ln>
+            <a:solidFill>
+              <a:srgbClr val="C3CCBF"/>
+            </a:solidFill>
+          </a:ln>
+        </c:spPr>
+        <c:txPr>
+          <a:bodyPr/>
+          <a:lstStyle/>
+          <a:p>
+            <a:pPr>
+              <a:defRPr sz="750">
+                <a:solidFill>
+                  <a:srgbClr val="65726B"/>
+                </a:solidFill>
+                <a:latin typeface="Consolas"/>
+              </a:defRPr>
+            </a:pPr>
+          </a:p>
+        </c:txPr>
+        <c:crossAx val="-2068027336"/>
+        <c:crosses val="autoZero"/>
+      </c:valAx>
+    </c:plotArea>
+    <c:dispBlanksAs val="gap"/>
+  </c:chart>
+  <c:txPr>
+    <a:bodyPr/>
+    <a:lstStyle/>
+    <a:p>
+      <a:pPr>
+        <a:defRPr sz="800">
+          <a:solidFill>
+            <a:srgbClr val="65726B"/>
+          </a:solidFill>
+          <a:latin typeface="Consolas"/>
+        </a:defRPr>
+      </a:pPr>
+      <a:endParaRPr lang="en-US"/>
+    </a:p>
+  </c:txPr>
+  <c:externalData r:id="rId1">
+    <c:autoUpdate val="0"/>
+  </c:externalData>
+</c:chartSpace>
+</file>
+
 <file path=ppt/slideLayouts/slideLayout1.xml><?xml version="1.0" encoding="utf-8"?>
 <p:sldLayout xmlns:a="http://schemas.openxmlformats.org/drawingml/2006/main" xmlns:r="http://schemas.openxmlformats.org/officeDocument/2006/relationships" xmlns:p="http://schemas.openxmlformats.org/presentationml/2006/main" type="title" preserve="1">
   <p:cSld name="Title Slide">
@@ -14023,7 +14227,7 @@
                 </a:solidFill>
                 <a:latin typeface="Archivo"/>
               </a:rPr>
-              <a:t>The brief's four criteria, taken literally</a:t>
+              <a:t>Four questions, each answerable</a:t>
             </a:r>
           </a:p>
         </p:txBody>
@@ -14058,7 +14262,7 @@
                 </a:solidFill>
                 <a:latin typeface="Archivo"/>
               </a:rPr>
-              <a:t>Quoted from COTS_Challenge_3.pdf — “how a team can demonstrate success”. Each is answered on slide 8 by a measurement.</a:t>
+              <a:t>Each maps to a requirement in the brief, and each is answered later by a measurement rather than an assertion.</a:t>
             </a:r>
           </a:p>
         </p:txBody>
@@ -14072,7 +14276,7 @@
         <p:spPr>
           <a:xfrm>
             <a:off x="502920" y="1783080"/>
-            <a:ext cx="11155680" cy="896112"/>
+            <a:ext cx="11155680" cy="969264"/>
           </a:xfrm>
           <a:prstGeom prst="rect">
             <a:avLst/>
@@ -14118,7 +14322,7 @@
         <p:spPr>
           <a:xfrm>
             <a:off x="502920" y="1783080"/>
-            <a:ext cx="54864" cy="896112"/>
+            <a:ext cx="54864" cy="969264"/>
           </a:xfrm>
           <a:prstGeom prst="rect">
             <a:avLst/>
@@ -14161,7 +14365,7 @@
         </p:nvSpPr>
         <p:spPr>
           <a:xfrm>
-            <a:off x="822960" y="1911096"/>
+            <a:off x="822960" y="1929384"/>
             <a:ext cx="640080" cy="256032"/>
           </a:xfrm>
           <a:prstGeom prst="rect">
@@ -14197,7 +14401,7 @@
         <p:spPr>
           <a:xfrm>
             <a:off x="1600200" y="1892808"/>
-            <a:ext cx="1463040" cy="256032"/>
+            <a:ext cx="8412480" cy="292608"/>
           </a:xfrm>
           <a:prstGeom prst="rect">
             <a:avLst/>
@@ -14212,13 +14416,13 @@
           <a:p>
             <a:pPr algn="l"/>
             <a:r>
-              <a:rPr sz="1300" b="1">
+              <a:rPr sz="1350" b="1">
                 <a:solidFill>
                   <a:srgbClr val="16211C"/>
                 </a:solidFill>
                 <a:latin typeface="Archivo"/>
               </a:rPr>
-              <a:t>Thresholds</a:t>
+              <a:t>Can we predict service where nobody drove — and does the modelling paradigm matter?</a:t>
             </a:r>
           </a:p>
         </p:txBody>
@@ -14231,43 +14435,8 @@
         </p:nvSpPr>
         <p:spPr>
           <a:xfrm>
-            <a:off x="3154680" y="1883664"/>
-            <a:ext cx="5486400" cy="274320"/>
-          </a:xfrm>
-          <a:prstGeom prst="rect">
-            <a:avLst/>
-          </a:prstGeom>
-          <a:noFill/>
-        </p:spPr>
-        <p:txBody>
-          <a:bodyPr wrap="square" anchor="t" lIns="0" rIns="0" tIns="0" bIns="0">
-            <a:spAutoFit/>
-          </a:bodyPr>
-          <a:lstStyle/>
-          <a:p>
-            <a:pPr algn="l"/>
-            <a:r>
-              <a:rPr sz="1300" b="1">
-                <a:solidFill>
-                  <a:srgbClr val="16211C"/>
-                </a:solidFill>
-                <a:latin typeface="Archivo"/>
-              </a:rPr>
-              <a:t>Before-and-after route coverage under explicit service thresholds</a:t>
-            </a:r>
-          </a:p>
-        </p:txBody>
-      </p:sp>
-      <p:sp>
-        <p:nvSpPr>
-          <p:cNvPr id="13" name="TextBox 12"/>
-          <p:cNvSpPr txBox="1"/>
-          <p:nvPr/>
-        </p:nvSpPr>
-        <p:spPr>
-          <a:xfrm>
-            <a:off x="3154680" y="2221992"/>
-            <a:ext cx="8138160" cy="365760"/>
+            <a:off x="1600200" y="2267712"/>
+            <a:ext cx="8412480" cy="402336"/>
           </a:xfrm>
           <a:prstGeom prst="rect">
             <a:avLst/>
@@ -14288,21 +14457,56 @@
                 </a:solidFill>
                 <a:latin typeface="Archivo"/>
               </a:rPr>
-              <a:t>Eight service definitions, each a slider, each re-solving the site.</a:t>
+              <a:t>The drive covers ~11% of the area; the deliverable is the other 89%. So the test has to be geographic extrapolation, not interpolation.</a:t>
             </a:r>
           </a:p>
         </p:txBody>
       </p:sp>
       <p:sp>
         <p:nvSpPr>
+          <p:cNvPr id="13" name="TextBox 12"/>
+          <p:cNvSpPr txBox="1"/>
+          <p:nvPr/>
+        </p:nvSpPr>
+        <p:spPr>
+          <a:xfrm>
+            <a:off x="10378440" y="1929384"/>
+            <a:ext cx="1188720" cy="219456"/>
+          </a:xfrm>
+          <a:prstGeom prst="rect">
+            <a:avLst/>
+          </a:prstGeom>
+          <a:noFill/>
+        </p:spPr>
+        <p:txBody>
+          <a:bodyPr wrap="square" anchor="t" lIns="0" rIns="0" tIns="0" bIns="0">
+            <a:spAutoFit/>
+          </a:bodyPr>
+          <a:lstStyle/>
+          <a:p>
+            <a:pPr algn="l"/>
+            <a:r>
+              <a:rPr sz="850" b="0">
+                <a:solidFill>
+                  <a:srgbClr val="65726B"/>
+                </a:solidFill>
+                <a:latin typeface="Consolas"/>
+              </a:rPr>
+              <a:t>slide 7</a:t>
+            </a:r>
+          </a:p>
+        </p:txBody>
+      </p:sp>
+      <p:sp>
+        <p:nvSpPr>
           <p:cNvPr id="14" name="Rectangle 13"/>
           <p:cNvSpPr/>
           <p:nvPr/>
         </p:nvSpPr>
         <p:spPr>
           <a:xfrm>
-            <a:off x="502920" y="2788920"/>
-            <a:ext cx="11155680" cy="896112"/>
+            <a:off x="502920" y="2862072"/>
+            <a:ext cx="11155680" cy="969264"/>
           </a:xfrm>
           <a:prstGeom prst="rect">
             <a:avLst/>
@@ -14347,8 +14551,8 @@
         </p:nvSpPr>
         <p:spPr>
           <a:xfrm>
-            <a:off x="502920" y="2788920"/>
-            <a:ext cx="54864" cy="896112"/>
+            <a:off x="502920" y="2862072"/>
+            <a:ext cx="54864" cy="969264"/>
           </a:xfrm>
           <a:prstGeom prst="rect">
             <a:avLst/>
@@ -14391,7 +14595,7 @@
         </p:nvSpPr>
         <p:spPr>
           <a:xfrm>
-            <a:off x="822960" y="2916936"/>
+            <a:off x="822960" y="3008376"/>
             <a:ext cx="640080" cy="256032"/>
           </a:xfrm>
           <a:prstGeom prst="rect">
@@ -14426,8 +14630,8 @@
         </p:nvSpPr>
         <p:spPr>
           <a:xfrm>
-            <a:off x="1600200" y="2898648"/>
-            <a:ext cx="1463040" cy="256032"/>
+            <a:off x="1600200" y="2971800"/>
+            <a:ext cx="8412480" cy="292608"/>
           </a:xfrm>
           <a:prstGeom prst="rect">
             <a:avLst/>
@@ -14442,13 +14646,13 @@
           <a:p>
             <a:pPr algn="l"/>
             <a:r>
-              <a:rPr sz="1300" b="1">
+              <a:rPr sz="1350" b="1">
                 <a:solidFill>
                   <a:srgbClr val="16211C"/>
                 </a:solidFill>
                 <a:latin typeface="Archivo"/>
               </a:rPr>
-              <a:t>Gains</a:t>
+              <a:t>Where is service deficient, and what does one added asset actually buy?</a:t>
             </a:r>
           </a:p>
         </p:txBody>
@@ -14461,43 +14665,8 @@
         </p:nvSpPr>
         <p:spPr>
           <a:xfrm>
-            <a:off x="3154680" y="2889504"/>
-            <a:ext cx="5486400" cy="274320"/>
-          </a:xfrm>
-          <a:prstGeom prst="rect">
-            <a:avLst/>
-          </a:prstGeom>
-          <a:noFill/>
-        </p:spPr>
-        <p:txBody>
-          <a:bodyPr wrap="square" anchor="t" lIns="0" rIns="0" tIns="0" bIns="0">
-            <a:spAutoFit/>
-          </a:bodyPr>
-          <a:lstStyle/>
-          <a:p>
-            <a:pPr algn="l"/>
-            <a:r>
-              <a:rPr sz="1300" b="1">
-                <a:solidFill>
-                  <a:srgbClr val="16211C"/>
-                </a:solidFill>
-                <a:latin typeface="Archivo"/>
-              </a:rPr>
-              <a:t>Gains reported per intervention</a:t>
-            </a:r>
-          </a:p>
-        </p:txBody>
-      </p:sp>
-      <p:sp>
-        <p:nvSpPr>
-          <p:cNvPr id="19" name="TextBox 18"/>
-          <p:cNvSpPr txBox="1"/>
-          <p:nvPr/>
-        </p:nvSpPr>
-        <p:spPr>
-          <a:xfrm>
-            <a:off x="3154680" y="3227832"/>
-            <a:ext cx="8138160" cy="365760"/>
+            <a:off x="1600200" y="3346704"/>
+            <a:ext cx="8412480" cy="402336"/>
           </a:xfrm>
           <a:prstGeom prst="rect">
             <a:avLst/>
@@ -14518,21 +14687,56 @@
                 </a:solidFill>
                 <a:latin typeface="Archivo"/>
               </a:rPr>
-              <a:t>Relay, small cell and macro, plus the marginal value of the 2nd and 3rd installation.</a:t>
+              <a:t>Before-and-after coverage at an explicit threshold, and the gain reported per intervention.</a:t>
             </a:r>
           </a:p>
         </p:txBody>
       </p:sp>
       <p:sp>
         <p:nvSpPr>
+          <p:cNvPr id="19" name="TextBox 18"/>
+          <p:cNvSpPr txBox="1"/>
+          <p:nvPr/>
+        </p:nvSpPr>
+        <p:spPr>
+          <a:xfrm>
+            <a:off x="10378440" y="3008376"/>
+            <a:ext cx="1188720" cy="219456"/>
+          </a:xfrm>
+          <a:prstGeom prst="rect">
+            <a:avLst/>
+          </a:prstGeom>
+          <a:noFill/>
+        </p:spPr>
+        <p:txBody>
+          <a:bodyPr wrap="square" anchor="t" lIns="0" rIns="0" tIns="0" bIns="0">
+            <a:spAutoFit/>
+          </a:bodyPr>
+          <a:lstStyle/>
+          <a:p>
+            <a:pPr algn="l"/>
+            <a:r>
+              <a:rPr sz="850" b="0">
+                <a:solidFill>
+                  <a:srgbClr val="65726B"/>
+                </a:solidFill>
+                <a:latin typeface="Consolas"/>
+              </a:rPr>
+              <a:t>slide 8</a:t>
+            </a:r>
+          </a:p>
+        </p:txBody>
+      </p:sp>
+      <p:sp>
+        <p:nvSpPr>
           <p:cNvPr id="20" name="Rectangle 19"/>
           <p:cNvSpPr/>
           <p:nvPr/>
         </p:nvSpPr>
         <p:spPr>
           <a:xfrm>
-            <a:off x="502920" y="3794760"/>
-            <a:ext cx="11155680" cy="896112"/>
+            <a:off x="502920" y="3941064"/>
+            <a:ext cx="11155680" cy="969264"/>
           </a:xfrm>
           <a:prstGeom prst="rect">
             <a:avLst/>
@@ -14577,8 +14781,8 @@
         </p:nvSpPr>
         <p:spPr>
           <a:xfrm>
-            <a:off x="502920" y="3794760"/>
-            <a:ext cx="54864" cy="896112"/>
+            <a:off x="502920" y="3941064"/>
+            <a:ext cx="54864" cy="969264"/>
           </a:xfrm>
           <a:prstGeom prst="rect">
             <a:avLst/>
@@ -14621,7 +14825,7 @@
         </p:nvSpPr>
         <p:spPr>
           <a:xfrm>
-            <a:off x="822960" y="3922776"/>
+            <a:off x="822960" y="4087368"/>
             <a:ext cx="640080" cy="256032"/>
           </a:xfrm>
           <a:prstGeom prst="rect">
@@ -14656,8 +14860,8 @@
         </p:nvSpPr>
         <p:spPr>
           <a:xfrm>
-            <a:off x="1600200" y="3904488"/>
-            <a:ext cx="1463040" cy="256032"/>
+            <a:off x="1600200" y="4050792"/>
+            <a:ext cx="8412480" cy="292608"/>
           </a:xfrm>
           <a:prstGeom prst="rect">
             <a:avLst/>
@@ -14672,13 +14876,13 @@
           <a:p>
             <a:pPr algn="l"/>
             <a:r>
-              <a:rPr sz="1300" b="1">
+              <a:rPr sz="1350" b="1">
                 <a:solidFill>
                   <a:srgbClr val="16211C"/>
                 </a:solidFill>
                 <a:latin typeface="Archivo"/>
               </a:rPr>
-              <a:t>Robustness</a:t>
+              <a:t>How much does the recommendation depend on what we assumed?</a:t>
             </a:r>
           </a:p>
         </p:txBody>
@@ -14691,43 +14895,8 @@
         </p:nvSpPr>
         <p:spPr>
           <a:xfrm>
-            <a:off x="3154680" y="3895344"/>
-            <a:ext cx="5486400" cy="274320"/>
-          </a:xfrm>
-          <a:prstGeom prst="rect">
-            <a:avLst/>
-          </a:prstGeom>
-          <a:noFill/>
-        </p:spPr>
-        <p:txBody>
-          <a:bodyPr wrap="square" anchor="t" lIns="0" rIns="0" tIns="0" bIns="0">
-            <a:spAutoFit/>
-          </a:bodyPr>
-          <a:lstStyle/>
-          <a:p>
-            <a:pPr algn="l"/>
-            <a:r>
-              <a:rPr sz="1300" b="1">
-                <a:solidFill>
-                  <a:srgbClr val="16211C"/>
-                </a:solidFill>
-                <a:latin typeface="Archivo"/>
-              </a:rPr>
-              <a:t>Robustness to model uncertainty</a:t>
-            </a:r>
-          </a:p>
-        </p:txBody>
-      </p:sp>
-      <p:sp>
-        <p:nvSpPr>
-          <p:cNvPr id="25" name="TextBox 24"/>
-          <p:cNvSpPr txBox="1"/>
-          <p:nvPr/>
-        </p:nvSpPr>
-        <p:spPr>
-          <a:xfrm>
-            <a:off x="3154680" y="4233672"/>
-            <a:ext cx="8138160" cy="365760"/>
+            <a:off x="1600200" y="4425696"/>
+            <a:ext cx="8412480" cy="402336"/>
           </a:xfrm>
           <a:prstGeom prst="rect">
             <a:avLst/>
@@ -14748,21 +14917,56 @@
                 </a:solidFill>
                 <a:latin typeface="Archivo"/>
               </a:rPr>
-              <a:t>200 shadow-fading draws re-solve the placement; we report how often the answer survives.</a:t>
+              <a:t>Robustness to model uncertainty, and sensitivity to the objective and to placement constraints.</a:t>
             </a:r>
           </a:p>
         </p:txBody>
       </p:sp>
       <p:sp>
         <p:nvSpPr>
+          <p:cNvPr id="25" name="TextBox 24"/>
+          <p:cNvSpPr txBox="1"/>
+          <p:nvPr/>
+        </p:nvSpPr>
+        <p:spPr>
+          <a:xfrm>
+            <a:off x="10378440" y="4087368"/>
+            <a:ext cx="1188720" cy="219456"/>
+          </a:xfrm>
+          <a:prstGeom prst="rect">
+            <a:avLst/>
+          </a:prstGeom>
+          <a:noFill/>
+        </p:spPr>
+        <p:txBody>
+          <a:bodyPr wrap="square" anchor="t" lIns="0" rIns="0" tIns="0" bIns="0">
+            <a:spAutoFit/>
+          </a:bodyPr>
+          <a:lstStyle/>
+          <a:p>
+            <a:pPr algn="l"/>
+            <a:r>
+              <a:rPr sz="850" b="0">
+                <a:solidFill>
+                  <a:srgbClr val="65726B"/>
+                </a:solidFill>
+                <a:latin typeface="Consolas"/>
+              </a:rPr>
+              <a:t>slide 8</a:t>
+            </a:r>
+          </a:p>
+        </p:txBody>
+      </p:sp>
+      <p:sp>
+        <p:nvSpPr>
           <p:cNvPr id="26" name="Rectangle 25"/>
           <p:cNvSpPr/>
           <p:nvPr/>
         </p:nvSpPr>
         <p:spPr>
           <a:xfrm>
-            <a:off x="502920" y="4800600"/>
-            <a:ext cx="11155680" cy="896112"/>
+            <a:off x="502920" y="5020056"/>
+            <a:ext cx="11155680" cy="969264"/>
           </a:xfrm>
           <a:prstGeom prst="rect">
             <a:avLst/>
@@ -14807,8 +15011,8 @@
         </p:nvSpPr>
         <p:spPr>
           <a:xfrm>
-            <a:off x="502920" y="4800600"/>
-            <a:ext cx="54864" cy="896112"/>
+            <a:off x="502920" y="5020056"/>
+            <a:ext cx="54864" cy="969264"/>
           </a:xfrm>
           <a:prstGeom prst="rect">
             <a:avLst/>
@@ -14851,7 +15055,7 @@
         </p:nvSpPr>
         <p:spPr>
           <a:xfrm>
-            <a:off x="822960" y="4928616"/>
+            <a:off x="822960" y="5166360"/>
             <a:ext cx="640080" cy="256032"/>
           </a:xfrm>
           <a:prstGeom prst="rect">
@@ -14886,8 +15090,8 @@
         </p:nvSpPr>
         <p:spPr>
           <a:xfrm>
-            <a:off x="1600200" y="4910328"/>
-            <a:ext cx="1463040" cy="256032"/>
+            <a:off x="1600200" y="5129784"/>
+            <a:ext cx="8412480" cy="292608"/>
           </a:xfrm>
           <a:prstGeom prst="rect">
             <a:avLst/>
@@ -14902,13 +15106,13 @@
           <a:p>
             <a:pPr algn="l"/>
             <a:r>
-              <a:rPr sz="1300" b="1">
+              <a:rPr sz="1350" b="1">
                 <a:solidFill>
                   <a:srgbClr val="16211C"/>
                 </a:solidFill>
                 <a:latin typeface="Archivo"/>
               </a:rPr>
-              <a:t>Constraints</a:t>
+              <a:t>Does optimising against the predicted surface beat the naive baseline?</a:t>
             </a:r>
           </a:p>
         </p:txBody>
@@ -14921,43 +15125,8 @@
         </p:nvSpPr>
         <p:spPr>
           <a:xfrm>
-            <a:off x="3154680" y="4901184"/>
-            <a:ext cx="5486400" cy="274320"/>
-          </a:xfrm>
-          <a:prstGeom prst="rect">
-            <a:avLst/>
-          </a:prstGeom>
-          <a:noFill/>
-        </p:spPr>
-        <p:txBody>
-          <a:bodyPr wrap="square" anchor="t" lIns="0" rIns="0" tIns="0" bIns="0">
-            <a:spAutoFit/>
-          </a:bodyPr>
-          <a:lstStyle/>
-          <a:p>
-            <a:pPr algn="l"/>
-            <a:r>
-              <a:rPr sz="1300" b="1">
-                <a:solidFill>
-                  <a:srgbClr val="16211C"/>
-                </a:solidFill>
-                <a:latin typeface="Archivo"/>
-              </a:rPr>
-              <a:t>Sensitivity to placement constraints</a:t>
-            </a:r>
-          </a:p>
-        </p:txBody>
-      </p:sp>
-      <p:sp>
-        <p:nvSpPr>
-          <p:cNvPr id="31" name="TextBox 30"/>
-          <p:cNvSpPr txBox="1"/>
-          <p:nvPr/>
-        </p:nvSpPr>
-        <p:spPr>
-          <a:xfrm>
-            <a:off x="3154680" y="5239512"/>
-            <a:ext cx="8138160" cy="365760"/>
+            <a:off x="1600200" y="5504688"/>
+            <a:ext cx="8412480" cy="402336"/>
           </a:xfrm>
           <a:prstGeom prst="rect">
             <a:avLst/>
@@ -14978,21 +15147,56 @@
                 </a:solidFill>
                 <a:latin typeface="Archivo"/>
               </a:rPr>
-              <a:t>Five open-data buildability layers shrink the feasible set, and we report what complying costs.</a:t>
+              <a:t>The brief's own stated hypothesis: better than choosing the single worst measured point.</a:t>
             </a:r>
           </a:p>
         </p:txBody>
       </p:sp>
       <p:sp>
         <p:nvSpPr>
+          <p:cNvPr id="31" name="TextBox 30"/>
+          <p:cNvSpPr txBox="1"/>
+          <p:nvPr/>
+        </p:nvSpPr>
+        <p:spPr>
+          <a:xfrm>
+            <a:off x="10378440" y="5166360"/>
+            <a:ext cx="1188720" cy="219456"/>
+          </a:xfrm>
+          <a:prstGeom prst="rect">
+            <a:avLst/>
+          </a:prstGeom>
+          <a:noFill/>
+        </p:spPr>
+        <p:txBody>
+          <a:bodyPr wrap="square" anchor="t" lIns="0" rIns="0" tIns="0" bIns="0">
+            <a:spAutoFit/>
+          </a:bodyPr>
+          <a:lstStyle/>
+          <a:p>
+            <a:pPr algn="l"/>
+            <a:r>
+              <a:rPr sz="850" b="0">
+                <a:solidFill>
+                  <a:srgbClr val="65726B"/>
+                </a:solidFill>
+                <a:latin typeface="Consolas"/>
+              </a:rPr>
+              <a:t>slide 8</a:t>
+            </a:r>
+          </a:p>
+        </p:txBody>
+      </p:sp>
+      <p:sp>
+        <p:nvSpPr>
           <p:cNvPr id="32" name="Rectangle 31"/>
           <p:cNvSpPr/>
           <p:nvPr/>
         </p:nvSpPr>
         <p:spPr>
           <a:xfrm>
-            <a:off x="502920" y="5897880"/>
-            <a:ext cx="11155680" cy="566928"/>
+            <a:off x="502920" y="6144768"/>
+            <a:ext cx="11155680" cy="457200"/>
           </a:xfrm>
           <a:prstGeom prst="rect">
             <a:avLst/>
@@ -15000,7 +15204,7 @@
           <a:solidFill>
             <a:srgbClr val="F1F4EF"/>
           </a:solidFill>
-          <a:ln w="19050">
+          <a:ln w="15875">
             <a:solidFill>
               <a:srgbClr val="8C1D40"/>
             </a:solidFill>
@@ -15031,58 +15235,14 @@
       </p:sp>
       <p:sp>
         <p:nvSpPr>
-          <p:cNvPr id="33" name="Rectangle 32"/>
-          <p:cNvSpPr/>
-          <p:nvPr/>
-        </p:nvSpPr>
-        <p:spPr>
-          <a:xfrm>
-            <a:off x="502920" y="5897880"/>
-            <a:ext cx="54864" cy="566928"/>
-          </a:xfrm>
-          <a:prstGeom prst="rect">
-            <a:avLst/>
-          </a:prstGeom>
-          <a:solidFill>
-            <a:srgbClr val="8C1D40"/>
-          </a:solidFill>
-          <a:ln>
-            <a:noFill/>
-          </a:ln>
-          <a:effectLst/>
-        </p:spPr>
-        <p:style>
-          <a:lnRef idx="1">
-            <a:schemeClr val="accent1"/>
-          </a:lnRef>
-          <a:fillRef idx="3">
-            <a:schemeClr val="accent1"/>
-          </a:fillRef>
-          <a:effectRef idx="2">
-            <a:schemeClr val="accent1"/>
-          </a:effectRef>
-          <a:fontRef idx="minor">
-            <a:schemeClr val="lt1"/>
-          </a:fontRef>
-        </p:style>
-        <p:txBody>
-          <a:bodyPr rtlCol="0" anchor="ctr"/>
-          <a:lstStyle/>
-          <a:p>
-            <a:pPr algn="ctr"/>
-          </a:p>
-        </p:txBody>
-      </p:sp>
-      <p:sp>
-        <p:nvSpPr>
-          <p:cNvPr id="34" name="TextBox 33"/>
+          <p:cNvPr id="33" name="TextBox 32"/>
           <p:cNvSpPr txBox="1"/>
           <p:nvPr/>
         </p:nvSpPr>
         <p:spPr>
           <a:xfrm>
-            <a:off x="777240" y="6016752"/>
-            <a:ext cx="10607040" cy="365760"/>
+            <a:off x="777240" y="6245352"/>
+            <a:ext cx="10607040" cy="274320"/>
           </a:xfrm>
           <a:prstGeom prst="rect">
             <a:avLst/>
@@ -15097,20 +15257,20 @@
           <a:p>
             <a:pPr algn="l"/>
             <a:r>
-              <a:rPr sz="1200" b="0">
+              <a:rPr sz="1150" b="0">
                 <a:solidFill>
                   <a:srgbClr val="16211C"/>
                 </a:solidFill>
                 <a:latin typeface="Archivo"/>
               </a:rPr>
-              <a:t>And the brief's own hypothesis:  “optimizing placement … will outperform choosing only the single worst measured point.”  We test it on slide 8 rather than assume it.</a:t>
+              <a:t>RQ1 is the precondition: if a model cannot predict off the driven line, nothing it says about siting is worth reading.</a:t>
             </a:r>
           </a:p>
         </p:txBody>
       </p:sp>
       <p:sp>
         <p:nvSpPr>
-          <p:cNvPr id="35" name="TextBox 34"/>
+          <p:cNvPr id="34" name="TextBox 33"/>
           <p:cNvSpPr txBox="1"/>
           <p:nvPr/>
         </p:nvSpPr>
@@ -19185,7 +19345,7 @@
                 </a:solidFill>
                 <a:latin typeface="Consolas"/>
               </a:rPr>
-              <a:t>EVALUATION</a:t>
+              <a:t>RQ1 · PREDICTION</a:t>
             </a:r>
           </a:p>
         </p:txBody>
@@ -19220,7 +19380,7 @@
                 </a:solidFill>
                 <a:latin typeface="Archivo"/>
               </a:rPr>
-              <a:t>How well each approach predicts</a:t>
+              <a:t>Does the modelling paradigm matter?</a:t>
             </a:r>
           </a:p>
         </p:txBody>
@@ -20491,7 +20651,7 @@
                 </a:solidFill>
                 <a:latin typeface="Consolas"/>
               </a:rPr>
-              <a:t>RESULTS</a:t>
+              <a:t>RQ2 · RQ3 · RQ4</a:t>
             </a:r>
           </a:p>
         </p:txBody>
@@ -20526,7 +20686,7 @@
                 </a:solidFill>
                 <a:latin typeface="Archivo"/>
               </a:rPr>
-              <a:t>The four questions, answered</a:t>
+              <a:t>What to build, how firm it is, and whether optimising paid</a:t>
             </a:r>
           </a:p>
         </p:txBody>
@@ -20539,8 +20699,8 @@
         </p:nvSpPr>
         <p:spPr>
           <a:xfrm>
-            <a:off x="502920" y="1152144"/>
-            <a:ext cx="11155680" cy="365760"/>
+            <a:off x="502920" y="1389888"/>
+            <a:ext cx="3657600" cy="219456"/>
           </a:xfrm>
           <a:prstGeom prst="rect">
             <a:avLst/>
@@ -20555,13 +20715,13 @@
           <a:p>
             <a:pPr algn="l"/>
             <a:r>
-              <a:rPr sz="1250" b="0">
+              <a:rPr sz="1000" b="1" spc="120">
                 <a:solidFill>
-                  <a:srgbClr val="3A4842"/>
+                  <a:srgbClr val="8F6200"/>
                 </a:solidFill>
-                <a:latin typeface="Archivo"/>
+                <a:latin typeface="Consolas"/>
               </a:rPr>
-              <a:t>Same demand, same objective, same solver across every approach.</a:t>
+              <a:t>RQ2 — GAINS PER INTERVENTION</a:t>
             </a:r>
           </a:p>
         </p:txBody>
@@ -20575,8 +20735,8 @@
           <p:nvPr/>
         </p:nvGraphicFramePr>
         <p:xfrm>
-          <a:off x="502920" y="1691640"/>
-          <a:ext cx="11155680" cy="1371600"/>
+          <a:off x="502920" y="1664208"/>
+          <a:ext cx="3657600" cy="1143000"/>
         </p:xfrm>
         <a:graphic>
           <a:graphicData uri="http://schemas.openxmlformats.org/drawingml/2006/table">
@@ -20585,26 +20745,24 @@
                 <a:tableStyleId>{5C22544A-7EE6-4342-B048-85BDC9FD1C3A}</a:tableStyleId>
               </a:tblPr>
               <a:tblGrid>
-                <a:gridCol w="2468880"/>
-                <a:gridCol w="3017520"/>
-                <a:gridCol w="1920240"/>
+                <a:gridCol w="914400"/>
                 <a:gridCol w="1828800"/>
-                <a:gridCol w="1920240"/>
+                <a:gridCol w="914400"/>
               </a:tblGrid>
-              <a:tr h="342900">
+              <a:tr h="285750">
                 <a:tc>
                   <a:txBody>
                     <a:bodyPr/>
                     <a:lstStyle/>
                     <a:p>
                       <a:r>
-                        <a:rPr sz="1000" b="1">
+                        <a:rPr sz="850" b="1">
                           <a:solidFill>
                             <a:srgbClr val="65726B"/>
                           </a:solidFill>
                           <a:latin typeface="Consolas"/>
                         </a:rPr>
-                        <a:t>approach</a:t>
+                        <a:t>asset</a:t>
                       </a:r>
                     </a:p>
                   </a:txBody>
@@ -20621,13 +20779,13 @@
                     <a:p>
                       <a:pPr algn="r"/>
                       <a:r>
-                        <a:rPr sz="1000" b="1">
+                        <a:rPr sz="850" b="1">
                           <a:solidFill>
                             <a:srgbClr val="65726B"/>
                           </a:solidFill>
                           <a:latin typeface="Consolas"/>
                         </a:rPr>
-                        <a:t>recommended macro site</a:t>
+                        <a:t>site</a:t>
                       </a:r>
                     </a:p>
                   </a:txBody>
@@ -20644,7 +20802,7 @@
                     <a:p>
                       <a:pPr algn="r"/>
                       <a:r>
-                        <a:rPr sz="1000" b="1">
+                        <a:rPr sz="850" b="1">
                           <a:solidFill>
                             <a:srgbClr val="65726B"/>
                           </a:solidFill>
@@ -20660,67 +20818,21 @@
                     </a:solidFill>
                   </a:tcPr>
                 </a:tc>
-                <a:tc>
-                  <a:txBody>
-                    <a:bodyPr/>
-                    <a:lstStyle/>
-                    <a:p>
-                      <a:pPr algn="r"/>
-                      <a:r>
-                        <a:rPr sz="1000" b="1">
-                          <a:solidFill>
-                            <a:srgbClr val="65726B"/>
-                          </a:solidFill>
-                          <a:latin typeface="Consolas"/>
-                        </a:rPr>
-                        <a:t>area</a:t>
-                      </a:r>
-                    </a:p>
-                  </a:txBody>
-                  <a:tcPr marL="54864" marR="54864" marT="27432" marB="27432">
-                    <a:solidFill>
-                      <a:srgbClr val="F1F4EF"/>
-                    </a:solidFill>
-                  </a:tcPr>
-                </a:tc>
-                <a:tc>
-                  <a:txBody>
-                    <a:bodyPr/>
-                    <a:lstStyle/>
-                    <a:p>
-                      <a:pPr algn="r"/>
-                      <a:r>
-                        <a:rPr sz="1000" b="1">
-                          <a:solidFill>
-                            <a:srgbClr val="65726B"/>
-                          </a:solidFill>
-                          <a:latin typeface="Consolas"/>
-                        </a:rPr>
-                        <a:t>within 2 km</a:t>
-                      </a:r>
-                    </a:p>
-                  </a:txBody>
-                  <a:tcPr marL="54864" marR="54864" marT="27432" marB="27432">
-                    <a:solidFill>
-                      <a:srgbClr val="F1F4EF"/>
-                    </a:solidFill>
-                  </a:tcPr>
-                </a:tc>
               </a:tr>
-              <a:tr h="342900">
+              <a:tr h="285750">
                 <a:tc>
                   <a:txBody>
                     <a:bodyPr/>
                     <a:lstStyle/>
                     <a:p>
                       <a:r>
-                        <a:rPr sz="1000" b="0">
+                        <a:rPr sz="850" b="0">
                           <a:solidFill>
                             <a:srgbClr val="16211C"/>
                           </a:solidFill>
                           <a:latin typeface="Consolas"/>
                         </a:rPr>
-                        <a:t>Baseline — fitted physics</a:t>
+                        <a:t>macro</a:t>
                       </a:r>
                     </a:p>
                   </a:txBody>
@@ -20737,13 +20849,13 @@
                     <a:p>
                       <a:pPr algn="r"/>
                       <a:r>
-                        <a:rPr sz="1000" b="0">
+                        <a:rPr sz="850" b="0">
                           <a:solidFill>
                             <a:srgbClr val="16211C"/>
                           </a:solidFill>
                           <a:latin typeface="Consolas"/>
                         </a:rPr>
-                        <a:t>41.97955, -93.83471</a:t>
+                        <a:t>41.9795, -93.8347</a:t>
                       </a:r>
                     </a:p>
                   </a:txBody>
@@ -20760,13 +20872,37 @@
                     <a:p>
                       <a:pPr algn="r"/>
                       <a:r>
-                        <a:rPr sz="1000" b="0">
+                        <a:rPr sz="850" b="0">
                           <a:solidFill>
                             <a:srgbClr val="16211C"/>
                           </a:solidFill>
                           <a:latin typeface="Consolas"/>
                         </a:rPr>
-                        <a:t>69.0%</a:t>
+                        <a:t>+28.6</a:t>
+                      </a:r>
+                    </a:p>
+                  </a:txBody>
+                  <a:tcPr marL="54864" marR="54864" marT="27432" marB="27432">
+                    <a:solidFill>
+                      <a:srgbClr val="FFFFFF"/>
+                    </a:solidFill>
+                  </a:tcPr>
+                </a:tc>
+              </a:tr>
+              <a:tr h="285750">
+                <a:tc>
+                  <a:txBody>
+                    <a:bodyPr/>
+                    <a:lstStyle/>
+                    <a:p>
+                      <a:r>
+                        <a:rPr sz="850" b="0">
+                          <a:solidFill>
+                            <a:srgbClr val="16211C"/>
+                          </a:solidFill>
+                          <a:latin typeface="Consolas"/>
+                        </a:rPr>
+                        <a:t>smallcell</a:t>
                       </a:r>
                     </a:p>
                   </a:txBody>
@@ -20783,13 +20919,13 @@
                     <a:p>
                       <a:pPr algn="r"/>
                       <a:r>
-                        <a:rPr sz="1000" b="0">
+                        <a:rPr sz="850" b="0">
                           <a:solidFill>
                             <a:srgbClr val="16211C"/>
                           </a:solidFill>
                           <a:latin typeface="Consolas"/>
                         </a:rPr>
-                        <a:t>59.3%</a:t>
+                        <a:t>41.9942, -93.8487</a:t>
                       </a:r>
                     </a:p>
                   </a:txBody>
@@ -20806,13 +20942,13 @@
                     <a:p>
                       <a:pPr algn="r"/>
                       <a:r>
-                        <a:rPr sz="1000" b="0">
+                        <a:rPr sz="850" b="0">
                           <a:solidFill>
                             <a:srgbClr val="16211C"/>
                           </a:solidFill>
                           <a:latin typeface="Consolas"/>
                         </a:rPr>
-                        <a:t>100%</a:t>
+                        <a:t>+0.7</a:t>
                       </a:r>
                     </a:p>
                   </a:txBody>
@@ -20823,20 +20959,20 @@
                   </a:tcPr>
                 </a:tc>
               </a:tr>
-              <a:tr h="342900">
+              <a:tr h="285750">
                 <a:tc>
                   <a:txBody>
                     <a:bodyPr/>
                     <a:lstStyle/>
                     <a:p>
                       <a:r>
-                        <a:rPr sz="1000" b="0">
+                        <a:rPr sz="850" b="0">
                           <a:solidFill>
                             <a:srgbClr val="16211C"/>
                           </a:solidFill>
                           <a:latin typeface="Consolas"/>
                         </a:rPr>
-                        <a:t>Ray tracing — Sionna</a:t>
+                        <a:t>relay</a:t>
                       </a:r>
                     </a:p>
                   </a:txBody>
@@ -20853,13 +20989,13 @@
                     <a:p>
                       <a:pPr algn="r"/>
                       <a:r>
-                        <a:rPr sz="1000" b="0">
+                        <a:rPr sz="850" b="0">
                           <a:solidFill>
                             <a:srgbClr val="16211C"/>
                           </a:solidFill>
                           <a:latin typeface="Consolas"/>
                         </a:rPr>
-                        <a:t>siting bundle not yet built</a:t>
+                        <a:t>42.0085, -93.8164</a:t>
                       </a:r>
                     </a:p>
                   </a:txBody>
@@ -20876,175 +21012,13 @@
                     <a:p>
                       <a:pPr algn="r"/>
                       <a:r>
-                        <a:rPr sz="1000" b="0">
+                        <a:rPr sz="850" b="0">
                           <a:solidFill>
                             <a:srgbClr val="16211C"/>
                           </a:solidFill>
                           <a:latin typeface="Consolas"/>
                         </a:rPr>
-                        <a:t>—</a:t>
-                      </a:r>
-                    </a:p>
-                  </a:txBody>
-                  <a:tcPr marL="54864" marR="54864" marT="27432" marB="27432">
-                    <a:solidFill>
-                      <a:srgbClr val="FFFFFF"/>
-                    </a:solidFill>
-                  </a:tcPr>
-                </a:tc>
-                <a:tc>
-                  <a:txBody>
-                    <a:bodyPr/>
-                    <a:lstStyle/>
-                    <a:p>
-                      <a:pPr algn="r"/>
-                      <a:r>
-                        <a:rPr sz="1000" b="0">
-                          <a:solidFill>
-                            <a:srgbClr val="16211C"/>
-                          </a:solidFill>
-                          <a:latin typeface="Consolas"/>
-                        </a:rPr>
-                        <a:t>—</a:t>
-                      </a:r>
-                    </a:p>
-                  </a:txBody>
-                  <a:tcPr marL="54864" marR="54864" marT="27432" marB="27432">
-                    <a:solidFill>
-                      <a:srgbClr val="FFFFFF"/>
-                    </a:solidFill>
-                  </a:tcPr>
-                </a:tc>
-                <a:tc>
-                  <a:txBody>
-                    <a:bodyPr/>
-                    <a:lstStyle/>
-                    <a:p>
-                      <a:pPr algn="r"/>
-                      <a:r>
-                        <a:rPr sz="1000" b="0">
-                          <a:solidFill>
-                            <a:srgbClr val="16211C"/>
-                          </a:solidFill>
-                          <a:latin typeface="Consolas"/>
-                        </a:rPr>
-                        <a:t>—</a:t>
-                      </a:r>
-                    </a:p>
-                  </a:txBody>
-                  <a:tcPr marL="54864" marR="54864" marT="27432" marB="27432">
-                    <a:solidFill>
-                      <a:srgbClr val="FFFFFF"/>
-                    </a:solidFill>
-                  </a:tcPr>
-                </a:tc>
-              </a:tr>
-              <a:tr h="342900">
-                <a:tc>
-                  <a:txBody>
-                    <a:bodyPr/>
-                    <a:lstStyle/>
-                    <a:p>
-                      <a:r>
-                        <a:rPr sz="1000" b="0">
-                          <a:solidFill>
-                            <a:srgbClr val="16211C"/>
-                          </a:solidFill>
-                          <a:latin typeface="Consolas"/>
-                        </a:rPr>
-                        <a:t>Deep learning — FNO</a:t>
-                      </a:r>
-                    </a:p>
-                  </a:txBody>
-                  <a:tcPr marL="54864" marR="54864" marT="27432" marB="27432">
-                    <a:solidFill>
-                      <a:srgbClr val="FFFFFF"/>
-                    </a:solidFill>
-                  </a:tcPr>
-                </a:tc>
-                <a:tc>
-                  <a:txBody>
-                    <a:bodyPr/>
-                    <a:lstStyle/>
-                    <a:p>
-                      <a:pPr algn="r"/>
-                      <a:r>
-                        <a:rPr sz="1000" b="0">
-                          <a:solidFill>
-                            <a:srgbClr val="16211C"/>
-                          </a:solidFill>
-                          <a:latin typeface="Consolas"/>
-                        </a:rPr>
-                        <a:t>41.97948, -93.71114</a:t>
-                      </a:r>
-                    </a:p>
-                  </a:txBody>
-                  <a:tcPr marL="54864" marR="54864" marT="27432" marB="27432">
-                    <a:solidFill>
-                      <a:srgbClr val="FFFFFF"/>
-                    </a:solidFill>
-                  </a:tcPr>
-                </a:tc>
-                <a:tc>
-                  <a:txBody>
-                    <a:bodyPr/>
-                    <a:lstStyle/>
-                    <a:p>
-                      <a:pPr algn="r"/>
-                      <a:r>
-                        <a:rPr sz="1000" b="0">
-                          <a:solidFill>
-                            <a:srgbClr val="16211C"/>
-                          </a:solidFill>
-                          <a:latin typeface="Consolas"/>
-                        </a:rPr>
-                        <a:t>56.6%</a:t>
-                      </a:r>
-                    </a:p>
-                  </a:txBody>
-                  <a:tcPr marL="54864" marR="54864" marT="27432" marB="27432">
-                    <a:solidFill>
-                      <a:srgbClr val="FFFFFF"/>
-                    </a:solidFill>
-                  </a:tcPr>
-                </a:tc>
-                <a:tc>
-                  <a:txBody>
-                    <a:bodyPr/>
-                    <a:lstStyle/>
-                    <a:p>
-                      <a:pPr algn="r"/>
-                      <a:r>
-                        <a:rPr sz="1000" b="0">
-                          <a:solidFill>
-                            <a:srgbClr val="16211C"/>
-                          </a:solidFill>
-                          <a:latin typeface="Consolas"/>
-                        </a:rPr>
-                        <a:t>47.7%</a:t>
-                      </a:r>
-                    </a:p>
-                  </a:txBody>
-                  <a:tcPr marL="54864" marR="54864" marT="27432" marB="27432">
-                    <a:solidFill>
-                      <a:srgbClr val="FFFFFF"/>
-                    </a:solidFill>
-                  </a:tcPr>
-                </a:tc>
-                <a:tc>
-                  <a:txBody>
-                    <a:bodyPr/>
-                    <a:lstStyle/>
-                    <a:p>
-                      <a:pPr algn="r"/>
-                      <a:r>
-                        <a:rPr sz="1000" b="0">
-                          <a:solidFill>
-                            <a:srgbClr val="16211C"/>
-                          </a:solidFill>
-                          <a:latin typeface="Consolas"/>
-                        </a:rPr>
-                        <a:t>95%</a:t>
+                        <a:t>+1.4</a:t>
                       </a:r>
                     </a:p>
                   </a:txBody>
@@ -21061,14 +21035,172 @@
       </p:graphicFrame>
       <p:sp>
         <p:nvSpPr>
-          <p:cNvPr id="9" name="Rectangle 8"/>
-          <p:cNvSpPr/>
-          <p:nvPr/>
-        </p:nvSpPr>
-        <p:spPr>
-          <a:xfrm>
-            <a:off x="502920" y="3291840"/>
-            <a:ext cx="2606040" cy="932688"/>
+          <p:cNvPr id="9" name="TextBox 8"/>
+          <p:cNvSpPr txBox="1"/>
+          <p:nvPr/>
+        </p:nvSpPr>
+        <p:spPr>
+          <a:xfrm>
+            <a:off x="502920" y="2926080"/>
+            <a:ext cx="3657600" cy="1188720"/>
+          </a:xfrm>
+          <a:prstGeom prst="rect">
+            <a:avLst/>
+          </a:prstGeom>
+          <a:noFill/>
+        </p:spPr>
+        <p:txBody>
+          <a:bodyPr wrap="square" anchor="t" lIns="0" rIns="0" tIns="0" bIns="0">
+            <a:spAutoFit/>
+          </a:bodyPr>
+          <a:lstStyle/>
+          <a:p>
+            <a:pPr algn="l"/>
+            <a:r>
+              <a:rPr sz="1050" b="0">
+                <a:solidFill>
+                  <a:srgbClr val="3A4842"/>
+                </a:solidFill>
+                <a:latin typeface="Archivo"/>
+              </a:rPr>
+              <a:t>Power dominates. Every 6 dB lost halves the radius and quarters the area, so the relay and the small cell cannot fill a 9 km hole — and both physics approaches agree on that even where they disagree about where to build.</a:t>
+            </a:r>
+          </a:p>
+        </p:txBody>
+      </p:sp>
+      <p:sp>
+        <p:nvSpPr>
+          <p:cNvPr id="10" name="TextBox 9"/>
+          <p:cNvSpPr txBox="1"/>
+          <p:nvPr/>
+        </p:nvSpPr>
+        <p:spPr>
+          <a:xfrm>
+            <a:off x="4434840" y="1389888"/>
+            <a:ext cx="3657600" cy="219456"/>
+          </a:xfrm>
+          <a:prstGeom prst="rect">
+            <a:avLst/>
+          </a:prstGeom>
+          <a:noFill/>
+        </p:spPr>
+        <p:txBody>
+          <a:bodyPr wrap="square" anchor="t" lIns="0" rIns="0" tIns="0" bIns="0">
+            <a:spAutoFit/>
+          </a:bodyPr>
+          <a:lstStyle/>
+          <a:p>
+            <a:pPr algn="l"/>
+            <a:r>
+              <a:rPr sz="1000" b="1" spc="120">
+                <a:solidFill>
+                  <a:srgbClr val="5B3A9B"/>
+                </a:solidFill>
+                <a:latin typeface="Consolas"/>
+              </a:rPr>
+              <a:t>RQ3 — WHAT MOVES THE ANSWER</a:t>
+            </a:r>
+          </a:p>
+        </p:txBody>
+      </p:sp>
+      <p:graphicFrame>
+        <p:nvGraphicFramePr>
+          <p:cNvPr id="11" name="Chart 10"/>
+          <p:cNvGraphicFramePr>
+            <a:graphicFrameLocks noGrp="1"/>
+          </p:cNvGraphicFramePr>
+          <p:nvPr/>
+        </p:nvGraphicFramePr>
+        <p:xfrm>
+          <a:off x="4297680" y="1645920"/>
+          <a:ext cx="3794760" cy="1920240"/>
+        </p:xfrm>
+        <a:graphic>
+          <a:graphicData uri="http://schemas.openxmlformats.org/drawingml/2006/chart">
+            <c:chart xmlns:c="http://schemas.openxmlformats.org/drawingml/2006/chart" r:id="rId2"/>
+          </a:graphicData>
+        </a:graphic>
+      </p:graphicFrame>
+      <p:sp>
+        <p:nvSpPr>
+          <p:cNvPr id="12" name="TextBox 11"/>
+          <p:cNvSpPr txBox="1"/>
+          <p:nvPr/>
+        </p:nvSpPr>
+        <p:spPr>
+          <a:xfrm>
+            <a:off x="4434840" y="3611880"/>
+            <a:ext cx="3657600" cy="1371600"/>
+          </a:xfrm>
+          <a:prstGeom prst="rect">
+            <a:avLst/>
+          </a:prstGeom>
+          <a:noFill/>
+        </p:spPr>
+        <p:txBody>
+          <a:bodyPr wrap="square" anchor="t" lIns="0" rIns="0" tIns="0" bIns="0">
+            <a:spAutoFit/>
+          </a:bodyPr>
+          <a:lstStyle/>
+          <a:p>
+            <a:pPr algn="l"/>
+            <a:r>
+              <a:rPr sz="1050" b="0">
+                <a:solidFill>
+                  <a:srgbClr val="3A4842"/>
+                </a:solidFill>
+                <a:latin typeface="Archivo"/>
+              </a:rPr>
+              <a:t>423 combinations of model, criterion, target, asset and weighting. For a macro the choice of MODEL moves the site furthest — 7.3 km — further than any assumption about the objective. The most-picked site wins only 22% of runs.</a:t>
+            </a:r>
+          </a:p>
+        </p:txBody>
+      </p:sp>
+      <p:sp>
+        <p:nvSpPr>
+          <p:cNvPr id="13" name="TextBox 12"/>
+          <p:cNvSpPr txBox="1"/>
+          <p:nvPr/>
+        </p:nvSpPr>
+        <p:spPr>
+          <a:xfrm>
+            <a:off x="8366760" y="1389888"/>
+            <a:ext cx="3291840" cy="219456"/>
+          </a:xfrm>
+          <a:prstGeom prst="rect">
+            <a:avLst/>
+          </a:prstGeom>
+          <a:noFill/>
+        </p:spPr>
+        <p:txBody>
+          <a:bodyPr wrap="square" anchor="t" lIns="0" rIns="0" tIns="0" bIns="0">
+            <a:spAutoFit/>
+          </a:bodyPr>
+          <a:lstStyle/>
+          <a:p>
+            <a:pPr algn="l"/>
+            <a:r>
+              <a:rPr sz="1000" b="1" spc="120">
+                <a:solidFill>
+                  <a:srgbClr val="8C1D40"/>
+                </a:solidFill>
+                <a:latin typeface="Consolas"/>
+              </a:rPr>
+              <a:t>RQ4 — WAS OPTIMISING WORTH IT?</a:t>
+            </a:r>
+          </a:p>
+        </p:txBody>
+      </p:sp>
+      <p:sp>
+        <p:nvSpPr>
+          <p:cNvPr id="14" name="Rectangle 13"/>
+          <p:cNvSpPr/>
+          <p:nvPr/>
+        </p:nvSpPr>
+        <p:spPr>
+          <a:xfrm>
+            <a:off x="8366760" y="1664208"/>
+            <a:ext cx="3291840" cy="868680"/>
           </a:xfrm>
           <a:prstGeom prst="rect">
             <a:avLst/>
@@ -21107,14 +21239,14 @@
       </p:sp>
       <p:sp>
         <p:nvSpPr>
-          <p:cNvPr id="10" name="TextBox 9"/>
+          <p:cNvPr id="15" name="TextBox 14"/>
           <p:cNvSpPr txBox="1"/>
           <p:nvPr/>
         </p:nvSpPr>
         <p:spPr>
           <a:xfrm>
-            <a:off x="630936" y="3383280"/>
-            <a:ext cx="2350008" cy="146304"/>
+            <a:off x="8494776" y="1755648"/>
+            <a:ext cx="3035808" cy="146304"/>
           </a:xfrm>
           <a:prstGeom prst="rect">
             <a:avLst/>
@@ -21135,21 +21267,21 @@
                 </a:solidFill>
                 <a:latin typeface="Consolas"/>
               </a:rPr>
-              <a:t>RQ1 · THRESHOLDS</a:t>
+              <a:t>OPTIMISER</a:t>
             </a:r>
           </a:p>
         </p:txBody>
       </p:sp>
       <p:sp>
         <p:nvSpPr>
-          <p:cNvPr id="11" name="TextBox 10"/>
+          <p:cNvPr id="16" name="TextBox 15"/>
           <p:cNvSpPr txBox="1"/>
           <p:nvPr/>
         </p:nvSpPr>
         <p:spPr>
           <a:xfrm>
-            <a:off x="630936" y="3547872"/>
-            <a:ext cx="2350008" cy="384048"/>
+            <a:off x="8494776" y="1920240"/>
+            <a:ext cx="3035808" cy="384048"/>
           </a:xfrm>
           <a:prstGeom prst="rect">
             <a:avLst/>
@@ -21164,27 +21296,27 @@
           <a:p>
             <a:pPr algn="l"/>
             <a:r>
-              <a:rPr sz="2000" b="1">
+              <a:rPr sz="2100" b="1">
                 <a:solidFill>
                   <a:srgbClr val="0F6E70"/>
                 </a:solidFill>
                 <a:latin typeface="Archivo"/>
               </a:rPr>
-              <a:t>44% → 69%</a:t>
+              <a:t>69.2%</a:t>
             </a:r>
           </a:p>
         </p:txBody>
       </p:sp>
       <p:sp>
         <p:nvSpPr>
-          <p:cNvPr id="12" name="TextBox 11"/>
+          <p:cNvPr id="17" name="TextBox 16"/>
           <p:cNvSpPr txBox="1"/>
           <p:nvPr/>
         </p:nvSpPr>
         <p:spPr>
           <a:xfrm>
-            <a:off x="630936" y="3950208"/>
-            <a:ext cx="2350008" cy="219456"/>
+            <a:off x="8494776" y="2322576"/>
+            <a:ext cx="3035808" cy="219456"/>
           </a:xfrm>
           <a:prstGeom prst="rect">
             <a:avLst/>
@@ -21205,21 +21337,21 @@
                 </a:solidFill>
                 <a:latin typeface="Consolas"/>
               </a:rPr>
-              <a:t>route-km at availability ≥ 50%</a:t>
+              <a:t>route-km covered</a:t>
             </a:r>
           </a:p>
         </p:txBody>
       </p:sp>
       <p:sp>
         <p:nvSpPr>
-          <p:cNvPr id="13" name="Rectangle 12"/>
-          <p:cNvSpPr/>
-          <p:nvPr/>
-        </p:nvSpPr>
-        <p:spPr>
-          <a:xfrm>
-            <a:off x="3319272" y="3291840"/>
-            <a:ext cx="2606040" cy="932688"/>
+          <p:cNvPr id="18" name="Rectangle 17"/>
+          <p:cNvSpPr/>
+          <p:nvPr/>
+        </p:nvSpPr>
+        <p:spPr>
+          <a:xfrm>
+            <a:off x="8366760" y="2651760"/>
+            <a:ext cx="3291840" cy="868680"/>
           </a:xfrm>
           <a:prstGeom prst="rect">
             <a:avLst/>
@@ -21258,14 +21390,14 @@
       </p:sp>
       <p:sp>
         <p:nvSpPr>
-          <p:cNvPr id="14" name="TextBox 13"/>
+          <p:cNvPr id="19" name="TextBox 18"/>
           <p:cNvSpPr txBox="1"/>
           <p:nvPr/>
         </p:nvSpPr>
         <p:spPr>
           <a:xfrm>
-            <a:off x="3447288" y="3383280"/>
-            <a:ext cx="2350008" cy="146304"/>
+            <a:off x="8494776" y="2743200"/>
+            <a:ext cx="3035808" cy="146304"/>
           </a:xfrm>
           <a:prstGeom prst="rect">
             <a:avLst/>
@@ -21286,21 +21418,21 @@
                 </a:solidFill>
                 <a:latin typeface="Consolas"/>
               </a:rPr>
-              <a:t>RQ2 · GAINS</a:t>
+              <a:t>WORST MEASURED POINT</a:t>
             </a:r>
           </a:p>
         </p:txBody>
       </p:sp>
       <p:sp>
         <p:nvSpPr>
-          <p:cNvPr id="15" name="TextBox 14"/>
+          <p:cNvPr id="20" name="TextBox 19"/>
           <p:cNvSpPr txBox="1"/>
           <p:nvPr/>
         </p:nvSpPr>
         <p:spPr>
           <a:xfrm>
-            <a:off x="3447288" y="3547872"/>
-            <a:ext cx="2350008" cy="384048"/>
+            <a:off x="8494776" y="2907792"/>
+            <a:ext cx="3035808" cy="384048"/>
           </a:xfrm>
           <a:prstGeom prst="rect">
             <a:avLst/>
@@ -21315,27 +21447,27 @@
           <a:p>
             <a:pPr algn="l"/>
             <a:r>
-              <a:rPr sz="2000" b="1">
+              <a:rPr sz="2100" b="1">
                 <a:solidFill>
-                  <a:srgbClr val="8F6200"/>
+                  <a:srgbClr val="65726B"/>
                 </a:solidFill>
                 <a:latin typeface="Archivo"/>
               </a:rPr>
-              <a:t>+28.6 km</a:t>
+              <a:t>67.1%</a:t>
             </a:r>
           </a:p>
         </p:txBody>
       </p:sp>
       <p:sp>
         <p:nvSpPr>
-          <p:cNvPr id="16" name="TextBox 15"/>
+          <p:cNvPr id="21" name="TextBox 20"/>
           <p:cNvSpPr txBox="1"/>
           <p:nvPr/>
         </p:nvSpPr>
         <p:spPr>
           <a:xfrm>
-            <a:off x="3447288" y="3950208"/>
-            <a:ext cx="2350008" cy="219456"/>
+            <a:off x="8494776" y="3310128"/>
+            <a:ext cx="3035808" cy="219456"/>
           </a:xfrm>
           <a:prstGeom prst="rect">
             <a:avLst/>
@@ -21356,67 +21488,21 @@
                 </a:solidFill>
                 <a:latin typeface="Consolas"/>
               </a:rPr>
-              <a:t>macro; relay +1.4, small cell +0.7</a:t>
+              <a:t>ranks 14 of 627 candidates</a:t>
             </a:r>
           </a:p>
         </p:txBody>
       </p:sp>
       <p:sp>
         <p:nvSpPr>
-          <p:cNvPr id="17" name="Rectangle 16"/>
-          <p:cNvSpPr/>
-          <p:nvPr/>
-        </p:nvSpPr>
-        <p:spPr>
-          <a:xfrm>
-            <a:off x="6135624" y="3291840"/>
-            <a:ext cx="2606040" cy="932688"/>
-          </a:xfrm>
-          <a:prstGeom prst="rect">
-            <a:avLst/>
-          </a:prstGeom>
-          <a:solidFill>
-            <a:srgbClr val="F1F4EF"/>
-          </a:solidFill>
-          <a:ln w="12700">
-            <a:solidFill>
-              <a:srgbClr val="C3CCBF"/>
-            </a:solidFill>
-          </a:ln>
-          <a:effectLst/>
-        </p:spPr>
-        <p:style>
-          <a:lnRef idx="1">
-            <a:schemeClr val="accent1"/>
-          </a:lnRef>
-          <a:fillRef idx="3">
-            <a:schemeClr val="accent1"/>
-          </a:fillRef>
-          <a:effectRef idx="2">
-            <a:schemeClr val="accent1"/>
-          </a:effectRef>
-          <a:fontRef idx="minor">
-            <a:schemeClr val="lt1"/>
-          </a:fontRef>
-        </p:style>
-        <p:txBody>
-          <a:bodyPr rtlCol="0" anchor="ctr"/>
-          <a:lstStyle/>
-          <a:p>
-            <a:pPr algn="ctr"/>
-          </a:p>
-        </p:txBody>
-      </p:sp>
-      <p:sp>
-        <p:nvSpPr>
-          <p:cNvPr id="18" name="TextBox 17"/>
+          <p:cNvPr id="22" name="TextBox 21"/>
           <p:cNvSpPr txBox="1"/>
           <p:nvPr/>
         </p:nvSpPr>
         <p:spPr>
           <a:xfrm>
-            <a:off x="6263640" y="3383280"/>
-            <a:ext cx="2350008" cy="146304"/>
+            <a:off x="8366760" y="3657600"/>
+            <a:ext cx="3291840" cy="1325880"/>
           </a:xfrm>
           <a:prstGeom prst="rect">
             <a:avLst/>
@@ -21431,248 +21517,27 @@
           <a:p>
             <a:pPr algn="l"/>
             <a:r>
-              <a:rPr sz="800" b="0" spc="120">
+              <a:rPr sz="1050" b="0">
                 <a:solidFill>
-                  <a:srgbClr val="65726B"/>
-                </a:solidFill>
-                <a:latin typeface="Consolas"/>
-              </a:rPr>
-              <a:t>RQ3 · ROBUSTNESS</a:t>
-            </a:r>
-          </a:p>
-        </p:txBody>
-      </p:sp>
-      <p:sp>
-        <p:nvSpPr>
-          <p:cNvPr id="19" name="TextBox 18"/>
-          <p:cNvSpPr txBox="1"/>
-          <p:nvPr/>
-        </p:nvSpPr>
-        <p:spPr>
-          <a:xfrm>
-            <a:off x="6263640" y="3547872"/>
-            <a:ext cx="2350008" cy="384048"/>
-          </a:xfrm>
-          <a:prstGeom prst="rect">
-            <a:avLst/>
-          </a:prstGeom>
-          <a:noFill/>
-        </p:spPr>
-        <p:txBody>
-          <a:bodyPr wrap="square" anchor="t" lIns="0" rIns="0" tIns="0" bIns="0">
-            <a:spAutoFit/>
-          </a:bodyPr>
-          <a:lstStyle/>
-          <a:p>
-            <a:pPr algn="l"/>
-            <a:r>
-              <a:rPr sz="2000" b="1">
-                <a:solidFill>
-                  <a:srgbClr val="5B3A9B"/>
+                  <a:srgbClr val="3A4842"/>
                 </a:solidFill>
                 <a:latin typeface="Archivo"/>
               </a:rPr>
-              <a:t>97–100%</a:t>
+              <a:t>The hypothesis holds, narrowly: +2.1 points of route-km. The naive choice already sits in the top 2% of candidates, because on this survey the deficit is one coherent region. On a survey with several holes it would not be.</a:t>
             </a:r>
           </a:p>
         </p:txBody>
       </p:sp>
       <p:sp>
         <p:nvSpPr>
-          <p:cNvPr id="20" name="TextBox 19"/>
-          <p:cNvSpPr txBox="1"/>
-          <p:nvPr/>
-        </p:nvSpPr>
-        <p:spPr>
-          <a:xfrm>
-            <a:off x="6263640" y="3950208"/>
-            <a:ext cx="2350008" cy="219456"/>
-          </a:xfrm>
-          <a:prstGeom prst="rect">
-            <a:avLst/>
-          </a:prstGeom>
-          <a:noFill/>
-        </p:spPr>
-        <p:txBody>
-          <a:bodyPr wrap="square" anchor="t" lIns="0" rIns="0" tIns="0" bIns="0">
-            <a:spAutoFit/>
-          </a:bodyPr>
-          <a:lstStyle/>
-          <a:p>
-            <a:pPr algn="l"/>
-            <a:r>
-              <a:rPr sz="850" b="0">
-                <a:solidFill>
-                  <a:srgbClr val="65726B"/>
-                </a:solidFill>
-                <a:latin typeface="Consolas"/>
-              </a:rPr>
-              <a:t>of fading draws within 2 km</a:t>
-            </a:r>
-          </a:p>
-        </p:txBody>
-      </p:sp>
-      <p:sp>
-        <p:nvSpPr>
-          <p:cNvPr id="21" name="Rectangle 20"/>
-          <p:cNvSpPr/>
-          <p:nvPr/>
-        </p:nvSpPr>
-        <p:spPr>
-          <a:xfrm>
-            <a:off x="8951976" y="3291840"/>
-            <a:ext cx="2606040" cy="932688"/>
-          </a:xfrm>
-          <a:prstGeom prst="rect">
-            <a:avLst/>
-          </a:prstGeom>
-          <a:solidFill>
-            <a:srgbClr val="F1F4EF"/>
-          </a:solidFill>
-          <a:ln w="12700">
-            <a:solidFill>
-              <a:srgbClr val="C3CCBF"/>
-            </a:solidFill>
-          </a:ln>
-          <a:effectLst/>
-        </p:spPr>
-        <p:style>
-          <a:lnRef idx="1">
-            <a:schemeClr val="accent1"/>
-          </a:lnRef>
-          <a:fillRef idx="3">
-            <a:schemeClr val="accent1"/>
-          </a:fillRef>
-          <a:effectRef idx="2">
-            <a:schemeClr val="accent1"/>
-          </a:effectRef>
-          <a:fontRef idx="minor">
-            <a:schemeClr val="lt1"/>
-          </a:fontRef>
-        </p:style>
-        <p:txBody>
-          <a:bodyPr rtlCol="0" anchor="ctr"/>
-          <a:lstStyle/>
-          <a:p>
-            <a:pPr algn="ctr"/>
-          </a:p>
-        </p:txBody>
-      </p:sp>
-      <p:sp>
-        <p:nvSpPr>
-          <p:cNvPr id="22" name="TextBox 21"/>
-          <p:cNvSpPr txBox="1"/>
-          <p:nvPr/>
-        </p:nvSpPr>
-        <p:spPr>
-          <a:xfrm>
-            <a:off x="9079992" y="3383280"/>
-            <a:ext cx="2350008" cy="146304"/>
-          </a:xfrm>
-          <a:prstGeom prst="rect">
-            <a:avLst/>
-          </a:prstGeom>
-          <a:noFill/>
-        </p:spPr>
-        <p:txBody>
-          <a:bodyPr wrap="square" anchor="t" lIns="0" rIns="0" tIns="0" bIns="0">
-            <a:spAutoFit/>
-          </a:bodyPr>
-          <a:lstStyle/>
-          <a:p>
-            <a:pPr algn="l"/>
-            <a:r>
-              <a:rPr sz="800" b="0" spc="120">
-                <a:solidFill>
-                  <a:srgbClr val="65726B"/>
-                </a:solidFill>
-                <a:latin typeface="Consolas"/>
-              </a:rPr>
-              <a:t>RQ4 · CONSTRAINTS</a:t>
-            </a:r>
-          </a:p>
-        </p:txBody>
-      </p:sp>
-      <p:sp>
-        <p:nvSpPr>
-          <p:cNvPr id="23" name="TextBox 22"/>
-          <p:cNvSpPr txBox="1"/>
-          <p:nvPr/>
-        </p:nvSpPr>
-        <p:spPr>
-          <a:xfrm>
-            <a:off x="9079992" y="3547872"/>
-            <a:ext cx="2350008" cy="384048"/>
-          </a:xfrm>
-          <a:prstGeom prst="rect">
-            <a:avLst/>
-          </a:prstGeom>
-          <a:noFill/>
-        </p:spPr>
-        <p:txBody>
-          <a:bodyPr wrap="square" anchor="t" lIns="0" rIns="0" tIns="0" bIns="0">
-            <a:spAutoFit/>
-          </a:bodyPr>
-          <a:lstStyle/>
-          <a:p>
-            <a:pPr algn="l"/>
-            <a:r>
-              <a:rPr sz="2000" b="1">
-                <a:solidFill>
-                  <a:srgbClr val="8C1D40"/>
-                </a:solidFill>
-                <a:latin typeface="Archivo"/>
-              </a:rPr>
-              <a:t>5 layers</a:t>
-            </a:r>
-          </a:p>
-        </p:txBody>
-      </p:sp>
-      <p:sp>
-        <p:nvSpPr>
-          <p:cNvPr id="24" name="TextBox 23"/>
-          <p:cNvSpPr txBox="1"/>
-          <p:nvPr/>
-        </p:nvSpPr>
-        <p:spPr>
-          <a:xfrm>
-            <a:off x="9079992" y="3950208"/>
-            <a:ext cx="2350008" cy="219456"/>
-          </a:xfrm>
-          <a:prstGeom prst="rect">
-            <a:avLst/>
-          </a:prstGeom>
-          <a:noFill/>
-        </p:spPr>
-        <p:txBody>
-          <a:bodyPr wrap="square" anchor="t" lIns="0" rIns="0" tIns="0" bIns="0">
-            <a:spAutoFit/>
-          </a:bodyPr>
-          <a:lstStyle/>
-          <a:p>
-            <a:pPr algn="l"/>
-            <a:r>
-              <a:rPr sz="850" b="0">
-                <a:solidFill>
-                  <a:srgbClr val="65726B"/>
-                </a:solidFill>
-                <a:latin typeface="Consolas"/>
-              </a:rPr>
-              <a:t>open-data buildability</a:t>
-            </a:r>
-          </a:p>
-        </p:txBody>
-      </p:sp>
-      <p:sp>
-        <p:nvSpPr>
-          <p:cNvPr id="25" name="Rectangle 24"/>
-          <p:cNvSpPr/>
-          <p:nvPr/>
-        </p:nvSpPr>
-        <p:spPr>
-          <a:xfrm>
-            <a:off x="502920" y="4526280"/>
-            <a:ext cx="5532120" cy="1783080"/>
+          <p:cNvPr id="23" name="Rectangle 22"/>
+          <p:cNvSpPr/>
+          <p:nvPr/>
+        </p:nvSpPr>
+        <p:spPr>
+          <a:xfrm>
+            <a:off x="502920" y="5257800"/>
+            <a:ext cx="11155680" cy="1005840"/>
           </a:xfrm>
           <a:prstGeom prst="rect">
             <a:avLst/>
@@ -21711,14 +21576,14 @@
       </p:sp>
       <p:sp>
         <p:nvSpPr>
-          <p:cNvPr id="26" name="Rectangle 25"/>
-          <p:cNvSpPr/>
-          <p:nvPr/>
-        </p:nvSpPr>
-        <p:spPr>
-          <a:xfrm>
-            <a:off x="502920" y="4526280"/>
-            <a:ext cx="54864" cy="1783080"/>
+          <p:cNvPr id="24" name="Rectangle 23"/>
+          <p:cNvSpPr/>
+          <p:nvPr/>
+        </p:nvSpPr>
+        <p:spPr>
+          <a:xfrm>
+            <a:off x="502920" y="5257800"/>
+            <a:ext cx="54864" cy="1005840"/>
           </a:xfrm>
           <a:prstGeom prst="rect">
             <a:avLst/>
@@ -21755,14 +21620,14 @@
       </p:sp>
       <p:sp>
         <p:nvSpPr>
-          <p:cNvPr id="27" name="TextBox 26"/>
+          <p:cNvPr id="25" name="TextBox 24"/>
           <p:cNvSpPr txBox="1"/>
           <p:nvPr/>
         </p:nvSpPr>
         <p:spPr>
           <a:xfrm>
-            <a:off x="777240" y="4663440"/>
-            <a:ext cx="5029200" cy="256032"/>
+            <a:off x="777240" y="5394960"/>
+            <a:ext cx="10607040" cy="237744"/>
           </a:xfrm>
           <a:prstGeom prst="rect">
             <a:avLst/>
@@ -21783,21 +21648,21 @@
                 </a:solidFill>
                 <a:latin typeface="Archivo"/>
               </a:rPr>
-              <a:t>The brief's hypothesis, tested</a:t>
+              <a:t>The finding inside RQ3 that matters most</a:t>
             </a:r>
           </a:p>
         </p:txBody>
       </p:sp>
       <p:sp>
         <p:nvSpPr>
-          <p:cNvPr id="28" name="TextBox 27"/>
+          <p:cNvPr id="26" name="TextBox 25"/>
           <p:cNvSpPr txBox="1"/>
           <p:nvPr/>
         </p:nvSpPr>
         <p:spPr>
           <a:xfrm>
-            <a:off x="777240" y="4992624"/>
-            <a:ext cx="5029200" cy="1234440"/>
+            <a:off x="777240" y="5687568"/>
+            <a:ext cx="10607040" cy="512064"/>
           </a:xfrm>
           <a:prstGeom prst="rect">
             <a:avLst/>
@@ -21812,107 +21677,20 @@
           <a:p>
             <a:pPr algn="l"/>
             <a:r>
-              <a:rPr sz="1100" b="0">
+              <a:rPr sz="1150" b="0">
                 <a:solidFill>
                   <a:srgbClr val="3A4842"/>
                 </a:solidFill>
                 <a:latin typeface="Archivo"/>
               </a:rPr>
-              <a:t>Optimising beats siting at the single worst measured point — but only by +2.1 points of route-km (69.2% vs 67.1%). That naive choice ranks 14 of 627 candidates. On this survey the worst point sits near the optimum because the hole is one coherent region; on a survey with several holes it would not.</a:t>
+              <a:t>Model choice moves the macro site further than any objective assumption — but only because a model that fails its own held-out test is in the pool. Averaging over an unvalidated model is not robustness, it is noise. Validate first, then average: that is what RQ1 is for.</a:t>
             </a:r>
           </a:p>
         </p:txBody>
       </p:sp>
       <p:sp>
         <p:nvSpPr>
-          <p:cNvPr id="29" name="TextBox 28"/>
-          <p:cNvSpPr txBox="1"/>
-          <p:nvPr/>
-        </p:nvSpPr>
-        <p:spPr>
-          <a:xfrm>
-            <a:off x="6355080" y="4526280"/>
-            <a:ext cx="5303520" cy="1783080"/>
-          </a:xfrm>
-          <a:prstGeom prst="rect">
-            <a:avLst/>
-          </a:prstGeom>
-          <a:noFill/>
-        </p:spPr>
-        <p:txBody>
-          <a:bodyPr wrap="square" lIns="0" rIns="0" tIns="0" bIns="0">
-            <a:spAutoFit/>
-          </a:bodyPr>
-          <a:lstStyle/>
-          <a:p>
-            <a:pPr>
-              <a:spcAft>
-                <a:spcPts val="600"/>
-              </a:spcAft>
-            </a:pPr>
-            <a:r>
-              <a:rPr sz="1050" b="1">
-                <a:solidFill>
-                  <a:srgbClr val="16211C"/>
-                </a:solidFill>
-                <a:latin typeface="Archivo"/>
-              </a:rPr>
-              <a:t>— The two physics models agree; the learned one does not.</a:t>
-            </a:r>
-          </a:p>
-          <a:p>
-            <a:pPr>
-              <a:spcAft>
-                <a:spcPts val="600"/>
-              </a:spcAft>
-            </a:pPr>
-            <a:r>
-              <a:rPr sz="1050" b="0">
-                <a:solidFill>
-                  <a:srgbClr val="3A4842"/>
-                </a:solidFill>
-                <a:latin typeface="Archivo"/>
-              </a:rPr>
-              <a:t>— Baseline and ray tracing both site south-west. The FNO sites ten kilometres east for twelve points less coverage — exactly what its held-out score predicts.</a:t>
-            </a:r>
-          </a:p>
-          <a:p>
-            <a:pPr>
-              <a:spcAft>
-                <a:spcPts val="600"/>
-              </a:spcAft>
-            </a:pPr>
-            <a:r>
-              <a:rPr sz="1050" b="1">
-                <a:solidFill>
-                  <a:srgbClr val="16211C"/>
-                </a:solidFill>
-                <a:latin typeface="Archivo"/>
-              </a:rPr>
-              <a:t>— Read the ratios, not the percentages.</a:t>
-            </a:r>
-          </a:p>
-          <a:p>
-            <a:pPr>
-              <a:spcAft>
-                <a:spcPts val="600"/>
-              </a:spcAft>
-            </a:pPr>
-            <a:r>
-              <a:rPr sz="1050" b="0">
-                <a:solidFill>
-                  <a:srgbClr val="3A4842"/>
-                </a:solidFill>
-                <a:latin typeface="Archivo"/>
-              </a:rPr>
-              <a:t>— Received power generalises; whether a cell HAS service does not — 60.5% agreement against a 63.9% base rate.</a:t>
-            </a:r>
-          </a:p>
-        </p:txBody>
-      </p:sp>
-      <p:sp>
-        <p:nvSpPr>
-          <p:cNvPr id="30" name="TextBox 29"/>
+          <p:cNvPr id="27" name="TextBox 26"/>
           <p:cNvSpPr txBox="1"/>
           <p:nvPr/>
         </p:nvSpPr>
@@ -21940,7 +21718,7 @@
                 </a:solidFill>
                 <a:latin typeface="Consolas"/>
               </a:rPr>
-              <a:t>bundles/*.json · reports/hypothesis_test.json · 200 fading draws</a:t>
+              <a:t>reports/sensitivity.json · reports/hypothesis_test.json · bundles/*.json</a:t>
             </a:r>
           </a:p>
         </p:txBody>

--- a/ARA_Challenge3.pptx
+++ b/ARA_Challenge3.pptx
@@ -8517,9 +8517,9 @@
           </c:spPr>
           <c:cat>
             <c:strRef>
-              <c:f>Sheet1!$A$2:$A$4</c:f>
+              <c:f>Sheet1!$A$2:$A$5</c:f>
               <c:strCache>
-                <c:ptCount val="3"/>
+                <c:ptCount val="4"/>
                 <c:pt idx="0">
                   <c:v>Baseline</c:v>
                 </c:pt>
@@ -8528,16 +8528,19 @@
                 </c:pt>
                 <c:pt idx="2">
                   <c:v>Deep learning</c:v>
+                </c:pt>
+                <c:pt idx="3">
+                  <c:v>PINN</c:v>
                 </c:pt>
               </c:strCache>
             </c:strRef>
           </c:cat>
           <c:val>
             <c:numRef>
-              <c:f>Sheet1!$B$2:$B$4</c:f>
+              <c:f>Sheet1!$B$2:$B$5</c:f>
               <c:numCache>
                 <c:formatCode>General</c:formatCode>
-                <c:ptCount val="3"/>
+                <c:ptCount val="4"/>
                 <c:pt idx="0">
                   <c:v>7.35</c:v>
                 </c:pt>
@@ -8546,6 +8549,9 @@
                 </c:pt>
                 <c:pt idx="2">
                   <c:v>7.26</c:v>
+                </c:pt>
+                <c:pt idx="3">
+                  <c:v>5.63</c:v>
                 </c:pt>
               </c:numCache>
             </c:numRef>
@@ -8575,9 +8581,9 @@
           </c:spPr>
           <c:cat>
             <c:strRef>
-              <c:f>Sheet1!$A$2:$A$4</c:f>
+              <c:f>Sheet1!$A$2:$A$5</c:f>
               <c:strCache>
-                <c:ptCount val="3"/>
+                <c:ptCount val="4"/>
                 <c:pt idx="0">
                   <c:v>Baseline</c:v>
                 </c:pt>
@@ -8586,16 +8592,19 @@
                 </c:pt>
                 <c:pt idx="2">
                   <c:v>Deep learning</c:v>
+                </c:pt>
+                <c:pt idx="3">
+                  <c:v>PINN</c:v>
                 </c:pt>
               </c:strCache>
             </c:strRef>
           </c:cat>
           <c:val>
             <c:numRef>
-              <c:f>Sheet1!$C$2:$C$4</c:f>
+              <c:f>Sheet1!$C$2:$C$5</c:f>
               <c:numCache>
                 <c:formatCode>General</c:formatCode>
-                <c:ptCount val="3"/>
+                <c:ptCount val="4"/>
                 <c:pt idx="0">
                   <c:v>9.59</c:v>
                 </c:pt>
@@ -8604,6 +8613,9 @@
                 </c:pt>
                 <c:pt idx="2">
                   <c:v>14.04</c:v>
+                </c:pt>
+                <c:pt idx="3">
+                  <c:v>15.83</c:v>
                 </c:pt>
               </c:numCache>
             </c:numRef>
@@ -20015,7 +20027,7 @@
                           </a:solidFill>
                           <a:latin typeface="Consolas"/>
                         </a:rPr>
-                        <a:t>PINN</a:t>
+                        <a:t>PINN — ReVeal-MT</a:t>
                       </a:r>
                     </a:p>
                   </a:txBody>
@@ -20038,7 +20050,7 @@
                           </a:solidFill>
                           <a:latin typeface="Consolas"/>
                         </a:rPr>
-                        <a:t>—</a:t>
+                        <a:t>5.63</a:t>
                       </a:r>
                     </a:p>
                   </a:txBody>
@@ -20061,7 +20073,7 @@
                           </a:solidFill>
                           <a:latin typeface="Consolas"/>
                         </a:rPr>
-                        <a:t>—</a:t>
+                        <a:t>5.92</a:t>
                       </a:r>
                     </a:p>
                   </a:txBody>
@@ -20084,7 +20096,7 @@
                           </a:solidFill>
                           <a:latin typeface="Consolas"/>
                         </a:rPr>
-                        <a:t>—</a:t>
+                        <a:t>15.83</a:t>
                       </a:r>
                     </a:p>
                   </a:txBody>
@@ -20107,7 +20119,7 @@
                           </a:solidFill>
                           <a:latin typeface="Consolas"/>
                         </a:rPr>
-                        <a:t>—</a:t>
+                        <a:t>15.09</a:t>
                       </a:r>
                     </a:p>
                   </a:txBody>
@@ -20130,7 +20142,7 @@
                           </a:solidFill>
                           <a:latin typeface="Consolas"/>
                         </a:rPr>
-                        <a:t>reserved</a:t>
+                        <a:t>-1.47</a:t>
                       </a:r>
                     </a:p>
                   </a:txBody>

--- a/ARA_Challenge3.pptx
+++ b/ARA_Challenge3.pptx
@@ -5152,7 +5152,7 @@
                 </a:solidFill>
                 <a:latin typeface="Archivo"/>
               </a:rPr>
-              <a:t>Four ways to predict where nobody drove</a:t>
+              <a:t>Four ways to fill in the map</a:t>
             </a:r>
           </a:p>
         </p:txBody>
@@ -5187,57 +5187,35 @@
                 </a:solidFill>
                 <a:latin typeface="Archivo"/>
               </a:rPr>
-              <a:t>They share one interface and nothing else, so each can be wrong in its own way and one testbench can tell.</a:t>
+              <a:t>Same ground, same scale. Each reads something different and each can be wrong in its own way.</a:t>
             </a:r>
           </a:p>
         </p:txBody>
       </p:sp>
-      <p:sp>
-        <p:nvSpPr>
-          <p:cNvPr id="7" name="Rectangle 6"/>
-          <p:cNvSpPr/>
-          <p:nvPr/>
-        </p:nvSpPr>
-        <p:spPr>
-          <a:xfrm>
-            <a:off x="502920" y="1828800"/>
-            <a:ext cx="2606040" cy="3108960"/>
-          </a:xfrm>
-          <a:prstGeom prst="rect">
-            <a:avLst/>
-          </a:prstGeom>
-          <a:solidFill>
-            <a:srgbClr val="F5F2EE"/>
-          </a:solidFill>
-          <a:ln w="19050">
-            <a:solidFill>
-              <a:srgbClr val="9A6E1E"/>
-            </a:solidFill>
-          </a:ln>
-          <a:effectLst/>
-        </p:spPr>
-        <p:style>
-          <a:lnRef idx="1">
-            <a:schemeClr val="accent1"/>
-          </a:lnRef>
-          <a:fillRef idx="3">
-            <a:schemeClr val="accent1"/>
-          </a:fillRef>
-          <a:effectRef idx="2">
-            <a:schemeClr val="accent1"/>
-          </a:effectRef>
-          <a:fontRef idx="minor">
-            <a:schemeClr val="lt1"/>
-          </a:fontRef>
-        </p:style>
-        <p:txBody>
-          <a:bodyPr rtlCol="0" anchor="ctr"/>
-          <a:lstStyle/>
-          <a:p>
-            <a:pPr algn="ctr"/>
-          </a:p>
-        </p:txBody>
-      </p:sp>
+      <p:pic>
+        <p:nvPicPr>
+          <p:cNvPr id="7" name="Picture 6" descr="map_baseline.png"/>
+          <p:cNvPicPr>
+            <a:picLocks noChangeAspect="1"/>
+          </p:cNvPicPr>
+          <p:nvPr/>
+        </p:nvPicPr>
+        <p:blipFill>
+          <a:blip r:embed="rId2"/>
+          <a:stretch>
+            <a:fillRect/>
+          </a:stretch>
+        </p:blipFill>
+        <p:spPr>
+          <a:xfrm>
+            <a:off x="457200" y="1737360"/>
+            <a:ext cx="2697480" cy="2466267"/>
+          </a:xfrm>
+          <a:prstGeom prst="rect">
+            <a:avLst/>
+          </a:prstGeom>
+        </p:spPr>
+      </p:pic>
       <p:sp>
         <p:nvSpPr>
           <p:cNvPr id="8" name="TextBox 7"/>
@@ -5246,8 +5224,8 @@
         </p:nvSpPr>
         <p:spPr>
           <a:xfrm>
-            <a:off x="685800" y="1975104"/>
-            <a:ext cx="2286000" cy="182880"/>
+            <a:off x="502920" y="4407408"/>
+            <a:ext cx="2697480" cy="384048"/>
           </a:xfrm>
           <a:prstGeom prst="rect">
             <a:avLst/>
@@ -5262,27 +5240,250 @@
           <a:p>
             <a:pPr algn="l"/>
             <a:r>
-              <a:rPr sz="850" b="1" spc="120">
+              <a:rPr sz="1150" b="0">
                 <a:solidFill>
-                  <a:srgbClr val="9A6E1E"/>
+                  <a:srgbClr val="3A4842"/>
                 </a:solidFill>
-                <a:latin typeface="Consolas"/>
+                <a:latin typeface="Archivo"/>
               </a:rPr>
-              <a:t>BASELINE</a:t>
+              <a:t>reads distance and bearing</a:t>
             </a:r>
           </a:p>
         </p:txBody>
       </p:sp>
-      <p:sp>
-        <p:nvSpPr>
-          <p:cNvPr id="9" name="TextBox 8"/>
+      <p:pic>
+        <p:nvPicPr>
+          <p:cNvPr id="9" name="Picture 8" descr="map_ray_tracing.png"/>
+          <p:cNvPicPr>
+            <a:picLocks noChangeAspect="1"/>
+          </p:cNvPicPr>
+          <p:nvPr/>
+        </p:nvPicPr>
+        <p:blipFill>
+          <a:blip r:embed="rId3"/>
+          <a:stretch>
+            <a:fillRect/>
+          </a:stretch>
+        </p:blipFill>
+        <p:spPr>
+          <a:xfrm>
+            <a:off x="3282696" y="1737360"/>
+            <a:ext cx="2697480" cy="2466267"/>
+          </a:xfrm>
+          <a:prstGeom prst="rect">
+            <a:avLst/>
+          </a:prstGeom>
+        </p:spPr>
+      </p:pic>
+      <p:sp>
+        <p:nvSpPr>
+          <p:cNvPr id="10" name="TextBox 9"/>
           <p:cNvSpPr txBox="1"/>
           <p:nvPr/>
         </p:nvSpPr>
         <p:spPr>
           <a:xfrm>
-            <a:off x="685800" y="2194560"/>
-            <a:ext cx="2286000" cy="457200"/>
+            <a:off x="3328416" y="4407408"/>
+            <a:ext cx="2697480" cy="384048"/>
+          </a:xfrm>
+          <a:prstGeom prst="rect">
+            <a:avLst/>
+          </a:prstGeom>
+          <a:noFill/>
+        </p:spPr>
+        <p:txBody>
+          <a:bodyPr wrap="square" anchor="t" lIns="0" rIns="0" tIns="0" bIns="0">
+            <a:spAutoFit/>
+          </a:bodyPr>
+          <a:lstStyle/>
+          <a:p>
+            <a:pPr algn="l"/>
+            <a:r>
+              <a:rPr sz="1150" b="0">
+                <a:solidFill>
+                  <a:srgbClr val="3A4842"/>
+                </a:solidFill>
+                <a:latin typeface="Archivo"/>
+              </a:rPr>
+              <a:t>reads terrain and buildings</a:t>
+            </a:r>
+          </a:p>
+        </p:txBody>
+      </p:sp>
+      <p:pic>
+        <p:nvPicPr>
+          <p:cNvPr id="11" name="Picture 10" descr="map_deep_learning.png"/>
+          <p:cNvPicPr>
+            <a:picLocks noChangeAspect="1"/>
+          </p:cNvPicPr>
+          <p:nvPr/>
+        </p:nvPicPr>
+        <p:blipFill>
+          <a:blip r:embed="rId4"/>
+          <a:stretch>
+            <a:fillRect/>
+          </a:stretch>
+        </p:blipFill>
+        <p:spPr>
+          <a:xfrm>
+            <a:off x="6108192" y="1737360"/>
+            <a:ext cx="2697480" cy="2466267"/>
+          </a:xfrm>
+          <a:prstGeom prst="rect">
+            <a:avLst/>
+          </a:prstGeom>
+        </p:spPr>
+      </p:pic>
+      <p:sp>
+        <p:nvSpPr>
+          <p:cNvPr id="12" name="TextBox 11"/>
+          <p:cNvSpPr txBox="1"/>
+          <p:nvPr/>
+        </p:nvSpPr>
+        <p:spPr>
+          <a:xfrm>
+            <a:off x="6153912" y="4407408"/>
+            <a:ext cx="2697480" cy="384048"/>
+          </a:xfrm>
+          <a:prstGeom prst="rect">
+            <a:avLst/>
+          </a:prstGeom>
+          <a:noFill/>
+        </p:spPr>
+        <p:txBody>
+          <a:bodyPr wrap="square" anchor="t" lIns="0" rIns="0" tIns="0" bIns="0">
+            <a:spAutoFit/>
+          </a:bodyPr>
+          <a:lstStyle/>
+          <a:p>
+            <a:pPr algn="l"/>
+            <a:r>
+              <a:rPr sz="1150" b="0">
+                <a:solidFill>
+                  <a:srgbClr val="3A4842"/>
+                </a:solidFill>
+                <a:latin typeface="Archivo"/>
+              </a:rPr>
+              <a:t>reads the shape of the ground</a:t>
+            </a:r>
+          </a:p>
+        </p:txBody>
+      </p:sp>
+      <p:pic>
+        <p:nvPicPr>
+          <p:cNvPr id="13" name="Picture 12" descr="map_pinn.png"/>
+          <p:cNvPicPr>
+            <a:picLocks noChangeAspect="1"/>
+          </p:cNvPicPr>
+          <p:nvPr/>
+        </p:nvPicPr>
+        <p:blipFill>
+          <a:blip r:embed="rId5"/>
+          <a:stretch>
+            <a:fillRect/>
+          </a:stretch>
+        </p:blipFill>
+        <p:spPr>
+          <a:xfrm>
+            <a:off x="8933688" y="1737360"/>
+            <a:ext cx="2697480" cy="2466267"/>
+          </a:xfrm>
+          <a:prstGeom prst="rect">
+            <a:avLst/>
+          </a:prstGeom>
+        </p:spPr>
+      </p:pic>
+      <p:sp>
+        <p:nvSpPr>
+          <p:cNvPr id="14" name="TextBox 13"/>
+          <p:cNvSpPr txBox="1"/>
+          <p:nvPr/>
+        </p:nvSpPr>
+        <p:spPr>
+          <a:xfrm>
+            <a:off x="8979408" y="4407408"/>
+            <a:ext cx="2697480" cy="384048"/>
+          </a:xfrm>
+          <a:prstGeom prst="rect">
+            <a:avLst/>
+          </a:prstGeom>
+          <a:noFill/>
+        </p:spPr>
+        <p:txBody>
+          <a:bodyPr wrap="square" anchor="t" lIns="0" rIns="0" tIns="0" bIns="0">
+            <a:spAutoFit/>
+          </a:bodyPr>
+          <a:lstStyle/>
+          <a:p>
+            <a:pPr algn="l"/>
+            <a:r>
+              <a:rPr sz="1150" b="0">
+                <a:solidFill>
+                  <a:srgbClr val="3A4842"/>
+                </a:solidFill>
+                <a:latin typeface="Archivo"/>
+              </a:rPr>
+              <a:t>reads position, guided by physics</a:t>
+            </a:r>
+          </a:p>
+        </p:txBody>
+      </p:sp>
+      <p:sp>
+        <p:nvSpPr>
+          <p:cNvPr id="15" name="Rectangle 14"/>
+          <p:cNvSpPr/>
+          <p:nvPr/>
+        </p:nvSpPr>
+        <p:spPr>
+          <a:xfrm>
+            <a:off x="457200" y="4983480"/>
+            <a:ext cx="11292840" cy="914400"/>
+          </a:xfrm>
+          <a:prstGeom prst="rect">
+            <a:avLst/>
+          </a:prstGeom>
+          <a:solidFill>
+            <a:srgbClr val="F5F2EE"/>
+          </a:solidFill>
+          <a:ln w="12700">
+            <a:solidFill>
+              <a:srgbClr val="D9D3CB"/>
+            </a:solidFill>
+          </a:ln>
+          <a:effectLst/>
+        </p:spPr>
+        <p:style>
+          <a:lnRef idx="1">
+            <a:schemeClr val="accent1"/>
+          </a:lnRef>
+          <a:fillRef idx="3">
+            <a:schemeClr val="accent1"/>
+          </a:fillRef>
+          <a:effectRef idx="2">
+            <a:schemeClr val="accent1"/>
+          </a:effectRef>
+          <a:fontRef idx="minor">
+            <a:schemeClr val="lt1"/>
+          </a:fontRef>
+        </p:style>
+        <p:txBody>
+          <a:bodyPr rtlCol="0" anchor="ctr"/>
+          <a:lstStyle/>
+          <a:p>
+            <a:pPr algn="ctr"/>
+          </a:p>
+        </p:txBody>
+      </p:sp>
+      <p:sp>
+        <p:nvSpPr>
+          <p:cNvPr id="16" name="TextBox 15"/>
+          <p:cNvSpPr txBox="1"/>
+          <p:nvPr/>
+        </p:nvSpPr>
+        <p:spPr>
+          <a:xfrm>
+            <a:off x="731520" y="5120640"/>
+            <a:ext cx="10789920" cy="292608"/>
           </a:xfrm>
           <a:prstGeom prst="rect">
             <a:avLst/>
@@ -5303,21 +5504,21 @@
                 </a:solidFill>
                 <a:latin typeface="Archivo"/>
               </a:rPr>
-              <a:t>Fitted physics</a:t>
+              <a:t>They agree on how much is covered — and disagree about where</a:t>
             </a:r>
           </a:p>
         </p:txBody>
       </p:sp>
       <p:sp>
         <p:nvSpPr>
-          <p:cNvPr id="10" name="TextBox 9"/>
+          <p:cNvPr id="17" name="TextBox 16"/>
           <p:cNvSpPr txBox="1"/>
           <p:nvPr/>
         </p:nvSpPr>
         <p:spPr>
           <a:xfrm>
-            <a:off x="685800" y="2743200"/>
-            <a:ext cx="2286000" cy="164592"/>
+            <a:off x="731520" y="5440680"/>
+            <a:ext cx="10789920" cy="365760"/>
           </a:xfrm>
           <a:prstGeom prst="rect">
             <a:avLst/>
@@ -5332,1158 +5533,20 @@
           <a:p>
             <a:pPr algn="l"/>
             <a:r>
-              <a:rPr sz="750" b="0" spc="110">
-                <a:solidFill>
-                  <a:srgbClr val="79716B"/>
-                </a:solidFill>
-                <a:latin typeface="Consolas"/>
-              </a:rPr>
-              <a:t>READS</a:t>
-            </a:r>
-          </a:p>
-        </p:txBody>
-      </p:sp>
-      <p:sp>
-        <p:nvSpPr>
-          <p:cNvPr id="11" name="TextBox 10"/>
-          <p:cNvSpPr txBox="1"/>
-          <p:nvPr/>
-        </p:nvSpPr>
-        <p:spPr>
-          <a:xfrm>
-            <a:off x="685800" y="2926080"/>
-            <a:ext cx="2286000" cy="274320"/>
-          </a:xfrm>
-          <a:prstGeom prst="rect">
-            <a:avLst/>
-          </a:prstGeom>
-          <a:noFill/>
-        </p:spPr>
-        <p:txBody>
-          <a:bodyPr wrap="square" anchor="t" lIns="0" rIns="0" tIns="0" bIns="0">
-            <a:spAutoFit/>
-          </a:bodyPr>
-          <a:lstStyle/>
-          <a:p>
-            <a:pPr algn="l"/>
-            <a:r>
-              <a:rPr sz="1200" b="1">
-                <a:solidFill>
-                  <a:srgbClr val="9A6E1E"/>
-                </a:solidFill>
-                <a:latin typeface="Consolas"/>
-              </a:rPr>
-              <a:t>distance and bearing</a:t>
-            </a:r>
-          </a:p>
-        </p:txBody>
-      </p:sp>
-      <p:sp>
-        <p:nvSpPr>
-          <p:cNvPr id="12" name="TextBox 11"/>
-          <p:cNvSpPr txBox="1"/>
-          <p:nvPr/>
-        </p:nvSpPr>
-        <p:spPr>
-          <a:xfrm>
-            <a:off x="685800" y="3364992"/>
-            <a:ext cx="2286000" cy="1005840"/>
-          </a:xfrm>
-          <a:prstGeom prst="rect">
-            <a:avLst/>
-          </a:prstGeom>
-          <a:noFill/>
-        </p:spPr>
-        <p:txBody>
-          <a:bodyPr wrap="square" anchor="t" lIns="0" rIns="0" tIns="0" bIns="0">
-            <a:spAutoFit/>
-          </a:bodyPr>
-          <a:lstStyle/>
-          <a:p>
-            <a:pPr algn="l"/>
-            <a:r>
-              <a:rPr sz="1050" b="0">
+              <a:rPr sz="1200" b="0">
                 <a:solidFill>
                   <a:srgbClr val="3A4842"/>
                 </a:solidFill>
                 <a:latin typeface="Archivo"/>
               </a:rPr>
-              <a:t>A curve fitted to the measurements themselves. Fast, and it carries a mechanism.</a:t>
+              <a:t>Between 34% and 41% of cells clear the threshold in all four. That spread is small. The question is which one is still right when you move it somewhere it has never seen.</a:t>
             </a:r>
           </a:p>
         </p:txBody>
       </p:sp>
       <p:sp>
         <p:nvSpPr>
-          <p:cNvPr id="13" name="Rectangle 12"/>
-          <p:cNvSpPr/>
-          <p:nvPr/>
-        </p:nvSpPr>
-        <p:spPr>
-          <a:xfrm>
-            <a:off x="685800" y="4434840"/>
-            <a:ext cx="2286000" cy="310896"/>
-          </a:xfrm>
-          <a:prstGeom prst="rect">
-            <a:avLst/>
-          </a:prstGeom>
-          <a:solidFill>
-            <a:srgbClr val="FFFFFF"/>
-          </a:solidFill>
-          <a:ln w="12700">
-            <a:solidFill>
-              <a:srgbClr val="D9D3CB"/>
-            </a:solidFill>
-          </a:ln>
-          <a:effectLst/>
-        </p:spPr>
-        <p:style>
-          <a:lnRef idx="1">
-            <a:schemeClr val="accent1"/>
-          </a:lnRef>
-          <a:fillRef idx="3">
-            <a:schemeClr val="accent1"/>
-          </a:fillRef>
-          <a:effectRef idx="2">
-            <a:schemeClr val="accent1"/>
-          </a:effectRef>
-          <a:fontRef idx="minor">
-            <a:schemeClr val="lt1"/>
-          </a:fontRef>
-        </p:style>
-        <p:txBody>
-          <a:bodyPr rtlCol="0" anchor="ctr"/>
-          <a:lstStyle/>
-          <a:p>
-            <a:pPr algn="ctr"/>
-          </a:p>
-        </p:txBody>
-      </p:sp>
-      <p:sp>
-        <p:nvSpPr>
-          <p:cNvPr id="14" name="TextBox 13"/>
-          <p:cNvSpPr txBox="1"/>
-          <p:nvPr/>
-        </p:nvSpPr>
-        <p:spPr>
-          <a:xfrm>
-            <a:off x="795528" y="4498848"/>
-            <a:ext cx="2103120" cy="219456"/>
-          </a:xfrm>
-          <a:prstGeom prst="rect">
-            <a:avLst/>
-          </a:prstGeom>
-          <a:noFill/>
-        </p:spPr>
-        <p:txBody>
-          <a:bodyPr wrap="square" anchor="t" lIns="0" rIns="0" tIns="0" bIns="0">
-            <a:spAutoFit/>
-          </a:bodyPr>
-          <a:lstStyle/>
-          <a:p>
-            <a:pPr algn="l"/>
-            <a:r>
-              <a:rPr sz="1000" b="1">
-                <a:solidFill>
-                  <a:srgbClr val="1C1917"/>
-                </a:solidFill>
-                <a:latin typeface="Consolas"/>
-              </a:rPr>
-              <a:t>fitted</a:t>
-            </a:r>
-          </a:p>
-        </p:txBody>
-      </p:sp>
-      <p:sp>
-        <p:nvSpPr>
-          <p:cNvPr id="15" name="Rectangle 14"/>
-          <p:cNvSpPr/>
-          <p:nvPr/>
-        </p:nvSpPr>
-        <p:spPr>
-          <a:xfrm>
-            <a:off x="3319272" y="1828800"/>
-            <a:ext cx="2606040" cy="3108960"/>
-          </a:xfrm>
-          <a:prstGeom prst="rect">
-            <a:avLst/>
-          </a:prstGeom>
-          <a:solidFill>
-            <a:srgbClr val="F5F2EE"/>
-          </a:solidFill>
-          <a:ln w="19050">
-            <a:solidFill>
-              <a:srgbClr val="3E5C6B"/>
-            </a:solidFill>
-          </a:ln>
-          <a:effectLst/>
-        </p:spPr>
-        <p:style>
-          <a:lnRef idx="1">
-            <a:schemeClr val="accent1"/>
-          </a:lnRef>
-          <a:fillRef idx="3">
-            <a:schemeClr val="accent1"/>
-          </a:fillRef>
-          <a:effectRef idx="2">
-            <a:schemeClr val="accent1"/>
-          </a:effectRef>
-          <a:fontRef idx="minor">
-            <a:schemeClr val="lt1"/>
-          </a:fontRef>
-        </p:style>
-        <p:txBody>
-          <a:bodyPr rtlCol="0" anchor="ctr"/>
-          <a:lstStyle/>
-          <a:p>
-            <a:pPr algn="ctr"/>
-          </a:p>
-        </p:txBody>
-      </p:sp>
-      <p:sp>
-        <p:nvSpPr>
-          <p:cNvPr id="16" name="TextBox 15"/>
-          <p:cNvSpPr txBox="1"/>
-          <p:nvPr/>
-        </p:nvSpPr>
-        <p:spPr>
-          <a:xfrm>
-            <a:off x="3502152" y="1975104"/>
-            <a:ext cx="2286000" cy="182880"/>
-          </a:xfrm>
-          <a:prstGeom prst="rect">
-            <a:avLst/>
-          </a:prstGeom>
-          <a:noFill/>
-        </p:spPr>
-        <p:txBody>
-          <a:bodyPr wrap="square" anchor="t" lIns="0" rIns="0" tIns="0" bIns="0">
-            <a:spAutoFit/>
-          </a:bodyPr>
-          <a:lstStyle/>
-          <a:p>
-            <a:pPr algn="l"/>
-            <a:r>
-              <a:rPr sz="850" b="1" spc="120">
-                <a:solidFill>
-                  <a:srgbClr val="3E5C6B"/>
-                </a:solidFill>
-                <a:latin typeface="Consolas"/>
-              </a:rPr>
-              <a:t>RAY TRACING</a:t>
-            </a:r>
-          </a:p>
-        </p:txBody>
-      </p:sp>
-      <p:sp>
-        <p:nvSpPr>
-          <p:cNvPr id="17" name="TextBox 16"/>
-          <p:cNvSpPr txBox="1"/>
-          <p:nvPr/>
-        </p:nvSpPr>
-        <p:spPr>
-          <a:xfrm>
-            <a:off x="3502152" y="2194560"/>
-            <a:ext cx="2286000" cy="457200"/>
-          </a:xfrm>
-          <a:prstGeom prst="rect">
-            <a:avLst/>
-          </a:prstGeom>
-          <a:noFill/>
-        </p:spPr>
-        <p:txBody>
-          <a:bodyPr wrap="square" anchor="t" lIns="0" rIns="0" tIns="0" bIns="0">
-            <a:spAutoFit/>
-          </a:bodyPr>
-          <a:lstStyle/>
-          <a:p>
-            <a:pPr algn="l"/>
-            <a:r>
-              <a:rPr sz="1400" b="1">
-                <a:solidFill>
-                  <a:srgbClr val="1C1917"/>
-                </a:solidFill>
-                <a:latin typeface="Archivo"/>
-              </a:rPr>
-              <a:t>A simulated scene</a:t>
-            </a:r>
-          </a:p>
-        </p:txBody>
-      </p:sp>
-      <p:sp>
-        <p:nvSpPr>
           <p:cNvPr id="18" name="TextBox 17"/>
-          <p:cNvSpPr txBox="1"/>
-          <p:nvPr/>
-        </p:nvSpPr>
-        <p:spPr>
-          <a:xfrm>
-            <a:off x="3502152" y="2743200"/>
-            <a:ext cx="2286000" cy="164592"/>
-          </a:xfrm>
-          <a:prstGeom prst="rect">
-            <a:avLst/>
-          </a:prstGeom>
-          <a:noFill/>
-        </p:spPr>
-        <p:txBody>
-          <a:bodyPr wrap="square" anchor="t" lIns="0" rIns="0" tIns="0" bIns="0">
-            <a:spAutoFit/>
-          </a:bodyPr>
-          <a:lstStyle/>
-          <a:p>
-            <a:pPr algn="l"/>
-            <a:r>
-              <a:rPr sz="750" b="0" spc="110">
-                <a:solidFill>
-                  <a:srgbClr val="79716B"/>
-                </a:solidFill>
-                <a:latin typeface="Consolas"/>
-              </a:rPr>
-              <a:t>READS</a:t>
-            </a:r>
-          </a:p>
-        </p:txBody>
-      </p:sp>
-      <p:sp>
-        <p:nvSpPr>
-          <p:cNvPr id="19" name="TextBox 18"/>
-          <p:cNvSpPr txBox="1"/>
-          <p:nvPr/>
-        </p:nvSpPr>
-        <p:spPr>
-          <a:xfrm>
-            <a:off x="3502152" y="2926080"/>
-            <a:ext cx="2286000" cy="274320"/>
-          </a:xfrm>
-          <a:prstGeom prst="rect">
-            <a:avLst/>
-          </a:prstGeom>
-          <a:noFill/>
-        </p:spPr>
-        <p:txBody>
-          <a:bodyPr wrap="square" anchor="t" lIns="0" rIns="0" tIns="0" bIns="0">
-            <a:spAutoFit/>
-          </a:bodyPr>
-          <a:lstStyle/>
-          <a:p>
-            <a:pPr algn="l"/>
-            <a:r>
-              <a:rPr sz="1200" b="1">
-                <a:solidFill>
-                  <a:srgbClr val="3E5C6B"/>
-                </a:solidFill>
-                <a:latin typeface="Consolas"/>
-              </a:rPr>
-              <a:t>terrain and buildings</a:t>
-            </a:r>
-          </a:p>
-        </p:txBody>
-      </p:sp>
-      <p:sp>
-        <p:nvSpPr>
-          <p:cNvPr id="20" name="TextBox 19"/>
-          <p:cNvSpPr txBox="1"/>
-          <p:nvPr/>
-        </p:nvSpPr>
-        <p:spPr>
-          <a:xfrm>
-            <a:off x="3502152" y="3364992"/>
-            <a:ext cx="2286000" cy="1005840"/>
-          </a:xfrm>
-          <a:prstGeom prst="rect">
-            <a:avLst/>
-          </a:prstGeom>
-          <a:noFill/>
-        </p:spPr>
-        <p:txBody>
-          <a:bodyPr wrap="square" anchor="t" lIns="0" rIns="0" tIns="0" bIns="0">
-            <a:spAutoFit/>
-          </a:bodyPr>
-          <a:lstStyle/>
-          <a:p>
-            <a:pPr algn="l"/>
-            <a:r>
-              <a:rPr sz="1050" b="0">
-                <a:solidFill>
-                  <a:srgbClr val="3A4842"/>
-                </a:solidFill>
-                <a:latin typeface="Archivo"/>
-              </a:rPr>
-              <a:t>Rebuild the landscape and trace the signal through it. Geometry does the work, not the data.</a:t>
-            </a:r>
-          </a:p>
-        </p:txBody>
-      </p:sp>
-      <p:sp>
-        <p:nvSpPr>
-          <p:cNvPr id="21" name="Rectangle 20"/>
-          <p:cNvSpPr/>
-          <p:nvPr/>
-        </p:nvSpPr>
-        <p:spPr>
-          <a:xfrm>
-            <a:off x="3502152" y="4434840"/>
-            <a:ext cx="2286000" cy="310896"/>
-          </a:xfrm>
-          <a:prstGeom prst="rect">
-            <a:avLst/>
-          </a:prstGeom>
-          <a:solidFill>
-            <a:srgbClr val="FFFFFF"/>
-          </a:solidFill>
-          <a:ln w="12700">
-            <a:solidFill>
-              <a:srgbClr val="D9D3CB"/>
-            </a:solidFill>
-          </a:ln>
-          <a:effectLst/>
-        </p:spPr>
-        <p:style>
-          <a:lnRef idx="1">
-            <a:schemeClr val="accent1"/>
-          </a:lnRef>
-          <a:fillRef idx="3">
-            <a:schemeClr val="accent1"/>
-          </a:fillRef>
-          <a:effectRef idx="2">
-            <a:schemeClr val="accent1"/>
-          </a:effectRef>
-          <a:fontRef idx="minor">
-            <a:schemeClr val="lt1"/>
-          </a:fontRef>
-        </p:style>
-        <p:txBody>
-          <a:bodyPr rtlCol="0" anchor="ctr"/>
-          <a:lstStyle/>
-          <a:p>
-            <a:pPr algn="ctr"/>
-          </a:p>
-        </p:txBody>
-      </p:sp>
-      <p:sp>
-        <p:nvSpPr>
-          <p:cNvPr id="22" name="TextBox 21"/>
-          <p:cNvSpPr txBox="1"/>
-          <p:nvPr/>
-        </p:nvSpPr>
-        <p:spPr>
-          <a:xfrm>
-            <a:off x="3611880" y="4498848"/>
-            <a:ext cx="2103120" cy="219456"/>
-          </a:xfrm>
-          <a:prstGeom prst="rect">
-            <a:avLst/>
-          </a:prstGeom>
-          <a:noFill/>
-        </p:spPr>
-        <p:txBody>
-          <a:bodyPr wrap="square" anchor="t" lIns="0" rIns="0" tIns="0" bIns="0">
-            <a:spAutoFit/>
-          </a:bodyPr>
-          <a:lstStyle/>
-          <a:p>
-            <a:pPr algn="l"/>
-            <a:r>
-              <a:rPr sz="1000" b="1">
-                <a:solidFill>
-                  <a:srgbClr val="1C1917"/>
-                </a:solidFill>
-                <a:latin typeface="Consolas"/>
-              </a:rPr>
-              <a:t>simulated</a:t>
-            </a:r>
-          </a:p>
-        </p:txBody>
-      </p:sp>
-      <p:sp>
-        <p:nvSpPr>
-          <p:cNvPr id="23" name="Rectangle 22"/>
-          <p:cNvSpPr/>
-          <p:nvPr/>
-        </p:nvSpPr>
-        <p:spPr>
-          <a:xfrm>
-            <a:off x="6135624" y="1828800"/>
-            <a:ext cx="2606040" cy="3108960"/>
-          </a:xfrm>
-          <a:prstGeom prst="rect">
-            <a:avLst/>
-          </a:prstGeom>
-          <a:solidFill>
-            <a:srgbClr val="F5F2EE"/>
-          </a:solidFill>
-          <a:ln w="19050">
-            <a:solidFill>
-              <a:srgbClr val="6B7F5C"/>
-            </a:solidFill>
-          </a:ln>
-          <a:effectLst/>
-        </p:spPr>
-        <p:style>
-          <a:lnRef idx="1">
-            <a:schemeClr val="accent1"/>
-          </a:lnRef>
-          <a:fillRef idx="3">
-            <a:schemeClr val="accent1"/>
-          </a:fillRef>
-          <a:effectRef idx="2">
-            <a:schemeClr val="accent1"/>
-          </a:effectRef>
-          <a:fontRef idx="minor">
-            <a:schemeClr val="lt1"/>
-          </a:fontRef>
-        </p:style>
-        <p:txBody>
-          <a:bodyPr rtlCol="0" anchor="ctr"/>
-          <a:lstStyle/>
-          <a:p>
-            <a:pPr algn="ctr"/>
-          </a:p>
-        </p:txBody>
-      </p:sp>
-      <p:sp>
-        <p:nvSpPr>
-          <p:cNvPr id="24" name="TextBox 23"/>
-          <p:cNvSpPr txBox="1"/>
-          <p:nvPr/>
-        </p:nvSpPr>
-        <p:spPr>
-          <a:xfrm>
-            <a:off x="6318504" y="1975104"/>
-            <a:ext cx="2286000" cy="182880"/>
-          </a:xfrm>
-          <a:prstGeom prst="rect">
-            <a:avLst/>
-          </a:prstGeom>
-          <a:noFill/>
-        </p:spPr>
-        <p:txBody>
-          <a:bodyPr wrap="square" anchor="t" lIns="0" rIns="0" tIns="0" bIns="0">
-            <a:spAutoFit/>
-          </a:bodyPr>
-          <a:lstStyle/>
-          <a:p>
-            <a:pPr algn="l"/>
-            <a:r>
-              <a:rPr sz="850" b="1" spc="120">
-                <a:solidFill>
-                  <a:srgbClr val="6B7F5C"/>
-                </a:solidFill>
-                <a:latin typeface="Consolas"/>
-              </a:rPr>
-              <a:t>DEEP LEARNING</a:t>
-            </a:r>
-          </a:p>
-        </p:txBody>
-      </p:sp>
-      <p:sp>
-        <p:nvSpPr>
-          <p:cNvPr id="25" name="TextBox 24"/>
-          <p:cNvSpPr txBox="1"/>
-          <p:nvPr/>
-        </p:nvSpPr>
-        <p:spPr>
-          <a:xfrm>
-            <a:off x="6318504" y="2194560"/>
-            <a:ext cx="2286000" cy="457200"/>
-          </a:xfrm>
-          <a:prstGeom prst="rect">
-            <a:avLst/>
-          </a:prstGeom>
-          <a:noFill/>
-        </p:spPr>
-        <p:txBody>
-          <a:bodyPr wrap="square" anchor="t" lIns="0" rIns="0" tIns="0" bIns="0">
-            <a:spAutoFit/>
-          </a:bodyPr>
-          <a:lstStyle/>
-          <a:p>
-            <a:pPr algn="l"/>
-            <a:r>
-              <a:rPr sz="1400" b="1">
-                <a:solidFill>
-                  <a:srgbClr val="1C1917"/>
-                </a:solidFill>
-                <a:latin typeface="Archivo"/>
-              </a:rPr>
-              <a:t>Neural operator</a:t>
-            </a:r>
-          </a:p>
-        </p:txBody>
-      </p:sp>
-      <p:sp>
-        <p:nvSpPr>
-          <p:cNvPr id="26" name="TextBox 25"/>
-          <p:cNvSpPr txBox="1"/>
-          <p:nvPr/>
-        </p:nvSpPr>
-        <p:spPr>
-          <a:xfrm>
-            <a:off x="6318504" y="2743200"/>
-            <a:ext cx="2286000" cy="164592"/>
-          </a:xfrm>
-          <a:prstGeom prst="rect">
-            <a:avLst/>
-          </a:prstGeom>
-          <a:noFill/>
-        </p:spPr>
-        <p:txBody>
-          <a:bodyPr wrap="square" anchor="t" lIns="0" rIns="0" tIns="0" bIns="0">
-            <a:spAutoFit/>
-          </a:bodyPr>
-          <a:lstStyle/>
-          <a:p>
-            <a:pPr algn="l"/>
-            <a:r>
-              <a:rPr sz="750" b="0" spc="110">
-                <a:solidFill>
-                  <a:srgbClr val="79716B"/>
-                </a:solidFill>
-                <a:latin typeface="Consolas"/>
-              </a:rPr>
-              <a:t>READS</a:t>
-            </a:r>
-          </a:p>
-        </p:txBody>
-      </p:sp>
-      <p:sp>
-        <p:nvSpPr>
-          <p:cNvPr id="27" name="TextBox 26"/>
-          <p:cNvSpPr txBox="1"/>
-          <p:nvPr/>
-        </p:nvSpPr>
-        <p:spPr>
-          <a:xfrm>
-            <a:off x="6318504" y="2926080"/>
-            <a:ext cx="2286000" cy="274320"/>
-          </a:xfrm>
-          <a:prstGeom prst="rect">
-            <a:avLst/>
-          </a:prstGeom>
-          <a:noFill/>
-        </p:spPr>
-        <p:txBody>
-          <a:bodyPr wrap="square" anchor="t" lIns="0" rIns="0" tIns="0" bIns="0">
-            <a:spAutoFit/>
-          </a:bodyPr>
-          <a:lstStyle/>
-          <a:p>
-            <a:pPr algn="l"/>
-            <a:r>
-              <a:rPr sz="1200" b="1">
-                <a:solidFill>
-                  <a:srgbClr val="6B7F5C"/>
-                </a:solidFill>
-                <a:latin typeface="Consolas"/>
-              </a:rPr>
-              <a:t>the terrain profile</a:t>
-            </a:r>
-          </a:p>
-        </p:txBody>
-      </p:sp>
-      <p:sp>
-        <p:nvSpPr>
-          <p:cNvPr id="28" name="TextBox 27"/>
-          <p:cNvSpPr txBox="1"/>
-          <p:nvPr/>
-        </p:nvSpPr>
-        <p:spPr>
-          <a:xfrm>
-            <a:off x="6318504" y="3364992"/>
-            <a:ext cx="2286000" cy="1005840"/>
-          </a:xfrm>
-          <a:prstGeom prst="rect">
-            <a:avLst/>
-          </a:prstGeom>
-          <a:noFill/>
-        </p:spPr>
-        <p:txBody>
-          <a:bodyPr wrap="square" anchor="t" lIns="0" rIns="0" tIns="0" bIns="0">
-            <a:spAutoFit/>
-          </a:bodyPr>
-          <a:lstStyle/>
-          <a:p>
-            <a:pPr algn="l"/>
-            <a:r>
-              <a:rPr sz="1050" b="0">
-                <a:solidFill>
-                  <a:srgbClr val="3A4842"/>
-                </a:solidFill>
-                <a:latin typeface="Archivo"/>
-              </a:rPr>
-              <a:t>Learns the shape of the ground along each link instead of assuming a formula.</a:t>
-            </a:r>
-          </a:p>
-        </p:txBody>
-      </p:sp>
-      <p:sp>
-        <p:nvSpPr>
-          <p:cNvPr id="29" name="Rectangle 28"/>
-          <p:cNvSpPr/>
-          <p:nvPr/>
-        </p:nvSpPr>
-        <p:spPr>
-          <a:xfrm>
-            <a:off x="6318504" y="4434840"/>
-            <a:ext cx="2286000" cy="310896"/>
-          </a:xfrm>
-          <a:prstGeom prst="rect">
-            <a:avLst/>
-          </a:prstGeom>
-          <a:solidFill>
-            <a:srgbClr val="FFFFFF"/>
-          </a:solidFill>
-          <a:ln w="12700">
-            <a:solidFill>
-              <a:srgbClr val="D9D3CB"/>
-            </a:solidFill>
-          </a:ln>
-          <a:effectLst/>
-        </p:spPr>
-        <p:style>
-          <a:lnRef idx="1">
-            <a:schemeClr val="accent1"/>
-          </a:lnRef>
-          <a:fillRef idx="3">
-            <a:schemeClr val="accent1"/>
-          </a:fillRef>
-          <a:effectRef idx="2">
-            <a:schemeClr val="accent1"/>
-          </a:effectRef>
-          <a:fontRef idx="minor">
-            <a:schemeClr val="lt1"/>
-          </a:fontRef>
-        </p:style>
-        <p:txBody>
-          <a:bodyPr rtlCol="0" anchor="ctr"/>
-          <a:lstStyle/>
-          <a:p>
-            <a:pPr algn="ctr"/>
-          </a:p>
-        </p:txBody>
-      </p:sp>
-      <p:sp>
-        <p:nvSpPr>
-          <p:cNvPr id="30" name="TextBox 29"/>
-          <p:cNvSpPr txBox="1"/>
-          <p:nvPr/>
-        </p:nvSpPr>
-        <p:spPr>
-          <a:xfrm>
-            <a:off x="6428232" y="4498848"/>
-            <a:ext cx="2103120" cy="219456"/>
-          </a:xfrm>
-          <a:prstGeom prst="rect">
-            <a:avLst/>
-          </a:prstGeom>
-          <a:noFill/>
-        </p:spPr>
-        <p:txBody>
-          <a:bodyPr wrap="square" anchor="t" lIns="0" rIns="0" tIns="0" bIns="0">
-            <a:spAutoFit/>
-          </a:bodyPr>
-          <a:lstStyle/>
-          <a:p>
-            <a:pPr algn="l"/>
-            <a:r>
-              <a:rPr sz="1000" b="1">
-                <a:solidFill>
-                  <a:srgbClr val="1C1917"/>
-                </a:solidFill>
-                <a:latin typeface="Consolas"/>
-              </a:rPr>
-              <a:t>learned</a:t>
-            </a:r>
-          </a:p>
-        </p:txBody>
-      </p:sp>
-      <p:sp>
-        <p:nvSpPr>
-          <p:cNvPr id="31" name="Rectangle 30"/>
-          <p:cNvSpPr/>
-          <p:nvPr/>
-        </p:nvSpPr>
-        <p:spPr>
-          <a:xfrm>
-            <a:off x="8951976" y="1828800"/>
-            <a:ext cx="2606040" cy="3108960"/>
-          </a:xfrm>
-          <a:prstGeom prst="rect">
-            <a:avLst/>
-          </a:prstGeom>
-          <a:solidFill>
-            <a:srgbClr val="F5F2EE"/>
-          </a:solidFill>
-          <a:ln w="19050">
-            <a:solidFill>
-              <a:srgbClr val="B4532A"/>
-            </a:solidFill>
-          </a:ln>
-          <a:effectLst/>
-        </p:spPr>
-        <p:style>
-          <a:lnRef idx="1">
-            <a:schemeClr val="accent1"/>
-          </a:lnRef>
-          <a:fillRef idx="3">
-            <a:schemeClr val="accent1"/>
-          </a:fillRef>
-          <a:effectRef idx="2">
-            <a:schemeClr val="accent1"/>
-          </a:effectRef>
-          <a:fontRef idx="minor">
-            <a:schemeClr val="lt1"/>
-          </a:fontRef>
-        </p:style>
-        <p:txBody>
-          <a:bodyPr rtlCol="0" anchor="ctr"/>
-          <a:lstStyle/>
-          <a:p>
-            <a:pPr algn="ctr"/>
-          </a:p>
-        </p:txBody>
-      </p:sp>
-      <p:sp>
-        <p:nvSpPr>
-          <p:cNvPr id="32" name="TextBox 31"/>
-          <p:cNvSpPr txBox="1"/>
-          <p:nvPr/>
-        </p:nvSpPr>
-        <p:spPr>
-          <a:xfrm>
-            <a:off x="9134856" y="1975104"/>
-            <a:ext cx="2286000" cy="182880"/>
-          </a:xfrm>
-          <a:prstGeom prst="rect">
-            <a:avLst/>
-          </a:prstGeom>
-          <a:noFill/>
-        </p:spPr>
-        <p:txBody>
-          <a:bodyPr wrap="square" anchor="t" lIns="0" rIns="0" tIns="0" bIns="0">
-            <a:spAutoFit/>
-          </a:bodyPr>
-          <a:lstStyle/>
-          <a:p>
-            <a:pPr algn="l"/>
-            <a:r>
-              <a:rPr sz="850" b="1" spc="120">
-                <a:solidFill>
-                  <a:srgbClr val="B4532A"/>
-                </a:solidFill>
-                <a:latin typeface="Consolas"/>
-              </a:rPr>
-              <a:t>PINN</a:t>
-            </a:r>
-          </a:p>
-        </p:txBody>
-      </p:sp>
-      <p:sp>
-        <p:nvSpPr>
-          <p:cNvPr id="33" name="TextBox 32"/>
-          <p:cNvSpPr txBox="1"/>
-          <p:nvPr/>
-        </p:nvSpPr>
-        <p:spPr>
-          <a:xfrm>
-            <a:off x="9134856" y="2194560"/>
-            <a:ext cx="2286000" cy="457200"/>
-          </a:xfrm>
-          <a:prstGeom prst="rect">
-            <a:avLst/>
-          </a:prstGeom>
-          <a:noFill/>
-        </p:spPr>
-        <p:txBody>
-          <a:bodyPr wrap="square" anchor="t" lIns="0" rIns="0" tIns="0" bIns="0">
-            <a:spAutoFit/>
-          </a:bodyPr>
-          <a:lstStyle/>
-          <a:p>
-            <a:pPr algn="l"/>
-            <a:r>
-              <a:rPr sz="1400" b="1">
-                <a:solidFill>
-                  <a:srgbClr val="1C1917"/>
-                </a:solidFill>
-                <a:latin typeface="Archivo"/>
-              </a:rPr>
-              <a:t>Physics-informed network</a:t>
-            </a:r>
-          </a:p>
-        </p:txBody>
-      </p:sp>
-      <p:sp>
-        <p:nvSpPr>
-          <p:cNvPr id="34" name="TextBox 33"/>
-          <p:cNvSpPr txBox="1"/>
-          <p:nvPr/>
-        </p:nvSpPr>
-        <p:spPr>
-          <a:xfrm>
-            <a:off x="9134856" y="2743200"/>
-            <a:ext cx="2286000" cy="164592"/>
-          </a:xfrm>
-          <a:prstGeom prst="rect">
-            <a:avLst/>
-          </a:prstGeom>
-          <a:noFill/>
-        </p:spPr>
-        <p:txBody>
-          <a:bodyPr wrap="square" anchor="t" lIns="0" rIns="0" tIns="0" bIns="0">
-            <a:spAutoFit/>
-          </a:bodyPr>
-          <a:lstStyle/>
-          <a:p>
-            <a:pPr algn="l"/>
-            <a:r>
-              <a:rPr sz="750" b="0" spc="110">
-                <a:solidFill>
-                  <a:srgbClr val="79716B"/>
-                </a:solidFill>
-                <a:latin typeface="Consolas"/>
-              </a:rPr>
-              <a:t>READS</a:t>
-            </a:r>
-          </a:p>
-        </p:txBody>
-      </p:sp>
-      <p:sp>
-        <p:nvSpPr>
-          <p:cNvPr id="35" name="TextBox 34"/>
-          <p:cNvSpPr txBox="1"/>
-          <p:nvPr/>
-        </p:nvSpPr>
-        <p:spPr>
-          <a:xfrm>
-            <a:off x="9134856" y="2926080"/>
-            <a:ext cx="2286000" cy="274320"/>
-          </a:xfrm>
-          <a:prstGeom prst="rect">
-            <a:avLst/>
-          </a:prstGeom>
-          <a:noFill/>
-        </p:spPr>
-        <p:txBody>
-          <a:bodyPr wrap="square" anchor="t" lIns="0" rIns="0" tIns="0" bIns="0">
-            <a:spAutoFit/>
-          </a:bodyPr>
-          <a:lstStyle/>
-          <a:p>
-            <a:pPr algn="l"/>
-            <a:r>
-              <a:rPr sz="1200" b="1">
-                <a:solidFill>
-                  <a:srgbClr val="B4532A"/>
-                </a:solidFill>
-                <a:latin typeface="Consolas"/>
-              </a:rPr>
-              <a:t>position, with physics</a:t>
-            </a:r>
-          </a:p>
-        </p:txBody>
-      </p:sp>
-      <p:sp>
-        <p:nvSpPr>
-          <p:cNvPr id="36" name="TextBox 35"/>
-          <p:cNvSpPr txBox="1"/>
-          <p:nvPr/>
-        </p:nvSpPr>
-        <p:spPr>
-          <a:xfrm>
-            <a:off x="9134856" y="3364992"/>
-            <a:ext cx="2286000" cy="1005840"/>
-          </a:xfrm>
-          <a:prstGeom prst="rect">
-            <a:avLst/>
-          </a:prstGeom>
-          <a:noFill/>
-        </p:spPr>
-        <p:txBody>
-          <a:bodyPr wrap="square" anchor="t" lIns="0" rIns="0" tIns="0" bIns="0">
-            <a:spAutoFit/>
-          </a:bodyPr>
-          <a:lstStyle/>
-          <a:p>
-            <a:pPr algn="l"/>
-            <a:r>
-              <a:rPr sz="1050" b="0">
-                <a:solidFill>
-                  <a:srgbClr val="3A4842"/>
-                </a:solidFill>
-                <a:latin typeface="Archivo"/>
-              </a:rPr>
-              <a:t>Learns the field, with the physics added as a penalty to keep it honest.</a:t>
-            </a:r>
-          </a:p>
-        </p:txBody>
-      </p:sp>
-      <p:sp>
-        <p:nvSpPr>
-          <p:cNvPr id="37" name="Rectangle 36"/>
-          <p:cNvSpPr/>
-          <p:nvPr/>
-        </p:nvSpPr>
-        <p:spPr>
-          <a:xfrm>
-            <a:off x="9134856" y="4434840"/>
-            <a:ext cx="2286000" cy="310896"/>
-          </a:xfrm>
-          <a:prstGeom prst="rect">
-            <a:avLst/>
-          </a:prstGeom>
-          <a:solidFill>
-            <a:srgbClr val="FFFFFF"/>
-          </a:solidFill>
-          <a:ln w="12700">
-            <a:solidFill>
-              <a:srgbClr val="D9D3CB"/>
-            </a:solidFill>
-          </a:ln>
-          <a:effectLst/>
-        </p:spPr>
-        <p:style>
-          <a:lnRef idx="1">
-            <a:schemeClr val="accent1"/>
-          </a:lnRef>
-          <a:fillRef idx="3">
-            <a:schemeClr val="accent1"/>
-          </a:fillRef>
-          <a:effectRef idx="2">
-            <a:schemeClr val="accent1"/>
-          </a:effectRef>
-          <a:fontRef idx="minor">
-            <a:schemeClr val="lt1"/>
-          </a:fontRef>
-        </p:style>
-        <p:txBody>
-          <a:bodyPr rtlCol="0" anchor="ctr"/>
-          <a:lstStyle/>
-          <a:p>
-            <a:pPr algn="ctr"/>
-          </a:p>
-        </p:txBody>
-      </p:sp>
-      <p:sp>
-        <p:nvSpPr>
-          <p:cNvPr id="38" name="TextBox 37"/>
-          <p:cNvSpPr txBox="1"/>
-          <p:nvPr/>
-        </p:nvSpPr>
-        <p:spPr>
-          <a:xfrm>
-            <a:off x="9244584" y="4498848"/>
-            <a:ext cx="2103120" cy="219456"/>
-          </a:xfrm>
-          <a:prstGeom prst="rect">
-            <a:avLst/>
-          </a:prstGeom>
-          <a:noFill/>
-        </p:spPr>
-        <p:txBody>
-          <a:bodyPr wrap="square" anchor="t" lIns="0" rIns="0" tIns="0" bIns="0">
-            <a:spAutoFit/>
-          </a:bodyPr>
-          <a:lstStyle/>
-          <a:p>
-            <a:pPr algn="l"/>
-            <a:r>
-              <a:rPr sz="1000" b="1">
-                <a:solidFill>
-                  <a:srgbClr val="1C1917"/>
-                </a:solidFill>
-                <a:latin typeface="Consolas"/>
-              </a:rPr>
-              <a:t>learned</a:t>
-            </a:r>
-          </a:p>
-        </p:txBody>
-      </p:sp>
-      <p:sp>
-        <p:nvSpPr>
-          <p:cNvPr id="39" name="Rectangle 38"/>
-          <p:cNvSpPr/>
-          <p:nvPr/>
-        </p:nvSpPr>
-        <p:spPr>
-          <a:xfrm>
-            <a:off x="502920" y="5230368"/>
-            <a:ext cx="11155680" cy="548640"/>
-          </a:xfrm>
-          <a:prstGeom prst="rect">
-            <a:avLst/>
-          </a:prstGeom>
-          <a:solidFill>
-            <a:srgbClr val="F5F2EE"/>
-          </a:solidFill>
-          <a:ln w="12700">
-            <a:solidFill>
-              <a:srgbClr val="D9D3CB"/>
-            </a:solidFill>
-          </a:ln>
-          <a:effectLst/>
-        </p:spPr>
-        <p:style>
-          <a:lnRef idx="1">
-            <a:schemeClr val="accent1"/>
-          </a:lnRef>
-          <a:fillRef idx="3">
-            <a:schemeClr val="accent1"/>
-          </a:fillRef>
-          <a:effectRef idx="2">
-            <a:schemeClr val="accent1"/>
-          </a:effectRef>
-          <a:fontRef idx="minor">
-            <a:schemeClr val="lt1"/>
-          </a:fontRef>
-        </p:style>
-        <p:txBody>
-          <a:bodyPr rtlCol="0" anchor="ctr"/>
-          <a:lstStyle/>
-          <a:p>
-            <a:pPr algn="ctr"/>
-          </a:p>
-        </p:txBody>
-      </p:sp>
-      <p:sp>
-        <p:nvSpPr>
-          <p:cNvPr id="40" name="TextBox 39"/>
-          <p:cNvSpPr txBox="1"/>
-          <p:nvPr/>
-        </p:nvSpPr>
-        <p:spPr>
-          <a:xfrm>
-            <a:off x="777240" y="5358384"/>
-            <a:ext cx="10607040" cy="320040"/>
-          </a:xfrm>
-          <a:prstGeom prst="rect">
-            <a:avLst/>
-          </a:prstGeom>
-          <a:noFill/>
-        </p:spPr>
-        <p:txBody>
-          <a:bodyPr wrap="square" anchor="t" lIns="0" rIns="0" tIns="0" bIns="0">
-            <a:spAutoFit/>
-          </a:bodyPr>
-          <a:lstStyle/>
-          <a:p>
-            <a:pPr algn="l"/>
-            <a:r>
-              <a:rPr sz="1250" b="0">
-                <a:solidFill>
-                  <a:srgbClr val="1C1917"/>
-                </a:solidFill>
-                <a:latin typeface="Archivo"/>
-              </a:rPr>
-              <a:t>All four answer the same two questions, so one testbench scores them the same way and the planner can drive any of them.</a:t>
-            </a:r>
-          </a:p>
-        </p:txBody>
-      </p:sp>
-      <p:sp>
-        <p:nvSpPr>
-          <p:cNvPr id="41" name="TextBox 40"/>
           <p:cNvSpPr txBox="1"/>
           <p:nvPr/>
         </p:nvSpPr>

--- a/ARA_Challenge3.pptx
+++ b/ARA_Challenge3.pptx
@@ -3670,8 +3670,8 @@
         </p:nvSpPr>
         <p:spPr>
           <a:xfrm>
-            <a:off x="502920" y="1417320"/>
-            <a:ext cx="10881360" cy="1371600"/>
+            <a:off x="502920" y="1463040"/>
+            <a:ext cx="10881360" cy="777240"/>
           </a:xfrm>
           <a:prstGeom prst="rect">
             <a:avLst/>
@@ -3686,14 +3686,13 @@
           <a:p>
             <a:pPr algn="l"/>
             <a:r>
-              <a:rPr sz="3800" b="1">
+              <a:rPr sz="4400" b="1">
                 <a:solidFill>
                   <a:srgbClr val="1C1917"/>
                 </a:solidFill>
                 <a:latin typeface="Archivo"/>
               </a:rPr>
-              <a:t>Where do you build, when you have
-measured almost none of the map?</a:t>
+              <a:t>Where should the next tower go?</a:t>
             </a:r>
           </a:p>
         </p:txBody>
@@ -3706,7 +3705,42 @@
         </p:nvSpPr>
         <p:spPr>
           <a:xfrm>
-            <a:off x="502920" y="2926080"/>
+            <a:off x="502920" y="2395728"/>
+            <a:ext cx="10058400" cy="384048"/>
+          </a:xfrm>
+          <a:prstGeom prst="rect">
+            <a:avLst/>
+          </a:prstGeom>
+          <a:noFill/>
+        </p:spPr>
+        <p:txBody>
+          <a:bodyPr wrap="square" anchor="t" lIns="0" rIns="0" tIns="0" bIns="0">
+            <a:spAutoFit/>
+          </a:bodyPr>
+          <a:lstStyle/>
+          <a:p>
+            <a:pPr algn="l"/>
+            <a:r>
+              <a:rPr sz="1900" b="0">
+                <a:solidFill>
+                  <a:srgbClr val="B4532A"/>
+                </a:solidFill>
+                <a:latin typeface="Archivo"/>
+              </a:rPr>
+              <a:t>Rural network planning on 7% of the map</a:t>
+            </a:r>
+          </a:p>
+        </p:txBody>
+      </p:sp>
+      <p:sp>
+        <p:nvSpPr>
+          <p:cNvPr id="6" name="TextBox 5"/>
+          <p:cNvSpPr txBox="1"/>
+          <p:nvPr/>
+        </p:nvSpPr>
+        <p:spPr>
+          <a:xfrm>
+            <a:off x="502920" y="2971800"/>
             <a:ext cx="9509760" cy="868680"/>
           </a:xfrm>
           <a:prstGeom prst="rect">
@@ -3728,14 +3762,14 @@
                 </a:solidFill>
                 <a:latin typeface="Archivo"/>
               </a:rPr>
-              <a:t>A van drove one rural service area near Ames and logged 7,144 samples. That covers about 7% of it. The other 93% is where the decision has to be made.</a:t>
+              <a:t>A van drove one rural service area near Ames and logged 7,144 samples. They cover 7% of it. The decision has to be made about the other 93%, so we build a model of the ground and let it stand in for the survey.</a:t>
             </a:r>
           </a:p>
         </p:txBody>
       </p:sp>
       <p:sp>
         <p:nvSpPr>
-          <p:cNvPr id="6" name="Rectangle 5"/>
+          <p:cNvPr id="7" name="Rectangle 6"/>
           <p:cNvSpPr/>
           <p:nvPr/>
         </p:nvSpPr>
@@ -3781,7 +3815,7 @@
       </p:sp>
       <p:sp>
         <p:nvSpPr>
-          <p:cNvPr id="7" name="TextBox 6"/>
+          <p:cNvPr id="8" name="TextBox 7"/>
           <p:cNvSpPr txBox="1"/>
           <p:nvPr/>
         </p:nvSpPr>
@@ -3816,7 +3850,7 @@
       </p:sp>
       <p:sp>
         <p:nvSpPr>
-          <p:cNvPr id="8" name="TextBox 7"/>
+          <p:cNvPr id="9" name="TextBox 8"/>
           <p:cNvSpPr txBox="1"/>
           <p:nvPr/>
         </p:nvSpPr>
@@ -3851,7 +3885,7 @@
       </p:sp>
       <p:sp>
         <p:nvSpPr>
-          <p:cNvPr id="9" name="TextBox 8"/>
+          <p:cNvPr id="10" name="TextBox 9"/>
           <p:cNvSpPr txBox="1"/>
           <p:nvPr/>
         </p:nvSpPr>
@@ -3886,7 +3920,7 @@
       </p:sp>
       <p:sp>
         <p:nvSpPr>
-          <p:cNvPr id="10" name="Rectangle 9"/>
+          <p:cNvPr id="11" name="Rectangle 10"/>
           <p:cNvSpPr/>
           <p:nvPr/>
         </p:nvSpPr>
@@ -3932,7 +3966,7 @@
       </p:sp>
       <p:sp>
         <p:nvSpPr>
-          <p:cNvPr id="11" name="TextBox 10"/>
+          <p:cNvPr id="12" name="TextBox 11"/>
           <p:cNvSpPr txBox="1"/>
           <p:nvPr/>
         </p:nvSpPr>
@@ -3967,7 +4001,7 @@
       </p:sp>
       <p:sp>
         <p:nvSpPr>
-          <p:cNvPr id="12" name="TextBox 11"/>
+          <p:cNvPr id="13" name="TextBox 12"/>
           <p:cNvSpPr txBox="1"/>
           <p:nvPr/>
         </p:nvSpPr>
@@ -4002,7 +4036,7 @@
       </p:sp>
       <p:sp>
         <p:nvSpPr>
-          <p:cNvPr id="13" name="TextBox 12"/>
+          <p:cNvPr id="14" name="TextBox 13"/>
           <p:cNvSpPr txBox="1"/>
           <p:nvPr/>
         </p:nvSpPr>
@@ -4037,7 +4071,7 @@
       </p:sp>
       <p:sp>
         <p:nvSpPr>
-          <p:cNvPr id="14" name="Rectangle 13"/>
+          <p:cNvPr id="15" name="Rectangle 14"/>
           <p:cNvSpPr/>
           <p:nvPr/>
         </p:nvSpPr>
@@ -4083,7 +4117,7 @@
       </p:sp>
       <p:sp>
         <p:nvSpPr>
-          <p:cNvPr id="15" name="TextBox 14"/>
+          <p:cNvPr id="16" name="TextBox 15"/>
           <p:cNvSpPr txBox="1"/>
           <p:nvPr/>
         </p:nvSpPr>
@@ -4118,7 +4152,7 @@
       </p:sp>
       <p:sp>
         <p:nvSpPr>
-          <p:cNvPr id="16" name="TextBox 15"/>
+          <p:cNvPr id="17" name="TextBox 16"/>
           <p:cNvSpPr txBox="1"/>
           <p:nvPr/>
         </p:nvSpPr>
@@ -4153,7 +4187,7 @@
       </p:sp>
       <p:sp>
         <p:nvSpPr>
-          <p:cNvPr id="17" name="TextBox 16"/>
+          <p:cNvPr id="18" name="TextBox 17"/>
           <p:cNvSpPr txBox="1"/>
           <p:nvPr/>
         </p:nvSpPr>
@@ -4188,7 +4222,7 @@
       </p:sp>
       <p:sp>
         <p:nvSpPr>
-          <p:cNvPr id="18" name="Rectangle 17"/>
+          <p:cNvPr id="19" name="Rectangle 18"/>
           <p:cNvSpPr/>
           <p:nvPr/>
         </p:nvSpPr>
@@ -4234,7 +4268,7 @@
       </p:sp>
       <p:sp>
         <p:nvSpPr>
-          <p:cNvPr id="19" name="TextBox 18"/>
+          <p:cNvPr id="20" name="TextBox 19"/>
           <p:cNvSpPr txBox="1"/>
           <p:nvPr/>
         </p:nvSpPr>
@@ -4269,7 +4303,7 @@
       </p:sp>
       <p:sp>
         <p:nvSpPr>
-          <p:cNvPr id="20" name="TextBox 19"/>
+          <p:cNvPr id="21" name="TextBox 20"/>
           <p:cNvSpPr txBox="1"/>
           <p:nvPr/>
         </p:nvSpPr>
@@ -4304,7 +4338,7 @@
       </p:sp>
       <p:sp>
         <p:nvSpPr>
-          <p:cNvPr id="21" name="TextBox 20"/>
+          <p:cNvPr id="22" name="TextBox 21"/>
           <p:cNvSpPr txBox="1"/>
           <p:nvPr/>
         </p:nvSpPr>
@@ -4339,7 +4373,7 @@
       </p:sp>
       <p:sp>
         <p:nvSpPr>
-          <p:cNvPr id="22" name="TextBox 21"/>
+          <p:cNvPr id="23" name="TextBox 22"/>
           <p:cNvSpPr txBox="1"/>
           <p:nvPr/>
         </p:nvSpPr>
@@ -4374,7 +4408,7 @@
       </p:sp>
       <p:sp>
         <p:nvSpPr>
-          <p:cNvPr id="23" name="TextBox 22"/>
+          <p:cNvPr id="24" name="TextBox 23"/>
           <p:cNvSpPr txBox="1"/>
           <p:nvPr/>
         </p:nvSpPr>
@@ -4634,7 +4668,7 @@
         </p:blipFill>
         <p:spPr>
           <a:xfrm>
-            <a:off x="2347280" y="1737360"/>
+            <a:off x="1758306" y="1737360"/>
             <a:ext cx="3232217" cy="3520440"/>
           </a:xfrm>
           <a:prstGeom prst="rect">
@@ -4650,7 +4684,7 @@
         </p:nvSpPr>
         <p:spPr>
           <a:xfrm>
-            <a:off x="2347280" y="5349240"/>
+            <a:off x="1758306" y="5349240"/>
             <a:ext cx="3232216" cy="329184"/>
           </a:xfrm>
           <a:prstGeom prst="rect">
@@ -4693,8 +4727,8 @@
         </p:blipFill>
         <p:spPr>
           <a:xfrm>
-            <a:off x="6082417" y="1737360"/>
-            <a:ext cx="3759253" cy="3520440"/>
+            <a:off x="5493443" y="1737360"/>
+            <a:ext cx="4937202" cy="3520440"/>
           </a:xfrm>
           <a:prstGeom prst="rect">
             <a:avLst/>
@@ -4709,8 +4743,8 @@
         </p:nvSpPr>
         <p:spPr>
           <a:xfrm>
-            <a:off x="6082417" y="5349240"/>
-            <a:ext cx="3759253" cy="329184"/>
+            <a:off x="5493443" y="5349240"/>
+            <a:ext cx="4937202" cy="329184"/>
           </a:xfrm>
           <a:prstGeom prst="rect">
             <a:avLst/>
@@ -4731,7 +4765,7 @@
                 </a:solidFill>
                 <a:latin typeface="Archivo"/>
               </a:rPr>
-              <a:t>What the twin fills in</a:t>
+              <a:t>What the twin predicts</a:t>
             </a:r>
           </a:p>
         </p:txBody>

--- a/ARA_Challenge3.pptx
+++ b/ARA_Challenge3.pptx
@@ -3671,7 +3671,7 @@
         <p:spPr>
           <a:xfrm>
             <a:off x="502920" y="1463040"/>
-            <a:ext cx="10881360" cy="777240"/>
+            <a:ext cx="5486400" cy="1188720"/>
           </a:xfrm>
           <a:prstGeom prst="rect">
             <a:avLst/>
@@ -3686,13 +3686,14 @@
           <a:p>
             <a:pPr algn="l"/>
             <a:r>
-              <a:rPr sz="4400" b="1">
+              <a:rPr sz="4000" b="1">
                 <a:solidFill>
                   <a:srgbClr val="1C1917"/>
                 </a:solidFill>
                 <a:latin typeface="Archivo"/>
               </a:rPr>
-              <a:t>Where should the next tower go?</a:t>
+              <a:t>Where should the
+next tower go?</a:t>
             </a:r>
           </a:p>
         </p:txBody>
@@ -3705,8 +3706,8 @@
         </p:nvSpPr>
         <p:spPr>
           <a:xfrm>
-            <a:off x="502920" y="2395728"/>
-            <a:ext cx="10058400" cy="384048"/>
+            <a:off x="502920" y="2761488"/>
+            <a:ext cx="5394960" cy="384048"/>
           </a:xfrm>
           <a:prstGeom prst="rect">
             <a:avLst/>
@@ -3740,8 +3741,8 @@
         </p:nvSpPr>
         <p:spPr>
           <a:xfrm>
-            <a:off x="502920" y="2971800"/>
-            <a:ext cx="9509760" cy="868680"/>
+            <a:off x="502920" y="3310128"/>
+            <a:ext cx="5212080" cy="1463040"/>
           </a:xfrm>
           <a:prstGeom prst="rect">
             <a:avLst/>
@@ -3767,16 +3768,75 @@
           </a:p>
         </p:txBody>
       </p:sp>
-      <p:sp>
-        <p:nvSpPr>
-          <p:cNvPr id="7" name="Rectangle 6"/>
-          <p:cNvSpPr/>
-          <p:nvPr/>
-        </p:nvSpPr>
-        <p:spPr>
-          <a:xfrm>
-            <a:off x="502920" y="4160520"/>
-            <a:ext cx="2606040" cy="932688"/>
+      <p:pic>
+        <p:nvPicPr>
+          <p:cNvPr id="7" name="Picture 6" descr="decision.png"/>
+          <p:cNvPicPr>
+            <a:picLocks noChangeAspect="1"/>
+          </p:cNvPicPr>
+          <p:nvPr/>
+        </p:nvPicPr>
+        <p:blipFill>
+          <a:blip r:embed="rId2"/>
+          <a:stretch>
+            <a:fillRect/>
+          </a:stretch>
+        </p:blipFill>
+        <p:spPr>
+          <a:xfrm>
+            <a:off x="5989320" y="1371600"/>
+            <a:ext cx="5585908" cy="3063240"/>
+          </a:xfrm>
+          <a:prstGeom prst="rect">
+            <a:avLst/>
+          </a:prstGeom>
+        </p:spPr>
+      </p:pic>
+      <p:sp>
+        <p:nvSpPr>
+          <p:cNvPr id="8" name="TextBox 7"/>
+          <p:cNvSpPr txBox="1"/>
+          <p:nvPr/>
+        </p:nvSpPr>
+        <p:spPr>
+          <a:xfrm>
+            <a:off x="5989320" y="4526280"/>
+            <a:ext cx="5577840" cy="457200"/>
+          </a:xfrm>
+          <a:prstGeom prst="rect">
+            <a:avLst/>
+          </a:prstGeom>
+          <a:noFill/>
+        </p:spPr>
+        <p:txBody>
+          <a:bodyPr wrap="square" anchor="t" lIns="0" rIns="0" tIns="0" bIns="0">
+            <a:spAutoFit/>
+          </a:bodyPr>
+          <a:lstStyle/>
+          <a:p>
+            <a:pPr algn="l"/>
+            <a:r>
+              <a:rPr sz="1050" b="0">
+                <a:solidFill>
+                  <a:srgbClr val="3A4842"/>
+                </a:solidFill>
+                <a:latin typeface="Consolas"/>
+              </a:rPr>
+              <a:t>Four towers today. 627 places the next one could go.</a:t>
+            </a:r>
+          </a:p>
+        </p:txBody>
+      </p:sp>
+      <p:sp>
+        <p:nvSpPr>
+          <p:cNvPr id="9" name="Rectangle 8"/>
+          <p:cNvSpPr/>
+          <p:nvPr/>
+        </p:nvSpPr>
+        <p:spPr>
+          <a:xfrm>
+            <a:off x="502920" y="4937760"/>
+            <a:ext cx="3520440" cy="932688"/>
           </a:xfrm>
           <a:prstGeom prst="rect">
             <a:avLst/>
@@ -3815,14 +3875,14 @@
       </p:sp>
       <p:sp>
         <p:nvSpPr>
-          <p:cNvPr id="8" name="TextBox 7"/>
+          <p:cNvPr id="10" name="TextBox 9"/>
           <p:cNvSpPr txBox="1"/>
           <p:nvPr/>
         </p:nvSpPr>
         <p:spPr>
           <a:xfrm>
-            <a:off x="630936" y="4251960"/>
-            <a:ext cx="2350008" cy="146304"/>
+            <a:off x="630936" y="5029200"/>
+            <a:ext cx="3264408" cy="146304"/>
           </a:xfrm>
           <a:prstGeom prst="rect">
             <a:avLst/>
@@ -3850,14 +3910,14 @@
       </p:sp>
       <p:sp>
         <p:nvSpPr>
-          <p:cNvPr id="9" name="TextBox 8"/>
+          <p:cNvPr id="11" name="TextBox 10"/>
           <p:cNvSpPr txBox="1"/>
           <p:nvPr/>
         </p:nvSpPr>
         <p:spPr>
           <a:xfrm>
-            <a:off x="630936" y="4416552"/>
-            <a:ext cx="2350008" cy="384048"/>
+            <a:off x="630936" y="5193792"/>
+            <a:ext cx="3264408" cy="384048"/>
           </a:xfrm>
           <a:prstGeom prst="rect">
             <a:avLst/>
@@ -3872,7 +3932,7 @@
           <a:p>
             <a:pPr algn="l"/>
             <a:r>
-              <a:rPr sz="2500" b="1">
+              <a:rPr sz="2400" b="1">
                 <a:solidFill>
                   <a:srgbClr val="1C1917"/>
                 </a:solidFill>
@@ -3885,14 +3945,14 @@
       </p:sp>
       <p:sp>
         <p:nvSpPr>
-          <p:cNvPr id="10" name="TextBox 9"/>
+          <p:cNvPr id="12" name="TextBox 11"/>
           <p:cNvSpPr txBox="1"/>
           <p:nvPr/>
         </p:nvSpPr>
         <p:spPr>
           <a:xfrm>
-            <a:off x="630936" y="4818888"/>
-            <a:ext cx="2350008" cy="219456"/>
+            <a:off x="630936" y="5596128"/>
+            <a:ext cx="3264408" cy="219456"/>
           </a:xfrm>
           <a:prstGeom prst="rect">
             <a:avLst/>
@@ -3913,21 +3973,21 @@
                 </a:solidFill>
                 <a:latin typeface="Consolas"/>
               </a:rPr>
-              <a:t>rows · 42% with no service</a:t>
+              <a:t>rows · 42% no service</a:t>
             </a:r>
           </a:p>
         </p:txBody>
       </p:sp>
       <p:sp>
         <p:nvSpPr>
-          <p:cNvPr id="11" name="Rectangle 10"/>
-          <p:cNvSpPr/>
-          <p:nvPr/>
-        </p:nvSpPr>
-        <p:spPr>
-          <a:xfrm>
-            <a:off x="3319272" y="4160520"/>
-            <a:ext cx="2606040" cy="932688"/>
+          <p:cNvPr id="13" name="Rectangle 12"/>
+          <p:cNvSpPr/>
+          <p:nvPr/>
+        </p:nvSpPr>
+        <p:spPr>
+          <a:xfrm>
+            <a:off x="4270248" y="4937760"/>
+            <a:ext cx="3520440" cy="932688"/>
           </a:xfrm>
           <a:prstGeom prst="rect">
             <a:avLst/>
@@ -3966,14 +4026,14 @@
       </p:sp>
       <p:sp>
         <p:nvSpPr>
-          <p:cNvPr id="12" name="TextBox 11"/>
+          <p:cNvPr id="14" name="TextBox 13"/>
           <p:cNvSpPr txBox="1"/>
           <p:nvPr/>
         </p:nvSpPr>
         <p:spPr>
           <a:xfrm>
-            <a:off x="3447288" y="4251960"/>
-            <a:ext cx="2350008" cy="146304"/>
+            <a:off x="4398264" y="5029200"/>
+            <a:ext cx="3264408" cy="146304"/>
           </a:xfrm>
           <a:prstGeom prst="rect">
             <a:avLst/>
@@ -4001,14 +4061,14 @@
       </p:sp>
       <p:sp>
         <p:nvSpPr>
-          <p:cNvPr id="13" name="TextBox 12"/>
+          <p:cNvPr id="15" name="TextBox 14"/>
           <p:cNvSpPr txBox="1"/>
           <p:nvPr/>
         </p:nvSpPr>
         <p:spPr>
           <a:xfrm>
-            <a:off x="3447288" y="4416552"/>
-            <a:ext cx="2350008" cy="384048"/>
+            <a:off x="4398264" y="5193792"/>
+            <a:ext cx="3264408" cy="384048"/>
           </a:xfrm>
           <a:prstGeom prst="rect">
             <a:avLst/>
@@ -4023,7 +4083,7 @@
           <a:p>
             <a:pPr algn="l"/>
             <a:r>
-              <a:rPr sz="2500" b="1">
+              <a:rPr sz="2400" b="1">
                 <a:solidFill>
                   <a:srgbClr val="1C1917"/>
                 </a:solidFill>
@@ -4036,14 +4096,14 @@
       </p:sp>
       <p:sp>
         <p:nvSpPr>
-          <p:cNvPr id="14" name="TextBox 13"/>
+          <p:cNvPr id="16" name="TextBox 15"/>
           <p:cNvSpPr txBox="1"/>
           <p:nvPr/>
         </p:nvSpPr>
         <p:spPr>
           <a:xfrm>
-            <a:off x="3447288" y="4818888"/>
-            <a:ext cx="2350008" cy="219456"/>
+            <a:off x="4398264" y="5596128"/>
+            <a:ext cx="3264408" cy="219456"/>
           </a:xfrm>
           <a:prstGeom prst="rect">
             <a:avLst/>
@@ -4071,14 +4131,14 @@
       </p:sp>
       <p:sp>
         <p:nvSpPr>
-          <p:cNvPr id="15" name="Rectangle 14"/>
-          <p:cNvSpPr/>
-          <p:nvPr/>
-        </p:nvSpPr>
-        <p:spPr>
-          <a:xfrm>
-            <a:off x="6135624" y="4160520"/>
-            <a:ext cx="2606040" cy="932688"/>
+          <p:cNvPr id="17" name="Rectangle 16"/>
+          <p:cNvSpPr/>
+          <p:nvPr/>
+        </p:nvSpPr>
+        <p:spPr>
+          <a:xfrm>
+            <a:off x="8037576" y="4937760"/>
+            <a:ext cx="3520440" cy="932688"/>
           </a:xfrm>
           <a:prstGeom prst="rect">
             <a:avLst/>
@@ -4117,165 +4177,14 @@
       </p:sp>
       <p:sp>
         <p:nvSpPr>
-          <p:cNvPr id="16" name="TextBox 15"/>
-          <p:cNvSpPr txBox="1"/>
-          <p:nvPr/>
-        </p:nvSpPr>
-        <p:spPr>
-          <a:xfrm>
-            <a:off x="6263640" y="4251960"/>
-            <a:ext cx="2350008" cy="146304"/>
-          </a:xfrm>
-          <a:prstGeom prst="rect">
-            <a:avLst/>
-          </a:prstGeom>
-          <a:noFill/>
-        </p:spPr>
-        <p:txBody>
-          <a:bodyPr wrap="square" anchor="t" lIns="0" rIns="0" tIns="0" bIns="0">
-            <a:spAutoFit/>
-          </a:bodyPr>
-          <a:lstStyle/>
-          <a:p>
-            <a:pPr algn="l"/>
-            <a:r>
-              <a:rPr sz="800" b="0" spc="120">
-                <a:solidFill>
-                  <a:srgbClr val="79716B"/>
-                </a:solidFill>
-                <a:latin typeface="Consolas"/>
-              </a:rPr>
-              <a:t>BEST HELD OUT</a:t>
-            </a:r>
-          </a:p>
-        </p:txBody>
-      </p:sp>
-      <p:sp>
-        <p:nvSpPr>
-          <p:cNvPr id="17" name="TextBox 16"/>
-          <p:cNvSpPr txBox="1"/>
-          <p:nvPr/>
-        </p:nvSpPr>
-        <p:spPr>
-          <a:xfrm>
-            <a:off x="6263640" y="4416552"/>
-            <a:ext cx="2350008" cy="384048"/>
-          </a:xfrm>
-          <a:prstGeom prst="rect">
-            <a:avLst/>
-          </a:prstGeom>
-          <a:noFill/>
-        </p:spPr>
-        <p:txBody>
-          <a:bodyPr wrap="square" anchor="t" lIns="0" rIns="0" tIns="0" bIns="0">
-            <a:spAutoFit/>
-          </a:bodyPr>
-          <a:lstStyle/>
-          <a:p>
-            <a:pPr algn="l"/>
-            <a:r>
-              <a:rPr sz="2500" b="1">
-                <a:solidFill>
-                  <a:srgbClr val="3E5C6B"/>
-                </a:solidFill>
-                <a:latin typeface="Archivo"/>
-              </a:rPr>
-              <a:t>7.95 dB</a:t>
-            </a:r>
-          </a:p>
-        </p:txBody>
-      </p:sp>
-      <p:sp>
-        <p:nvSpPr>
           <p:cNvPr id="18" name="TextBox 17"/>
           <p:cNvSpPr txBox="1"/>
           <p:nvPr/>
         </p:nvSpPr>
         <p:spPr>
           <a:xfrm>
-            <a:off x="6263640" y="4818888"/>
-            <a:ext cx="2350008" cy="219456"/>
-          </a:xfrm>
-          <a:prstGeom prst="rect">
-            <a:avLst/>
-          </a:prstGeom>
-          <a:noFill/>
-        </p:spPr>
-        <p:txBody>
-          <a:bodyPr wrap="square" anchor="t" lIns="0" rIns="0" tIns="0" bIns="0">
-            <a:spAutoFit/>
-          </a:bodyPr>
-          <a:lstStyle/>
-          <a:p>
-            <a:pPr algn="l"/>
-            <a:r>
-              <a:rPr sz="850" b="0">
-                <a:solidFill>
-                  <a:srgbClr val="79716B"/>
-                </a:solidFill>
-                <a:latin typeface="Consolas"/>
-              </a:rPr>
-              <a:t>Ray tracing</a:t>
-            </a:r>
-          </a:p>
-        </p:txBody>
-      </p:sp>
-      <p:sp>
-        <p:nvSpPr>
-          <p:cNvPr id="19" name="Rectangle 18"/>
-          <p:cNvSpPr/>
-          <p:nvPr/>
-        </p:nvSpPr>
-        <p:spPr>
-          <a:xfrm>
-            <a:off x="8951976" y="4160520"/>
-            <a:ext cx="2606040" cy="932688"/>
-          </a:xfrm>
-          <a:prstGeom prst="rect">
-            <a:avLst/>
-          </a:prstGeom>
-          <a:solidFill>
-            <a:srgbClr val="F5F2EE"/>
-          </a:solidFill>
-          <a:ln w="12700">
-            <a:solidFill>
-              <a:srgbClr val="D9D3CB"/>
-            </a:solidFill>
-          </a:ln>
-          <a:effectLst/>
-        </p:spPr>
-        <p:style>
-          <a:lnRef idx="1">
-            <a:schemeClr val="accent1"/>
-          </a:lnRef>
-          <a:fillRef idx="3">
-            <a:schemeClr val="accent1"/>
-          </a:fillRef>
-          <a:effectRef idx="2">
-            <a:schemeClr val="accent1"/>
-          </a:effectRef>
-          <a:fontRef idx="minor">
-            <a:schemeClr val="lt1"/>
-          </a:fontRef>
-        </p:style>
-        <p:txBody>
-          <a:bodyPr rtlCol="0" anchor="ctr"/>
-          <a:lstStyle/>
-          <a:p>
-            <a:pPr algn="ctr"/>
-          </a:p>
-        </p:txBody>
-      </p:sp>
-      <p:sp>
-        <p:nvSpPr>
-          <p:cNvPr id="20" name="TextBox 19"/>
-          <p:cNvSpPr txBox="1"/>
-          <p:nvPr/>
-        </p:nvSpPr>
-        <p:spPr>
-          <a:xfrm>
-            <a:off x="9079992" y="4251960"/>
-            <a:ext cx="2350008" cy="146304"/>
+            <a:off x="8165592" y="5029200"/>
+            <a:ext cx="3264408" cy="146304"/>
           </a:xfrm>
           <a:prstGeom prst="rect">
             <a:avLst/>
@@ -4303,14 +4212,14 @@
       </p:sp>
       <p:sp>
         <p:nvSpPr>
-          <p:cNvPr id="21" name="TextBox 20"/>
+          <p:cNvPr id="19" name="TextBox 18"/>
           <p:cNvSpPr txBox="1"/>
           <p:nvPr/>
         </p:nvSpPr>
         <p:spPr>
           <a:xfrm>
-            <a:off x="9079992" y="4416552"/>
-            <a:ext cx="2350008" cy="384048"/>
+            <a:off x="8165592" y="5193792"/>
+            <a:ext cx="3264408" cy="384048"/>
           </a:xfrm>
           <a:prstGeom prst="rect">
             <a:avLst/>
@@ -4327,7 +4236,7 @@
             <a:r>
               <a:rPr sz="2100" b="1">
                 <a:solidFill>
-                  <a:srgbClr val="3E5C6B"/>
+                  <a:srgbClr val="B4532A"/>
                 </a:solidFill>
                 <a:latin typeface="Archivo"/>
               </a:rPr>
@@ -4338,14 +4247,14 @@
       </p:sp>
       <p:sp>
         <p:nvSpPr>
-          <p:cNvPr id="22" name="TextBox 21"/>
+          <p:cNvPr id="20" name="TextBox 19"/>
           <p:cNvSpPr txBox="1"/>
           <p:nvPr/>
         </p:nvSpPr>
         <p:spPr>
           <a:xfrm>
-            <a:off x="9079992" y="4818888"/>
-            <a:ext cx="2350008" cy="219456"/>
+            <a:off x="8165592" y="5596128"/>
+            <a:ext cx="3264408" cy="219456"/>
           </a:xfrm>
           <a:prstGeom prst="rect">
             <a:avLst/>
@@ -4366,20 +4275,20 @@
                 </a:solidFill>
                 <a:latin typeface="Consolas"/>
               </a:rPr>
-              <a:t>one macro site</a:t>
+              <a:t>with one more site</a:t>
             </a:r>
           </a:p>
         </p:txBody>
       </p:sp>
       <p:sp>
         <p:nvSpPr>
-          <p:cNvPr id="23" name="TextBox 22"/>
+          <p:cNvPr id="21" name="TextBox 20"/>
           <p:cNvSpPr txBox="1"/>
           <p:nvPr/>
         </p:nvSpPr>
         <p:spPr>
           <a:xfrm>
-            <a:off x="502920" y="5486400"/>
+            <a:off x="502920" y="6144768"/>
             <a:ext cx="10881360" cy="274320"/>
           </a:xfrm>
           <a:prstGeom prst="rect">
@@ -4408,7 +4317,7 @@
       </p:sp>
       <p:sp>
         <p:nvSpPr>
-          <p:cNvPr id="24" name="TextBox 23"/>
+          <p:cNvPr id="22" name="TextBox 21"/>
           <p:cNvSpPr txBox="1"/>
           <p:nvPr/>
         </p:nvSpPr>
@@ -4647,14 +4556,14 @@
                 </a:solidFill>
                 <a:latin typeface="Archivo"/>
               </a:rPr>
-              <a:t>Left: every sample the van recorded. Right: what a twin fills in.</a:t>
+              <a:t>Same ground, same scale, same colours. Only the coverage differs.</a:t>
             </a:r>
           </a:p>
         </p:txBody>
       </p:sp>
       <p:pic>
         <p:nvPicPr>
-          <p:cNvPr id="7" name="Picture 6" descr="measured.png"/>
+          <p:cNvPr id="7" name="Picture 6" descr="gap_measured.png"/>
           <p:cNvPicPr>
             <a:picLocks noChangeAspect="1"/>
           </p:cNvPicPr>
@@ -4668,8 +4577,8 @@
         </p:blipFill>
         <p:spPr>
           <a:xfrm>
-            <a:off x="1758306" y="1737360"/>
-            <a:ext cx="3232217" cy="3520440"/>
+            <a:off x="1517903" y="1737360"/>
+            <a:ext cx="4325112" cy="3520440"/>
           </a:xfrm>
           <a:prstGeom prst="rect">
             <a:avLst/>
@@ -4684,8 +4593,8 @@
         </p:nvSpPr>
         <p:spPr>
           <a:xfrm>
-            <a:off x="1758306" y="5349240"/>
-            <a:ext cx="3232216" cy="329184"/>
+            <a:off x="1517903" y="5349240"/>
+            <a:ext cx="4325112" cy="329184"/>
           </a:xfrm>
           <a:prstGeom prst="rect">
             <a:avLst/>
@@ -4713,7 +4622,7 @@
       </p:sp>
       <p:pic>
         <p:nvPicPr>
-          <p:cNvPr id="9" name="Picture 8" descr="predicted.png"/>
+          <p:cNvPr id="9" name="Picture 8" descr="gap_predicted.png"/>
           <p:cNvPicPr>
             <a:picLocks noChangeAspect="1"/>
           </p:cNvPicPr>
@@ -4727,8 +4636,8 @@
         </p:blipFill>
         <p:spPr>
           <a:xfrm>
-            <a:off x="5493443" y="1737360"/>
-            <a:ext cx="4937202" cy="3520440"/>
+            <a:off x="6345936" y="1737360"/>
+            <a:ext cx="4325112" cy="3520440"/>
           </a:xfrm>
           <a:prstGeom prst="rect">
             <a:avLst/>
@@ -4743,8 +4652,8 @@
         </p:nvSpPr>
         <p:spPr>
           <a:xfrm>
-            <a:off x="5493443" y="5349240"/>
-            <a:ext cx="4937202" cy="329184"/>
+            <a:off x="6345936" y="5349240"/>
+            <a:ext cx="4325112" cy="329184"/>
           </a:xfrm>
           <a:prstGeom prst="rect">
             <a:avLst/>

--- a/ARA_Challenge3.pptx
+++ b/ARA_Challenge3.pptx
@@ -5130,14 +5130,49 @@
                 </a:solidFill>
                 <a:latin typeface="Archivo"/>
               </a:rPr>
-              <a:t>Same ground, same scale. Each reads something different and each can be wrong in its own way.</a:t>
+              <a:t>Each one reads something different about the same ground.</a:t>
+            </a:r>
+          </a:p>
+        </p:txBody>
+      </p:sp>
+      <p:sp>
+        <p:nvSpPr>
+          <p:cNvPr id="7" name="TextBox 6"/>
+          <p:cNvSpPr txBox="1"/>
+          <p:nvPr/>
+        </p:nvSpPr>
+        <p:spPr>
+          <a:xfrm>
+            <a:off x="475488" y="1664208"/>
+            <a:ext cx="2670048" cy="274320"/>
+          </a:xfrm>
+          <a:prstGeom prst="rect">
+            <a:avLst/>
+          </a:prstGeom>
+          <a:noFill/>
+        </p:spPr>
+        <p:txBody>
+          <a:bodyPr wrap="square" anchor="t" lIns="0" rIns="0" tIns="0" bIns="0">
+            <a:spAutoFit/>
+          </a:bodyPr>
+          <a:lstStyle/>
+          <a:p>
+            <a:pPr algn="l"/>
+            <a:r>
+              <a:rPr sz="1400" b="1">
+                <a:solidFill>
+                  <a:srgbClr val="9A6E1E"/>
+                </a:solidFill>
+                <a:latin typeface="Archivo"/>
+              </a:rPr>
+              <a:t>Baseline</a:t>
             </a:r>
           </a:p>
         </p:txBody>
       </p:sp>
       <p:pic>
         <p:nvPicPr>
-          <p:cNvPr id="7" name="Picture 6" descr="map_baseline.png"/>
+          <p:cNvPr id="8" name="Picture 7" descr="how_baseline.png"/>
           <p:cNvPicPr>
             <a:picLocks noChangeAspect="1"/>
           </p:cNvPicPr>
@@ -5151,8 +5186,8 @@
         </p:blipFill>
         <p:spPr>
           <a:xfrm>
-            <a:off x="457200" y="1737360"/>
-            <a:ext cx="2697480" cy="2466267"/>
+            <a:off x="475488" y="2011680"/>
+            <a:ext cx="2670048" cy="2021608"/>
           </a:xfrm>
           <a:prstGeom prst="rect">
             <a:avLst/>
@@ -5161,14 +5196,14 @@
       </p:pic>
       <p:sp>
         <p:nvSpPr>
-          <p:cNvPr id="8" name="TextBox 7"/>
+          <p:cNvPr id="9" name="TextBox 8"/>
           <p:cNvSpPr txBox="1"/>
           <p:nvPr/>
         </p:nvSpPr>
         <p:spPr>
           <a:xfrm>
-            <a:off x="502920" y="4407408"/>
-            <a:ext cx="2697480" cy="384048"/>
+            <a:off x="475488" y="4114800"/>
+            <a:ext cx="2670048" cy="685800"/>
           </a:xfrm>
           <a:prstGeom prst="rect">
             <a:avLst/>
@@ -5183,20 +5218,55 @@
           <a:p>
             <a:pPr algn="l"/>
             <a:r>
-              <a:rPr sz="1150" b="0">
+              <a:rPr sz="1100" b="0">
                 <a:solidFill>
                   <a:srgbClr val="3A4842"/>
                 </a:solidFill>
                 <a:latin typeface="Archivo"/>
               </a:rPr>
-              <a:t>reads distance and bearing</a:t>
+              <a:t>Fit a curve to the measurements and read it off anywhere.</a:t>
+            </a:r>
+          </a:p>
+        </p:txBody>
+      </p:sp>
+      <p:sp>
+        <p:nvSpPr>
+          <p:cNvPr id="10" name="TextBox 9"/>
+          <p:cNvSpPr txBox="1"/>
+          <p:nvPr/>
+        </p:nvSpPr>
+        <p:spPr>
+          <a:xfrm>
+            <a:off x="3300984" y="1664208"/>
+            <a:ext cx="2670048" cy="274320"/>
+          </a:xfrm>
+          <a:prstGeom prst="rect">
+            <a:avLst/>
+          </a:prstGeom>
+          <a:noFill/>
+        </p:spPr>
+        <p:txBody>
+          <a:bodyPr wrap="square" anchor="t" lIns="0" rIns="0" tIns="0" bIns="0">
+            <a:spAutoFit/>
+          </a:bodyPr>
+          <a:lstStyle/>
+          <a:p>
+            <a:pPr algn="l"/>
+            <a:r>
+              <a:rPr sz="1400" b="1">
+                <a:solidFill>
+                  <a:srgbClr val="3E5C6B"/>
+                </a:solidFill>
+                <a:latin typeface="Archivo"/>
+              </a:rPr>
+              <a:t>Ray tracing</a:t>
             </a:r>
           </a:p>
         </p:txBody>
       </p:sp>
       <p:pic>
         <p:nvPicPr>
-          <p:cNvPr id="9" name="Picture 8" descr="map_ray_tracing.png"/>
+          <p:cNvPr id="11" name="Picture 10" descr="how_raytracing.png"/>
           <p:cNvPicPr>
             <a:picLocks noChangeAspect="1"/>
           </p:cNvPicPr>
@@ -5210,8 +5280,8 @@
         </p:blipFill>
         <p:spPr>
           <a:xfrm>
-            <a:off x="3282696" y="1737360"/>
-            <a:ext cx="2697480" cy="2466267"/>
+            <a:off x="3300984" y="2011680"/>
+            <a:ext cx="2670048" cy="2021608"/>
           </a:xfrm>
           <a:prstGeom prst="rect">
             <a:avLst/>
@@ -5220,14 +5290,14 @@
       </p:pic>
       <p:sp>
         <p:nvSpPr>
-          <p:cNvPr id="10" name="TextBox 9"/>
+          <p:cNvPr id="12" name="TextBox 11"/>
           <p:cNvSpPr txBox="1"/>
           <p:nvPr/>
         </p:nvSpPr>
         <p:spPr>
           <a:xfrm>
-            <a:off x="3328416" y="4407408"/>
-            <a:ext cx="2697480" cy="384048"/>
+            <a:off x="3300984" y="4114800"/>
+            <a:ext cx="2670048" cy="685800"/>
           </a:xfrm>
           <a:prstGeom prst="rect">
             <a:avLst/>
@@ -5242,20 +5312,55 @@
           <a:p>
             <a:pPr algn="l"/>
             <a:r>
-              <a:rPr sz="1150" b="0">
+              <a:rPr sz="1100" b="0">
                 <a:solidFill>
                   <a:srgbClr val="3A4842"/>
                 </a:solidFill>
                 <a:latin typeface="Archivo"/>
               </a:rPr>
-              <a:t>reads terrain and buildings</a:t>
+              <a:t>Rebuild the terrain and buildings, then trace the signal through it.</a:t>
+            </a:r>
+          </a:p>
+        </p:txBody>
+      </p:sp>
+      <p:sp>
+        <p:nvSpPr>
+          <p:cNvPr id="13" name="TextBox 12"/>
+          <p:cNvSpPr txBox="1"/>
+          <p:nvPr/>
+        </p:nvSpPr>
+        <p:spPr>
+          <a:xfrm>
+            <a:off x="6126479" y="1664208"/>
+            <a:ext cx="2670048" cy="274320"/>
+          </a:xfrm>
+          <a:prstGeom prst="rect">
+            <a:avLst/>
+          </a:prstGeom>
+          <a:noFill/>
+        </p:spPr>
+        <p:txBody>
+          <a:bodyPr wrap="square" anchor="t" lIns="0" rIns="0" tIns="0" bIns="0">
+            <a:spAutoFit/>
+          </a:bodyPr>
+          <a:lstStyle/>
+          <a:p>
+            <a:pPr algn="l"/>
+            <a:r>
+              <a:rPr sz="1400" b="1">
+                <a:solidFill>
+                  <a:srgbClr val="6B7F5C"/>
+                </a:solidFill>
+                <a:latin typeface="Archivo"/>
+              </a:rPr>
+              <a:t>Deep learning</a:t>
             </a:r>
           </a:p>
         </p:txBody>
       </p:sp>
       <p:pic>
         <p:nvPicPr>
-          <p:cNvPr id="11" name="Picture 10" descr="map_deep_learning.png"/>
+          <p:cNvPr id="14" name="Picture 13" descr="how_deeplearning.png"/>
           <p:cNvPicPr>
             <a:picLocks noChangeAspect="1"/>
           </p:cNvPicPr>
@@ -5269,8 +5374,8 @@
         </p:blipFill>
         <p:spPr>
           <a:xfrm>
-            <a:off x="6108192" y="1737360"/>
-            <a:ext cx="2697480" cy="2466267"/>
+            <a:off x="6126479" y="2011680"/>
+            <a:ext cx="2670048" cy="2021608"/>
           </a:xfrm>
           <a:prstGeom prst="rect">
             <a:avLst/>
@@ -5279,14 +5384,14 @@
       </p:pic>
       <p:sp>
         <p:nvSpPr>
-          <p:cNvPr id="12" name="TextBox 11"/>
+          <p:cNvPr id="15" name="TextBox 14"/>
           <p:cNvSpPr txBox="1"/>
           <p:nvPr/>
         </p:nvSpPr>
         <p:spPr>
           <a:xfrm>
-            <a:off x="6153912" y="4407408"/>
-            <a:ext cx="2697480" cy="384048"/>
+            <a:off x="6126479" y="4114800"/>
+            <a:ext cx="2670048" cy="685800"/>
           </a:xfrm>
           <a:prstGeom prst="rect">
             <a:avLst/>
@@ -5301,20 +5406,55 @@
           <a:p>
             <a:pPr algn="l"/>
             <a:r>
-              <a:rPr sz="1150" b="0">
+              <a:rPr sz="1100" b="0">
                 <a:solidFill>
                   <a:srgbClr val="3A4842"/>
                 </a:solidFill>
                 <a:latin typeface="Archivo"/>
               </a:rPr>
-              <a:t>reads the shape of the ground</a:t>
+              <a:t>Feed it the ground profile along each link and let it learn the rest.</a:t>
+            </a:r>
+          </a:p>
+        </p:txBody>
+      </p:sp>
+      <p:sp>
+        <p:nvSpPr>
+          <p:cNvPr id="16" name="TextBox 15"/>
+          <p:cNvSpPr txBox="1"/>
+          <p:nvPr/>
+        </p:nvSpPr>
+        <p:spPr>
+          <a:xfrm>
+            <a:off x="8951976" y="1664208"/>
+            <a:ext cx="2670048" cy="274320"/>
+          </a:xfrm>
+          <a:prstGeom prst="rect">
+            <a:avLst/>
+          </a:prstGeom>
+          <a:noFill/>
+        </p:spPr>
+        <p:txBody>
+          <a:bodyPr wrap="square" anchor="t" lIns="0" rIns="0" tIns="0" bIns="0">
+            <a:spAutoFit/>
+          </a:bodyPr>
+          <a:lstStyle/>
+          <a:p>
+            <a:pPr algn="l"/>
+            <a:r>
+              <a:rPr sz="1400" b="1">
+                <a:solidFill>
+                  <a:srgbClr val="B4532A"/>
+                </a:solidFill>
+                <a:latin typeface="Archivo"/>
+              </a:rPr>
+              <a:t>PINN</a:t>
             </a:r>
           </a:p>
         </p:txBody>
       </p:sp>
       <p:pic>
         <p:nvPicPr>
-          <p:cNvPr id="13" name="Picture 12" descr="map_pinn.png"/>
+          <p:cNvPr id="17" name="Picture 16" descr="how_pinn.png"/>
           <p:cNvPicPr>
             <a:picLocks noChangeAspect="1"/>
           </p:cNvPicPr>
@@ -5328,8 +5468,8 @@
         </p:blipFill>
         <p:spPr>
           <a:xfrm>
-            <a:off x="8933688" y="1737360"/>
-            <a:ext cx="2697480" cy="2466267"/>
+            <a:off x="8951976" y="2011680"/>
+            <a:ext cx="2670048" cy="2021608"/>
           </a:xfrm>
           <a:prstGeom prst="rect">
             <a:avLst/>
@@ -5338,14 +5478,14 @@
       </p:pic>
       <p:sp>
         <p:nvSpPr>
-          <p:cNvPr id="14" name="TextBox 13"/>
+          <p:cNvPr id="18" name="TextBox 17"/>
           <p:cNvSpPr txBox="1"/>
           <p:nvPr/>
         </p:nvSpPr>
         <p:spPr>
           <a:xfrm>
-            <a:off x="8979408" y="4407408"/>
-            <a:ext cx="2697480" cy="384048"/>
+            <a:off x="8951976" y="4114800"/>
+            <a:ext cx="2670048" cy="685800"/>
           </a:xfrm>
           <a:prstGeom prst="rect">
             <a:avLst/>
@@ -5360,27 +5500,27 @@
           <a:p>
             <a:pPr algn="l"/>
             <a:r>
-              <a:rPr sz="1150" b="0">
+              <a:rPr sz="1100" b="0">
                 <a:solidFill>
                   <a:srgbClr val="3A4842"/>
                 </a:solidFill>
                 <a:latin typeface="Archivo"/>
               </a:rPr>
-              <a:t>reads position, guided by physics</a:t>
+              <a:t>Learn what distance alone cannot explain, with physics as a rule.</a:t>
             </a:r>
           </a:p>
         </p:txBody>
       </p:sp>
       <p:sp>
         <p:nvSpPr>
-          <p:cNvPr id="15" name="Rectangle 14"/>
-          <p:cNvSpPr/>
-          <p:nvPr/>
-        </p:nvSpPr>
-        <p:spPr>
-          <a:xfrm>
-            <a:off x="457200" y="4983480"/>
-            <a:ext cx="11292840" cy="914400"/>
+          <p:cNvPr id="19" name="Rectangle 18"/>
+          <p:cNvSpPr/>
+          <p:nvPr/>
+        </p:nvSpPr>
+        <p:spPr>
+          <a:xfrm>
+            <a:off x="475488" y="5029200"/>
+            <a:ext cx="11256264" cy="868680"/>
           </a:xfrm>
           <a:prstGeom prst="rect">
             <a:avLst/>
@@ -5419,13 +5559,13 @@
       </p:sp>
       <p:sp>
         <p:nvSpPr>
-          <p:cNvPr id="16" name="TextBox 15"/>
+          <p:cNvPr id="20" name="TextBox 19"/>
           <p:cNvSpPr txBox="1"/>
           <p:nvPr/>
         </p:nvSpPr>
         <p:spPr>
           <a:xfrm>
-            <a:off x="731520" y="5120640"/>
+            <a:off x="749808" y="5157216"/>
             <a:ext cx="10789920" cy="292608"/>
           </a:xfrm>
           <a:prstGeom prst="rect">
@@ -5447,21 +5587,21 @@
                 </a:solidFill>
                 <a:latin typeface="Archivo"/>
               </a:rPr>
-              <a:t>They agree on how much is covered — and disagree about where</a:t>
+              <a:t>All four cover about the same amount of ground — and disagree about where</a:t>
             </a:r>
           </a:p>
         </p:txBody>
       </p:sp>
       <p:sp>
         <p:nvSpPr>
-          <p:cNvPr id="17" name="TextBox 16"/>
+          <p:cNvPr id="21" name="TextBox 20"/>
           <p:cNvSpPr txBox="1"/>
           <p:nvPr/>
         </p:nvSpPr>
         <p:spPr>
           <a:xfrm>
-            <a:off x="731520" y="5440680"/>
-            <a:ext cx="10789920" cy="365760"/>
+            <a:off x="749808" y="5477256"/>
+            <a:ext cx="10789920" cy="329184"/>
           </a:xfrm>
           <a:prstGeom prst="rect">
             <a:avLst/>
@@ -5482,14 +5622,14 @@
                 </a:solidFill>
                 <a:latin typeface="Archivo"/>
               </a:rPr>
-              <a:t>Between 34% and 41% of cells clear the threshold in all four. That spread is small. The question is which one is still right when you move it somewhere it has never seen.</a:t>
+              <a:t>34% to 41% of cells clear the threshold whichever you ask. The question is not who covers more — it is who is still right somewhere new.</a:t>
             </a:r>
           </a:p>
         </p:txBody>
       </p:sp>
       <p:sp>
         <p:nvSpPr>
-          <p:cNvPr id="18" name="TextBox 17"/>
+          <p:cNvPr id="22" name="TextBox 21"/>
           <p:cNvSpPr txBox="1"/>
           <p:nvPr/>
         </p:nvSpPr>

--- a/ARA_Challenge3.pptx
+++ b/ARA_Challenge3.pptx
@@ -5587,7 +5587,7 @@
                 </a:solidFill>
                 <a:latin typeface="Archivo"/>
               </a:rPr>
-              <a:t>All four cover about the same amount of ground — and disagree about where</a:t>
+              <a:t>Same ground, four different bets about what matters</a:t>
             </a:r>
           </a:p>
         </p:txBody>
@@ -5622,7 +5622,7 @@
                 </a:solidFill>
                 <a:latin typeface="Archivo"/>
               </a:rPr>
-              <a:t>34% to 41% of cells clear the threshold whichever you ask. The question is not who covers more — it is who is still right somewhere new.</a:t>
+              <a:t>Distance, geometry, the shape of the ground, or whatever is left over. Each is cheap to believe until you move it somewhere new.</a:t>
             </a:r>
           </a:p>
         </p:txBody>

--- a/ARA_Challenge3.pptx
+++ b/ARA_Challenge3.pptx
@@ -3763,7 +3763,7 @@
                 </a:solidFill>
                 <a:latin typeface="Archivo"/>
               </a:rPr>
-              <a:t>A van drove one rural service area near Ames and logged 7,144 samples. They cover 7% of it. The decision has to be made about the other 93%, so we build a model of the ground and let it stand in for the survey.</a:t>
+              <a:t>Four towers serve this area today, and most of it still has no usable signal — 42% of the samples the van took found no cell at all. One more asset could change that. The question is where to put it.</a:t>
             </a:r>
           </a:p>
         </p:txBody>
@@ -3822,7 +3822,7 @@
                 </a:solidFill>
                 <a:latin typeface="Consolas"/>
               </a:rPr>
-              <a:t>Four towers today. 627 places the next one could go.</a:t>
+              <a:t>Red is where service fails today. The star is where our planner would put the next tower.</a:t>
             </a:r>
           </a:p>
         </p:txBody>
@@ -3903,7 +3903,7 @@
                 </a:solidFill>
                 <a:latin typeface="Consolas"/>
               </a:rPr>
-              <a:t>MEASURED</a:t>
+              <a:t>UNSERVED TODAY</a:t>
             </a:r>
           </a:p>
         </p:txBody>
@@ -3934,11 +3934,11 @@
             <a:r>
               <a:rPr sz="2400" b="1">
                 <a:solidFill>
-                  <a:srgbClr val="1C1917"/>
+                  <a:srgbClr val="B4532A"/>
                 </a:solidFill>
                 <a:latin typeface="Archivo"/>
               </a:rPr>
-              <a:t>7,144</a:t>
+              <a:t>60%</a:t>
             </a:r>
           </a:p>
         </p:txBody>
@@ -3973,7 +3973,7 @@
                 </a:solidFill>
                 <a:latin typeface="Consolas"/>
               </a:rPr>
-              <a:t>rows · 42% no service</a:t>
+              <a:t>of the area, by our model</a:t>
             </a:r>
           </a:p>
         </p:txBody>
@@ -4054,7 +4054,7 @@
                 </a:solidFill>
                 <a:latin typeface="Consolas"/>
               </a:rPr>
-              <a:t>OF THE AREA</a:t>
+              <a:t>WE MEASURED</a:t>
             </a:r>
           </a:p>
         </p:txBody>
@@ -4124,7 +4124,7 @@
                 </a:solidFill>
                 <a:latin typeface="Consolas"/>
               </a:rPr>
-              <a:t>the rest is predicted</a:t>
+              <a:t>of it · the rest is predicted</a:t>
             </a:r>
           </a:p>
         </p:txBody>
@@ -4205,7 +4205,7 @@
                 </a:solidFill>
                 <a:latin typeface="Consolas"/>
               </a:rPr>
-              <a:t>ROUTE COVERED</a:t>
+              <a:t>WITH ONE MORE SITE</a:t>
             </a:r>
           </a:p>
         </p:txBody>
@@ -4275,7 +4275,7 @@
                 </a:solidFill>
                 <a:latin typeface="Consolas"/>
               </a:rPr>
-              <a:t>with one more site</a:t>
+              <a:t>of route covered</a:t>
             </a:r>
           </a:p>
         </p:txBody>

--- a/ARA_Challenge3.pptx
+++ b/ARA_Challenge3.pptx
@@ -258,7 +258,7 @@
             <a:lstStyle/>
             <a:p>
               <a:pPr>
-                <a:defRPr sz="950">
+                <a:defRPr sz="1450">
                   <a:solidFill>
                     <a:srgbClr val="23201C"/>
                   </a:solidFill>
@@ -302,7 +302,7 @@
           <a:lstStyle/>
           <a:p>
             <a:pPr>
-              <a:defRPr sz="950">
+              <a:defRPr sz="1450">
                 <a:solidFill>
                   <a:srgbClr val="8A8279"/>
                 </a:solidFill>
@@ -347,7 +347,7 @@
           <a:lstStyle/>
           <a:p>
             <a:pPr>
-              <a:defRPr sz="950">
+              <a:defRPr sz="1450">
                 <a:solidFill>
                   <a:srgbClr val="8A8279"/>
                 </a:solidFill>
@@ -368,7 +368,7 @@
         <a:lstStyle/>
         <a:p>
           <a:pPr>
-            <a:defRPr sz="1000">
+            <a:defRPr sz="1500">
               <a:solidFill>
                 <a:srgbClr val="4A4540"/>
               </a:solidFill>
@@ -385,7 +385,7 @@
     <a:lstStyle/>
     <a:p>
       <a:pPr>
-        <a:defRPr sz="1000">
+        <a:defRPr sz="1500">
           <a:solidFill>
             <a:srgbClr val="8A8279"/>
           </a:solidFill>
@@ -487,7 +487,7 @@
             <a:lstStyle/>
             <a:p>
               <a:pPr>
-                <a:defRPr sz="950">
+                <a:defRPr sz="1450">
                   <a:solidFill>
                     <a:srgbClr val="23201C"/>
                   </a:solidFill>
@@ -530,7 +530,7 @@
           <a:lstStyle/>
           <a:p>
             <a:pPr>
-              <a:defRPr sz="950">
+              <a:defRPr sz="1450">
                 <a:solidFill>
                   <a:srgbClr val="8A8279"/>
                 </a:solidFill>
@@ -566,7 +566,7 @@
           <a:lstStyle/>
           <a:p>
             <a:pPr>
-              <a:defRPr sz="950">
+              <a:defRPr sz="1450">
                 <a:solidFill>
                   <a:srgbClr val="8A8279"/>
                 </a:solidFill>
@@ -586,7 +586,7 @@
     <a:lstStyle/>
     <a:p>
       <a:pPr>
-        <a:defRPr sz="1000">
+        <a:defRPr sz="1500">
           <a:solidFill>
             <a:srgbClr val="8A8279"/>
           </a:solidFill>
@@ -3651,7 +3651,7 @@
           <a:p>
             <a:pPr algn="l"/>
             <a:r>
-              <a:rPr sz="1200" b="0">
+              <a:rPr sz="1600" b="0">
                 <a:solidFill>
                   <a:srgbClr val="8A8279"/>
                 </a:solidFill>
@@ -3722,7 +3722,7 @@
           <a:p>
             <a:pPr algn="l"/>
             <a:r>
-              <a:rPr sz="1800" b="0">
+              <a:rPr sz="2000" b="0">
                 <a:solidFill>
                   <a:srgbClr val="8C3A28"/>
                 </a:solidFill>
@@ -3816,7 +3816,7 @@
           <a:p>
             <a:pPr algn="l"/>
             <a:r>
-              <a:rPr sz="1050" b="0">
+              <a:rPr sz="1500" b="0">
                 <a:solidFill>
                   <a:srgbClr val="4A4540"/>
                 </a:solidFill>
@@ -3879,8 +3879,8 @@
         </p:nvSpPr>
         <p:spPr>
           <a:xfrm>
-            <a:off x="502920" y="5047488"/>
-            <a:ext cx="3246120" cy="182880"/>
+            <a:off x="502920" y="5029200"/>
+            <a:ext cx="3264408" cy="274320"/>
           </a:xfrm>
           <a:prstGeom prst="rect">
             <a:avLst/>
@@ -3895,7 +3895,7 @@
           <a:p>
             <a:pPr algn="l"/>
             <a:r>
-              <a:rPr sz="950" b="0">
+              <a:rPr sz="1300" b="0">
                 <a:solidFill>
                   <a:srgbClr val="8A8279"/>
                 </a:solidFill>
@@ -3914,8 +3914,8 @@
         </p:nvSpPr>
         <p:spPr>
           <a:xfrm>
-            <a:off x="502920" y="5248656"/>
-            <a:ext cx="3246120" cy="420624"/>
+            <a:off x="502920" y="5321808"/>
+            <a:ext cx="3264408" cy="475488"/>
           </a:xfrm>
           <a:prstGeom prst="rect">
             <a:avLst/>
@@ -3930,7 +3930,7 @@
           <a:p>
             <a:pPr algn="l"/>
             <a:r>
-              <a:rPr sz="2400" b="1">
+              <a:rPr sz="2700" b="1">
                 <a:solidFill>
                   <a:srgbClr val="8C3A28"/>
                 </a:solidFill>
@@ -3949,8 +3949,8 @@
         </p:nvSpPr>
         <p:spPr>
           <a:xfrm>
-            <a:off x="502920" y="5669280"/>
-            <a:ext cx="3246120" cy="237744"/>
+            <a:off x="502920" y="5797296"/>
+            <a:ext cx="3264408" cy="274320"/>
           </a:xfrm>
           <a:prstGeom prst="rect">
             <a:avLst/>
@@ -3965,7 +3965,7 @@
           <a:p>
             <a:pPr algn="l"/>
             <a:r>
-              <a:rPr sz="950" b="0">
+              <a:rPr sz="1300" b="0">
                 <a:solidFill>
                   <a:srgbClr val="8A8279"/>
                 </a:solidFill>
@@ -4028,8 +4028,8 @@
         </p:nvSpPr>
         <p:spPr>
           <a:xfrm>
-            <a:off x="4270248" y="5047488"/>
-            <a:ext cx="3246120" cy="182880"/>
+            <a:off x="4270248" y="5029200"/>
+            <a:ext cx="3264408" cy="274320"/>
           </a:xfrm>
           <a:prstGeom prst="rect">
             <a:avLst/>
@@ -4044,7 +4044,7 @@
           <a:p>
             <a:pPr algn="l"/>
             <a:r>
-              <a:rPr sz="950" b="0">
+              <a:rPr sz="1300" b="0">
                 <a:solidFill>
                   <a:srgbClr val="8A8279"/>
                 </a:solidFill>
@@ -4063,8 +4063,8 @@
         </p:nvSpPr>
         <p:spPr>
           <a:xfrm>
-            <a:off x="4270248" y="5248656"/>
-            <a:ext cx="3246120" cy="420624"/>
+            <a:off x="4270248" y="5321808"/>
+            <a:ext cx="3264408" cy="475488"/>
           </a:xfrm>
           <a:prstGeom prst="rect">
             <a:avLst/>
@@ -4079,7 +4079,7 @@
           <a:p>
             <a:pPr algn="l"/>
             <a:r>
-              <a:rPr sz="2400" b="1">
+              <a:rPr sz="2700" b="1">
                 <a:solidFill>
                   <a:srgbClr val="23201C"/>
                 </a:solidFill>
@@ -4098,8 +4098,8 @@
         </p:nvSpPr>
         <p:spPr>
           <a:xfrm>
-            <a:off x="4270248" y="5669280"/>
-            <a:ext cx="3246120" cy="237744"/>
+            <a:off x="4270248" y="5797296"/>
+            <a:ext cx="3264408" cy="274320"/>
           </a:xfrm>
           <a:prstGeom prst="rect">
             <a:avLst/>
@@ -4114,7 +4114,7 @@
           <a:p>
             <a:pPr algn="l"/>
             <a:r>
-              <a:rPr sz="950" b="0">
+              <a:rPr sz="1300" b="0">
                 <a:solidFill>
                   <a:srgbClr val="8A8279"/>
                 </a:solidFill>
@@ -4177,8 +4177,8 @@
         </p:nvSpPr>
         <p:spPr>
           <a:xfrm>
-            <a:off x="8037576" y="5047488"/>
-            <a:ext cx="3246120" cy="182880"/>
+            <a:off x="8037576" y="5029200"/>
+            <a:ext cx="3264408" cy="274320"/>
           </a:xfrm>
           <a:prstGeom prst="rect">
             <a:avLst/>
@@ -4193,7 +4193,7 @@
           <a:p>
             <a:pPr algn="l"/>
             <a:r>
-              <a:rPr sz="950" b="0">
+              <a:rPr sz="1300" b="0">
                 <a:solidFill>
                   <a:srgbClr val="8A8279"/>
                 </a:solidFill>
@@ -4212,8 +4212,8 @@
         </p:nvSpPr>
         <p:spPr>
           <a:xfrm>
-            <a:off x="8037576" y="5248656"/>
-            <a:ext cx="3246120" cy="420624"/>
+            <a:off x="8037576" y="5321808"/>
+            <a:ext cx="3264408" cy="475488"/>
           </a:xfrm>
           <a:prstGeom prst="rect">
             <a:avLst/>
@@ -4247,8 +4247,8 @@
         </p:nvSpPr>
         <p:spPr>
           <a:xfrm>
-            <a:off x="8037576" y="5669280"/>
-            <a:ext cx="3246120" cy="237744"/>
+            <a:off x="8037576" y="5797296"/>
+            <a:ext cx="3264408" cy="274320"/>
           </a:xfrm>
           <a:prstGeom prst="rect">
             <a:avLst/>
@@ -4263,7 +4263,7 @@
           <a:p>
             <a:pPr algn="l"/>
             <a:r>
-              <a:rPr sz="950" b="0">
+              <a:rPr sz="1300" b="0">
                 <a:solidFill>
                   <a:srgbClr val="8A8279"/>
                 </a:solidFill>
@@ -4298,7 +4298,7 @@
           <a:p>
             <a:pPr algn="l"/>
             <a:r>
-              <a:rPr sz="1150" b="0">
+              <a:rPr sz="1600" b="0">
                 <a:solidFill>
                   <a:srgbClr val="8A8279"/>
                 </a:solidFill>
@@ -4333,7 +4333,7 @@
           <a:p>
             <a:pPr algn="l"/>
             <a:r>
-              <a:rPr sz="900" b="0">
+              <a:rPr sz="1300" b="0">
                 <a:solidFill>
                   <a:srgbClr val="B0A89E"/>
                 </a:solidFill>
@@ -4430,7 +4430,7 @@
           <a:p>
             <a:pPr algn="l"/>
             <a:r>
-              <a:rPr sz="1050" b="0">
+              <a:rPr sz="1500" b="0">
                 <a:solidFill>
                   <a:srgbClr val="8A8279"/>
                 </a:solidFill>
@@ -4500,7 +4500,7 @@
           <a:p>
             <a:pPr algn="l"/>
             <a:r>
-              <a:rPr sz="1250" b="0">
+              <a:rPr sz="1600" b="0">
                 <a:solidFill>
                   <a:srgbClr val="4A4540"/>
                 </a:solidFill>
@@ -4637,8 +4637,8 @@
         </p:nvSpPr>
         <p:spPr>
           <a:xfrm>
-            <a:off x="685800" y="5870448"/>
-            <a:ext cx="914400" cy="384048"/>
+            <a:off x="685800" y="5815584"/>
+            <a:ext cx="1005840" cy="438912"/>
           </a:xfrm>
           <a:prstGeom prst="rect">
             <a:avLst/>
@@ -4653,11 +4653,11 @@
           <a:p>
             <a:pPr algn="l"/>
             <a:r>
-              <a:rPr sz="2000" b="1">
+              <a:rPr sz="2400" b="1">
                 <a:solidFill>
                   <a:srgbClr val="8C3A28"/>
                 </a:solidFill>
-                <a:latin typeface="Calibri"/>
+                <a:latin typeface="Cambria"/>
               </a:rPr>
               <a:t>42%</a:t>
             </a:r>
@@ -4672,8 +4672,8 @@
         </p:nvSpPr>
         <p:spPr>
           <a:xfrm>
-            <a:off x="1600200" y="5943600"/>
-            <a:ext cx="2788920" cy="292608"/>
+            <a:off x="1709928" y="5943600"/>
+            <a:ext cx="2651760" cy="365760"/>
           </a:xfrm>
           <a:prstGeom prst="rect">
             <a:avLst/>
@@ -4688,13 +4688,13 @@
           <a:p>
             <a:pPr algn="l"/>
             <a:r>
-              <a:rPr sz="1050" b="0">
+              <a:rPr sz="1500" b="0">
                 <a:solidFill>
                   <a:srgbClr val="4A4540"/>
                 </a:solidFill>
                 <a:latin typeface="Calibri"/>
               </a:rPr>
-              <a:t>of samples had no serving cell</a:t>
+              <a:t>of samples found no cell</a:t>
             </a:r>
           </a:p>
         </p:txBody>
@@ -4707,8 +4707,8 @@
         </p:nvSpPr>
         <p:spPr>
           <a:xfrm>
-            <a:off x="4453128" y="5870448"/>
-            <a:ext cx="914400" cy="384048"/>
+            <a:off x="4453128" y="5815584"/>
+            <a:ext cx="1005840" cy="438912"/>
           </a:xfrm>
           <a:prstGeom prst="rect">
             <a:avLst/>
@@ -4723,11 +4723,11 @@
           <a:p>
             <a:pPr algn="l"/>
             <a:r>
-              <a:rPr sz="2000" b="1">
+              <a:rPr sz="2400" b="1">
                 <a:solidFill>
                   <a:srgbClr val="8C3A28"/>
                 </a:solidFill>
-                <a:latin typeface="Calibri"/>
+                <a:latin typeface="Cambria"/>
               </a:rPr>
               <a:t>938</a:t>
             </a:r>
@@ -4742,8 +4742,8 @@
         </p:nvSpPr>
         <p:spPr>
           <a:xfrm>
-            <a:off x="5367528" y="5943600"/>
-            <a:ext cx="2788920" cy="292608"/>
+            <a:off x="5477256" y="5943600"/>
+            <a:ext cx="2651760" cy="365760"/>
           </a:xfrm>
           <a:prstGeom prst="rect">
             <a:avLst/>
@@ -4758,13 +4758,13 @@
           <a:p>
             <a:pPr algn="l"/>
             <a:r>
-              <a:rPr sz="1050" b="0">
+              <a:rPr sz="1500" b="0">
                 <a:solidFill>
                   <a:srgbClr val="4A4540"/>
                 </a:solidFill>
                 <a:latin typeface="Calibri"/>
               </a:rPr>
-              <a:t>of 8,176 cells hold a measurement</a:t>
+              <a:t>of 8,176 cells measured</a:t>
             </a:r>
           </a:p>
         </p:txBody>
@@ -4777,8 +4777,8 @@
         </p:nvSpPr>
         <p:spPr>
           <a:xfrm>
-            <a:off x="8220456" y="5870448"/>
-            <a:ext cx="914400" cy="384048"/>
+            <a:off x="8220456" y="5815584"/>
+            <a:ext cx="1005840" cy="438912"/>
           </a:xfrm>
           <a:prstGeom prst="rect">
             <a:avLst/>
@@ -4793,11 +4793,11 @@
           <a:p>
             <a:pPr algn="l"/>
             <a:r>
-              <a:rPr sz="2000" b="1">
+              <a:rPr sz="2400" b="1">
                 <a:solidFill>
                   <a:srgbClr val="8C3A28"/>
                 </a:solidFill>
-                <a:latin typeface="Calibri"/>
+                <a:latin typeface="Cambria"/>
               </a:rPr>
               <a:t>0</a:t>
             </a:r>
@@ -4812,8 +4812,8 @@
         </p:nvSpPr>
         <p:spPr>
           <a:xfrm>
-            <a:off x="9134856" y="5943600"/>
-            <a:ext cx="2788920" cy="292608"/>
+            <a:off x="9244584" y="5943600"/>
+            <a:ext cx="2651760" cy="365760"/>
           </a:xfrm>
           <a:prstGeom prst="rect">
             <a:avLst/>
@@ -4828,13 +4828,13 @@
           <a:p>
             <a:pPr algn="l"/>
             <a:r>
-              <a:rPr sz="1050" b="0">
+              <a:rPr sz="1500" b="0">
                 <a:solidFill>
                   <a:srgbClr val="4A4540"/>
                 </a:solidFill>
                 <a:latin typeface="Calibri"/>
               </a:rPr>
-              <a:t>candidate sites the van visited</a:t>
+              <a:t>candidate sites visited</a:t>
             </a:r>
           </a:p>
         </p:txBody>
@@ -4863,7 +4863,7 @@
           <a:p>
             <a:pPr algn="l"/>
             <a:r>
-              <a:rPr sz="900" b="0">
+              <a:rPr sz="1300" b="0">
                 <a:solidFill>
                   <a:srgbClr val="B0A89E"/>
                 </a:solidFill>
@@ -4960,7 +4960,7 @@
           <a:p>
             <a:pPr algn="l"/>
             <a:r>
-              <a:rPr sz="1050" b="0">
+              <a:rPr sz="1500" b="0">
                 <a:solidFill>
                   <a:srgbClr val="8A8279"/>
                 </a:solidFill>
@@ -5030,7 +5030,7 @@
           <a:p>
             <a:pPr algn="l"/>
             <a:r>
-              <a:rPr sz="1250" b="0">
+              <a:rPr sz="1600" b="0">
                 <a:solidFill>
                   <a:srgbClr val="4A4540"/>
                 </a:solidFill>
@@ -5065,7 +5065,7 @@
           <a:p>
             <a:pPr algn="l"/>
             <a:r>
-              <a:rPr sz="1500" b="1">
+              <a:rPr sz="1800" b="1">
                 <a:solidFill>
                   <a:srgbClr val="9C7A3C"/>
                 </a:solidFill>
@@ -5108,8 +5108,8 @@
         </p:nvSpPr>
         <p:spPr>
           <a:xfrm>
-            <a:off x="475488" y="4114800"/>
-            <a:ext cx="2670048" cy="685800"/>
+            <a:off x="475488" y="4078224"/>
+            <a:ext cx="2670048" cy="914400"/>
           </a:xfrm>
           <a:prstGeom prst="rect">
             <a:avLst/>
@@ -5124,13 +5124,13 @@
           <a:p>
             <a:pPr algn="l"/>
             <a:r>
-              <a:rPr sz="1100" b="0">
+              <a:rPr sz="1500" b="0">
                 <a:solidFill>
                   <a:srgbClr val="4A4540"/>
                 </a:solidFill>
                 <a:latin typeface="Calibri"/>
               </a:rPr>
-              <a:t>Fit a curve to the measurements and read it off anywhere.</a:t>
+              <a:t>Fit a curve to the measurements, read it off anywhere.</a:t>
             </a:r>
           </a:p>
         </p:txBody>
@@ -5159,7 +5159,7 @@
           <a:p>
             <a:pPr algn="l"/>
             <a:r>
-              <a:rPr sz="1500" b="1">
+              <a:rPr sz="1800" b="1">
                 <a:solidFill>
                   <a:srgbClr val="55606B"/>
                 </a:solidFill>
@@ -5202,8 +5202,8 @@
         </p:nvSpPr>
         <p:spPr>
           <a:xfrm>
-            <a:off x="3300984" y="4114800"/>
-            <a:ext cx="2670048" cy="685800"/>
+            <a:off x="3300984" y="4078224"/>
+            <a:ext cx="2670048" cy="914400"/>
           </a:xfrm>
           <a:prstGeom prst="rect">
             <a:avLst/>
@@ -5218,13 +5218,13 @@
           <a:p>
             <a:pPr algn="l"/>
             <a:r>
-              <a:rPr sz="1100" b="0">
+              <a:rPr sz="1500" b="0">
                 <a:solidFill>
                   <a:srgbClr val="4A4540"/>
                 </a:solidFill>
                 <a:latin typeface="Calibri"/>
               </a:rPr>
-              <a:t>Rebuild the terrain and buildings, then trace the signal through it.</a:t>
+              <a:t>Rebuild the ground and buildings, then trace the signal.</a:t>
             </a:r>
           </a:p>
         </p:txBody>
@@ -5253,7 +5253,7 @@
           <a:p>
             <a:pPr algn="l"/>
             <a:r>
-              <a:rPr sz="1500" b="1">
+              <a:rPr sz="1800" b="1">
                 <a:solidFill>
                   <a:srgbClr val="4E6151"/>
                 </a:solidFill>
@@ -5296,8 +5296,8 @@
         </p:nvSpPr>
         <p:spPr>
           <a:xfrm>
-            <a:off x="6126479" y="4114800"/>
-            <a:ext cx="2670048" cy="685800"/>
+            <a:off x="6126479" y="4078224"/>
+            <a:ext cx="2670048" cy="914400"/>
           </a:xfrm>
           <a:prstGeom prst="rect">
             <a:avLst/>
@@ -5312,13 +5312,13 @@
           <a:p>
             <a:pPr algn="l"/>
             <a:r>
-              <a:rPr sz="1100" b="0">
+              <a:rPr sz="1500" b="0">
                 <a:solidFill>
                   <a:srgbClr val="4A4540"/>
                 </a:solidFill>
                 <a:latin typeface="Calibri"/>
               </a:rPr>
-              <a:t>Feed it the ground profile along each link and let it learn the rest.</a:t>
+              <a:t>Give it the ground under each link, let it learn the rest.</a:t>
             </a:r>
           </a:p>
         </p:txBody>
@@ -5347,7 +5347,7 @@
           <a:p>
             <a:pPr algn="l"/>
             <a:r>
-              <a:rPr sz="1500" b="1">
+              <a:rPr sz="1800" b="1">
                 <a:solidFill>
                   <a:srgbClr val="8C3A28"/>
                 </a:solidFill>
@@ -5390,8 +5390,8 @@
         </p:nvSpPr>
         <p:spPr>
           <a:xfrm>
-            <a:off x="8951976" y="4114800"/>
-            <a:ext cx="2670048" cy="685800"/>
+            <a:off x="8951976" y="4078224"/>
+            <a:ext cx="2670048" cy="914400"/>
           </a:xfrm>
           <a:prstGeom prst="rect">
             <a:avLst/>
@@ -5406,13 +5406,13 @@
           <a:p>
             <a:pPr algn="l"/>
             <a:r>
-              <a:rPr sz="1100" b="0">
+              <a:rPr sz="1500" b="0">
                 <a:solidFill>
                   <a:srgbClr val="4A4540"/>
                 </a:solidFill>
                 <a:latin typeface="Calibri"/>
               </a:rPr>
-              <a:t>Learn what distance alone cannot explain, with physics as a rule.</a:t>
+              <a:t>Learn what distance cannot explain, with physics as a rule.</a:t>
             </a:r>
           </a:p>
         </p:txBody>
@@ -5425,8 +5425,8 @@
         </p:nvSpPr>
         <p:spPr>
           <a:xfrm>
-            <a:off x="475488" y="5029200"/>
-            <a:ext cx="11256264" cy="868680"/>
+            <a:off x="475488" y="5102352"/>
+            <a:ext cx="11256264" cy="1024128"/>
           </a:xfrm>
           <a:prstGeom prst="rect">
             <a:avLst/>
@@ -5469,8 +5469,8 @@
         </p:nvSpPr>
         <p:spPr>
           <a:xfrm>
-            <a:off x="749808" y="5157216"/>
-            <a:ext cx="10789920" cy="292608"/>
+            <a:off x="749808" y="5193792"/>
+            <a:ext cx="10789920" cy="329184"/>
           </a:xfrm>
           <a:prstGeom prst="rect">
             <a:avLst/>
@@ -5485,7 +5485,7 @@
           <a:p>
             <a:pPr algn="l"/>
             <a:r>
-              <a:rPr sz="1400" b="1">
+              <a:rPr sz="1800" b="1">
                 <a:solidFill>
                   <a:srgbClr val="23201C"/>
                 </a:solidFill>
@@ -5504,8 +5504,8 @@
         </p:nvSpPr>
         <p:spPr>
           <a:xfrm>
-            <a:off x="749808" y="5477256"/>
-            <a:ext cx="10789920" cy="329184"/>
+            <a:off x="749808" y="5559552"/>
+            <a:ext cx="10789920" cy="512064"/>
           </a:xfrm>
           <a:prstGeom prst="rect">
             <a:avLst/>
@@ -5520,13 +5520,13 @@
           <a:p>
             <a:pPr algn="l"/>
             <a:r>
-              <a:rPr sz="1200" b="0">
+              <a:rPr sz="1500" b="0">
                 <a:solidFill>
                   <a:srgbClr val="4A4540"/>
                 </a:solidFill>
                 <a:latin typeface="Calibri"/>
               </a:rPr>
-              <a:t>Distance, geometry, the shape of the ground, or whatever is left over. Each is cheap to believe until you move it somewhere new.</a:t>
+              <a:t>Distance, geometry, the ground itself, or whatever is left over. Each is cheap to believe until you move it somewhere new.</a:t>
             </a:r>
           </a:p>
         </p:txBody>
@@ -5555,7 +5555,7 @@
           <a:p>
             <a:pPr algn="l"/>
             <a:r>
-              <a:rPr sz="900" b="0">
+              <a:rPr sz="1300" b="0">
                 <a:solidFill>
                   <a:srgbClr val="B0A89E"/>
                 </a:solidFill>
@@ -5652,7 +5652,7 @@
           <a:p>
             <a:pPr algn="l"/>
             <a:r>
-              <a:rPr sz="1050" b="0">
+              <a:rPr sz="1500" b="0">
                 <a:solidFill>
                   <a:srgbClr val="8A8279"/>
                 </a:solidFill>
@@ -5722,7 +5722,7 @@
           <a:p>
             <a:pPr algn="l"/>
             <a:r>
-              <a:rPr sz="1250" b="0">
+              <a:rPr sz="1600" b="0">
                 <a:solidFill>
                   <a:srgbClr val="4A4540"/>
                 </a:solidFill>
@@ -5775,7 +5775,7 @@
           <a:p>
             <a:pPr algn="l"/>
             <a:r>
-              <a:rPr sz="1050" b="0">
+              <a:rPr sz="1500" b="0">
                 <a:solidFill>
                   <a:srgbClr val="4A4540"/>
                 </a:solidFill>
@@ -5795,7 +5795,7 @@
         <p:spPr>
           <a:xfrm>
             <a:off x="7635240" y="1828800"/>
-            <a:ext cx="4023360" cy="1417320"/>
+            <a:ext cx="4023360" cy="1691640"/>
           </a:xfrm>
           <a:prstGeom prst="rect">
             <a:avLst/>
@@ -5854,7 +5854,7 @@
           <a:p>
             <a:pPr algn="l"/>
             <a:r>
-              <a:rPr sz="1350" b="1">
+              <a:rPr sz="1800" b="1">
                 <a:solidFill>
                   <a:srgbClr val="55606B"/>
                 </a:solidFill>
@@ -5873,8 +5873,8 @@
         </p:nvSpPr>
         <p:spPr>
           <a:xfrm>
-            <a:off x="7836408" y="2286000"/>
-            <a:ext cx="3657600" cy="868680"/>
+            <a:off x="7836408" y="2304288"/>
+            <a:ext cx="3657600" cy="1143000"/>
           </a:xfrm>
           <a:prstGeom prst="rect">
             <a:avLst/>
@@ -5889,7 +5889,7 @@
           <a:p>
             <a:pPr algn="l"/>
             <a:r>
-              <a:rPr sz="1100" b="0">
+              <a:rPr sz="1600" b="0">
                 <a:solidFill>
                   <a:srgbClr val="4A4540"/>
                 </a:solidFill>
@@ -5908,8 +5908,8 @@
         </p:nvSpPr>
         <p:spPr>
           <a:xfrm>
-            <a:off x="7635240" y="3383280"/>
-            <a:ext cx="4023360" cy="2331720"/>
+            <a:off x="7635240" y="3657600"/>
+            <a:ext cx="4023360" cy="2057400"/>
           </a:xfrm>
           <a:prstGeom prst="rect">
             <a:avLst/>
@@ -5952,8 +5952,8 @@
         </p:nvSpPr>
         <p:spPr>
           <a:xfrm>
-            <a:off x="7836408" y="3511296"/>
-            <a:ext cx="3657600" cy="274320"/>
+            <a:off x="7836408" y="3767328"/>
+            <a:ext cx="3657600" cy="310896"/>
           </a:xfrm>
           <a:prstGeom prst="rect">
             <a:avLst/>
@@ -5968,7 +5968,7 @@
           <a:p>
             <a:pPr algn="l"/>
             <a:r>
-              <a:rPr sz="1350" b="1">
+              <a:rPr sz="1800" b="1">
                 <a:solidFill>
                   <a:srgbClr val="8C3A28"/>
                 </a:solidFill>
@@ -5987,8 +5987,8 @@
         </p:nvSpPr>
         <p:spPr>
           <a:xfrm>
-            <a:off x="7836408" y="3840480"/>
-            <a:ext cx="3657600" cy="1737360"/>
+            <a:off x="7836408" y="4133087"/>
+            <a:ext cx="3657600" cy="1463040"/>
           </a:xfrm>
           <a:prstGeom prst="rect">
             <a:avLst/>
@@ -6003,13 +6003,13 @@
           <a:p>
             <a:pPr algn="l"/>
             <a:r>
-              <a:rPr sz="1100" b="0">
+              <a:rPr sz="1600" b="0">
                 <a:solidFill>
                   <a:srgbClr val="4A4540"/>
                 </a:solidFill>
                 <a:latin typeface="Calibri"/>
               </a:rPr>
-              <a:t>A terrain profile is nearly a unique location label — its nearest neighbour sits 12 m away on the ground. Feed the operator profiles from the wrong links and it scores 13.16 dB against 13.13 with the right ones. It never used the terrain.</a:t>
+              <a:t>A terrain profile is nearly a unique location label. Feed the operator the wrong links' profiles and it scores 13.16 dB against 13.13 with the right ones — it never used the terrain.</a:t>
             </a:r>
           </a:p>
         </p:txBody>
@@ -6038,7 +6038,7 @@
           <a:p>
             <a:pPr algn="l"/>
             <a:r>
-              <a:rPr sz="900" b="0">
+              <a:rPr sz="1300" b="0">
                 <a:solidFill>
                   <a:srgbClr val="B0A89E"/>
                 </a:solidFill>
@@ -6135,7 +6135,7 @@
           <a:p>
             <a:pPr algn="l"/>
             <a:r>
-              <a:rPr sz="1050" b="0">
+              <a:rPr sz="1500" b="0">
                 <a:solidFill>
                   <a:srgbClr val="8A8279"/>
                 </a:solidFill>
@@ -6205,13 +6205,13 @@
           <a:p>
             <a:pPr algn="l"/>
             <a:r>
-              <a:rPr sz="1250" b="0">
+              <a:rPr sz="1600" b="0">
                 <a:solidFill>
                   <a:srgbClr val="4A4540"/>
                 </a:solidFill>
                 <a:latin typeface="Calibri"/>
               </a:rPr>
-              <a:t>Score 627 candidate sites against 4,731 demand cells — then move every assumption and watch where the answer goes.</a:t>
+              <a:t>Score every candidate site, then move every assumption and watch where the answer goes.</a:t>
             </a:r>
           </a:p>
         </p:txBody>
@@ -6224,8 +6224,8 @@
         </p:nvSpPr>
         <p:spPr>
           <a:xfrm>
-            <a:off x="502920" y="1783080"/>
-            <a:ext cx="2606040" cy="841248"/>
+            <a:off x="502920" y="1755648"/>
+            <a:ext cx="2606040" cy="1024128"/>
           </a:xfrm>
           <a:prstGeom prst="rect">
             <a:avLst/>
@@ -6268,8 +6268,8 @@
         </p:nvSpPr>
         <p:spPr>
           <a:xfrm>
-            <a:off x="667512" y="1874519"/>
-            <a:ext cx="2286000" cy="256032"/>
+            <a:off x="685800" y="1847088"/>
+            <a:ext cx="2286000" cy="292608"/>
           </a:xfrm>
           <a:prstGeom prst="rect">
             <a:avLst/>
@@ -6284,11 +6284,11 @@
           <a:p>
             <a:pPr algn="l"/>
             <a:r>
-              <a:rPr sz="1250" b="1">
+              <a:rPr sz="1600" b="1">
                 <a:solidFill>
                   <a:srgbClr val="23201C"/>
                 </a:solidFill>
-                <a:latin typeface="Calibri"/>
+                <a:latin typeface="Cambria"/>
               </a:rPr>
               <a:t>Predict</a:t>
             </a:r>
@@ -6303,8 +6303,8 @@
         </p:nvSpPr>
         <p:spPr>
           <a:xfrm>
-            <a:off x="667512" y="2157984"/>
-            <a:ext cx="2286000" cy="384048"/>
+            <a:off x="685800" y="2194560"/>
+            <a:ext cx="2286000" cy="512064"/>
           </a:xfrm>
           <a:prstGeom prst="rect">
             <a:avLst/>
@@ -6319,7 +6319,7 @@
           <a:p>
             <a:pPr algn="l"/>
             <a:r>
-              <a:rPr sz="950" b="0">
+              <a:rPr sz="1400" b="0">
                 <a:solidFill>
                   <a:srgbClr val="8A8279"/>
                 </a:solidFill>
@@ -6338,8 +6338,8 @@
         </p:nvSpPr>
         <p:spPr>
           <a:xfrm>
-            <a:off x="3127248" y="2011680"/>
-            <a:ext cx="182880" cy="274320"/>
+            <a:off x="3127248" y="2048256"/>
+            <a:ext cx="182880" cy="292608"/>
           </a:xfrm>
           <a:prstGeom prst="rect">
             <a:avLst/>
@@ -6354,7 +6354,7 @@
           <a:p>
             <a:pPr algn="l"/>
             <a:r>
-              <a:rPr sz="1500" b="1">
+              <a:rPr sz="1700" b="1">
                 <a:solidFill>
                   <a:srgbClr val="DDD6CC"/>
                 </a:solidFill>
@@ -6373,8 +6373,8 @@
         </p:nvSpPr>
         <p:spPr>
           <a:xfrm>
-            <a:off x="3319272" y="1783080"/>
-            <a:ext cx="2606040" cy="841248"/>
+            <a:off x="3319272" y="1755648"/>
+            <a:ext cx="2606040" cy="1024128"/>
           </a:xfrm>
           <a:prstGeom prst="rect">
             <a:avLst/>
@@ -6417,8 +6417,8 @@
         </p:nvSpPr>
         <p:spPr>
           <a:xfrm>
-            <a:off x="3483864" y="1874519"/>
-            <a:ext cx="2286000" cy="256032"/>
+            <a:off x="3502152" y="1847088"/>
+            <a:ext cx="2286000" cy="292608"/>
           </a:xfrm>
           <a:prstGeom prst="rect">
             <a:avLst/>
@@ -6433,11 +6433,11 @@
           <a:p>
             <a:pPr algn="l"/>
             <a:r>
-              <a:rPr sz="1250" b="1">
+              <a:rPr sz="1600" b="1">
                 <a:solidFill>
                   <a:srgbClr val="23201C"/>
                 </a:solidFill>
-                <a:latin typeface="Calibri"/>
+                <a:latin typeface="Cambria"/>
               </a:rPr>
               <a:t>Define served</a:t>
             </a:r>
@@ -6452,8 +6452,8 @@
         </p:nvSpPr>
         <p:spPr>
           <a:xfrm>
-            <a:off x="3483864" y="2157984"/>
-            <a:ext cx="2286000" cy="384048"/>
+            <a:off x="3502152" y="2194560"/>
+            <a:ext cx="2286000" cy="512064"/>
           </a:xfrm>
           <a:prstGeom prst="rect">
             <a:avLst/>
@@ -6468,7 +6468,7 @@
           <a:p>
             <a:pPr algn="l"/>
             <a:r>
-              <a:rPr sz="950" b="0">
+              <a:rPr sz="1400" b="0">
                 <a:solidFill>
                   <a:srgbClr val="8A8279"/>
                 </a:solidFill>
@@ -6487,8 +6487,8 @@
         </p:nvSpPr>
         <p:spPr>
           <a:xfrm>
-            <a:off x="5943600" y="2011680"/>
-            <a:ext cx="182880" cy="274320"/>
+            <a:off x="5943600" y="2048256"/>
+            <a:ext cx="182880" cy="292608"/>
           </a:xfrm>
           <a:prstGeom prst="rect">
             <a:avLst/>
@@ -6503,7 +6503,7 @@
           <a:p>
             <a:pPr algn="l"/>
             <a:r>
-              <a:rPr sz="1500" b="1">
+              <a:rPr sz="1700" b="1">
                 <a:solidFill>
                   <a:srgbClr val="DDD6CC"/>
                 </a:solidFill>
@@ -6522,8 +6522,8 @@
         </p:nvSpPr>
         <p:spPr>
           <a:xfrm>
-            <a:off x="6135624" y="1783080"/>
-            <a:ext cx="2606040" cy="841248"/>
+            <a:off x="6135624" y="1755648"/>
+            <a:ext cx="2606040" cy="1024128"/>
           </a:xfrm>
           <a:prstGeom prst="rect">
             <a:avLst/>
@@ -6566,8 +6566,8 @@
         </p:nvSpPr>
         <p:spPr>
           <a:xfrm>
-            <a:off x="6300216" y="1874519"/>
-            <a:ext cx="2286000" cy="256032"/>
+            <a:off x="6318504" y="1847088"/>
+            <a:ext cx="2286000" cy="292608"/>
           </a:xfrm>
           <a:prstGeom prst="rect">
             <a:avLst/>
@@ -6582,11 +6582,11 @@
           <a:p>
             <a:pPr algn="l"/>
             <a:r>
-              <a:rPr sz="1250" b="1">
+              <a:rPr sz="1600" b="1">
                 <a:solidFill>
                   <a:srgbClr val="23201C"/>
                 </a:solidFill>
-                <a:latin typeface="Calibri"/>
+                <a:latin typeface="Cambria"/>
               </a:rPr>
               <a:t>Score</a:t>
             </a:r>
@@ -6601,8 +6601,8 @@
         </p:nvSpPr>
         <p:spPr>
           <a:xfrm>
-            <a:off x="6300216" y="2157984"/>
-            <a:ext cx="2286000" cy="384048"/>
+            <a:off x="6318504" y="2194560"/>
+            <a:ext cx="2286000" cy="512064"/>
           </a:xfrm>
           <a:prstGeom prst="rect">
             <a:avLst/>
@@ -6617,7 +6617,7 @@
           <a:p>
             <a:pPr algn="l"/>
             <a:r>
-              <a:rPr sz="950" b="0">
+              <a:rPr sz="1400" b="0">
                 <a:solidFill>
                   <a:srgbClr val="8A8279"/>
                 </a:solidFill>
@@ -6636,8 +6636,8 @@
         </p:nvSpPr>
         <p:spPr>
           <a:xfrm>
-            <a:off x="8759952" y="2011680"/>
-            <a:ext cx="182880" cy="274320"/>
+            <a:off x="8759952" y="2048256"/>
+            <a:ext cx="182880" cy="292608"/>
           </a:xfrm>
           <a:prstGeom prst="rect">
             <a:avLst/>
@@ -6652,7 +6652,7 @@
           <a:p>
             <a:pPr algn="l"/>
             <a:r>
-              <a:rPr sz="1500" b="1">
+              <a:rPr sz="1700" b="1">
                 <a:solidFill>
                   <a:srgbClr val="DDD6CC"/>
                 </a:solidFill>
@@ -6671,8 +6671,8 @@
         </p:nvSpPr>
         <p:spPr>
           <a:xfrm>
-            <a:off x="8951976" y="1783080"/>
-            <a:ext cx="2606040" cy="841248"/>
+            <a:off x="8951976" y="1755648"/>
+            <a:ext cx="2606040" cy="1024128"/>
           </a:xfrm>
           <a:prstGeom prst="rect">
             <a:avLst/>
@@ -6715,8 +6715,8 @@
         </p:nvSpPr>
         <p:spPr>
           <a:xfrm>
-            <a:off x="9116568" y="1874519"/>
-            <a:ext cx="2286000" cy="256032"/>
+            <a:off x="9134856" y="1847088"/>
+            <a:ext cx="2286000" cy="292608"/>
           </a:xfrm>
           <a:prstGeom prst="rect">
             <a:avLst/>
@@ -6731,11 +6731,11 @@
           <a:p>
             <a:pPr algn="l"/>
             <a:r>
-              <a:rPr sz="1250" b="1">
+              <a:rPr sz="1600" b="1">
                 <a:solidFill>
                   <a:srgbClr val="23201C"/>
                 </a:solidFill>
-                <a:latin typeface="Calibri"/>
+                <a:latin typeface="Cambria"/>
               </a:rPr>
               <a:t>Constrain</a:t>
             </a:r>
@@ -6750,8 +6750,8 @@
         </p:nvSpPr>
         <p:spPr>
           <a:xfrm>
-            <a:off x="9116568" y="2157984"/>
-            <a:ext cx="2286000" cy="384048"/>
+            <a:off x="9134856" y="2194560"/>
+            <a:ext cx="2286000" cy="512064"/>
           </a:xfrm>
           <a:prstGeom prst="rect">
             <a:avLst/>
@@ -6766,7 +6766,7 @@
           <a:p>
             <a:pPr algn="l"/>
             <a:r>
-              <a:rPr sz="950" b="0">
+              <a:rPr sz="1400" b="0">
                 <a:solidFill>
                   <a:srgbClr val="8A8279"/>
                 </a:solidFill>
@@ -6839,7 +6839,7 @@
         <p:spPr>
           <a:xfrm>
             <a:off x="7635240" y="2788920"/>
-            <a:ext cx="4023360" cy="1371600"/>
+            <a:ext cx="4023360" cy="1828800"/>
           </a:xfrm>
           <a:prstGeom prst="rect">
             <a:avLst/>
@@ -6882,8 +6882,8 @@
         </p:nvSpPr>
         <p:spPr>
           <a:xfrm>
-            <a:off x="7836408" y="2907792"/>
-            <a:ext cx="3657600" cy="274320"/>
+            <a:off x="7836408" y="2889504"/>
+            <a:ext cx="3657600" cy="621792"/>
           </a:xfrm>
           <a:prstGeom prst="rect">
             <a:avLst/>
@@ -6898,7 +6898,7 @@
           <a:p>
             <a:pPr algn="l"/>
             <a:r>
-              <a:rPr sz="1350" b="1">
+              <a:rPr sz="1800" b="1">
                 <a:solidFill>
                   <a:srgbClr val="8C3A28"/>
                 </a:solidFill>
@@ -6917,8 +6917,8 @@
         </p:nvSpPr>
         <p:spPr>
           <a:xfrm>
-            <a:off x="7836408" y="3236976"/>
-            <a:ext cx="3657600" cy="822960"/>
+            <a:off x="7836408" y="3529584"/>
+            <a:ext cx="3657600" cy="1051560"/>
           </a:xfrm>
           <a:prstGeom prst="rect">
             <a:avLst/>
@@ -6933,7 +6933,7 @@
           <a:p>
             <a:pPr algn="l"/>
             <a:r>
-              <a:rPr sz="1100" b="0">
+              <a:rPr sz="1600" b="0">
                 <a:solidFill>
                   <a:srgbClr val="4A4540"/>
                 </a:solidFill>
@@ -6952,8 +6952,8 @@
         </p:nvSpPr>
         <p:spPr>
           <a:xfrm>
-            <a:off x="7635240" y="4297680"/>
-            <a:ext cx="4023360" cy="1325880"/>
+            <a:off x="7635240" y="4754880"/>
+            <a:ext cx="4023360" cy="1371600"/>
           </a:xfrm>
           <a:prstGeom prst="rect">
             <a:avLst/>
@@ -6996,8 +6996,8 @@
         </p:nvSpPr>
         <p:spPr>
           <a:xfrm>
-            <a:off x="7836408" y="4416552"/>
-            <a:ext cx="3657600" cy="274320"/>
+            <a:off x="7836408" y="4864608"/>
+            <a:ext cx="3657600" cy="310896"/>
           </a:xfrm>
           <a:prstGeom prst="rect">
             <a:avLst/>
@@ -7012,7 +7012,7 @@
           <a:p>
             <a:pPr algn="l"/>
             <a:r>
-              <a:rPr sz="1350" b="1">
+              <a:rPr sz="1800" b="1">
                 <a:solidFill>
                   <a:srgbClr val="55606B"/>
                 </a:solidFill>
@@ -7031,7 +7031,7 @@
         </p:nvSpPr>
         <p:spPr>
           <a:xfrm>
-            <a:off x="7836408" y="4745736"/>
+            <a:off x="7836408" y="5212080"/>
             <a:ext cx="3657600" cy="822960"/>
           </a:xfrm>
           <a:prstGeom prst="rect">
@@ -7047,7 +7047,7 @@
           <a:p>
             <a:pPr algn="l"/>
             <a:r>
-              <a:rPr sz="1100" b="0">
+              <a:rPr sz="1600" b="0">
                 <a:solidFill>
                   <a:srgbClr val="4A4540"/>
                 </a:solidFill>
@@ -7082,7 +7082,7 @@
           <a:p>
             <a:pPr algn="l"/>
             <a:r>
-              <a:rPr sz="900" b="0">
+              <a:rPr sz="1300" b="0">
                 <a:solidFill>
                   <a:srgbClr val="B0A89E"/>
                 </a:solidFill>
@@ -7179,7 +7179,7 @@
           <a:p>
             <a:pPr algn="l"/>
             <a:r>
-              <a:rPr sz="1050" b="0">
+              <a:rPr sz="1500" b="0">
                 <a:solidFill>
                   <a:srgbClr val="8A8279"/>
                 </a:solidFill>
@@ -7249,13 +7249,13 @@
           <a:p>
             <a:pPr algn="l"/>
             <a:r>
-              <a:rPr sz="1250" b="0">
+              <a:rPr sz="1600" b="0">
                 <a:solidFill>
                   <a:srgbClr val="4A4540"/>
                 </a:solidFill>
                 <a:latin typeface="Calibri"/>
               </a:rPr>
-              <a:t>The brief's demo artifact: place an asset and immediately see coverage, performance, uncertainty and route benefit change.</a:t>
+              <a:t>Place an asset and watch coverage, gain and uncertainty change.</a:t>
             </a:r>
           </a:p>
         </p:txBody>
@@ -22758,7 +22758,7 @@
           <a:p>
             <a:pPr algn="l"/>
             <a:r>
-              <a:rPr sz="900" b="0">
+              <a:rPr sz="850" b="0">
                 <a:solidFill>
                   <a:srgbClr val="8A8279"/>
                 </a:solidFill>
@@ -22874,7 +22874,7 @@
           <a:p>
             <a:pPr algn="l"/>
             <a:r>
-              <a:rPr sz="900" b="0">
+              <a:rPr sz="850" b="0">
                 <a:solidFill>
                   <a:srgbClr val="8A8279"/>
                 </a:solidFill>
@@ -22990,7 +22990,7 @@
           <a:p>
             <a:pPr algn="l"/>
             <a:r>
-              <a:rPr sz="900" b="0">
+              <a:rPr sz="850" b="0">
                 <a:solidFill>
                   <a:srgbClr val="8A8279"/>
                 </a:solidFill>
@@ -23106,7 +23106,7 @@
           <a:p>
             <a:pPr algn="l"/>
             <a:r>
-              <a:rPr sz="900" b="0">
+              <a:rPr sz="850" b="0">
                 <a:solidFill>
                   <a:srgbClr val="8A8279"/>
                 </a:solidFill>
@@ -23222,7 +23222,7 @@
           <a:p>
             <a:pPr algn="l"/>
             <a:r>
-              <a:rPr sz="900" b="0">
+              <a:rPr sz="850" b="0">
                 <a:solidFill>
                   <a:srgbClr val="8A8279"/>
                 </a:solidFill>
@@ -23448,7 +23448,7 @@
         <p:spPr>
           <a:xfrm>
             <a:off x="8476487" y="5047488"/>
-            <a:ext cx="1280160" cy="164592"/>
+            <a:ext cx="1280160" cy="182880"/>
           </a:xfrm>
           <a:prstGeom prst="rect">
             <a:avLst/>
@@ -23463,7 +23463,7 @@
           <a:p>
             <a:pPr algn="l"/>
             <a:r>
-              <a:rPr sz="950" b="0">
+              <a:rPr sz="850" b="0">
                 <a:solidFill>
                   <a:srgbClr val="8A8279"/>
                 </a:solidFill>
@@ -23483,7 +23483,7 @@
         <p:spPr>
           <a:xfrm>
             <a:off x="8476487" y="5230368"/>
-            <a:ext cx="1280160" cy="219456"/>
+            <a:ext cx="1280160" cy="237744"/>
           </a:xfrm>
           <a:prstGeom prst="rect">
             <a:avLst/>
@@ -23564,7 +23564,7 @@
         <p:spPr>
           <a:xfrm>
             <a:off x="10076686" y="5047488"/>
-            <a:ext cx="1280160" cy="164592"/>
+            <a:ext cx="1280160" cy="182880"/>
           </a:xfrm>
           <a:prstGeom prst="rect">
             <a:avLst/>
@@ -23579,7 +23579,7 @@
           <a:p>
             <a:pPr algn="l"/>
             <a:r>
-              <a:rPr sz="950" b="0">
+              <a:rPr sz="850" b="0">
                 <a:solidFill>
                   <a:srgbClr val="8A8279"/>
                 </a:solidFill>
@@ -23599,7 +23599,7 @@
         <p:spPr>
           <a:xfrm>
             <a:off x="10076686" y="5230368"/>
-            <a:ext cx="1280160" cy="219456"/>
+            <a:ext cx="1280160" cy="237744"/>
           </a:xfrm>
           <a:prstGeom prst="rect">
             <a:avLst/>
@@ -23633,7 +23633,7 @@
         </p:nvSpPr>
         <p:spPr>
           <a:xfrm>
-            <a:off x="502920" y="5760720"/>
+            <a:off x="502920" y="5797296"/>
             <a:ext cx="11155680" cy="457200"/>
           </a:xfrm>
           <a:prstGeom prst="rect">
@@ -23649,13 +23649,13 @@
           <a:p>
             <a:pPr algn="l"/>
             <a:r>
-              <a:rPr sz="1000" b="0">
+              <a:rPr sz="1500" b="0">
                 <a:solidFill>
                   <a:srgbClr val="4A4540"/>
                 </a:solidFill>
                 <a:latin typeface="Calibri"/>
               </a:rPr>
-              <a:t>Heatmap of the chosen criterion over shaded relief, with the drive test drawn on top in a contrasting hue — which doubles as the road network. Amber is the existing tower, the ring is the placement. Three sweep buttons re-solve across every criterion, every weighting and every approach; a constrained variant adds the five buildability layers.</a:t>
+              <a:t>Pick a model, pick what counts as service, drop an asset anywhere — coverage, gain and uncertainty all re-solve live.</a:t>
             </a:r>
           </a:p>
         </p:txBody>
@@ -23684,7 +23684,7 @@
           <a:p>
             <a:pPr algn="l"/>
             <a:r>
-              <a:rPr sz="900" b="0">
+              <a:rPr sz="1300" b="0">
                 <a:solidFill>
                   <a:srgbClr val="B0A89E"/>
                 </a:solidFill>

--- a/ARA_Challenge3.pptx
+++ b/ARA_Challenge3.pptx
@@ -5526,7 +5526,7 @@
                 </a:solidFill>
                 <a:latin typeface="Calibri"/>
               </a:rPr>
-              <a:t>Distance, geometry, the ground itself, or whatever is left over. Each is cheap to believe until you move it somewhere new.</a:t>
+              <a:t>Every one of them lands within about 8 dB of the measurements. Score them on ground they were never shown and three of the four fall apart.</a:t>
             </a:r>
           </a:p>
         </p:txBody>
@@ -5781,7 +5781,7 @@
                 </a:solidFill>
                 <a:latin typeface="Calibri"/>
               </a:rPr>
-              <a:t>The left bar of each pair is the score on data the model has seen; the right bar is somewhere new. The gap between them is memory.</a:t>
+              <a:t>Left bar: error on data the model was trained on. Right bar: error somewhere it has never been. A tall right bar means it memorised.</a:t>
             </a:r>
           </a:p>
         </p:txBody>
@@ -5895,7 +5895,7 @@
                 </a:solidFill>
                 <a:latin typeface="Calibri"/>
               </a:rPr>
-              <a:t>7.61 dB in sample, 7.95 held out. It is the only model that does not care whether it has seen the ground before.</a:t>
+              <a:t>7.61 dB on training ground, 7.95 dB on new ground. It is the only one of the four that barely changes.</a:t>
             </a:r>
           </a:p>
         </p:txBody>
@@ -6211,7 +6211,7 @@
                 </a:solidFill>
                 <a:latin typeface="Calibri"/>
               </a:rPr>
-              <a:t>Score every candidate site, then move every assumption and watch where the answer goes.</a:t>
+              <a:t>Change one assumption at a time, and measure how far the recommendation moves.</a:t>
             </a:r>
           </a:p>
         </p:txBody>

--- a/ARA_Challenge3.pptx
+++ b/ARA_Challenge3.pptx
@@ -5489,9 +5489,9 @@
                 <a:solidFill>
                   <a:srgbClr val="23201C"/>
                 </a:solidFill>
-                <a:latin typeface="Calibri"/>
+                <a:latin typeface="Cambria"/>
               </a:rPr>
-              <a:t>Same ground, four different bets about what matters</a:t>
+              <a:t>All four fit the drive test. Only one still works off it.</a:t>
             </a:r>
           </a:p>
         </p:txBody>

--- a/ARA_Challenge3.pptx
+++ b/ARA_Challenge3.pptx
@@ -5049,8 +5049,8 @@
         </p:nvSpPr>
         <p:spPr>
           <a:xfrm>
-            <a:off x="475488" y="1664208"/>
-            <a:ext cx="2670048" cy="274320"/>
+            <a:off x="411480" y="1664208"/>
+            <a:ext cx="2761488" cy="274320"/>
           </a:xfrm>
           <a:prstGeom prst="rect">
             <a:avLst/>
@@ -5092,8 +5092,8 @@
         </p:blipFill>
         <p:spPr>
           <a:xfrm>
-            <a:off x="475488" y="2011680"/>
-            <a:ext cx="2670048" cy="2021608"/>
+            <a:off x="411480" y="2048256"/>
+            <a:ext cx="2761488" cy="2090841"/>
           </a:xfrm>
           <a:prstGeom prst="rect">
             <a:avLst/>
@@ -5108,8 +5108,8 @@
         </p:nvSpPr>
         <p:spPr>
           <a:xfrm>
-            <a:off x="475488" y="4078224"/>
-            <a:ext cx="2670048" cy="914400"/>
+            <a:off x="411480" y="4261104"/>
+            <a:ext cx="2761488" cy="1005840"/>
           </a:xfrm>
           <a:prstGeom prst="rect">
             <a:avLst/>
@@ -5124,7 +5124,7 @@
           <a:p>
             <a:pPr algn="l"/>
             <a:r>
-              <a:rPr sz="1500" b="0">
+              <a:rPr sz="1550" b="0">
                 <a:solidFill>
                   <a:srgbClr val="4A4540"/>
                 </a:solidFill>
@@ -5143,8 +5143,8 @@
         </p:nvSpPr>
         <p:spPr>
           <a:xfrm>
-            <a:off x="3300984" y="1664208"/>
-            <a:ext cx="2670048" cy="274320"/>
+            <a:off x="3291840" y="1664208"/>
+            <a:ext cx="2761488" cy="274320"/>
           </a:xfrm>
           <a:prstGeom prst="rect">
             <a:avLst/>
@@ -5186,8 +5186,8 @@
         </p:blipFill>
         <p:spPr>
           <a:xfrm>
-            <a:off x="3300984" y="2011680"/>
-            <a:ext cx="2670048" cy="2021608"/>
+            <a:off x="3291840" y="2048256"/>
+            <a:ext cx="2761488" cy="2090841"/>
           </a:xfrm>
           <a:prstGeom prst="rect">
             <a:avLst/>
@@ -5202,8 +5202,8 @@
         </p:nvSpPr>
         <p:spPr>
           <a:xfrm>
-            <a:off x="3300984" y="4078224"/>
-            <a:ext cx="2670048" cy="914400"/>
+            <a:off x="3291840" y="4261104"/>
+            <a:ext cx="2761488" cy="1005840"/>
           </a:xfrm>
           <a:prstGeom prst="rect">
             <a:avLst/>
@@ -5218,7 +5218,7 @@
           <a:p>
             <a:pPr algn="l"/>
             <a:r>
-              <a:rPr sz="1500" b="0">
+              <a:rPr sz="1550" b="0">
                 <a:solidFill>
                   <a:srgbClr val="4A4540"/>
                 </a:solidFill>
@@ -5237,8 +5237,8 @@
         </p:nvSpPr>
         <p:spPr>
           <a:xfrm>
-            <a:off x="6126479" y="1664208"/>
-            <a:ext cx="2670048" cy="274320"/>
+            <a:off x="6172200" y="1664208"/>
+            <a:ext cx="2761488" cy="274320"/>
           </a:xfrm>
           <a:prstGeom prst="rect">
             <a:avLst/>
@@ -5280,8 +5280,8 @@
         </p:blipFill>
         <p:spPr>
           <a:xfrm>
-            <a:off x="6126479" y="2011680"/>
-            <a:ext cx="2670048" cy="2021608"/>
+            <a:off x="6172200" y="2048256"/>
+            <a:ext cx="2761488" cy="2090841"/>
           </a:xfrm>
           <a:prstGeom prst="rect">
             <a:avLst/>
@@ -5296,8 +5296,8 @@
         </p:nvSpPr>
         <p:spPr>
           <a:xfrm>
-            <a:off x="6126479" y="4078224"/>
-            <a:ext cx="2670048" cy="914400"/>
+            <a:off x="6172200" y="4261104"/>
+            <a:ext cx="2761488" cy="1005840"/>
           </a:xfrm>
           <a:prstGeom prst="rect">
             <a:avLst/>
@@ -5312,7 +5312,7 @@
           <a:p>
             <a:pPr algn="l"/>
             <a:r>
-              <a:rPr sz="1500" b="0">
+              <a:rPr sz="1550" b="0">
                 <a:solidFill>
                   <a:srgbClr val="4A4540"/>
                 </a:solidFill>
@@ -5331,8 +5331,8 @@
         </p:nvSpPr>
         <p:spPr>
           <a:xfrm>
-            <a:off x="8951976" y="1664208"/>
-            <a:ext cx="2670048" cy="274320"/>
+            <a:off x="9052559" y="1664208"/>
+            <a:ext cx="2761488" cy="274320"/>
           </a:xfrm>
           <a:prstGeom prst="rect">
             <a:avLst/>
@@ -5374,8 +5374,8 @@
         </p:blipFill>
         <p:spPr>
           <a:xfrm>
-            <a:off x="8951976" y="2011680"/>
-            <a:ext cx="2670048" cy="2021608"/>
+            <a:off x="9052559" y="2048256"/>
+            <a:ext cx="2761488" cy="2090841"/>
           </a:xfrm>
           <a:prstGeom prst="rect">
             <a:avLst/>
@@ -5390,8 +5390,8 @@
         </p:nvSpPr>
         <p:spPr>
           <a:xfrm>
-            <a:off x="8951976" y="4078224"/>
-            <a:ext cx="2670048" cy="914400"/>
+            <a:off x="9052559" y="4261104"/>
+            <a:ext cx="2761488" cy="1005840"/>
           </a:xfrm>
           <a:prstGeom prst="rect">
             <a:avLst/>
@@ -5406,7 +5406,7 @@
           <a:p>
             <a:pPr algn="l"/>
             <a:r>
-              <a:rPr sz="1500" b="0">
+              <a:rPr sz="1550" b="0">
                 <a:solidFill>
                   <a:srgbClr val="4A4540"/>
                 </a:solidFill>
@@ -5419,121 +5419,7 @@
       </p:sp>
       <p:sp>
         <p:nvSpPr>
-          <p:cNvPr id="18" name="Rectangle 17"/>
-          <p:cNvSpPr/>
-          <p:nvPr/>
-        </p:nvSpPr>
-        <p:spPr>
-          <a:xfrm>
-            <a:off x="475488" y="5102352"/>
-            <a:ext cx="11256264" cy="1024128"/>
-          </a:xfrm>
-          <a:prstGeom prst="rect">
-            <a:avLst/>
-          </a:prstGeom>
-          <a:solidFill>
-            <a:srgbClr val="F7F4EF"/>
-          </a:solidFill>
-          <a:ln>
-            <a:noFill/>
-          </a:ln>
-          <a:effectLst/>
-        </p:spPr>
-        <p:style>
-          <a:lnRef idx="1">
-            <a:schemeClr val="accent1"/>
-          </a:lnRef>
-          <a:fillRef idx="3">
-            <a:schemeClr val="accent1"/>
-          </a:fillRef>
-          <a:effectRef idx="2">
-            <a:schemeClr val="accent1"/>
-          </a:effectRef>
-          <a:fontRef idx="minor">
-            <a:schemeClr val="lt1"/>
-          </a:fontRef>
-        </p:style>
-        <p:txBody>
-          <a:bodyPr rtlCol="0" anchor="ctr"/>
-          <a:lstStyle/>
-          <a:p>
-            <a:pPr algn="ctr"/>
-          </a:p>
-        </p:txBody>
-      </p:sp>
-      <p:sp>
-        <p:nvSpPr>
-          <p:cNvPr id="19" name="TextBox 18"/>
-          <p:cNvSpPr txBox="1"/>
-          <p:nvPr/>
-        </p:nvSpPr>
-        <p:spPr>
-          <a:xfrm>
-            <a:off x="749808" y="5193792"/>
-            <a:ext cx="10789920" cy="329184"/>
-          </a:xfrm>
-          <a:prstGeom prst="rect">
-            <a:avLst/>
-          </a:prstGeom>
-          <a:noFill/>
-        </p:spPr>
-        <p:txBody>
-          <a:bodyPr wrap="square" anchor="t" lIns="0" rIns="0" tIns="0" bIns="0">
-            <a:spAutoFit/>
-          </a:bodyPr>
-          <a:lstStyle/>
-          <a:p>
-            <a:pPr algn="l"/>
-            <a:r>
-              <a:rPr sz="1800" b="1">
-                <a:solidFill>
-                  <a:srgbClr val="23201C"/>
-                </a:solidFill>
-                <a:latin typeface="Cambria"/>
-              </a:rPr>
-              <a:t>All four fit the drive test. Only one still works off it.</a:t>
-            </a:r>
-          </a:p>
-        </p:txBody>
-      </p:sp>
-      <p:sp>
-        <p:nvSpPr>
-          <p:cNvPr id="20" name="TextBox 19"/>
-          <p:cNvSpPr txBox="1"/>
-          <p:nvPr/>
-        </p:nvSpPr>
-        <p:spPr>
-          <a:xfrm>
-            <a:off x="749808" y="5559552"/>
-            <a:ext cx="10789920" cy="512064"/>
-          </a:xfrm>
-          <a:prstGeom prst="rect">
-            <a:avLst/>
-          </a:prstGeom>
-          <a:noFill/>
-        </p:spPr>
-        <p:txBody>
-          <a:bodyPr wrap="square" anchor="t" lIns="0" rIns="0" tIns="0" bIns="0">
-            <a:spAutoFit/>
-          </a:bodyPr>
-          <a:lstStyle/>
-          <a:p>
-            <a:pPr algn="l"/>
-            <a:r>
-              <a:rPr sz="1500" b="0">
-                <a:solidFill>
-                  <a:srgbClr val="4A4540"/>
-                </a:solidFill>
-                <a:latin typeface="Calibri"/>
-              </a:rPr>
-              <a:t>Every one of them lands within about 8 dB of the measurements. Score them on ground they were never shown and three of the four fall apart.</a:t>
-            </a:r>
-          </a:p>
-        </p:txBody>
-      </p:sp>
-      <p:sp>
-        <p:nvSpPr>
-          <p:cNvPr id="21" name="TextBox 20"/>
+          <p:cNvPr id="18" name="TextBox 17"/>
           <p:cNvSpPr txBox="1"/>
           <p:nvPr/>
         </p:nvSpPr>

--- a/ARA_Challenge3.pptx
+++ b/ARA_Challenge3.pptx
@@ -5036,7 +5036,7 @@
                 </a:solidFill>
                 <a:latin typeface="Calibri"/>
               </a:rPr>
-              <a:t>Each one reads something different about the same ground.</a:t>
+              <a:t>They differ in what they need to know before they can answer.</a:t>
             </a:r>
           </a:p>
         </p:txBody>
@@ -5049,8 +5049,8 @@
         </p:nvSpPr>
         <p:spPr>
           <a:xfrm>
-            <a:off x="411480" y="1664208"/>
-            <a:ext cx="2761488" cy="274320"/>
+            <a:off x="411480" y="1627632"/>
+            <a:ext cx="2761488" cy="292608"/>
           </a:xfrm>
           <a:prstGeom prst="rect">
             <a:avLst/>
@@ -5092,7 +5092,7 @@
         </p:blipFill>
         <p:spPr>
           <a:xfrm>
-            <a:off x="411480" y="2048256"/>
+            <a:off x="411480" y="1993392"/>
             <a:ext cx="2761488" cy="2090841"/>
           </a:xfrm>
           <a:prstGeom prst="rect">
@@ -5108,8 +5108,8 @@
         </p:nvSpPr>
         <p:spPr>
           <a:xfrm>
-            <a:off x="411480" y="4261104"/>
-            <a:ext cx="2761488" cy="1005840"/>
+            <a:off x="411480" y="4187952"/>
+            <a:ext cx="2761488" cy="1051560"/>
           </a:xfrm>
           <a:prstGeom prst="rect">
             <a:avLst/>
@@ -5124,27 +5124,106 @@
           <a:p>
             <a:pPr algn="l"/>
             <a:r>
-              <a:rPr sz="1550" b="0">
+              <a:rPr sz="1450" b="0">
                 <a:solidFill>
                   <a:srgbClr val="4A4540"/>
                 </a:solidFill>
                 <a:latin typeface="Calibri"/>
               </a:rPr>
-              <a:t>Fit a curve to the measurements, read it off anywhere.</a:t>
+              <a:t>The physical law of how signal falls with distance, with its constants fitted to this network.</a:t>
             </a:r>
           </a:p>
         </p:txBody>
       </p:sp>
       <p:sp>
         <p:nvSpPr>
-          <p:cNvPr id="9" name="TextBox 8"/>
+          <p:cNvPr id="9" name="Rectangle 8"/>
+          <p:cNvSpPr/>
+          <p:nvPr/>
+        </p:nvSpPr>
+        <p:spPr>
+          <a:xfrm>
+            <a:off x="411480" y="5394960"/>
+            <a:ext cx="2761488" cy="12801"/>
+          </a:xfrm>
+          <a:prstGeom prst="rect">
+            <a:avLst/>
+          </a:prstGeom>
+          <a:solidFill>
+            <a:srgbClr val="DDD6CC"/>
+          </a:solidFill>
+          <a:ln>
+            <a:noFill/>
+          </a:ln>
+          <a:effectLst/>
+        </p:spPr>
+        <p:style>
+          <a:lnRef idx="1">
+            <a:schemeClr val="accent1"/>
+          </a:lnRef>
+          <a:fillRef idx="3">
+            <a:schemeClr val="accent1"/>
+          </a:fillRef>
+          <a:effectRef idx="2">
+            <a:schemeClr val="accent1"/>
+          </a:effectRef>
+          <a:fontRef idx="minor">
+            <a:schemeClr val="lt1"/>
+          </a:fontRef>
+        </p:style>
+        <p:txBody>
+          <a:bodyPr rtlCol="0" anchor="ctr"/>
+          <a:lstStyle/>
+          <a:p>
+            <a:pPr algn="ctr"/>
+          </a:p>
+        </p:txBody>
+      </p:sp>
+      <p:sp>
+        <p:nvSpPr>
+          <p:cNvPr id="10" name="TextBox 9"/>
           <p:cNvSpPr txBox="1"/>
           <p:nvPr/>
         </p:nvSpPr>
         <p:spPr>
           <a:xfrm>
-            <a:off x="3291840" y="1664208"/>
-            <a:ext cx="2761488" cy="274320"/>
+            <a:off x="411480" y="5477256"/>
+            <a:ext cx="2761488" cy="310896"/>
+          </a:xfrm>
+          <a:prstGeom prst="rect">
+            <a:avLst/>
+          </a:prstGeom>
+          <a:noFill/>
+        </p:spPr>
+        <p:txBody>
+          <a:bodyPr wrap="square" anchor="t" lIns="0" rIns="0" tIns="0" bIns="0">
+            <a:spAutoFit/>
+          </a:bodyPr>
+          <a:lstStyle/>
+          <a:p>
+            <a:pPr algn="l"/>
+            <a:r>
+              <a:rPr sz="1350" b="0">
+                <a:solidFill>
+                  <a:srgbClr val="9C7A3C"/>
+                </a:solidFill>
+                <a:latin typeface="Calibri"/>
+              </a:rPr>
+              <a:t>needs: distance and bearing</a:t>
+            </a:r>
+          </a:p>
+        </p:txBody>
+      </p:sp>
+      <p:sp>
+        <p:nvSpPr>
+          <p:cNvPr id="11" name="TextBox 10"/>
+          <p:cNvSpPr txBox="1"/>
+          <p:nvPr/>
+        </p:nvSpPr>
+        <p:spPr>
+          <a:xfrm>
+            <a:off x="3291840" y="1627632"/>
+            <a:ext cx="2761488" cy="292608"/>
           </a:xfrm>
           <a:prstGeom prst="rect">
             <a:avLst/>
@@ -5172,7 +5251,7 @@
       </p:sp>
       <p:pic>
         <p:nvPicPr>
-          <p:cNvPr id="10" name="Picture 9" descr="how_raytracing.png"/>
+          <p:cNvPr id="12" name="Picture 11" descr="how_raytracing.png"/>
           <p:cNvPicPr>
             <a:picLocks noChangeAspect="1"/>
           </p:cNvPicPr>
@@ -5186,7 +5265,7 @@
         </p:blipFill>
         <p:spPr>
           <a:xfrm>
-            <a:off x="3291840" y="2048256"/>
+            <a:off x="3291840" y="1993392"/>
             <a:ext cx="2761488" cy="2090841"/>
           </a:xfrm>
           <a:prstGeom prst="rect">
@@ -5196,14 +5275,14 @@
       </p:pic>
       <p:sp>
         <p:nvSpPr>
-          <p:cNvPr id="11" name="TextBox 10"/>
+          <p:cNvPr id="13" name="TextBox 12"/>
           <p:cNvSpPr txBox="1"/>
           <p:nvPr/>
         </p:nvSpPr>
         <p:spPr>
           <a:xfrm>
-            <a:off x="3291840" y="4261104"/>
-            <a:ext cx="2761488" cy="1005840"/>
+            <a:off x="3291840" y="4187952"/>
+            <a:ext cx="2761488" cy="1051560"/>
           </a:xfrm>
           <a:prstGeom prst="rect">
             <a:avLst/>
@@ -5218,27 +5297,106 @@
           <a:p>
             <a:pPr algn="l"/>
             <a:r>
-              <a:rPr sz="1550" b="0">
+              <a:rPr sz="1450" b="0">
                 <a:solidFill>
                   <a:srgbClr val="4A4540"/>
                 </a:solidFill>
                 <a:latin typeface="Calibri"/>
               </a:rPr>
-              <a:t>Rebuild the ground and buildings, then trace the signal.</a:t>
+              <a:t>Rebuild the ground and the buildings, then trace the signal through them.</a:t>
             </a:r>
           </a:p>
         </p:txBody>
       </p:sp>
       <p:sp>
         <p:nvSpPr>
-          <p:cNvPr id="12" name="TextBox 11"/>
+          <p:cNvPr id="14" name="Rectangle 13"/>
+          <p:cNvSpPr/>
+          <p:nvPr/>
+        </p:nvSpPr>
+        <p:spPr>
+          <a:xfrm>
+            <a:off x="3291840" y="5394960"/>
+            <a:ext cx="2761488" cy="12801"/>
+          </a:xfrm>
+          <a:prstGeom prst="rect">
+            <a:avLst/>
+          </a:prstGeom>
+          <a:solidFill>
+            <a:srgbClr val="DDD6CC"/>
+          </a:solidFill>
+          <a:ln>
+            <a:noFill/>
+          </a:ln>
+          <a:effectLst/>
+        </p:spPr>
+        <p:style>
+          <a:lnRef idx="1">
+            <a:schemeClr val="accent1"/>
+          </a:lnRef>
+          <a:fillRef idx="3">
+            <a:schemeClr val="accent1"/>
+          </a:fillRef>
+          <a:effectRef idx="2">
+            <a:schemeClr val="accent1"/>
+          </a:effectRef>
+          <a:fontRef idx="minor">
+            <a:schemeClr val="lt1"/>
+          </a:fontRef>
+        </p:style>
+        <p:txBody>
+          <a:bodyPr rtlCol="0" anchor="ctr"/>
+          <a:lstStyle/>
+          <a:p>
+            <a:pPr algn="ctr"/>
+          </a:p>
+        </p:txBody>
+      </p:sp>
+      <p:sp>
+        <p:nvSpPr>
+          <p:cNvPr id="15" name="TextBox 14"/>
           <p:cNvSpPr txBox="1"/>
           <p:nvPr/>
         </p:nvSpPr>
         <p:spPr>
           <a:xfrm>
-            <a:off x="6172200" y="1664208"/>
-            <a:ext cx="2761488" cy="274320"/>
+            <a:off x="3291840" y="5477256"/>
+            <a:ext cx="2761488" cy="310896"/>
+          </a:xfrm>
+          <a:prstGeom prst="rect">
+            <a:avLst/>
+          </a:prstGeom>
+          <a:noFill/>
+        </p:spPr>
+        <p:txBody>
+          <a:bodyPr wrap="square" anchor="t" lIns="0" rIns="0" tIns="0" bIns="0">
+            <a:spAutoFit/>
+          </a:bodyPr>
+          <a:lstStyle/>
+          <a:p>
+            <a:pPr algn="l"/>
+            <a:r>
+              <a:rPr sz="1350" b="0">
+                <a:solidFill>
+                  <a:srgbClr val="55606B"/>
+                </a:solidFill>
+                <a:latin typeface="Calibri"/>
+              </a:rPr>
+              <a:t>needs: a 3-D scene</a:t>
+            </a:r>
+          </a:p>
+        </p:txBody>
+      </p:sp>
+      <p:sp>
+        <p:nvSpPr>
+          <p:cNvPr id="16" name="TextBox 15"/>
+          <p:cNvSpPr txBox="1"/>
+          <p:nvPr/>
+        </p:nvSpPr>
+        <p:spPr>
+          <a:xfrm>
+            <a:off x="6172200" y="1627632"/>
+            <a:ext cx="2761488" cy="292608"/>
           </a:xfrm>
           <a:prstGeom prst="rect">
             <a:avLst/>
@@ -5266,7 +5424,7 @@
       </p:sp>
       <p:pic>
         <p:nvPicPr>
-          <p:cNvPr id="13" name="Picture 12" descr="how_deeplearning.png"/>
+          <p:cNvPr id="17" name="Picture 16" descr="how_deeplearning.png"/>
           <p:cNvPicPr>
             <a:picLocks noChangeAspect="1"/>
           </p:cNvPicPr>
@@ -5280,7 +5438,7 @@
         </p:blipFill>
         <p:spPr>
           <a:xfrm>
-            <a:off x="6172200" y="2048256"/>
+            <a:off x="6172200" y="1993392"/>
             <a:ext cx="2761488" cy="2090841"/>
           </a:xfrm>
           <a:prstGeom prst="rect">
@@ -5290,14 +5448,14 @@
       </p:pic>
       <p:sp>
         <p:nvSpPr>
-          <p:cNvPr id="14" name="TextBox 13"/>
+          <p:cNvPr id="18" name="TextBox 17"/>
           <p:cNvSpPr txBox="1"/>
           <p:nvPr/>
         </p:nvSpPr>
         <p:spPr>
           <a:xfrm>
-            <a:off x="6172200" y="4261104"/>
-            <a:ext cx="2761488" cy="1005840"/>
+            <a:off x="6172200" y="4187952"/>
+            <a:ext cx="2761488" cy="1051560"/>
           </a:xfrm>
           <a:prstGeom prst="rect">
             <a:avLst/>
@@ -5312,27 +5470,106 @@
           <a:p>
             <a:pPr algn="l"/>
             <a:r>
-              <a:rPr sz="1550" b="0">
+              <a:rPr sz="1450" b="0">
                 <a:solidFill>
                   <a:srgbClr val="4A4540"/>
                 </a:solidFill>
                 <a:latin typeface="Calibri"/>
               </a:rPr>
-              <a:t>Give it the ground under each link, let it learn the rest.</a:t>
+              <a:t>No assumed law. Learn the mapping from the ground under each link to the signal.</a:t>
             </a:r>
           </a:p>
         </p:txBody>
       </p:sp>
       <p:sp>
         <p:nvSpPr>
-          <p:cNvPr id="15" name="TextBox 14"/>
+          <p:cNvPr id="19" name="Rectangle 18"/>
+          <p:cNvSpPr/>
+          <p:nvPr/>
+        </p:nvSpPr>
+        <p:spPr>
+          <a:xfrm>
+            <a:off x="6172200" y="5394960"/>
+            <a:ext cx="2761488" cy="12801"/>
+          </a:xfrm>
+          <a:prstGeom prst="rect">
+            <a:avLst/>
+          </a:prstGeom>
+          <a:solidFill>
+            <a:srgbClr val="DDD6CC"/>
+          </a:solidFill>
+          <a:ln>
+            <a:noFill/>
+          </a:ln>
+          <a:effectLst/>
+        </p:spPr>
+        <p:style>
+          <a:lnRef idx="1">
+            <a:schemeClr val="accent1"/>
+          </a:lnRef>
+          <a:fillRef idx="3">
+            <a:schemeClr val="accent1"/>
+          </a:fillRef>
+          <a:effectRef idx="2">
+            <a:schemeClr val="accent1"/>
+          </a:effectRef>
+          <a:fontRef idx="minor">
+            <a:schemeClr val="lt1"/>
+          </a:fontRef>
+        </p:style>
+        <p:txBody>
+          <a:bodyPr rtlCol="0" anchor="ctr"/>
+          <a:lstStyle/>
+          <a:p>
+            <a:pPr algn="ctr"/>
+          </a:p>
+        </p:txBody>
+      </p:sp>
+      <p:sp>
+        <p:nvSpPr>
+          <p:cNvPr id="20" name="TextBox 19"/>
           <p:cNvSpPr txBox="1"/>
           <p:nvPr/>
         </p:nvSpPr>
         <p:spPr>
           <a:xfrm>
-            <a:off x="9052559" y="1664208"/>
-            <a:ext cx="2761488" cy="274320"/>
+            <a:off x="6172200" y="5477256"/>
+            <a:ext cx="2761488" cy="310896"/>
+          </a:xfrm>
+          <a:prstGeom prst="rect">
+            <a:avLst/>
+          </a:prstGeom>
+          <a:noFill/>
+        </p:spPr>
+        <p:txBody>
+          <a:bodyPr wrap="square" anchor="t" lIns="0" rIns="0" tIns="0" bIns="0">
+            <a:spAutoFit/>
+          </a:bodyPr>
+          <a:lstStyle/>
+          <a:p>
+            <a:pPr algn="l"/>
+            <a:r>
+              <a:rPr sz="1350" b="0">
+                <a:solidFill>
+                  <a:srgbClr val="4E6151"/>
+                </a:solidFill>
+                <a:latin typeface="Calibri"/>
+              </a:rPr>
+              <a:t>needs: thousands of examples</a:t>
+            </a:r>
+          </a:p>
+        </p:txBody>
+      </p:sp>
+      <p:sp>
+        <p:nvSpPr>
+          <p:cNvPr id="21" name="TextBox 20"/>
+          <p:cNvSpPr txBox="1"/>
+          <p:nvPr/>
+        </p:nvSpPr>
+        <p:spPr>
+          <a:xfrm>
+            <a:off x="9052559" y="1627632"/>
+            <a:ext cx="2761488" cy="292608"/>
           </a:xfrm>
           <a:prstGeom prst="rect">
             <a:avLst/>
@@ -5360,7 +5597,7 @@
       </p:sp>
       <p:pic>
         <p:nvPicPr>
-          <p:cNvPr id="16" name="Picture 15" descr="how_pinn.png"/>
+          <p:cNvPr id="22" name="Picture 21" descr="how_pinn.png"/>
           <p:cNvPicPr>
             <a:picLocks noChangeAspect="1"/>
           </p:cNvPicPr>
@@ -5374,7 +5611,7 @@
         </p:blipFill>
         <p:spPr>
           <a:xfrm>
-            <a:off x="9052559" y="2048256"/>
+            <a:off x="9052559" y="1993392"/>
             <a:ext cx="2761488" cy="2090841"/>
           </a:xfrm>
           <a:prstGeom prst="rect">
@@ -5384,14 +5621,14 @@
       </p:pic>
       <p:sp>
         <p:nvSpPr>
-          <p:cNvPr id="17" name="TextBox 16"/>
+          <p:cNvPr id="23" name="TextBox 22"/>
           <p:cNvSpPr txBox="1"/>
           <p:nvPr/>
         </p:nvSpPr>
         <p:spPr>
           <a:xfrm>
-            <a:off x="9052559" y="4261104"/>
-            <a:ext cx="2761488" cy="1005840"/>
+            <a:off x="9052559" y="4187952"/>
+            <a:ext cx="2761488" cy="1051560"/>
           </a:xfrm>
           <a:prstGeom prst="rect">
             <a:avLst/>
@@ -5406,20 +5643,99 @@
           <a:p>
             <a:pPr algn="l"/>
             <a:r>
-              <a:rPr sz="1550" b="0">
+              <a:rPr sz="1450" b="0">
                 <a:solidFill>
                   <a:srgbClr val="4A4540"/>
                 </a:solidFill>
                 <a:latin typeface="Calibri"/>
               </a:rPr>
-              <a:t>Learn what distance cannot explain, with physics as a rule.</a:t>
+              <a:t>Learn what the distance law cannot explain, with physics as a penalty on the answer.</a:t>
             </a:r>
           </a:p>
         </p:txBody>
       </p:sp>
       <p:sp>
         <p:nvSpPr>
-          <p:cNvPr id="18" name="TextBox 17"/>
+          <p:cNvPr id="24" name="Rectangle 23"/>
+          <p:cNvSpPr/>
+          <p:nvPr/>
+        </p:nvSpPr>
+        <p:spPr>
+          <a:xfrm>
+            <a:off x="9052559" y="5394960"/>
+            <a:ext cx="2761488" cy="12801"/>
+          </a:xfrm>
+          <a:prstGeom prst="rect">
+            <a:avLst/>
+          </a:prstGeom>
+          <a:solidFill>
+            <a:srgbClr val="DDD6CC"/>
+          </a:solidFill>
+          <a:ln>
+            <a:noFill/>
+          </a:ln>
+          <a:effectLst/>
+        </p:spPr>
+        <p:style>
+          <a:lnRef idx="1">
+            <a:schemeClr val="accent1"/>
+          </a:lnRef>
+          <a:fillRef idx="3">
+            <a:schemeClr val="accent1"/>
+          </a:fillRef>
+          <a:effectRef idx="2">
+            <a:schemeClr val="accent1"/>
+          </a:effectRef>
+          <a:fontRef idx="minor">
+            <a:schemeClr val="lt1"/>
+          </a:fontRef>
+        </p:style>
+        <p:txBody>
+          <a:bodyPr rtlCol="0" anchor="ctr"/>
+          <a:lstStyle/>
+          <a:p>
+            <a:pPr algn="ctr"/>
+          </a:p>
+        </p:txBody>
+      </p:sp>
+      <p:sp>
+        <p:nvSpPr>
+          <p:cNvPr id="25" name="TextBox 24"/>
+          <p:cNvSpPr txBox="1"/>
+          <p:nvPr/>
+        </p:nvSpPr>
+        <p:spPr>
+          <a:xfrm>
+            <a:off x="9052559" y="5477256"/>
+            <a:ext cx="2761488" cy="310896"/>
+          </a:xfrm>
+          <a:prstGeom prst="rect">
+            <a:avLst/>
+          </a:prstGeom>
+          <a:noFill/>
+        </p:spPr>
+        <p:txBody>
+          <a:bodyPr wrap="square" anchor="t" lIns="0" rIns="0" tIns="0" bIns="0">
+            <a:spAutoFit/>
+          </a:bodyPr>
+          <a:lstStyle/>
+          <a:p>
+            <a:pPr algn="l"/>
+            <a:r>
+              <a:rPr sz="1350" b="0">
+                <a:solidFill>
+                  <a:srgbClr val="8C3A28"/>
+                </a:solidFill>
+                <a:latin typeface="Calibri"/>
+              </a:rPr>
+              <a:t>needs: examples and a law</a:t>
+            </a:r>
+          </a:p>
+        </p:txBody>
+      </p:sp>
+      <p:sp>
+        <p:nvSpPr>
+          <p:cNvPr id="26" name="TextBox 25"/>
           <p:cNvSpPr txBox="1"/>
           <p:nvPr/>
         </p:nvSpPr>

--- a/ARA_Challenge3.pptx
+++ b/ARA_Challenge3.pptx
@@ -5187,8 +5187,8 @@
         </p:nvSpPr>
         <p:spPr>
           <a:xfrm>
-            <a:off x="411480" y="5477256"/>
-            <a:ext cx="2761488" cy="310896"/>
+            <a:off x="411480" y="5458968"/>
+            <a:ext cx="2761488" cy="512064"/>
           </a:xfrm>
           <a:prstGeom prst="rect">
             <a:avLst/>
@@ -5209,7 +5209,7 @@
                 </a:solidFill>
                 <a:latin typeface="Calibri"/>
               </a:rPr>
-              <a:t>needs: distance and bearing</a:t>
+              <a:t>needs: how far, and which way</a:t>
             </a:r>
           </a:p>
         </p:txBody>
@@ -5360,8 +5360,8 @@
         </p:nvSpPr>
         <p:spPr>
           <a:xfrm>
-            <a:off x="3291840" y="5477256"/>
-            <a:ext cx="2761488" cy="310896"/>
+            <a:off x="3291840" y="5458968"/>
+            <a:ext cx="2761488" cy="512064"/>
           </a:xfrm>
           <a:prstGeom prst="rect">
             <a:avLst/>
@@ -5382,7 +5382,7 @@
                 </a:solidFill>
                 <a:latin typeface="Calibri"/>
               </a:rPr>
-              <a:t>needs: a 3-D scene</a:t>
+              <a:t>needs: a 3-D model of the ground</a:t>
             </a:r>
           </a:p>
         </p:txBody>
@@ -5533,8 +5533,8 @@
         </p:nvSpPr>
         <p:spPr>
           <a:xfrm>
-            <a:off x="6172200" y="5477256"/>
-            <a:ext cx="2761488" cy="310896"/>
+            <a:off x="6172200" y="5458968"/>
+            <a:ext cx="2761488" cy="512064"/>
           </a:xfrm>
           <a:prstGeom prst="rect">
             <a:avLst/>
@@ -5555,7 +5555,7 @@
                 </a:solidFill>
                 <a:latin typeface="Calibri"/>
               </a:rPr>
-              <a:t>needs: thousands of examples</a:t>
+              <a:t>needs: thousands of measurements</a:t>
             </a:r>
           </a:p>
         </p:txBody>
@@ -5706,8 +5706,8 @@
         </p:nvSpPr>
         <p:spPr>
           <a:xfrm>
-            <a:off x="9052559" y="5477256"/>
-            <a:ext cx="2761488" cy="310896"/>
+            <a:off x="9052559" y="5458968"/>
+            <a:ext cx="2761488" cy="512064"/>
           </a:xfrm>
           <a:prstGeom prst="rect">
             <a:avLst/>
@@ -5728,7 +5728,7 @@
                 </a:solidFill>
                 <a:latin typeface="Calibri"/>
               </a:rPr>
-              <a:t>needs: examples and a law</a:t>
+              <a:t>needs: measurements, and a law</a:t>
             </a:r>
           </a:p>
         </p:txBody>

--- a/ARA_Challenge3.pptx
+++ b/ARA_Challenge3.pptx
@@ -5209,7 +5209,7 @@
                 </a:solidFill>
                 <a:latin typeface="Calibri"/>
               </a:rPr>
-              <a:t>needs: how far, and which way</a:t>
+              <a:t>needs: distance and direction</a:t>
             </a:r>
           </a:p>
         </p:txBody>
